--- a/Studies/The-Ontology-of-Coexistence/The-Ontology-of-Existence-Madhyasth-Darshan.pptx
+++ b/Studies/The-Ontology-of-Coexistence/The-Ontology-of-Existence-Madhyasth-Darshan.pptx
@@ -597,7 +597,7 @@
           </a:p>
           <a:p>
             <a:r>
-              <a:t>The slide names five value families: object, *jeevan*, human, established, and civic — the last is *shishta-mulya* in the source. Object values are two, utility and art, so the same list is often counted as six types: utility, art, *jeevan*, human, established, and civic. Established values are the ones that become evident when human relationships are recognised and fulfilled — trust, respect, affection, care, and so on. Civic values are how all of that is expressed in social participation.</a:t>
+              <a:t>The slide names the thirty values: four *jeevan* values, six human values, nine established values, nine expressed values, and two object values. Established values become evident when human relationships are recognised and fulfilled — trust, respect, affection, care, and so on. Expressed values — *shishta-mulya* — are their corresponding powers in motion. The English translation of MVD renders those as civic values; they are relationship-expression, not a separate family of right-use of body, mind, and wealth.</a:t>
             </a:r>
           </a:p>
           <a:p>
@@ -1272,7 +1272,7 @@
           </a:p>
           <a:p>
             <a:r>
-              <a:t>On one side: the body — living composition, sense organs, brain, physical expression; decomposable. On the other: the sentient unit — constitutionally complete; faculties inherent; continuing when the joint form ends.</a:t>
+              <a:t>On one side: the body — living composition, sense organs, the brain (*medhas*), physical expression; decomposable. The brain receives and translates signals; it is the medium, not the knower. On the other: the sentient unit — constitutionally complete; faculties inherent; continuing when the joint form ends.</a:t>
             </a:r>
           </a:p>
           <a:p>
@@ -1362,7 +1362,12 @@
           </a:p>
           <a:p>
             <a:r>
-              <a:t>Each works outward and inward. Hope selects and tastes. Thought analyses and deliberates. Desire visualises and contemplates. Resolve resolves and receives clear understanding. The core self authenticates and realises.</a:t>
+              <a:t>Each works outward and inward. Hope selects and tastes. Thought analyses and deliberates. Desire visualises and contemplates — and directly apprehends. Resolve resolves and comprehends. The core self authenticates and realises.</a:t>
+            </a:r>
+          </a:p>
+          <a:p>
+            <a:r>
+              <a:t>Guidance can descend from the core self through the faculties — higher-conformance — or sensory drive can push inward from the body — lower-conformance. Cognisance regulates sensitivity when the higher direction holds.</a:t>
             </a:r>
           </a:p>
           <a:p>
@@ -2022,7 +2027,7 @@
           </a:p>
           <a:p>
             <a:r>
-              <a:t>On the right: how knowing happens within the sentient unit. Hope tastes and selects. Thought deliberates. Desire contemplates. Resolve clarifies and resolves. The core self realises — through truth. When each level is acted in alignment, it is felt as happiness, peace, contentment, and bliss.</a:t>
+              <a:t>On the right: how knowing happens within the sentient unit. Hope tastes and selects. Thought deliberates. Desire contemplates and directly apprehends. Resolve comprehends and resolves. The core self realises — through truth. When each level is acted in alignment, it is felt as happiness, peace, contentment, and bliss.</a:t>
             </a:r>
           </a:p>
           <a:p>
@@ -3017,7 +3022,7 @@
           </a:p>
           <a:p>
             <a:r>
-              <a:t>Complementarity second. Nothing in nature exists in isolation, and each unit is a whole along with its environment. Now the consequence people find surprising: essentiality in every order is what value *is*, in the broad sense — the usefulness through which a unit is complementary to others. That means value is ontological here. It is not assigned by an observer, and it is not a human invention layered on top of physics.</a:t>
+              <a:t>Complementarity second. Nothing in nature exists in isolation, and each unit is a whole along with its environment. Now the consequence people find surprising: value, in the universal sense, is essentiality and participation in orderliness — the definite conduct through which a unit complements others. Usefulness is that essentiality as it appears in objects; it is not the whole of value. Value is ontological here. It is not assigned by an observer, and it is not a human invention layered on top of physics.</a:t>
             </a:r>
           </a:p>
           <a:p>
@@ -3128,6 +3133,11 @@
           <a:p>
             <a:r>
               <a:t>And notice: the tree as a composite can die while its material constituents persist. Persistence of existence is not persistence of one configuration.</a:t>
+            </a:r>
+          </a:p>
+          <a:p>
+            <a:r>
+              <a:t>The same unit is known in three complementary aspects, not three worlds. Inherent truth is what the unit is. Positional truth is how it stands among others. Existential truth is that it exists in Omnipresence.</a:t>
             </a:r>
           </a:p>
         </p:txBody>
@@ -5517,7 +5527,7 @@
                 <a:ea typeface="Calibri"/>
                 <a:cs typeface="Calibri"/>
               </a:rPr>
-              <a:t>Five value families: object, jeevan, human, established, and civic (shishta). Object values are two — utility and art — so the same list is counted as six types: utility, art, jeevan, human, established, and civic.</a:t>
+              <a:t>Thirty values: four jeevan, six human, nine established, nine expressed (shishta), and two object values. Established values are paired with expressed values in conduct.</a:t>
             </a:r>
           </a:p>
         </p:txBody>
@@ -6161,7 +6171,7 @@
                 <a:ea typeface="Calibri"/>
                 <a:cs typeface="Calibri"/>
               </a:rPr>
-              <a:t>Human evaluation may err; understanding aligns knowing → believing → recognising → fulfilling. Established values arise as relationships are fulfilled; civic values express them socially.</a:t>
+              <a:t>Human evaluation may err; understanding aligns knowing → believing → recognising → fulfilling. Established values arise as relationships are fulfilled; expressed values carry them in conduct.</a:t>
             </a:r>
           </a:p>
         </p:txBody>
@@ -6217,7 +6227,7 @@
                 <a:ea typeface="Calibri"/>
                 <a:cs typeface="Calibri"/>
               </a:rPr>
-              <a:t>MVD pp. 61–62, 27  ·  SB pp. 50, 53, 61  ·  JV p. 69</a:t>
+              <a:t>MVD pp. 61–62, 27  ·  SB pp. 50, 53, 61  ·  JV p. 69  ·  Paribhasha pp. 151, 154</a:t>
             </a:r>
           </a:p>
         </p:txBody>
@@ -17211,7 +17221,7 @@
                           <a:ea typeface="Calibri"/>
                           <a:cs typeface="Calibri"/>
                         </a:rPr>
-                        <a:t>enlightenment</a:t>
+                        <a:t>comprehension</a:t>
                       </a:r>
                     </a:p>
                   </a:txBody>
@@ -26694,7 +26704,7 @@
                 <a:ea typeface="Calibri"/>
                 <a:cs typeface="Calibri"/>
               </a:rPr>
-              <a:t>enlightenment of existence, jeevan, conduct · resolve</a:t>
+              <a:t>comprehension of existence, jeevan, conduct · resolve</a:t>
             </a:r>
           </a:p>
         </p:txBody>
@@ -26817,7 +26827,7 @@
                 <a:ea typeface="Calibri"/>
                 <a:cs typeface="Calibri"/>
               </a:rPr>
-              <a:t>contemplation &amp; visualisation · direct recognition</a:t>
+              <a:t>contemplation &amp; visualisation · direct apprehension</a:t>
             </a:r>
           </a:p>
         </p:txBody>
@@ -38468,7 +38478,7 @@
                 <a:ea typeface="Calibri"/>
                 <a:cs typeface="Calibri"/>
               </a:rPr>
-              <a:t>Nothing exists in isolation, and each unit is a whole along with its environment. Essentiality in every order is value in the broad sense — the usefulness through which a unit is complementary to others. Value is ontological, not assigned by an observer.</a:t>
+              <a:t>Nothing exists in isolation, and each unit is a whole along with its environment. Value is essentiality and participation in orderliness — the definite conduct through which a unit complements others. Usefulness is that essentiality in objects, not the whole of value.</a:t>
             </a:r>
           </a:p>
         </p:txBody>

--- a/Studies/The-Ontology-of-Coexistence/The-Ontology-of-Existence-Madhyasth-Darshan.pptx
+++ b/Studies/The-Ontology-of-Coexistence/The-Ontology-of-Existence-Madhyasth-Darshan.pptx
@@ -1362,7 +1362,7 @@
           </a:p>
           <a:p>
             <a:r>
-              <a:t>Each works outward and inward. Hope selects and tastes. Thought analyses and deliberates. Desire visualises and contemplates — and directly apprehends. Resolve resolves and comprehends. The core self authenticates and realises.</a:t>
+              <a:t>Each works outward and inward. Hope selects and tastes. Thought analyses and deliberates. Desire visualises and contemplates — and directly apprehends. Resolve resolves and comprehends. The core self authenticates and realises. Tasting at hope has three orientations: sensory, value-based, and goal-based. Awakening changes which of these governs what is accepted. Projection of realisation is authenticity, resolve, visualisation, analysis, and selection into living conduct.</a:t>
             </a:r>
           </a:p>
           <a:p>

--- a/Studies/The-Ontology-of-Coexistence/The-Ontology-of-Existence-Madhyasth-Darshan.pptx
+++ b/Studies/The-Ontology-of-Coexistence/The-Ontology-of-Existence-Madhyasth-Darshan.pptx
@@ -2,40 +2,41 @@
 <file path=ppt/presentation.xml><?xml version="1.0" encoding="utf-8"?>
 <p:presentation xmlns:p="http://schemas.openxmlformats.org/presentationml/2006/main">
   <p:sldMasterIdLst>
-    <p:sldMasterId xmlns:r="http://schemas.openxmlformats.org/officeDocument/2006/relationships" id="2147483648" r:id="Rb763969d7a354eb0"/>
+    <p:sldMasterId xmlns:r="http://schemas.openxmlformats.org/officeDocument/2006/relationships" id="2147483648" r:id="R4b6a22f3eab34b84"/>
   </p:sldMasterIdLst>
   <p:notesMasterIdLst>
-    <p:notesMasterId xmlns:r="http://schemas.openxmlformats.org/officeDocument/2006/relationships" r:id="Re089755d6eee4c05"/>
+    <p:notesMasterId xmlns:r="http://schemas.openxmlformats.org/officeDocument/2006/relationships" r:id="R90bc957ecea84c6f"/>
   </p:notesMasterIdLst>
   <p:sldIdLst>
-    <p:sldId xmlns:r="http://schemas.openxmlformats.org/officeDocument/2006/relationships" id="256" r:id="Rcf1a2b7213d4431e"/>
-    <p:sldId xmlns:r="http://schemas.openxmlformats.org/officeDocument/2006/relationships" id="257" r:id="R694c89ade17f41b8"/>
-    <p:sldId xmlns:r="http://schemas.openxmlformats.org/officeDocument/2006/relationships" id="258" r:id="R00eb5efb8c5f4e44"/>
-    <p:sldId xmlns:r="http://schemas.openxmlformats.org/officeDocument/2006/relationships" id="259" r:id="Rd90f309206424460"/>
-    <p:sldId xmlns:r="http://schemas.openxmlformats.org/officeDocument/2006/relationships" id="260" r:id="Raf2baeef531a4f5e"/>
-    <p:sldId xmlns:r="http://schemas.openxmlformats.org/officeDocument/2006/relationships" id="261" r:id="R698bb10d3d0c4344"/>
-    <p:sldId xmlns:r="http://schemas.openxmlformats.org/officeDocument/2006/relationships" id="262" r:id="R93cb00fbbfea4ae6"/>
-    <p:sldId xmlns:r="http://schemas.openxmlformats.org/officeDocument/2006/relationships" id="263" r:id="R47e7378bd44348b4"/>
-    <p:sldId xmlns:r="http://schemas.openxmlformats.org/officeDocument/2006/relationships" id="264" r:id="R23b69067c47a47fe"/>
-    <p:sldId xmlns:r="http://schemas.openxmlformats.org/officeDocument/2006/relationships" id="265" r:id="R46a5a279f5014553"/>
-    <p:sldId xmlns:r="http://schemas.openxmlformats.org/officeDocument/2006/relationships" id="266" r:id="R7c87f677a3b74689"/>
-    <p:sldId xmlns:r="http://schemas.openxmlformats.org/officeDocument/2006/relationships" id="267" r:id="Rbf1d92438c834905"/>
-    <p:sldId xmlns:r="http://schemas.openxmlformats.org/officeDocument/2006/relationships" id="268" r:id="Ra974545b42484d04"/>
-    <p:sldId xmlns:r="http://schemas.openxmlformats.org/officeDocument/2006/relationships" id="269" r:id="Re4bd29b4c7a04a69"/>
-    <p:sldId xmlns:r="http://schemas.openxmlformats.org/officeDocument/2006/relationships" id="270" r:id="R369076999c8e4178"/>
-    <p:sldId xmlns:r="http://schemas.openxmlformats.org/officeDocument/2006/relationships" id="271" r:id="R45e80e95324f49ac"/>
-    <p:sldId xmlns:r="http://schemas.openxmlformats.org/officeDocument/2006/relationships" id="272" r:id="Rba502ed2c6e44fee"/>
-    <p:sldId xmlns:r="http://schemas.openxmlformats.org/officeDocument/2006/relationships" id="273" r:id="R811c3c5282334a91"/>
-    <p:sldId xmlns:r="http://schemas.openxmlformats.org/officeDocument/2006/relationships" id="274" r:id="Rd62664e70b01459e"/>
-    <p:sldId xmlns:r="http://schemas.openxmlformats.org/officeDocument/2006/relationships" id="275" r:id="R3fce05a135364de6"/>
-    <p:sldId xmlns:r="http://schemas.openxmlformats.org/officeDocument/2006/relationships" id="276" r:id="R341dd9382d6f4162"/>
-    <p:sldId xmlns:r="http://schemas.openxmlformats.org/officeDocument/2006/relationships" id="277" r:id="Rac0e4792baf942b1"/>
-    <p:sldId xmlns:r="http://schemas.openxmlformats.org/officeDocument/2006/relationships" id="278" r:id="R8b0e403157ef46e5"/>
-    <p:sldId xmlns:r="http://schemas.openxmlformats.org/officeDocument/2006/relationships" id="279" r:id="R66b512dca57841c8"/>
-    <p:sldId xmlns:r="http://schemas.openxmlformats.org/officeDocument/2006/relationships" id="280" r:id="Rdd31d43a6bb1483d"/>
-    <p:sldId xmlns:r="http://schemas.openxmlformats.org/officeDocument/2006/relationships" id="281" r:id="R71b6723b939b4fe7"/>
-    <p:sldId xmlns:r="http://schemas.openxmlformats.org/officeDocument/2006/relationships" id="282" r:id="R406d5014727442d4"/>
-    <p:sldId xmlns:r="http://schemas.openxmlformats.org/officeDocument/2006/relationships" id="283" r:id="R8057b9684d574773"/>
+    <p:sldId xmlns:r="http://schemas.openxmlformats.org/officeDocument/2006/relationships" id="256" r:id="R43cce1505ab24e46"/>
+    <p:sldId xmlns:r="http://schemas.openxmlformats.org/officeDocument/2006/relationships" id="257" r:id="R81340e3a6e4e4321"/>
+    <p:sldId xmlns:r="http://schemas.openxmlformats.org/officeDocument/2006/relationships" id="258" r:id="R6579f0ff329b4d4c"/>
+    <p:sldId xmlns:r="http://schemas.openxmlformats.org/officeDocument/2006/relationships" id="259" r:id="R244e429c630049e3"/>
+    <p:sldId xmlns:r="http://schemas.openxmlformats.org/officeDocument/2006/relationships" id="260" r:id="Rd7ff98c8399b493f"/>
+    <p:sldId xmlns:r="http://schemas.openxmlformats.org/officeDocument/2006/relationships" id="261" r:id="R6ef06ae285bb4f47"/>
+    <p:sldId xmlns:r="http://schemas.openxmlformats.org/officeDocument/2006/relationships" id="262" r:id="Rb7f3a9e921cf4cef"/>
+    <p:sldId xmlns:r="http://schemas.openxmlformats.org/officeDocument/2006/relationships" id="263" r:id="Rab192b4fc3e24760"/>
+    <p:sldId xmlns:r="http://schemas.openxmlformats.org/officeDocument/2006/relationships" id="264" r:id="Re89a9eb74f364e99"/>
+    <p:sldId xmlns:r="http://schemas.openxmlformats.org/officeDocument/2006/relationships" id="265" r:id="Rc7e0f778bef84f5e"/>
+    <p:sldId xmlns:r="http://schemas.openxmlformats.org/officeDocument/2006/relationships" id="266" r:id="R8cb4bd1868c24556"/>
+    <p:sldId xmlns:r="http://schemas.openxmlformats.org/officeDocument/2006/relationships" id="267" r:id="Re03695870ec54e24"/>
+    <p:sldId xmlns:r="http://schemas.openxmlformats.org/officeDocument/2006/relationships" id="268" r:id="R05b0fee9ebbb4d71"/>
+    <p:sldId xmlns:r="http://schemas.openxmlformats.org/officeDocument/2006/relationships" id="269" r:id="R848868b1a79a47ac"/>
+    <p:sldId xmlns:r="http://schemas.openxmlformats.org/officeDocument/2006/relationships" id="270" r:id="Rf0a612bf33be43b2"/>
+    <p:sldId xmlns:r="http://schemas.openxmlformats.org/officeDocument/2006/relationships" id="271" r:id="R20587271494f44ab"/>
+    <p:sldId xmlns:r="http://schemas.openxmlformats.org/officeDocument/2006/relationships" id="272" r:id="R1d9e14a3f4654a00"/>
+    <p:sldId xmlns:r="http://schemas.openxmlformats.org/officeDocument/2006/relationships" id="273" r:id="R097d58afe07641f5"/>
+    <p:sldId xmlns:r="http://schemas.openxmlformats.org/officeDocument/2006/relationships" id="274" r:id="R6080883952844bb0"/>
+    <p:sldId xmlns:r="http://schemas.openxmlformats.org/officeDocument/2006/relationships" id="275" r:id="R656e3721fd3a4e3f"/>
+    <p:sldId xmlns:r="http://schemas.openxmlformats.org/officeDocument/2006/relationships" id="276" r:id="R45cc94adc9d7435f"/>
+    <p:sldId xmlns:r="http://schemas.openxmlformats.org/officeDocument/2006/relationships" id="277" r:id="R19238237be054855"/>
+    <p:sldId xmlns:r="http://schemas.openxmlformats.org/officeDocument/2006/relationships" id="278" r:id="Rc060f52729f74e66"/>
+    <p:sldId xmlns:r="http://schemas.openxmlformats.org/officeDocument/2006/relationships" id="279" r:id="R8f26ce1c97be4f62"/>
+    <p:sldId xmlns:r="http://schemas.openxmlformats.org/officeDocument/2006/relationships" id="280" r:id="R0e5453380f104c7e"/>
+    <p:sldId xmlns:r="http://schemas.openxmlformats.org/officeDocument/2006/relationships" id="281" r:id="R2191a9673ac04124"/>
+    <p:sldId xmlns:r="http://schemas.openxmlformats.org/officeDocument/2006/relationships" id="282" r:id="R403cd68193b14ebb"/>
+    <p:sldId xmlns:r="http://schemas.openxmlformats.org/officeDocument/2006/relationships" id="283" r:id="R18f750a2a95340a2"/>
+    <p:sldId xmlns:r="http://schemas.openxmlformats.org/officeDocument/2006/relationships" id="284" r:id="R8e80d585f0e742a0"/>
   </p:sldIdLst>
   <p:sldSz cx="9144000" cy="5143500"/>
   <p:notesSz cx="6858000" cy="9144000"/>
@@ -453,7 +454,7 @@
 </file>
 
 <file path=ppt/notesSlides/notesSlide1.xml><?xml version="1.0" encoding="utf-8"?>
-<p:notes xmlns:a="http://schemas.openxmlformats.org/drawingml/2006/main" xmlns:p="http://schemas.openxmlformats.org/presentationml/2006/main">
+<p:notes xmlns:p="http://schemas.openxmlformats.org/presentationml/2006/main">
   <p:cSld>
     <p:spTree>
       <p:nvGrpSpPr>
@@ -462,13 +463,13 @@
         <p:nvPr/>
       </p:nvGrpSpPr>
       <p:grpSpPr>
-        <a:xfrm/>
+        <a:xfrm xmlns:a="http://schemas.openxmlformats.org/drawingml/2006/main"/>
       </p:grpSpPr>
       <p:sp>
         <p:nvSpPr>
           <p:cNvPr id="2" name="Slide Image Placeholder 1"/>
           <p:cNvSpPr>
-            <a:spLocks noGrp="1"/>
+            <a:spLocks xmlns:a="http://schemas.openxmlformats.org/drawingml/2006/main" noGrp="1"/>
           </p:cNvSpPr>
           <p:nvPr>
             <p:ph type="sldImg" idx="0"/>
@@ -480,7 +481,7 @@
         <p:nvSpPr>
           <p:cNvPr id="3" name="Notes Placeholder 2"/>
           <p:cNvSpPr>
-            <a:spLocks noGrp="1"/>
+            <a:spLocks xmlns:a="http://schemas.openxmlformats.org/drawingml/2006/main" noGrp="1"/>
           </p:cNvSpPr>
           <p:nvPr>
             <p:ph type="body" idx="1"/>
@@ -488,29 +489,29 @@
         </p:nvSpPr>
         <p:spPr/>
         <p:txBody>
-          <a:bodyPr/>
-          <a:lstStyle/>
-          <a:p>
+          <a:bodyPr xmlns:a="http://schemas.openxmlformats.org/drawingml/2006/main"/>
+          <a:lstStyle xmlns:a="http://schemas.openxmlformats.org/drawingml/2006/main"/>
+          <a:p xmlns:a="http://schemas.openxmlformats.org/drawingml/2006/main">
             <a:r>
               <a:t>Welcome, and thank you for joining.</a:t>
             </a:r>
           </a:p>
-          <a:p>
+          <a:p xmlns:a="http://schemas.openxmlformats.org/drawingml/2006/main">
             <a:r>
               <a:t>You do not need any prior familiarity with Madhyasth Darshan, or with formal philosophy, to follow this session. I will use ordinary English first, and introduce source terms only when they help. Our aim is not persuasion or devotion. It is to examine one coherent account of reality — testing its definitions and internal consistency.</a:t>
             </a:r>
           </a:p>
-          <a:p>
+          <a:p xmlns:a="http://schemas.openxmlformats.org/drawingml/2006/main">
             <a:r>
               <a:t>Madhyasth Darshan — also called Co-existentialism — was propounded by Shri A. Nagraj. The name points to a thesis we will unpack later: order in nature is mediative and inherent, not imposed by an external governor.</a:t>
             </a:r>
           </a:p>
-          <a:p>
+          <a:p xmlns:a="http://schemas.openxmlformats.org/drawingml/2006/main">
             <a:r>
               <a:t>Here is the one claim to hold for the whole talk: existence is coexistence. Reality is the ever-present togetherness of a formless, all-pervasive ground and countless real, bounded units of nature, each saturated in that ground. Everything else — sentience, values, justice, society — unfolds from this picture.</a:t>
             </a:r>
           </a:p>
-          <a:p>
+          <a:p xmlns:a="http://schemas.openxmlformats.org/drawingml/2006/main">
             <a:r>
               <a:t>One word about vocabulary. The published translations often print “Omnipotence” for the ground; the slides and I will say Omnipresence. Same reality, different English label — you will see the translation's word only inside quotations.</a:t>
             </a:r>
@@ -521,7 +522,7 @@
         <p:nvSpPr>
           <p:cNvPr id="4" name="Slide Number Placeholder 3"/>
           <p:cNvSpPr>
-            <a:spLocks noGrp="1"/>
+            <a:spLocks xmlns:a="http://schemas.openxmlformats.org/drawingml/2006/main" noGrp="1"/>
           </p:cNvSpPr>
           <p:nvPr>
             <p:ph type="sldNum" idx="5"/>
@@ -529,21 +530,21 @@
         </p:nvSpPr>
         <p:spPr/>
         <p:txBody>
-          <a:bodyPr/>
-          <a:lstStyle/>
-          <a:p/>
+          <a:bodyPr xmlns:a="http://schemas.openxmlformats.org/drawingml/2006/main"/>
+          <a:lstStyle xmlns:a="http://schemas.openxmlformats.org/drawingml/2006/main"/>
+          <a:p xmlns:a="http://schemas.openxmlformats.org/drawingml/2006/main"/>
         </p:txBody>
       </p:sp>
     </p:spTree>
   </p:cSld>
   <p:clrMapOvr>
-    <a:masterClrMapping/>
+    <a:masterClrMapping xmlns:a="http://schemas.openxmlformats.org/drawingml/2006/main"/>
   </p:clrMapOvr>
 </p:notes>
 </file>
 
 <file path=ppt/notesSlides/notesSlide10.xml><?xml version="1.0" encoding="utf-8"?>
-<p:notes xmlns:a="http://schemas.openxmlformats.org/drawingml/2006/main" xmlns:p="http://schemas.openxmlformats.org/presentationml/2006/main">
+<p:notes xmlns:p="http://schemas.openxmlformats.org/presentationml/2006/main">
   <p:cSld>
     <p:spTree>
       <p:nvGrpSpPr>
@@ -552,13 +553,13 @@
         <p:nvPr/>
       </p:nvGrpSpPr>
       <p:grpSpPr>
-        <a:xfrm/>
+        <a:xfrm xmlns:a="http://schemas.openxmlformats.org/drawingml/2006/main"/>
       </p:grpSpPr>
       <p:sp>
         <p:nvSpPr>
           <p:cNvPr id="2" name="Slide Image Placeholder 1"/>
           <p:cNvSpPr>
-            <a:spLocks noGrp="1"/>
+            <a:spLocks xmlns:a="http://schemas.openxmlformats.org/drawingml/2006/main" noGrp="1"/>
           </p:cNvSpPr>
           <p:nvPr>
             <p:ph type="sldImg" idx="0"/>
@@ -570,7 +571,7 @@
         <p:nvSpPr>
           <p:cNvPr id="3" name="Notes Placeholder 2"/>
           <p:cNvSpPr>
-            <a:spLocks noGrp="1"/>
+            <a:spLocks xmlns:a="http://schemas.openxmlformats.org/drawingml/2006/main" noGrp="1"/>
           </p:cNvSpPr>
           <p:nvPr>
             <p:ph type="body" idx="1"/>
@@ -578,29 +579,29 @@
         </p:nvSpPr>
         <p:spPr/>
         <p:txBody>
-          <a:bodyPr/>
-          <a:lstStyle/>
-          <a:p>
+          <a:bodyPr xmlns:a="http://schemas.openxmlformats.org/drawingml/2006/main"/>
+          <a:lstStyle xmlns:a="http://schemas.openxmlformats.org/drawingml/2006/main"/>
+          <a:p xmlns:a="http://schemas.openxmlformats.org/drawingml/2006/main">
             <a:r>
               <a:t>The complementarity we just established becomes evident through relationships among units — this slide is what it looks like in practice.</a:t>
             </a:r>
           </a:p>
-          <a:p>
+          <a:p xmlns:a="http://schemas.openxmlformats.org/drawingml/2006/main">
             <a:r>
               <a:t>In the material, plant, and animal orders its expression is definite: recognition happens, fulfilment happens. At the human order alone it has to be recognised, evaluated, and fulfilled — so at the human order alone it can be got wrong, and it is got wrong when the body is mistaken for the self.</a:t>
             </a:r>
           </a:p>
-          <a:p>
+          <a:p xmlns:a="http://schemas.openxmlformats.org/drawingml/2006/main">
             <a:r>
               <a:t>Two kinds of mutuality matter. A relationship is mutuality whose expectations are definite in the completeness of the bond — parent and child. A contact (*sampark*) is mutuality where expectations are voluntary — neighbours who share a wall.</a:t>
             </a:r>
           </a:p>
-          <a:p>
+          <a:p xmlns:a="http://schemas.openxmlformats.org/drawingml/2006/main">
             <a:r>
               <a:t>The slide names the thirty values: four *jeevan* values, six human values, nine established values, nine expressed values, and two object values. Established values become evident when human relationships are recognised and fulfilled — trust, respect, affection, care, and so on. Expressed values — *shishta-mulya* — are their corresponding powers in motion. The English translation of MVD renders those as civic values; they are relationship-expression, not a separate family of right-use of body, mind, and wealth.</a:t>
             </a:r>
           </a:p>
-          <a:p>
+          <a:p xmlns:a="http://schemas.openxmlformats.org/drawingml/2006/main">
             <a:r>
               <a:t>At the human order the path runs: knowing, then believing, then recognising, then fulfilling. Awakening does not invent new faculties. It aligns this chain with coexistence.</a:t>
             </a:r>
@@ -611,7 +612,7 @@
         <p:nvSpPr>
           <p:cNvPr id="4" name="Slide Number Placeholder 3"/>
           <p:cNvSpPr>
-            <a:spLocks noGrp="1"/>
+            <a:spLocks xmlns:a="http://schemas.openxmlformats.org/drawingml/2006/main" noGrp="1"/>
           </p:cNvSpPr>
           <p:nvPr>
             <p:ph type="sldNum" idx="5"/>
@@ -619,21 +620,21 @@
         </p:nvSpPr>
         <p:spPr/>
         <p:txBody>
-          <a:bodyPr/>
-          <a:lstStyle/>
-          <a:p/>
+          <a:bodyPr xmlns:a="http://schemas.openxmlformats.org/drawingml/2006/main"/>
+          <a:lstStyle xmlns:a="http://schemas.openxmlformats.org/drawingml/2006/main"/>
+          <a:p xmlns:a="http://schemas.openxmlformats.org/drawingml/2006/main"/>
         </p:txBody>
       </p:sp>
     </p:spTree>
   </p:cSld>
   <p:clrMapOvr>
-    <a:masterClrMapping/>
+    <a:masterClrMapping xmlns:a="http://schemas.openxmlformats.org/drawingml/2006/main"/>
   </p:clrMapOvr>
 </p:notes>
 </file>
 
 <file path=ppt/notesSlides/notesSlide11.xml><?xml version="1.0" encoding="utf-8"?>
-<p:notes xmlns:a="http://schemas.openxmlformats.org/drawingml/2006/main" xmlns:p="http://schemas.openxmlformats.org/presentationml/2006/main">
+<p:notes xmlns:p="http://schemas.openxmlformats.org/presentationml/2006/main">
   <p:cSld>
     <p:spTree>
       <p:nvGrpSpPr>
@@ -642,13 +643,13 @@
         <p:nvPr/>
       </p:nvGrpSpPr>
       <p:grpSpPr>
-        <a:xfrm/>
+        <a:xfrm xmlns:a="http://schemas.openxmlformats.org/drawingml/2006/main"/>
       </p:grpSpPr>
       <p:sp>
         <p:nvSpPr>
           <p:cNvPr id="2" name="Slide Image Placeholder 1"/>
           <p:cNvSpPr>
-            <a:spLocks noGrp="1"/>
+            <a:spLocks xmlns:a="http://schemas.openxmlformats.org/drawingml/2006/main" noGrp="1"/>
           </p:cNvSpPr>
           <p:nvPr>
             <p:ph type="sldImg" idx="0"/>
@@ -660,7 +661,7 @@
         <p:nvSpPr>
           <p:cNvPr id="3" name="Notes Placeholder 2"/>
           <p:cNvSpPr>
-            <a:spLocks noGrp="1"/>
+            <a:spLocks xmlns:a="http://schemas.openxmlformats.org/drawingml/2006/main" noGrp="1"/>
           </p:cNvSpPr>
           <p:nvPr>
             <p:ph type="body" idx="1"/>
@@ -668,29 +669,29 @@
         </p:nvSpPr>
         <p:spPr/>
         <p:txBody>
-          <a:bodyPr/>
-          <a:lstStyle/>
-          <a:p>
+          <a:bodyPr xmlns:a="http://schemas.openxmlformats.org/drawingml/2006/main"/>
+          <a:lstStyle xmlns:a="http://schemas.openxmlformats.org/drawingml/2006/main"/>
+          <a:p xmlns:a="http://schemas.openxmlformats.org/drawingml/2006/main">
             <a:r>
               <a:t>Units organise into four stable orders: material; bio or living-plant order; animal; and knowledge — the human order.</a:t>
             </a:r>
           </a:p>
-          <a:p>
+          <a:p xmlns:a="http://schemas.openxmlformats.org/drawingml/2006/main">
             <a:r>
               <a:t>Read the table downward. Innateness is cumulative. Matter has existence. The bio order adds growth. The animal order adds hope to live. The human order adds happiness. Higher orders include the lower ones.</a:t>
             </a:r>
           </a:p>
-          <a:p>
+          <a:p xmlns:a="http://schemas.openxmlformats.org/drawingml/2006/main">
             <a:r>
               <a:t>The pivotal boundary is between plant life and animal life. Material and bio orders are non-sentient. Hope to live is where sentience enters. The sentient unit is present in animal and human joint forms.</a:t>
             </a:r>
           </a:p>
-          <a:p>
+          <a:p xmlns:a="http://schemas.openxmlformats.org/drawingml/2006/main">
             <a:r>
               <a:t>In animals, bodily and brain development limits how much of that unit’s range can be expressed. In humans, the bodily medium can support the full range, but confusion can still misdirect evaluation. Neither body produces sentience. Please do not collapse either case into “mind emerging from matter alone.”</a:t>
             </a:r>
           </a:p>
-          <a:p>
+          <a:p xmlns:a="http://schemas.openxmlformats.org/drawingml/2006/main">
             <a:r>
               <a:t>We have now stated what exists and how it is ordered. Next: how development proceeds.</a:t>
             </a:r>
@@ -701,7 +702,7 @@
         <p:nvSpPr>
           <p:cNvPr id="4" name="Slide Number Placeholder 3"/>
           <p:cNvSpPr>
-            <a:spLocks noGrp="1"/>
+            <a:spLocks xmlns:a="http://schemas.openxmlformats.org/drawingml/2006/main" noGrp="1"/>
           </p:cNvSpPr>
           <p:nvPr>
             <p:ph type="sldNum" idx="5"/>
@@ -709,21 +710,21 @@
         </p:nvSpPr>
         <p:spPr/>
         <p:txBody>
-          <a:bodyPr/>
-          <a:lstStyle/>
-          <a:p/>
+          <a:bodyPr xmlns:a="http://schemas.openxmlformats.org/drawingml/2006/main"/>
+          <a:lstStyle xmlns:a="http://schemas.openxmlformats.org/drawingml/2006/main"/>
+          <a:p xmlns:a="http://schemas.openxmlformats.org/drawingml/2006/main"/>
         </p:txBody>
       </p:sp>
     </p:spTree>
   </p:cSld>
   <p:clrMapOvr>
-    <a:masterClrMapping/>
+    <a:masterClrMapping xmlns:a="http://schemas.openxmlformats.org/drawingml/2006/main"/>
   </p:clrMapOvr>
 </p:notes>
 </file>
 
 <file path=ppt/notesSlides/notesSlide12.xml><?xml version="1.0" encoding="utf-8"?>
-<p:notes xmlns:a="http://schemas.openxmlformats.org/drawingml/2006/main" xmlns:p="http://schemas.openxmlformats.org/presentationml/2006/main">
+<p:notes xmlns:p="http://schemas.openxmlformats.org/presentationml/2006/main">
   <p:cSld>
     <p:spTree>
       <p:nvGrpSpPr>
@@ -732,13 +733,13 @@
         <p:nvPr/>
       </p:nvGrpSpPr>
       <p:grpSpPr>
-        <a:xfrm/>
+        <a:xfrm xmlns:a="http://schemas.openxmlformats.org/drawingml/2006/main"/>
       </p:grpSpPr>
       <p:sp>
         <p:nvSpPr>
           <p:cNvPr id="2" name="Slide Image Placeholder 1"/>
           <p:cNvSpPr>
-            <a:spLocks noGrp="1"/>
+            <a:spLocks xmlns:a="http://schemas.openxmlformats.org/drawingml/2006/main" noGrp="1"/>
           </p:cNvSpPr>
           <p:nvPr>
             <p:ph type="sldImg" idx="0"/>
@@ -750,7 +751,7 @@
         <p:nvSpPr>
           <p:cNvPr id="3" name="Notes Placeholder 2"/>
           <p:cNvSpPr>
-            <a:spLocks noGrp="1"/>
+            <a:spLocks xmlns:a="http://schemas.openxmlformats.org/drawingml/2006/main" noGrp="1"/>
           </p:cNvSpPr>
           <p:nvPr>
             <p:ph type="body" idx="1"/>
@@ -758,49 +759,49 @@
         </p:nvSpPr>
         <p:spPr/>
         <p:txBody>
-          <a:bodyPr/>
-          <a:lstStyle/>
-          <a:p>
+          <a:bodyPr xmlns:a="http://schemas.openxmlformats.org/drawingml/2006/main"/>
+          <a:lstStyle xmlns:a="http://schemas.openxmlformats.org/drawingml/2006/main"/>
+          <a:p xmlns:a="http://schemas.openxmlformats.org/drawingml/2006/main">
             <a:r>
               <a:t>Start with the question the last three slides have been building toward: why does anything develop at all?</a:t>
             </a:r>
           </a:p>
-          <a:p>
+          <a:p xmlns:a="http://schemas.openxmlformats.org/drawingml/2006/main">
             <a:r>
               <a:t>The answer the texts give is the completeness drive. Nature saturated in state-complete Omnipresence is oriented toward development and awakening, until realisation. “Oriented” is doing careful work there — it names a direction inherent in the order of coexistence, not a guarantee that every unit travels the whole way.</a:t>
             </a:r>
           </a:p>
-          <a:p>
+          <a:p xmlns:a="http://schemas.openxmlformats.org/drawingml/2006/main">
             <a:r>
               <a:t>And here is the connection back to slide 8, which is the one I most want to land: that drive is the drive to fulfil complementarity. Complementarity is given; fulfilling it is what development *is*. Everything in this movement, and everything in the movement after it, is a specification of that one sentence.</a:t>
             </a:r>
           </a:p>
-          <a:p>
+          <a:p xmlns:a="http://schemas.openxmlformats.org/drawingml/2006/main">
             <a:r>
               <a:t>That drive proceeds along two distinct lines, and Madhyasth Darshan insists they must not be collapsed.</a:t>
             </a:r>
           </a:p>
-          <a:p>
+          <a:p xmlns:a="http://schemas.openxmlformats.org/drawingml/2006/main">
             <a:r>
               <a:t>Compositional progression joins particles, atoms, molecules, cells, and bodies into larger configurations. Separately, development in an atom can reach constitutional completeness as a sentient unit. These lines meet in living joint forms, but they remain distinct.</a:t>
             </a:r>
           </a:p>
-          <a:p>
+          <a:p xmlns:a="http://schemas.openxmlformats.org/drawingml/2006/main">
             <a:r>
               <a:t>Across both, activity is one inseparable triad: effort, motion, and result — three aspects of one activity, not three sequential steps. When sodium and chlorine approach, the approach is effort and motion together; the stable salt crystal is the result.</a:t>
             </a:r>
           </a:p>
-          <a:p>
+          <a:p xmlns:a="http://schemas.openxmlformats.org/drawingml/2006/main">
             <a:r>
               <a:t>The texts compress the engine this way: saturation is forcefulness; forcefulness is basic impulsion; impulsion is activity; activity is effort-motion-result; and that is development.</a:t>
             </a:r>
           </a:p>
-          <a:p>
+          <a:p xmlns:a="http://schemas.openxmlformats.org/drawingml/2006/main">
             <a:r>
               <a:t>Each term has a goal: restfulness of effort, destination of motion, immortality of result. Development pervades nature; awakening occurs in the sentient. Non-sentient units participate by composing bodies and environments without each individually completing the drive.</a:t>
             </a:r>
           </a:p>
-          <a:p>
+          <a:p xmlns:a="http://schemas.openxmlformats.org/drawingml/2006/main">
             <a:r>
               <a:t>The next slide follows both paths through their convergence in animal and human living.</a:t>
             </a:r>
@@ -811,7 +812,7 @@
         <p:nvSpPr>
           <p:cNvPr id="4" name="Slide Number Placeholder 3"/>
           <p:cNvSpPr>
-            <a:spLocks noGrp="1"/>
+            <a:spLocks xmlns:a="http://schemas.openxmlformats.org/drawingml/2006/main" noGrp="1"/>
           </p:cNvSpPr>
           <p:nvPr>
             <p:ph type="sldNum" idx="5"/>
@@ -819,21 +820,21 @@
         </p:nvSpPr>
         <p:spPr/>
         <p:txBody>
-          <a:bodyPr/>
-          <a:lstStyle/>
-          <a:p/>
+          <a:bodyPr xmlns:a="http://schemas.openxmlformats.org/drawingml/2006/main"/>
+          <a:lstStyle xmlns:a="http://schemas.openxmlformats.org/drawingml/2006/main"/>
+          <a:p xmlns:a="http://schemas.openxmlformats.org/drawingml/2006/main"/>
         </p:txBody>
       </p:sp>
     </p:spTree>
   </p:cSld>
   <p:clrMapOvr>
-    <a:masterClrMapping/>
+    <a:masterClrMapping xmlns:a="http://schemas.openxmlformats.org/drawingml/2006/main"/>
   </p:clrMapOvr>
 </p:notes>
 </file>
 
 <file path=ppt/notesSlides/notesSlide13.xml><?xml version="1.0" encoding="utf-8"?>
-<p:notes xmlns:a="http://schemas.openxmlformats.org/drawingml/2006/main" xmlns:p="http://schemas.openxmlformats.org/presentationml/2006/main">
+<p:notes xmlns:p="http://schemas.openxmlformats.org/presentationml/2006/main">
   <p:cSld>
     <p:spTree>
       <p:nvGrpSpPr>
@@ -842,13 +843,13 @@
         <p:nvPr/>
       </p:nvGrpSpPr>
       <p:grpSpPr>
-        <a:xfrm/>
+        <a:xfrm xmlns:a="http://schemas.openxmlformats.org/drawingml/2006/main"/>
       </p:grpSpPr>
       <p:sp>
         <p:nvSpPr>
           <p:cNvPr id="2" name="Slide Image Placeholder 1"/>
           <p:cNvSpPr>
-            <a:spLocks noGrp="1"/>
+            <a:spLocks xmlns:a="http://schemas.openxmlformats.org/drawingml/2006/main" noGrp="1"/>
           </p:cNvSpPr>
           <p:nvPr>
             <p:ph type="sldImg" idx="0"/>
@@ -860,7 +861,7 @@
         <p:nvSpPr>
           <p:cNvPr id="3" name="Notes Placeholder 2"/>
           <p:cNvSpPr>
-            <a:spLocks noGrp="1"/>
+            <a:spLocks xmlns:a="http://schemas.openxmlformats.org/drawingml/2006/main" noGrp="1"/>
           </p:cNvSpPr>
           <p:nvPr>
             <p:ph type="body" idx="1"/>
@@ -868,34 +869,34 @@
         </p:nvSpPr>
         <p:spPr/>
         <p:txBody>
-          <a:bodyPr/>
-          <a:lstStyle/>
-          <a:p>
+          <a:bodyPr xmlns:a="http://schemas.openxmlformats.org/drawingml/2006/main"/>
+          <a:lstStyle xmlns:a="http://schemas.openxmlformats.org/drawingml/2006/main"/>
+          <a:p xmlns:a="http://schemas.openxmlformats.org/drawingml/2006/main">
             <a:r>
               <a:t>The completeness drive unfolds along two parallel paths.</a:t>
             </a:r>
           </a:p>
-          <a:p>
+          <a:p xmlns:a="http://schemas.openxmlformats.org/drawingml/2006/main">
             <a:r>
               <a:t>The first is the compositional path, *rachna*. Atoms and molecules form material-order structures. Under appropriate chemical and environmental conditions, pranic cells and biological formations appear. This is the material-to-biological order change, and both orders remain insentient.</a:t>
             </a:r>
           </a:p>
-          <a:p>
+          <a:p xmlns:a="http://schemas.openxmlformats.org/drawingml/2006/main">
             <a:r>
               <a:t>The second is the atomic path, *gathan*. A developing atom integrates the particle constitution required for completeness. At constitutional completeness, the texts classify that atom as sentient *jeevan*.</a:t>
             </a:r>
           </a:p>
-          <a:p>
+          <a:p xmlns:a="http://schemas.openxmlformats.org/drawingml/2006/main">
             <a:r>
               <a:t>The two paths meet in the animal order as a joint form: a biological body plus sentient *jeevan*. One does not manufacture the other; they work together.</a:t>
             </a:r>
           </a:p>
-          <a:p>
+          <a:p xmlns:a="http://schemas.openxmlformats.org/drawingml/2006/main">
             <a:r>
               <a:t>Development then continues along both aspects of the joint form. Bodily lineages develop through species-conforming biological organisation, while *jeevan*’s expression widens through those bodily media. In the animal order that expression remains limited by the body.</a:t>
             </a:r>
           </a:p>
-          <a:p>
+          <a:p xmlns:a="http://schemas.openxmlformats.org/drawingml/2006/main">
             <a:r>
               <a:t>The human body, in the knowledge order, is described as capable of evidencing all ten activities of *jeevan*. That does not mean the body owns those activities. It means the bodily medium is adequate for their expression. Once that capacity is present, the remaining development is awakening in *jeevan*, evidenced through understanding and conduct.</a:t>
             </a:r>
@@ -906,7 +907,7 @@
         <p:nvSpPr>
           <p:cNvPr id="4" name="Slide Number Placeholder 3"/>
           <p:cNvSpPr>
-            <a:spLocks noGrp="1"/>
+            <a:spLocks xmlns:a="http://schemas.openxmlformats.org/drawingml/2006/main" noGrp="1"/>
           </p:cNvSpPr>
           <p:nvPr>
             <p:ph type="sldNum" idx="5"/>
@@ -914,21 +915,21 @@
         </p:nvSpPr>
         <p:spPr/>
         <p:txBody>
-          <a:bodyPr/>
-          <a:lstStyle/>
-          <a:p/>
+          <a:bodyPr xmlns:a="http://schemas.openxmlformats.org/drawingml/2006/main"/>
+          <a:lstStyle xmlns:a="http://schemas.openxmlformats.org/drawingml/2006/main"/>
+          <a:p xmlns:a="http://schemas.openxmlformats.org/drawingml/2006/main"/>
         </p:txBody>
       </p:sp>
     </p:spTree>
   </p:cSld>
   <p:clrMapOvr>
-    <a:masterClrMapping/>
+    <a:masterClrMapping xmlns:a="http://schemas.openxmlformats.org/drawingml/2006/main"/>
   </p:clrMapOvr>
 </p:notes>
 </file>
 
 <file path=ppt/notesSlides/notesSlide14.xml><?xml version="1.0" encoding="utf-8"?>
-<p:notes xmlns:a="http://schemas.openxmlformats.org/drawingml/2006/main" xmlns:p="http://schemas.openxmlformats.org/presentationml/2006/main">
+<p:notes xmlns:p="http://schemas.openxmlformats.org/presentationml/2006/main">
   <p:cSld>
     <p:spTree>
       <p:nvGrpSpPr>
@@ -937,13 +938,13 @@
         <p:nvPr/>
       </p:nvGrpSpPr>
       <p:grpSpPr>
-        <a:xfrm/>
+        <a:xfrm xmlns:a="http://schemas.openxmlformats.org/drawingml/2006/main"/>
       </p:grpSpPr>
       <p:sp>
         <p:nvSpPr>
           <p:cNvPr id="2" name="Slide Image Placeholder 1"/>
           <p:cNvSpPr>
-            <a:spLocks noGrp="1"/>
+            <a:spLocks xmlns:a="http://schemas.openxmlformats.org/drawingml/2006/main" noGrp="1"/>
           </p:cNvSpPr>
           <p:nvPr>
             <p:ph type="sldImg" idx="0"/>
@@ -955,7 +956,7 @@
         <p:nvSpPr>
           <p:cNvPr id="3" name="Notes Placeholder 2"/>
           <p:cNvSpPr>
-            <a:spLocks noGrp="1"/>
+            <a:spLocks xmlns:a="http://schemas.openxmlformats.org/drawingml/2006/main" noGrp="1"/>
           </p:cNvSpPr>
           <p:nvPr>
             <p:ph type="body" idx="1"/>
@@ -963,39 +964,39 @@
         </p:nvSpPr>
         <p:spPr/>
         <p:txBody>
-          <a:bodyPr/>
-          <a:lstStyle/>
-          <a:p>
+          <a:bodyPr xmlns:a="http://schemas.openxmlformats.org/drawingml/2006/main"/>
+          <a:lstStyle xmlns:a="http://schemas.openxmlformats.org/drawingml/2006/main"/>
+          <a:p xmlns:a="http://schemas.openxmlformats.org/drawingml/2006/main">
             <a:r>
               <a:t>Now we name three milestones — T1, T2, and T3.</a:t>
             </a:r>
           </a:p>
-          <a:p>
+          <a:p xmlns:a="http://schemas.openxmlformats.org/drawingml/2006/main">
             <a:r>
               <a:t>T1 is constitutional completeness: the immortality of result. A developing atom becomes a sentient unit — jeevan. Status shifts from physicochemical to what the texts call delusional — meaning the body is mistaken for the self. That is a stage label, not a psychiatric diagnosis.</a:t>
             </a:r>
           </a:p>
-          <a:p>
+          <a:p xmlns:a="http://schemas.openxmlformats.org/drawingml/2006/main">
             <a:r>
               <a:t>T2 is activity completeness: restfulness of effort. Inner seeking settles into direct realisation and resolution. Status shifts toward awakened understanding.</a:t>
             </a:r>
           </a:p>
-          <a:p>
+          <a:p xmlns:a="http://schemas.openxmlformats.org/drawingml/2006/main">
             <a:r>
               <a:t>T3 is conduct completeness: destination of motion. Understanding becomes authentic conduct — living proof.</a:t>
             </a:r>
           </a:p>
-          <a:p>
+          <a:p xmlns:a="http://schemas.openxmlformats.org/drawingml/2006/main">
             <a:r>
               <a:t>Keep T2 and T3 apart. T2 is internal settlement. T3 is outer destination in conduct. And do not confuse T2’s restfulness with the ease of non-sentient natural complementarity.</a:t>
             </a:r>
           </a:p>
-          <a:p>
+          <a:p xmlns:a="http://schemas.openxmlformats.org/drawingml/2006/main">
             <a:r>
               <a:t>T1 is completeness of an atom’s constitution. T2 and T3 are not further material stages; they name completeness of activity and conduct in the awakened sentient unit. In one line: the saturated realises the ground it is saturated in.</a:t>
             </a:r>
           </a:p>
-          <a:p>
+          <a:p xmlns:a="http://schemas.openxmlformats.org/drawingml/2006/main">
             <a:r>
               <a:t>One naming point, since I have just used the words. Physicochemical, delusional, deific, divine — the band across the top of this slide — are what the texts call the four **planes**. A plane is the developmental standing a thing has reached. It is not a kind of thing, and it is not the same as an order of nature. The next slide sorts that out properly.</a:t>
             </a:r>
@@ -1006,7 +1007,7 @@
         <p:nvSpPr>
           <p:cNvPr id="4" name="Slide Number Placeholder 3"/>
           <p:cNvSpPr>
-            <a:spLocks noGrp="1"/>
+            <a:spLocks xmlns:a="http://schemas.openxmlformats.org/drawingml/2006/main" noGrp="1"/>
           </p:cNvSpPr>
           <p:nvPr>
             <p:ph type="sldNum" idx="5"/>
@@ -1014,21 +1015,21 @@
         </p:nvSpPr>
         <p:spPr/>
         <p:txBody>
-          <a:bodyPr/>
-          <a:lstStyle/>
-          <a:p/>
+          <a:bodyPr xmlns:a="http://schemas.openxmlformats.org/drawingml/2006/main"/>
+          <a:lstStyle xmlns:a="http://schemas.openxmlformats.org/drawingml/2006/main"/>
+          <a:p xmlns:a="http://schemas.openxmlformats.org/drawingml/2006/main"/>
         </p:txBody>
       </p:sp>
     </p:spTree>
   </p:cSld>
   <p:clrMapOvr>
-    <a:masterClrMapping/>
+    <a:masterClrMapping xmlns:a="http://schemas.openxmlformats.org/drawingml/2006/main"/>
   </p:clrMapOvr>
 </p:notes>
 </file>
 
 <file path=ppt/notesSlides/notesSlide15.xml><?xml version="1.0" encoding="utf-8"?>
-<p:notes xmlns:a="http://schemas.openxmlformats.org/drawingml/2006/main" xmlns:p="http://schemas.openxmlformats.org/presentationml/2006/main">
+<p:notes xmlns:p="http://schemas.openxmlformats.org/presentationml/2006/main">
   <p:cSld>
     <p:spTree>
       <p:nvGrpSpPr>
@@ -1037,13 +1038,13 @@
         <p:nvPr/>
       </p:nvGrpSpPr>
       <p:grpSpPr>
-        <a:xfrm/>
+        <a:xfrm xmlns:a="http://schemas.openxmlformats.org/drawingml/2006/main"/>
       </p:grpSpPr>
       <p:sp>
         <p:nvSpPr>
           <p:cNvPr id="2" name="Slide Image Placeholder 1"/>
           <p:cNvSpPr>
-            <a:spLocks noGrp="1"/>
+            <a:spLocks xmlns:a="http://schemas.openxmlformats.org/drawingml/2006/main" noGrp="1"/>
           </p:cNvSpPr>
           <p:nvPr>
             <p:ph type="sldImg" idx="0"/>
@@ -1055,7 +1056,7 @@
         <p:nvSpPr>
           <p:cNvPr id="3" name="Notes Placeholder 2"/>
           <p:cNvSpPr>
-            <a:spLocks noGrp="1"/>
+            <a:spLocks xmlns:a="http://schemas.openxmlformats.org/drawingml/2006/main" noGrp="1"/>
           </p:cNvSpPr>
           <p:nvPr>
             <p:ph type="body" idx="1"/>
@@ -1063,39 +1064,39 @@
         </p:nvSpPr>
         <p:spPr/>
         <p:txBody>
-          <a:bodyPr/>
-          <a:lstStyle/>
-          <a:p>
+          <a:bodyPr xmlns:a="http://schemas.openxmlformats.org/drawingml/2006/main"/>
+          <a:lstStyle xmlns:a="http://schemas.openxmlformats.org/drawingml/2006/main"/>
+          <a:p xmlns:a="http://schemas.openxmlformats.org/drawingml/2006/main">
             <a:r>
               <a:t>Let me consolidate, because this tradition uses four different vocabularies for what is fundamentally one thing, and mixing them up is the commonest way to get lost in it.</a:t>
             </a:r>
           </a:p>
-          <a:p>
+          <a:p xmlns:a="http://schemas.openxmlformats.org/drawingml/2006/main">
             <a:r>
               <a:t>There is one drive: nature saturated in state-complete Omnipresence, oriented toward development and awakening until realisation. Everything on this table is a way of describing where something stands in that drive.</a:t>
             </a:r>
           </a:p>
-          <a:p>
+          <a:p xmlns:a="http://schemas.openxmlformats.org/drawingml/2006/main">
             <a:r>
               <a:t>**Orders** — material, bio, animal, knowledge — say what *kind* of thing a unit is: its organisation, its essential nature, its innateness. Four orders.</a:t>
             </a:r>
           </a:p>
-          <a:p>
+          <a:p xmlns:a="http://schemas.openxmlformats.org/drawingml/2006/main">
             <a:r>
               <a:t>**Progressions** — existential, way of existence, development, awakening — say how the drive *moves*. The first names the definite sequence in which the orders become manifest; the second, the conformance by which each order keeps its conduct; the third, physicochemical and atomic development up to T1; the fourth, qualitative development inside a complete sentient unit toward T2 and T3.</a:t>
             </a:r>
           </a:p>
-          <a:p>
+          <a:p xmlns:a="http://schemas.openxmlformats.org/drawingml/2006/main">
             <a:r>
               <a:t>**Planes** — physicochemical, delusional, deific, divine — say how *far* something has come. These are the four we just saw across the top of the last slide. Before T1; T1 only; T2; T3.</a:t>
             </a:r>
           </a:p>
-          <a:p>
+          <a:p xmlns:a="http://schemas.openxmlformats.org/drawingml/2006/main">
             <a:r>
               <a:t>**Human types** — animalistic, demonic, humane or discerning, deific, divine — say how a human *life is oriented*. Five of them, and they classify modes of consciousness and conduct. Not biological species. Not social classes. Not castes.</a:t>
             </a:r>
           </a:p>
-          <a:p>
+          <a:p xmlns:a="http://schemas.openxmlformats.org/drawingml/2006/main">
             <a:r>
               <a:t>The one caution worth stating out loud: an order is not a plane. The knowledge order spans more than one plane — most human beings are in the knowledge order and on the delusional plane at the same time, and there is nothing insulting in that; it just means realisation has not happened yet. T1 separates physicochemical from sentient standing. T2 and T3 are completeness within an awakened sentient unit, and no fifth plane is added beyond them.</a:t>
             </a:r>
@@ -1106,7 +1107,7 @@
         <p:nvSpPr>
           <p:cNvPr id="4" name="Slide Number Placeholder 3"/>
           <p:cNvSpPr>
-            <a:spLocks noGrp="1"/>
+            <a:spLocks xmlns:a="http://schemas.openxmlformats.org/drawingml/2006/main" noGrp="1"/>
           </p:cNvSpPr>
           <p:nvPr>
             <p:ph type="sldNum" idx="5"/>
@@ -1114,21 +1115,21 @@
         </p:nvSpPr>
         <p:spPr/>
         <p:txBody>
-          <a:bodyPr/>
-          <a:lstStyle/>
-          <a:p/>
+          <a:bodyPr xmlns:a="http://schemas.openxmlformats.org/drawingml/2006/main"/>
+          <a:lstStyle xmlns:a="http://schemas.openxmlformats.org/drawingml/2006/main"/>
+          <a:p xmlns:a="http://schemas.openxmlformats.org/drawingml/2006/main"/>
         </p:txBody>
       </p:sp>
     </p:spTree>
   </p:cSld>
   <p:clrMapOvr>
-    <a:masterClrMapping/>
+    <a:masterClrMapping xmlns:a="http://schemas.openxmlformats.org/drawingml/2006/main"/>
   </p:clrMapOvr>
 </p:notes>
 </file>
 
 <file path=ppt/notesSlides/notesSlide16.xml><?xml version="1.0" encoding="utf-8"?>
-<p:notes xmlns:a="http://schemas.openxmlformats.org/drawingml/2006/main" xmlns:p="http://schemas.openxmlformats.org/presentationml/2006/main">
+<p:notes xmlns:p="http://schemas.openxmlformats.org/presentationml/2006/main">
   <p:cSld>
     <p:spTree>
       <p:nvGrpSpPr>
@@ -1137,13 +1138,13 @@
         <p:nvPr/>
       </p:nvGrpSpPr>
       <p:grpSpPr>
-        <a:xfrm/>
+        <a:xfrm xmlns:a="http://schemas.openxmlformats.org/drawingml/2006/main"/>
       </p:grpSpPr>
       <p:sp>
         <p:nvSpPr>
           <p:cNvPr id="2" name="Slide Image Placeholder 1"/>
           <p:cNvSpPr>
-            <a:spLocks noGrp="1"/>
+            <a:spLocks xmlns:a="http://schemas.openxmlformats.org/drawingml/2006/main" noGrp="1"/>
           </p:cNvSpPr>
           <p:nvPr>
             <p:ph type="sldImg" idx="0"/>
@@ -1155,7 +1156,7 @@
         <p:nvSpPr>
           <p:cNvPr id="3" name="Notes Placeholder 2"/>
           <p:cNvSpPr>
-            <a:spLocks noGrp="1"/>
+            <a:spLocks xmlns:a="http://schemas.openxmlformats.org/drawingml/2006/main" noGrp="1"/>
           </p:cNvSpPr>
           <p:nvPr>
             <p:ph type="body" idx="1"/>
@@ -1163,34 +1164,34 @@
         </p:nvSpPr>
         <p:spPr/>
         <p:txBody>
-          <a:bodyPr/>
-          <a:lstStyle/>
-          <a:p>
+          <a:bodyPr xmlns:a="http://schemas.openxmlformats.org/drawingml/2006/main"/>
+          <a:lstStyle xmlns:a="http://schemas.openxmlformats.org/drawingml/2006/main"/>
+          <a:p xmlns:a="http://schemas.openxmlformats.org/drawingml/2006/main">
             <a:r>
               <a:t>This is the claimed sentience threshold. The technical transitions slide names it T1; here the audience-facing question is how the texts say sentience enters.</a:t>
             </a:r>
           </a:p>
-          <a:p>
+          <a:p xmlns:a="http://schemas.openxmlformats.org/drawingml/2006/main">
             <a:r>
               <a:t>According to the primary texts, sentience appears when one developing atom reaches constitutional completeness — not through neural complexity, molecular size, or the material-to-biological order change.</a:t>
             </a:r>
           </a:p>
-          <a:p>
+          <a:p xmlns:a="http://schemas.openxmlformats.org/drawingml/2006/main">
             <a:r>
               <a:t>The described process begins with particle exchange. Hungry atoms can incorporate particles; overfull or undigested atoms seek to expel them. Under suitable mutuality, a developing atom integrates the full count required by its constitution. When that requirement is satisfied, the constitution closes and particle count no longer increases or decreases.</a:t>
             </a:r>
           </a:p>
-          <a:p>
+          <a:p xmlns:a="http://schemas.openxmlformats.org/drawingml/2006/main">
             <a:r>
               <a:t>The slide shows the before and after. Before sentience, the constitution remains open: particles are absorbed or expelled, molecular and weight bondage continue, and kind, capacity, and qualitative change track particle count. At the sentience threshold, all required particles are integrated. The count becomes fixed, molecular and weight bondage end, and qualitative activity continues. The texts classify that closed unit as sentient *jeevan*.</a:t>
             </a:r>
           </a:p>
-          <a:p>
+          <a:p xmlns:a="http://schemas.openxmlformats.org/drawingml/2006/main">
             <a:r>
               <a:t>That separation of qualitative from quantitative change is the stated criterion. MVD adds the visible signs of release from the molecular group, liberation from molecular- and weight-bondage, and establishment in hope-bondage.</a:t>
             </a:r>
           </a:p>
-          <a:p>
+          <a:p xmlns:a="http://schemas.openxmlformats.org/drawingml/2006/main">
             <a:r>
               <a:t>The transition to sentience is therefore a claim of reclassification at atomic closure: one atom becomes *jeevan*; a body does not become conscious by becoming more complex. The texts give a process and a criterion, but not an accepted physical measurement of this threshold or a causal explanation of why closure is sentience. We will return to that open bridge under method and evidence.</a:t>
             </a:r>
@@ -1201,7 +1202,7 @@
         <p:nvSpPr>
           <p:cNvPr id="4" name="Slide Number Placeholder 3"/>
           <p:cNvSpPr>
-            <a:spLocks noGrp="1"/>
+            <a:spLocks xmlns:a="http://schemas.openxmlformats.org/drawingml/2006/main" noGrp="1"/>
           </p:cNvSpPr>
           <p:nvPr>
             <p:ph type="sldNum" idx="5"/>
@@ -1209,21 +1210,21 @@
         </p:nvSpPr>
         <p:spPr/>
         <p:txBody>
-          <a:bodyPr/>
-          <a:lstStyle/>
-          <a:p/>
+          <a:bodyPr xmlns:a="http://schemas.openxmlformats.org/drawingml/2006/main"/>
+          <a:lstStyle xmlns:a="http://schemas.openxmlformats.org/drawingml/2006/main"/>
+          <a:p xmlns:a="http://schemas.openxmlformats.org/drawingml/2006/main"/>
         </p:txBody>
       </p:sp>
     </p:spTree>
   </p:cSld>
   <p:clrMapOvr>
-    <a:masterClrMapping/>
+    <a:masterClrMapping xmlns:a="http://schemas.openxmlformats.org/drawingml/2006/main"/>
   </p:clrMapOvr>
 </p:notes>
 </file>
 
 <file path=ppt/notesSlides/notesSlide17.xml><?xml version="1.0" encoding="utf-8"?>
-<p:notes xmlns:a="http://schemas.openxmlformats.org/drawingml/2006/main" xmlns:p="http://schemas.openxmlformats.org/presentationml/2006/main">
+<p:notes xmlns:p="http://schemas.openxmlformats.org/presentationml/2006/main">
   <p:cSld>
     <p:spTree>
       <p:nvGrpSpPr>
@@ -1232,13 +1233,13 @@
         <p:nvPr/>
       </p:nvGrpSpPr>
       <p:grpSpPr>
-        <a:xfrm/>
+        <a:xfrm xmlns:a="http://schemas.openxmlformats.org/drawingml/2006/main"/>
       </p:grpSpPr>
       <p:sp>
         <p:nvSpPr>
           <p:cNvPr id="2" name="Slide Image Placeholder 1"/>
           <p:cNvSpPr>
-            <a:spLocks noGrp="1"/>
+            <a:spLocks xmlns:a="http://schemas.openxmlformats.org/drawingml/2006/main" noGrp="1"/>
           </p:cNvSpPr>
           <p:nvPr>
             <p:ph type="sldImg" idx="0"/>
@@ -1250,7 +1251,7 @@
         <p:nvSpPr>
           <p:cNvPr id="3" name="Notes Placeholder 2"/>
           <p:cNvSpPr>
-            <a:spLocks noGrp="1"/>
+            <a:spLocks xmlns:a="http://schemas.openxmlformats.org/drawingml/2006/main" noGrp="1"/>
           </p:cNvSpPr>
           <p:nvPr>
             <p:ph type="body" idx="1"/>
@@ -1258,29 +1259,29 @@
         </p:nvSpPr>
         <p:spPr/>
         <p:txBody>
-          <a:bodyPr/>
-          <a:lstStyle/>
-          <a:p>
+          <a:bodyPr xmlns:a="http://schemas.openxmlformats.org/drawingml/2006/main"/>
+          <a:lstStyle xmlns:a="http://schemas.openxmlformats.org/drawingml/2006/main"/>
+          <a:p xmlns:a="http://schemas.openxmlformats.org/drawingml/2006/main">
             <a:r>
               <a:t>We now turn to human living — movement three.</a:t>
             </a:r>
           </a:p>
-          <a:p>
+          <a:p xmlns:a="http://schemas.openxmlformats.org/drawingml/2006/main">
             <a:r>
               <a:t>Animal and human living is a joint form. The sentient unit brings the full set of faculties and activities. The body supplies the species-specific medium.</a:t>
             </a:r>
           </a:p>
-          <a:p>
+          <a:p xmlns:a="http://schemas.openxmlformats.org/drawingml/2006/main">
             <a:r>
               <a:t>On one side: the body — living composition, sense organs, the brain (*medhas*), physical expression; decomposable. The brain receives and translates signals; it is the medium, not the knower. On the other: the sentient unit — constitutionally complete; faculties inherent; continuing when the joint form ends.</a:t>
             </a:r>
           </a:p>
-          <a:p>
+          <a:p xmlns:a="http://schemas.openxmlformats.org/drawingml/2006/main">
             <a:r>
               <a:t>Animal bodily development limits expression. The human medium can support the full range, while mistaking the body for the self can still misdirect evaluation.</a:t>
             </a:r>
           </a:p>
-          <a:p>
+          <a:p xmlns:a="http://schemas.openxmlformats.org/drawingml/2006/main">
             <a:r>
               <a:t>The body gates expression. The sentient unit is seer, doer, and enjoyer through the body. Animal limitation belongs to the medium. Human mis-evaluation belongs to that confusion. The body does not produce sentience, and those two problems are not the same problem.</a:t>
             </a:r>
@@ -1291,7 +1292,7 @@
         <p:nvSpPr>
           <p:cNvPr id="4" name="Slide Number Placeholder 3"/>
           <p:cNvSpPr>
-            <a:spLocks noGrp="1"/>
+            <a:spLocks xmlns:a="http://schemas.openxmlformats.org/drawingml/2006/main" noGrp="1"/>
           </p:cNvSpPr>
           <p:nvPr>
             <p:ph type="sldNum" idx="5"/>
@@ -1299,21 +1300,21 @@
         </p:nvSpPr>
         <p:spPr/>
         <p:txBody>
-          <a:bodyPr/>
-          <a:lstStyle/>
-          <a:p/>
+          <a:bodyPr xmlns:a="http://schemas.openxmlformats.org/drawingml/2006/main"/>
+          <a:lstStyle xmlns:a="http://schemas.openxmlformats.org/drawingml/2006/main"/>
+          <a:p xmlns:a="http://schemas.openxmlformats.org/drawingml/2006/main"/>
         </p:txBody>
       </p:sp>
     </p:spTree>
   </p:cSld>
   <p:clrMapOvr>
-    <a:masterClrMapping/>
+    <a:masterClrMapping xmlns:a="http://schemas.openxmlformats.org/drawingml/2006/main"/>
   </p:clrMapOvr>
 </p:notes>
 </file>
 
 <file path=ppt/notesSlides/notesSlide18.xml><?xml version="1.0" encoding="utf-8"?>
-<p:notes xmlns:a="http://schemas.openxmlformats.org/drawingml/2006/main" xmlns:p="http://schemas.openxmlformats.org/presentationml/2006/main">
+<p:notes xmlns:p="http://schemas.openxmlformats.org/presentationml/2006/main">
   <p:cSld>
     <p:spTree>
       <p:nvGrpSpPr>
@@ -1322,13 +1323,13 @@
         <p:nvPr/>
       </p:nvGrpSpPr>
       <p:grpSpPr>
-        <a:xfrm/>
+        <a:xfrm xmlns:a="http://schemas.openxmlformats.org/drawingml/2006/main"/>
       </p:grpSpPr>
       <p:sp>
         <p:nvSpPr>
           <p:cNvPr id="2" name="Slide Image Placeholder 1"/>
           <p:cNvSpPr>
-            <a:spLocks noGrp="1"/>
+            <a:spLocks xmlns:a="http://schemas.openxmlformats.org/drawingml/2006/main" noGrp="1"/>
           </p:cNvSpPr>
           <p:nvPr>
             <p:ph type="sldImg" idx="0"/>
@@ -1340,7 +1341,7 @@
         <p:nvSpPr>
           <p:cNvPr id="3" name="Notes Placeholder 2"/>
           <p:cNvSpPr>
-            <a:spLocks noGrp="1"/>
+            <a:spLocks xmlns:a="http://schemas.openxmlformats.org/drawingml/2006/main" noGrp="1"/>
           </p:cNvSpPr>
           <p:nvPr>
             <p:ph type="body" idx="1"/>
@@ -1348,34 +1349,34 @@
         </p:nvSpPr>
         <p:spPr/>
         <p:txBody>
-          <a:bodyPr/>
-          <a:lstStyle/>
-          <a:p>
+          <a:bodyPr xmlns:a="http://schemas.openxmlformats.org/drawingml/2006/main"/>
+          <a:lstStyle xmlns:a="http://schemas.openxmlformats.org/drawingml/2006/main"/>
+          <a:p xmlns:a="http://schemas.openxmlformats.org/drawingml/2006/main">
             <a:r>
               <a:t>The sentient unit — jeevan — is a constitutionally complete atom.</a:t>
             </a:r>
           </a:p>
-          <a:p>
+          <a:p xmlns:a="http://schemas.openxmlformats.org/drawingml/2006/main">
             <a:r>
               <a:t>Structurally, the centre is the core self. Around it: resolve, desire, thought, and hope — the texts’ buddhi, chitta, vritti, and mun.</a:t>
             </a:r>
           </a:p>
-          <a:p>
+          <a:p xmlns:a="http://schemas.openxmlformats.org/drawingml/2006/main">
             <a:r>
               <a:t>Each works outward and inward. Hope selects and tastes. Thought analyses and deliberates. Desire visualises and contemplates — and directly apprehends. Resolve resolves and comprehends. The core self authenticates and realises. Tasting at hope has three orientations: sensory, value-based, and goal-based. Awakening changes which of these governs what is accepted. Projection of realisation is authenticity, resolve, visualisation, analysis, and selection into living conduct.</a:t>
             </a:r>
           </a:p>
-          <a:p>
-            <a:r>
-              <a:t>Guidance can descend from the core self through the faculties — higher-conformance — or sensory drive can push inward from the body — lower-conformance. Cognisance regulates sensitivity when the higher direction holds.</a:t>
-            </a:r>
-          </a:p>
-          <a:p>
+          <a:p xmlns:a="http://schemas.openxmlformats.org/drawingml/2006/main">
+            <a:r>
+              <a:t>Here, reflection means pratyavartan, the inward activity of knowing. It differs from pratibimban, the imaging between units introduced on slides 8 and 9. Guidance can descend from the core self through the faculties, while sensory drive can press inward from the body. In awakening, cognisance regulates sensitivity.</a:t>
+            </a:r>
+          </a:p>
+          <a:p xmlns:a="http://schemas.openxmlformats.org/drawingml/2006/main">
             <a:r>
               <a:t>All five faculties and ten activities belong to the sentient unit. Presence is not the same as expression or effective organisation. Animal bodies limit expression. Humans have the medium for the full range, yet under body-confusion only part of that range may be effectively organised.</a:t>
             </a:r>
           </a:p>
-          <a:p>
+          <a:p xmlns:a="http://schemas.openxmlformats.org/drawingml/2006/main">
             <a:r>
               <a:t>Study brings understanding. Practice tests and stabilises it. Practice does not manufacture faculties that were missing.</a:t>
             </a:r>
@@ -1386,7 +1387,7 @@
         <p:nvSpPr>
           <p:cNvPr id="4" name="Slide Number Placeholder 3"/>
           <p:cNvSpPr>
-            <a:spLocks noGrp="1"/>
+            <a:spLocks xmlns:a="http://schemas.openxmlformats.org/drawingml/2006/main" noGrp="1"/>
           </p:cNvSpPr>
           <p:nvPr>
             <p:ph type="sldNum" idx="5"/>
@@ -1394,21 +1395,21 @@
         </p:nvSpPr>
         <p:spPr/>
         <p:txBody>
-          <a:bodyPr/>
-          <a:lstStyle/>
-          <a:p/>
+          <a:bodyPr xmlns:a="http://schemas.openxmlformats.org/drawingml/2006/main"/>
+          <a:lstStyle xmlns:a="http://schemas.openxmlformats.org/drawingml/2006/main"/>
+          <a:p xmlns:a="http://schemas.openxmlformats.org/drawingml/2006/main"/>
         </p:txBody>
       </p:sp>
     </p:spTree>
   </p:cSld>
   <p:clrMapOvr>
-    <a:masterClrMapping/>
+    <a:masterClrMapping xmlns:a="http://schemas.openxmlformats.org/drawingml/2006/main"/>
   </p:clrMapOvr>
 </p:notes>
 </file>
 
 <file path=ppt/notesSlides/notesSlide19.xml><?xml version="1.0" encoding="utf-8"?>
-<p:notes xmlns:a="http://schemas.openxmlformats.org/drawingml/2006/main" xmlns:p="http://schemas.openxmlformats.org/presentationml/2006/main">
+<p:notes xmlns:p="http://schemas.openxmlformats.org/presentationml/2006/main">
   <p:cSld>
     <p:spTree>
       <p:nvGrpSpPr>
@@ -1417,13 +1418,13 @@
         <p:nvPr/>
       </p:nvGrpSpPr>
       <p:grpSpPr>
-        <a:xfrm/>
+        <a:xfrm xmlns:a="http://schemas.openxmlformats.org/drawingml/2006/main"/>
       </p:grpSpPr>
       <p:sp>
         <p:nvSpPr>
           <p:cNvPr id="2" name="Slide Image Placeholder 1"/>
           <p:cNvSpPr>
-            <a:spLocks noGrp="1"/>
+            <a:spLocks xmlns:a="http://schemas.openxmlformats.org/drawingml/2006/main" noGrp="1"/>
           </p:cNvSpPr>
           <p:nvPr>
             <p:ph type="sldImg" idx="0"/>
@@ -1435,7 +1436,7 @@
         <p:nvSpPr>
           <p:cNvPr id="3" name="Notes Placeholder 2"/>
           <p:cNvSpPr>
-            <a:spLocks noGrp="1"/>
+            <a:spLocks xmlns:a="http://schemas.openxmlformats.org/drawingml/2006/main" noGrp="1"/>
           </p:cNvSpPr>
           <p:nvPr>
             <p:ph type="body" idx="1"/>
@@ -1443,31 +1444,31 @@
         </p:nvSpPr>
         <p:spPr/>
         <p:txBody>
-          <a:bodyPr/>
-          <a:lstStyle/>
-          <a:p>
+          <a:bodyPr xmlns:a="http://schemas.openxmlformats.org/drawingml/2006/main"/>
+          <a:lstStyle xmlns:a="http://schemas.openxmlformats.org/drawingml/2006/main"/>
+          <a:p xmlns:a="http://schemas.openxmlformats.org/drawingml/2006/main">
             <a:r>
               <a:t>Happiness, peace, contentment, and bliss are not passing moods, and they are not a fourth milestone after T1, T2, and T3.</a:t>
             </a:r>
           </a:p>
-          <a:p>
+          <a:p xmlns:a="http://schemas.openxmlformats.org/drawingml/2006/main">
             <a:r>
               <a:t>They name harmonies within the sentient unit. Happiness: harmony of hope and thought. Peace: thought and desire. Contentment: desire and resolve. Bliss: resolve and the core self.</a:t>
             </a:r>
           </a:p>
-          <a:p>
-            <a:r>
-              <a:t>Now hold all four in view, because they are what the knowledge order is actually after. This is the answer to “what is a human life for?” in this system — and notice that only the first of the four is reachable by sensory living. Happiness, the harmony of hope and thought, an animal can have. Peace, contentment, and bliss it cannot even see.</a:t>
-            </a:r>
-          </a:p>
-          <a:p>
+          <a:p xmlns:a="http://schemas.openxmlformats.org/drawingml/2006/main">
+            <a:r>
+              <a:t>These four harmonies belong to the knowledge-order account of awakening. Animal living expresses hope to live through its bodily medium. We should therefore keep animal sensory satisfaction distinct from the human development of these harmonies. Within the human account, bliss is borne at buddhi through harmony with atma. Realisation at atma is named ultimate bliss, or paramanand, whose effect reaches the remaining faculties.</a:t>
+            </a:r>
+          </a:p>
+          <a:p xmlns:a="http://schemas.openxmlformats.org/drawingml/2006/main">
             <a:r>
               <a:t>The living cycle is: reflection feeds projection, and projection feeds deeper reflection — that is what living means here. Continuous happiness is harmony evidenced in resolved living, not a sensory spike.</a:t>
             </a:r>
           </a:p>
-          <a:p>
-            <a:r>
-              <a:t>The next two slides ask how a human being actually gets from the first harmony to the other three.</a:t>
+          <a:p xmlns:a="http://schemas.openxmlformats.org/drawingml/2006/main">
+            <a:r>
+              <a:t>The next two slides examine how understanding comes to guide evaluation, work, and relationships.</a:t>
             </a:r>
           </a:p>
         </p:txBody>
@@ -1476,7 +1477,7 @@
         <p:nvSpPr>
           <p:cNvPr id="4" name="Slide Number Placeholder 3"/>
           <p:cNvSpPr>
-            <a:spLocks noGrp="1"/>
+            <a:spLocks xmlns:a="http://schemas.openxmlformats.org/drawingml/2006/main" noGrp="1"/>
           </p:cNvSpPr>
           <p:nvPr>
             <p:ph type="sldNum" idx="5"/>
@@ -1484,21 +1485,21 @@
         </p:nvSpPr>
         <p:spPr/>
         <p:txBody>
-          <a:bodyPr/>
-          <a:lstStyle/>
-          <a:p/>
+          <a:bodyPr xmlns:a="http://schemas.openxmlformats.org/drawingml/2006/main"/>
+          <a:lstStyle xmlns:a="http://schemas.openxmlformats.org/drawingml/2006/main"/>
+          <a:p xmlns:a="http://schemas.openxmlformats.org/drawingml/2006/main"/>
         </p:txBody>
       </p:sp>
     </p:spTree>
   </p:cSld>
   <p:clrMapOvr>
-    <a:masterClrMapping/>
+    <a:masterClrMapping xmlns:a="http://schemas.openxmlformats.org/drawingml/2006/main"/>
   </p:clrMapOvr>
 </p:notes>
 </file>
 
 <file path=ppt/notesSlides/notesSlide2.xml><?xml version="1.0" encoding="utf-8"?>
-<p:notes xmlns:a="http://schemas.openxmlformats.org/drawingml/2006/main" xmlns:p="http://schemas.openxmlformats.org/presentationml/2006/main">
+<p:notes xmlns:p="http://schemas.openxmlformats.org/presentationml/2006/main">
   <p:cSld>
     <p:spTree>
       <p:nvGrpSpPr>
@@ -1507,13 +1508,13 @@
         <p:nvPr/>
       </p:nvGrpSpPr>
       <p:grpSpPr>
-        <a:xfrm/>
+        <a:xfrm xmlns:a="http://schemas.openxmlformats.org/drawingml/2006/main"/>
       </p:grpSpPr>
       <p:sp>
         <p:nvSpPr>
           <p:cNvPr id="2" name="Slide Image Placeholder 1"/>
           <p:cNvSpPr>
-            <a:spLocks noGrp="1"/>
+            <a:spLocks xmlns:a="http://schemas.openxmlformats.org/drawingml/2006/main" noGrp="1"/>
           </p:cNvSpPr>
           <p:nvPr>
             <p:ph type="sldImg" idx="0"/>
@@ -1525,7 +1526,7 @@
         <p:nvSpPr>
           <p:cNvPr id="3" name="Notes Placeholder 2"/>
           <p:cNvSpPr>
-            <a:spLocks noGrp="1"/>
+            <a:spLocks xmlns:a="http://schemas.openxmlformats.org/drawingml/2006/main" noGrp="1"/>
           </p:cNvSpPr>
           <p:nvPr>
             <p:ph type="body" idx="1"/>
@@ -1533,34 +1534,34 @@
         </p:nvSpPr>
         <p:spPr/>
         <p:txBody>
-          <a:bodyPr/>
-          <a:lstStyle/>
-          <a:p>
+          <a:bodyPr xmlns:a="http://schemas.openxmlformats.org/drawingml/2006/main"/>
+          <a:lstStyle xmlns:a="http://schemas.openxmlformats.org/drawingml/2006/main"/>
+          <a:p xmlns:a="http://schemas.openxmlformats.org/drawingml/2006/main">
             <a:r>
               <a:t>Before the details, here is the map of the argument. One claim — existence is coexistence — moves through three parts.</a:t>
             </a:r>
           </a:p>
-          <a:p>
+          <a:p xmlns:a="http://schemas.openxmlformats.org/drawingml/2006/main">
             <a:r>
               <a:t>First: what is real, and how it is ordered. There is an all-pervasive ground and countable units, and two bonds — each unit to the ground, and each unit to the others. The second of those is complementarity, and it is given rather than made: because there are many bounded things in one ground, each stands in definite relation to the rest. Each unit has a definite form, capacities, a way of participating, and an inseparable innateness, and these show up in mutual relations across four orders of nature. Because no unit can be separated from the ground, existence itself neither begins nor ends.</a:t>
             </a:r>
           </a:p>
-          <a:p>
+          <a:p xmlns:a="http://schemas.openxmlformats.org/drawingml/2006/main">
             <a:r>
               <a:t>Second: how development proceeds along two lines that must not be collapsed. And the reason it proceeds at all — the drive is to fulfil that complementarity. One line builds larger configurations — particles, molecules, cells, bodies — but never exceeds the order of the things it is built from. The other is development in an atom that can become a complete sentient unit. Across both, activity is effort, motion, and result together — not three separate steps.</a:t>
             </a:r>
           </a:p>
-          <a:p>
-            <a:r>
-              <a:t>Third: how sentient living becomes awakened conduct — the human as a joint form of body and sentient unit, the faculties of that sentient unit, the four harmonies it can reach, and why the higher three are reached only through action actually performed: evaluation, realisation, and participation in humane order.</a:t>
-            </a:r>
-          </a:p>
-          <a:p>
+          <a:p xmlns:a="http://schemas.openxmlformats.org/drawingml/2006/main">
+            <a:r>
+              <a:t>Third: how sentient living becomes awakened conduct. We examine the human joint form, jeevan's faculties and harmonies, evaluation, realisation, and the expression of understanding through humane conduct.</a:t>
+            </a:r>
+          </a:p>
+          <a:p xmlns:a="http://schemas.openxmlformats.org/drawingml/2006/main">
             <a:r>
               <a:t>Please keep one distinction early: the body line and the sentient-unit line meet in animal and human living, but they are not the same process. That blocks the most common confusion — treating the body as the producer of the knower.</a:t>
             </a:r>
           </a:p>
-          <a:p>
+          <a:p xmlns:a="http://schemas.openxmlformats.org/drawingml/2006/main">
             <a:r>
               <a:t>Each movement is marked in the small line at the top of its opening slide, so you can always tell where we are.</a:t>
             </a:r>
@@ -1571,7 +1572,7 @@
         <p:nvSpPr>
           <p:cNvPr id="4" name="Slide Number Placeholder 3"/>
           <p:cNvSpPr>
-            <a:spLocks noGrp="1"/>
+            <a:spLocks xmlns:a="http://schemas.openxmlformats.org/drawingml/2006/main" noGrp="1"/>
           </p:cNvSpPr>
           <p:nvPr>
             <p:ph type="sldNum" idx="5"/>
@@ -1579,21 +1580,21 @@
         </p:nvSpPr>
         <p:spPr/>
         <p:txBody>
-          <a:bodyPr/>
-          <a:lstStyle/>
-          <a:p/>
+          <a:bodyPr xmlns:a="http://schemas.openxmlformats.org/drawingml/2006/main"/>
+          <a:lstStyle xmlns:a="http://schemas.openxmlformats.org/drawingml/2006/main"/>
+          <a:p xmlns:a="http://schemas.openxmlformats.org/drawingml/2006/main"/>
         </p:txBody>
       </p:sp>
     </p:spTree>
   </p:cSld>
   <p:clrMapOvr>
-    <a:masterClrMapping/>
+    <a:masterClrMapping xmlns:a="http://schemas.openxmlformats.org/drawingml/2006/main"/>
   </p:clrMapOvr>
 </p:notes>
 </file>
 
 <file path=ppt/notesSlides/notesSlide20.xml><?xml version="1.0" encoding="utf-8"?>
-<p:notes xmlns:a="http://schemas.openxmlformats.org/drawingml/2006/main" xmlns:p="http://schemas.openxmlformats.org/presentationml/2006/main">
+<p:notes xmlns:p="http://schemas.openxmlformats.org/presentationml/2006/main">
   <p:cSld>
     <p:spTree>
       <p:nvGrpSpPr>
@@ -1602,13 +1603,13 @@
         <p:nvPr/>
       </p:nvGrpSpPr>
       <p:grpSpPr>
-        <a:xfrm/>
+        <a:xfrm xmlns:a="http://schemas.openxmlformats.org/drawingml/2006/main"/>
       </p:grpSpPr>
       <p:sp>
         <p:nvSpPr>
           <p:cNvPr id="2" name="Slide Image Placeholder 1"/>
           <p:cNvSpPr>
-            <a:spLocks noGrp="1"/>
+            <a:spLocks xmlns:a="http://schemas.openxmlformats.org/drawingml/2006/main" noGrp="1"/>
           </p:cNvSpPr>
           <p:nvPr>
             <p:ph type="sldImg" idx="0"/>
@@ -1620,7 +1621,7 @@
         <p:nvSpPr>
           <p:cNvPr id="3" name="Notes Placeholder 2"/>
           <p:cNvSpPr>
-            <a:spLocks noGrp="1"/>
+            <a:spLocks xmlns:a="http://schemas.openxmlformats.org/drawingml/2006/main" noGrp="1"/>
           </p:cNvSpPr>
           <p:nvPr>
             <p:ph type="body" idx="1"/>
@@ -1628,44 +1629,44 @@
         </p:nvSpPr>
         <p:spPr/>
         <p:txBody>
-          <a:bodyPr/>
-          <a:lstStyle/>
-          <a:p>
+          <a:bodyPr xmlns:a="http://schemas.openxmlformats.org/drawingml/2006/main"/>
+          <a:lstStyle xmlns:a="http://schemas.openxmlformats.org/drawingml/2006/main"/>
+          <a:p xmlns:a="http://schemas.openxmlformats.org/drawingml/2006/main">
             <a:r>
               <a:t>Every sentient unit bears the same five faculties and the same ten activities. What differs is the medium and what the unit does with it.</a:t>
             </a:r>
           </a:p>
-          <a:p>
-            <a:r>
-              <a:t>Take the animal case first, because it sets up the human one. An animal *jeevan* is complete — it has all five faculties. But its bodily medium is limited, so its activity remains within sensory satisfaction under species-conformance, and it reaches the first harmony and stops. Peace, contentment, and bliss are not failures on its part; they are simply not available through that body.</a:t>
-            </a:r>
-          </a:p>
-          <a:p>
+          <a:p xmlns:a="http://schemas.openxmlformats.org/drawingml/2006/main">
+            <a:r>
+              <a:t>Take the animal case first. An animal jeevan has all five faculties, but its bodily medium limits their expression. Its dharma is hope to live, expressed through sensory selection under species-conformance. The human medium supports the full range of activity and the possibility of awakening.</a:t>
+            </a:r>
+          </a:p>
+          <a:p xmlns:a="http://schemas.openxmlformats.org/drawingml/2006/main">
             <a:r>
               <a:t>Now the human case. The human body *can* express all ten activities — that is what the developed nervous system is for. And yet, by default, human *jeevan* goes on evaluating by exactly the same sensory criteria the animal used. The equipment changed; the habit did not. That is the fork this slide names, and it answers one practical question — what makes me happy?</a:t>
             </a:r>
           </a:p>
-          <a:p>
+          <a:p xmlns:a="http://schemas.openxmlformats.org/drawingml/2006/main">
             <a:r>
               <a:t>Under confusion, the body is mistaken for the self. Selection and evaluation organise around pleasure, health, and profit.</a:t>
             </a:r>
           </a:p>
-          <a:p>
+          <a:p xmlns:a="http://schemas.openxmlformats.org/drawingml/2006/main">
             <a:r>
               <a:t>Under awakening, clear knowing regulates sensory life. Knowing and believing guide recognition and fulfilment toward justice, innateness, truth, and coexistence.</a:t>
             </a:r>
           </a:p>
-          <a:p>
+          <a:p xmlns:a="http://schemas.openxmlformats.org/drawingml/2006/main">
             <a:r>
               <a:t>No faculty is missing, and sensation is not rejected. Confusion lets sensory criteria rule; awakening balances sensation with understanding, so understanding guides conduct.</a:t>
             </a:r>
           </a:p>
-          <a:p>
+          <a:p xmlns:a="http://schemas.openxmlformats.org/drawingml/2006/main">
             <a:r>
               <a:t>When the same fork is resolved in a person and sustained across a tradition, it shows as resolution, prosperity, fearlessness, and coexistence.</a:t>
             </a:r>
           </a:p>
-          <a:p>
+          <a:p xmlns:a="http://schemas.openxmlformats.org/drawingml/2006/main">
             <a:r>
               <a:t>And one thing awakening is *not*: it is not preferring the right things, and it is not having the right insight. The next slide is about why.</a:t>
             </a:r>
@@ -1676,7 +1677,7 @@
         <p:nvSpPr>
           <p:cNvPr id="4" name="Slide Number Placeholder 3"/>
           <p:cNvSpPr>
-            <a:spLocks noGrp="1"/>
+            <a:spLocks xmlns:a="http://schemas.openxmlformats.org/drawingml/2006/main" noGrp="1"/>
           </p:cNvSpPr>
           <p:nvPr>
             <p:ph type="sldNum" idx="5"/>
@@ -1684,21 +1685,21 @@
         </p:nvSpPr>
         <p:spPr/>
         <p:txBody>
-          <a:bodyPr/>
-          <a:lstStyle/>
-          <a:p/>
+          <a:bodyPr xmlns:a="http://schemas.openxmlformats.org/drawingml/2006/main"/>
+          <a:lstStyle xmlns:a="http://schemas.openxmlformats.org/drawingml/2006/main"/>
+          <a:p xmlns:a="http://schemas.openxmlformats.org/drawingml/2006/main"/>
         </p:txBody>
       </p:sp>
     </p:spTree>
   </p:cSld>
   <p:clrMapOvr>
-    <a:masterClrMapping/>
+    <a:masterClrMapping xmlns:a="http://schemas.openxmlformats.org/drawingml/2006/main"/>
   </p:clrMapOvr>
 </p:notes>
 </file>
 
 <file path=ppt/notesSlides/notesSlide21.xml><?xml version="1.0" encoding="utf-8"?>
-<p:notes xmlns:a="http://schemas.openxmlformats.org/drawingml/2006/main" xmlns:p="http://schemas.openxmlformats.org/presentationml/2006/main">
+<p:notes xmlns:p="http://schemas.openxmlformats.org/presentationml/2006/main">
   <p:cSld>
     <p:spTree>
       <p:nvGrpSpPr>
@@ -1707,13 +1708,13 @@
         <p:nvPr/>
       </p:nvGrpSpPr>
       <p:grpSpPr>
-        <a:xfrm/>
+        <a:xfrm xmlns:a="http://schemas.openxmlformats.org/drawingml/2006/main"/>
       </p:grpSpPr>
       <p:sp>
         <p:nvSpPr>
           <p:cNvPr id="2" name="Slide Image Placeholder 1"/>
           <p:cNvSpPr>
-            <a:spLocks noGrp="1"/>
+            <a:spLocks xmlns:a="http://schemas.openxmlformats.org/drawingml/2006/main" noGrp="1"/>
           </p:cNvSpPr>
           <p:nvPr>
             <p:ph type="sldImg" idx="0"/>
@@ -1725,7 +1726,7 @@
         <p:nvSpPr>
           <p:cNvPr id="3" name="Notes Placeholder 2"/>
           <p:cNvSpPr>
-            <a:spLocks noGrp="1"/>
+            <a:spLocks xmlns:a="http://schemas.openxmlformats.org/drawingml/2006/main" noGrp="1"/>
           </p:cNvSpPr>
           <p:nvPr>
             <p:ph type="body" idx="1"/>
@@ -1733,39 +1734,39 @@
         </p:nvSpPr>
         <p:spPr/>
         <p:txBody>
-          <a:bodyPr/>
-          <a:lstStyle/>
-          <a:p>
+          <a:bodyPr xmlns:a="http://schemas.openxmlformats.org/drawingml/2006/main"/>
+          <a:lstStyle xmlns:a="http://schemas.openxmlformats.org/drawingml/2006/main"/>
+          <a:p xmlns:a="http://schemas.openxmlformats.org/drawingml/2006/main">
             <a:r>
               <a:t>So: peace, contentment, bliss. How does a person actually get them?</a:t>
             </a:r>
           </a:p>
-          <a:p>
+          <a:p xmlns:a="http://schemas.openxmlformats.org/drawingml/2006/main">
             <a:r>
               <a:t>Let me put the shape of the answer first, because it is the hinge of this whole movement. Below the human order, fulfilment is definite — it needs no deciding. A molecule does not choose. A plant does not deliberate. Even the animal, which has a complete sentient unit, is carried by species-conformance to the fulfilment available through its body. Nothing there has to be *worked out*.</a:t>
             </a:r>
           </a:p>
-          <a:p>
-            <a:r>
-              <a:t>The human order is the one place where complementarity has to be fulfilled *knowingly* — where the higher harmonies are on offer and nothing delivers them automatically. And here is the part people resist: understanding does not deliver them either. Study is necessary. It is not sufficient. You can recognise the higher faculties, grasp the whole account, hold it clearly — and still not have peace, contentment, or bliss, because those are harmonies of the unit in *activity*, and there is no activity in knowing about activity.</a:t>
-            </a:r>
-          </a:p>
-          <a:p>
-            <a:r>
-              <a:t>What delivers them is performed action — specifically, action that fulfils relationships. Recognise the higher faculties; study until you understand; then act so that what you owe in each relationship is actually fulfilled. That third step is not optional decoration on the first two. It is where the harmony happens.</a:t>
-            </a:r>
-          </a:p>
-          <a:p>
+          <a:p xmlns:a="http://schemas.openxmlformats.org/drawingml/2006/main">
+            <a:r>
+              <a:t>The human order is the one place where complementarity has to be fulfilled *knowingly* — where the higher harmonies are on offer and nothing delivers them automatically. Study introduces the account; understanding must become coherent activity. Knowing is itself an activity of jeevan, and its authenticity is evidenced in work and behaviour. Book knowledge alone does not establish that completed coherence.</a:t>
+            </a:r>
+          </a:p>
+          <a:p xmlns:a="http://schemas.openxmlformats.org/drawingml/2006/main">
+            <a:r>
+              <a:t>Understanding is evidenced as relationships are fulfilled. We study, practise, evaluate the result, and bring work and behaviour into alignment with what we understand. The harmony within jeevan and its evidence in living belong together.</a:t>
+            </a:r>
+          </a:p>
+          <a:p xmlns:a="http://schemas.openxmlformats.org/drawingml/2006/main">
             <a:r>
               <a:t>That is why the text bothers with the anatomy of action at all. *Kriyā* names activity throughout nature; it is not thereby *karma*. Human activity joined to aspiration has five limbs: doer, cause, objective, result, and effect. Effect means the act's reach or consequence — not a separate ledger of destiny. Desire is the aspiration; karma is the doing, activity together with aspiration; result is the fruit. And the text's own criterion: desire, doing, and result must *balance* for the desire to be truly accomplished. Wanting without doing is not accomplishment. Doing that misses the result is not accomplishment either.</a:t>
             </a:r>
           </a:p>
-          <a:p>
-            <a:r>
-              <a:t>So: understanding alone changes nothing. It is the doing that yields the fruit. Book knowledge is half the work — the other half is conduct that fulfils relationships.</a:t>
-            </a:r>
-          </a:p>
-          <a:p>
+          <a:p xmlns:a="http://schemas.openxmlformats.org/drawingml/2006/main">
+            <a:r>
+              <a:t>The intended result is accomplished through doing. Understanding guides that doing, and its authenticity is evidenced in conduct that fulfils relationships.</a:t>
+            </a:r>
+          </a:p>
+          <a:p xmlns:a="http://schemas.openxmlformats.org/drawingml/2006/main">
             <a:r>
               <a:t>Hold this beside the earlier triad of effort, motion, and result. This is the desire-laden human framing of the same activity ontology. The next slides show how desire and doing get reorganised under justice, innateness, and truth.</a:t>
             </a:r>
@@ -1776,7 +1777,7 @@
         <p:nvSpPr>
           <p:cNvPr id="4" name="Slide Number Placeholder 3"/>
           <p:cNvSpPr>
-            <a:spLocks noGrp="1"/>
+            <a:spLocks xmlns:a="http://schemas.openxmlformats.org/drawingml/2006/main" noGrp="1"/>
           </p:cNvSpPr>
           <p:nvPr>
             <p:ph type="sldNum" idx="5"/>
@@ -1784,21 +1785,21 @@
         </p:nvSpPr>
         <p:spPr/>
         <p:txBody>
-          <a:bodyPr/>
-          <a:lstStyle/>
-          <a:p/>
+          <a:bodyPr xmlns:a="http://schemas.openxmlformats.org/drawingml/2006/main"/>
+          <a:lstStyle xmlns:a="http://schemas.openxmlformats.org/drawingml/2006/main"/>
+          <a:p xmlns:a="http://schemas.openxmlformats.org/drawingml/2006/main"/>
         </p:txBody>
       </p:sp>
     </p:spTree>
   </p:cSld>
   <p:clrMapOvr>
-    <a:masterClrMapping/>
+    <a:masterClrMapping xmlns:a="http://schemas.openxmlformats.org/drawingml/2006/main"/>
   </p:clrMapOvr>
 </p:notes>
 </file>
 
 <file path=ppt/notesSlides/notesSlide22.xml><?xml version="1.0" encoding="utf-8"?>
-<p:notes xmlns:a="http://schemas.openxmlformats.org/drawingml/2006/main" xmlns:p="http://schemas.openxmlformats.org/presentationml/2006/main">
+<p:notes xmlns:p="http://schemas.openxmlformats.org/presentationml/2006/main">
   <p:cSld>
     <p:spTree>
       <p:nvGrpSpPr>
@@ -1807,13 +1808,13 @@
         <p:nvPr/>
       </p:nvGrpSpPr>
       <p:grpSpPr>
-        <a:xfrm/>
+        <a:xfrm xmlns:a="http://schemas.openxmlformats.org/drawingml/2006/main"/>
       </p:grpSpPr>
       <p:sp>
         <p:nvSpPr>
           <p:cNvPr id="2" name="Slide Image Placeholder 1"/>
           <p:cNvSpPr>
-            <a:spLocks noGrp="1"/>
+            <a:spLocks xmlns:a="http://schemas.openxmlformats.org/drawingml/2006/main" noGrp="1"/>
           </p:cNvSpPr>
           <p:nvPr>
             <p:ph type="sldImg" idx="0"/>
@@ -1825,7 +1826,7 @@
         <p:nvSpPr>
           <p:cNvPr id="3" name="Notes Placeholder 2"/>
           <p:cNvSpPr>
-            <a:spLocks noGrp="1"/>
+            <a:spLocks xmlns:a="http://schemas.openxmlformats.org/drawingml/2006/main" noGrp="1"/>
           </p:cNvSpPr>
           <p:nvPr>
             <p:ph type="body" idx="1"/>
@@ -1833,29 +1834,29 @@
         </p:nvSpPr>
         <p:spPr/>
         <p:txBody>
-          <a:bodyPr/>
-          <a:lstStyle/>
-          <a:p>
+          <a:bodyPr xmlns:a="http://schemas.openxmlformats.org/drawingml/2006/main"/>
+          <a:lstStyle xmlns:a="http://schemas.openxmlformats.org/drawingml/2006/main"/>
+          <a:p xmlns:a="http://schemas.openxmlformats.org/drawingml/2006/main">
             <a:r>
               <a:t>This slide explains the name Madhyasth — and it cashes a cheque I wrote back on slide 6.</a:t>
             </a:r>
           </a:p>
-          <a:p>
+          <a:p xmlns:a="http://schemas.openxmlformats.org/drawingml/2006/main">
             <a:r>
               <a:t>Remember the third of the three terms: surrounded. Regulation is what surroundedness establishes. Because the formless reality stands between units, each is held at a definite distance from the others. Orderliness is self-regulation inherent in saturated units — not dispensed by a cosmic governor. That mediative regulation, which regulates and conserves every unit, gives the darshan its name.</a:t>
             </a:r>
           </a:p>
-          <a:p>
+          <a:p xmlns:a="http://schemas.openxmlformats.org/drawingml/2006/main">
             <a:r>
               <a:t>The account works at three levels, and it is worth naming them: Omnipresence is the sustaining condition; within an atom, the nucleus is the mediative organisation that regulates generative and degenerative activity and conserves relative powers; and at larger scales, order-specific conformance is the definite conduct you can actually observe.</a:t>
             </a:r>
           </a:p>
-          <a:p>
+          <a:p xmlns:a="http://schemas.openxmlformats.org/drawingml/2006/main">
             <a:r>
               <a:t>Conformance has order-specific modes. Material: structural or result conformance. Bio: seed-conformance. Animal: species-conformance, inherited from gestation. Human: *sanskar*-conformance — achieved through knowing, believing, recognising, and fulfilling, rather than inherited. That last one is why education and tradition matter so much here: they can reproduce confusion just as easily as they can support awakening.</a:t>
             </a:r>
           </a:p>
-          <a:p>
+          <a:p xmlns:a="http://schemas.openxmlformats.org/drawingml/2006/main">
             <a:r>
               <a:t>Material, bio, and animal regulation is definite. An animal body’s expressive limits do not introduce evaluative error. In human living, the sentient unit can judge wrongly when it mistakes the body for the self. Awakening aligns evaluation with coexistence. That is why justice becomes necessary at the human order.</a:t>
             </a:r>
@@ -1866,7 +1867,7 @@
         <p:nvSpPr>
           <p:cNvPr id="4" name="Slide Number Placeholder 3"/>
           <p:cNvSpPr>
-            <a:spLocks noGrp="1"/>
+            <a:spLocks xmlns:a="http://schemas.openxmlformats.org/drawingml/2006/main" noGrp="1"/>
           </p:cNvSpPr>
           <p:nvPr>
             <p:ph type="sldNum" idx="5"/>
@@ -1874,21 +1875,21 @@
         </p:nvSpPr>
         <p:spPr/>
         <p:txBody>
-          <a:bodyPr/>
-          <a:lstStyle/>
-          <a:p/>
+          <a:bodyPr xmlns:a="http://schemas.openxmlformats.org/drawingml/2006/main"/>
+          <a:lstStyle xmlns:a="http://schemas.openxmlformats.org/drawingml/2006/main"/>
+          <a:p xmlns:a="http://schemas.openxmlformats.org/drawingml/2006/main"/>
         </p:txBody>
       </p:sp>
     </p:spTree>
   </p:cSld>
   <p:clrMapOvr>
-    <a:masterClrMapping/>
+    <a:masterClrMapping xmlns:a="http://schemas.openxmlformats.org/drawingml/2006/main"/>
   </p:clrMapOvr>
 </p:notes>
 </file>
 
 <file path=ppt/notesSlides/notesSlide23.xml><?xml version="1.0" encoding="utf-8"?>
-<p:notes xmlns:a="http://schemas.openxmlformats.org/drawingml/2006/main" xmlns:p="http://schemas.openxmlformats.org/presentationml/2006/main">
+<p:notes xmlns:p="http://schemas.openxmlformats.org/presentationml/2006/main">
   <p:cSld>
     <p:spTree>
       <p:nvGrpSpPr>
@@ -1897,13 +1898,13 @@
         <p:nvPr/>
       </p:nvGrpSpPr>
       <p:grpSpPr>
-        <a:xfrm/>
+        <a:xfrm xmlns:a="http://schemas.openxmlformats.org/drawingml/2006/main"/>
       </p:grpSpPr>
       <p:sp>
         <p:nvSpPr>
           <p:cNvPr id="2" name="Slide Image Placeholder 1"/>
           <p:cNvSpPr>
-            <a:spLocks noGrp="1"/>
+            <a:spLocks xmlns:a="http://schemas.openxmlformats.org/drawingml/2006/main" noGrp="1"/>
           </p:cNvSpPr>
           <p:nvPr>
             <p:ph type="sldImg" idx="0"/>
@@ -1915,7 +1916,7 @@
         <p:nvSpPr>
           <p:cNvPr id="3" name="Notes Placeholder 2"/>
           <p:cNvSpPr>
-            <a:spLocks noGrp="1"/>
+            <a:spLocks xmlns:a="http://schemas.openxmlformats.org/drawingml/2006/main" noGrp="1"/>
           </p:cNvSpPr>
           <p:nvPr>
             <p:ph type="body" idx="1"/>
@@ -1923,29 +1924,29 @@
         </p:nvSpPr>
         <p:spPr/>
         <p:txBody>
-          <a:bodyPr/>
-          <a:lstStyle/>
-          <a:p>
+          <a:bodyPr xmlns:a="http://schemas.openxmlformats.org/drawingml/2006/main"/>
+          <a:lstStyle xmlns:a="http://schemas.openxmlformats.org/drawingml/2006/main"/>
+          <a:p xmlns:a="http://schemas.openxmlformats.org/drawingml/2006/main">
             <a:r>
               <a:t>Human evaluation widens across six perspectives: pleasant, healthy, profit, justice, innateness or dharma as an evaluative lens, and truth. They move from sensation, body, and gain to relationship, orderliness, and coexistence.</a:t>
             </a:r>
           </a:p>
-          <a:p>
+          <a:p xmlns:a="http://schemas.openxmlformats.org/drawingml/2006/main">
             <a:r>
               <a:t>Justice is both one of the six and the principle of fulfilled relationship. Dharma here means fitting the wider pattern — discipline in thought, not only outer conduct. Truth means alignment with the whole, grounded in realisation, not in liking or gain.</a:t>
             </a:r>
           </a:p>
-          <a:p>
+          <a:p xmlns:a="http://schemas.openxmlformats.org/drawingml/2006/main">
             <a:r>
               <a:t>The graduated chain is: rule itself is justice; justice itself is dharma; dharma itself is truth; truth itself is coexistence.</a:t>
             </a:r>
           </a:p>
-          <a:p>
+          <a:p xmlns:a="http://schemas.openxmlformats.org/drawingml/2006/main">
             <a:r>
               <a:t>Pleasure, health, and profit are not condemned. They remain legitimate in their domain. Awakening changes the organising refuge: they are subordinated under justice, dharma, and truth — not abandoned.</a:t>
             </a:r>
           </a:p>
-          <a:p>
+          <a:p xmlns:a="http://schemas.openxmlformats.org/drawingml/2006/main">
             <a:r>
               <a:t>Keep this distinct from unit-innateness earlier. One word, two levels: what a unit cannot be separated from, versus how we evaluate thought and resolution.</a:t>
             </a:r>
@@ -1956,7 +1957,7 @@
         <p:nvSpPr>
           <p:cNvPr id="4" name="Slide Number Placeholder 3"/>
           <p:cNvSpPr>
-            <a:spLocks noGrp="1"/>
+            <a:spLocks xmlns:a="http://schemas.openxmlformats.org/drawingml/2006/main" noGrp="1"/>
           </p:cNvSpPr>
           <p:nvPr>
             <p:ph type="sldNum" idx="5"/>
@@ -1964,21 +1965,21 @@
         </p:nvSpPr>
         <p:spPr/>
         <p:txBody>
-          <a:bodyPr/>
-          <a:lstStyle/>
-          <a:p/>
+          <a:bodyPr xmlns:a="http://schemas.openxmlformats.org/drawingml/2006/main"/>
+          <a:lstStyle xmlns:a="http://schemas.openxmlformats.org/drawingml/2006/main"/>
+          <a:p xmlns:a="http://schemas.openxmlformats.org/drawingml/2006/main"/>
         </p:txBody>
       </p:sp>
     </p:spTree>
   </p:cSld>
   <p:clrMapOvr>
-    <a:masterClrMapping/>
+    <a:masterClrMapping xmlns:a="http://schemas.openxmlformats.org/drawingml/2006/main"/>
   </p:clrMapOvr>
 </p:notes>
 </file>
 
 <file path=ppt/notesSlides/notesSlide24.xml><?xml version="1.0" encoding="utf-8"?>
-<p:notes xmlns:a="http://schemas.openxmlformats.org/drawingml/2006/main" xmlns:p="http://schemas.openxmlformats.org/presentationml/2006/main">
+<p:notes xmlns:p="http://schemas.openxmlformats.org/presentationml/2006/main">
   <p:cSld>
     <p:spTree>
       <p:nvGrpSpPr>
@@ -1987,13 +1988,13 @@
         <p:nvPr/>
       </p:nvGrpSpPr>
       <p:grpSpPr>
-        <a:xfrm/>
+        <a:xfrm xmlns:a="http://schemas.openxmlformats.org/drawingml/2006/main"/>
       </p:grpSpPr>
       <p:sp>
         <p:nvSpPr>
           <p:cNvPr id="2" name="Slide Image Placeholder 1"/>
           <p:cNvSpPr>
-            <a:spLocks noGrp="1"/>
+            <a:spLocks xmlns:a="http://schemas.openxmlformats.org/drawingml/2006/main" noGrp="1"/>
           </p:cNvSpPr>
           <p:nvPr>
             <p:ph type="sldImg" idx="0"/>
@@ -2005,7 +2006,7 @@
         <p:nvSpPr>
           <p:cNvPr id="3" name="Notes Placeholder 2"/>
           <p:cNvSpPr>
-            <a:spLocks noGrp="1"/>
+            <a:spLocks xmlns:a="http://schemas.openxmlformats.org/drawingml/2006/main" noGrp="1"/>
           </p:cNvSpPr>
           <p:nvPr>
             <p:ph type="body" idx="1"/>
@@ -2013,26 +2014,26 @@
         </p:nvSpPr>
         <p:spPr/>
         <p:txBody>
-          <a:bodyPr/>
-          <a:lstStyle/>
-          <a:p>
+          <a:bodyPr xmlns:a="http://schemas.openxmlformats.org/drawingml/2006/main"/>
+          <a:lstStyle xmlns:a="http://schemas.openxmlformats.org/drawingml/2006/main"/>
+          <a:p xmlns:a="http://schemas.openxmlformats.org/drawingml/2006/main">
             <a:r>
               <a:t>We turn now to knowing — how understanding widens, and how it happens in the sentient unit.</a:t>
             </a:r>
           </a:p>
-          <a:p>
+          <a:p xmlns:a="http://schemas.openxmlformats.org/drawingml/2006/main">
             <a:r>
               <a:t>On the left: what must be understood as mutual context widens. Form is real structure encountered in mutual facing. Capacities show as effects between units. Essential nature needs state, order, and context. Innateness is evidenced in whole-order fulfilment. Relationships are shared expectations weighed by justice, dharma, and truth. At the top is coexistence itself — not another observed detail, but the aim of knowing.</a:t>
             </a:r>
           </a:p>
-          <a:p>
-            <a:r>
-              <a:t>On the right: how knowing happens within the sentient unit. Hope tastes and selects. Thought deliberates. Desire contemplates and directly apprehends. Resolve comprehends and resolves. The core self realises — through truth. When each level is acted in alignment, it is felt as happiness, peace, contentment, and bliss.</a:t>
-            </a:r>
-          </a:p>
-          <a:p>
-            <a:r>
-              <a:t>The ladders meet at the top: coexistence known and lived is felt as bliss. Human error belongs to confused evaluation, not to fuzziness in the reality reflected.</a:t>
+          <a:p xmlns:a="http://schemas.openxmlformats.org/drawingml/2006/main">
+            <a:r>
+              <a:t>On the right: how knowing happens within the sentient unit. Hope tastes and selects. Thought deliberates. Desire contemplates and directly apprehends. Resolve comprehends and resolves. The core self realises through truth. Happiness, peace, contentment, and bliss name harmonies between paired faculties. Realisation at the core is named ultimate bliss.</a:t>
+            </a:r>
+          </a:p>
+          <a:p xmlns:a="http://schemas.openxmlformats.org/drawingml/2006/main">
+            <a:r>
+              <a:t>Every unit is already manifest with all four aspects. The left-hand steps describe widening human understanding of that unit; they do not describe successive additions to its image. Inward reflection deepens knowing, and projection makes understanding evident through conduct. Bliss names the harmony of buddhi and atma; coexistence realised at atma is ultimate bliss.</a:t>
             </a:r>
           </a:p>
         </p:txBody>
@@ -2041,7 +2042,7 @@
         <p:nvSpPr>
           <p:cNvPr id="4" name="Slide Number Placeholder 3"/>
           <p:cNvSpPr>
-            <a:spLocks noGrp="1"/>
+            <a:spLocks xmlns:a="http://schemas.openxmlformats.org/drawingml/2006/main" noGrp="1"/>
           </p:cNvSpPr>
           <p:nvPr>
             <p:ph type="sldNum" idx="5"/>
@@ -2049,21 +2050,21 @@
         </p:nvSpPr>
         <p:spPr/>
         <p:txBody>
-          <a:bodyPr/>
-          <a:lstStyle/>
-          <a:p/>
+          <a:bodyPr xmlns:a="http://schemas.openxmlformats.org/drawingml/2006/main"/>
+          <a:lstStyle xmlns:a="http://schemas.openxmlformats.org/drawingml/2006/main"/>
+          <a:p xmlns:a="http://schemas.openxmlformats.org/drawingml/2006/main"/>
         </p:txBody>
       </p:sp>
     </p:spTree>
   </p:cSld>
   <p:clrMapOvr>
-    <a:masterClrMapping/>
+    <a:masterClrMapping xmlns:a="http://schemas.openxmlformats.org/drawingml/2006/main"/>
   </p:clrMapOvr>
 </p:notes>
 </file>
 
 <file path=ppt/notesSlides/notesSlide25.xml><?xml version="1.0" encoding="utf-8"?>
-<p:notes xmlns:a="http://schemas.openxmlformats.org/drawingml/2006/main" xmlns:p="http://schemas.openxmlformats.org/presentationml/2006/main">
+<p:notes xmlns:p="http://schemas.openxmlformats.org/presentationml/2006/main">
   <p:cSld>
     <p:spTree>
       <p:nvGrpSpPr>
@@ -2072,13 +2073,13 @@
         <p:nvPr/>
       </p:nvGrpSpPr>
       <p:grpSpPr>
-        <a:xfrm/>
+        <a:xfrm xmlns:a="http://schemas.openxmlformats.org/drawingml/2006/main"/>
       </p:grpSpPr>
       <p:sp>
         <p:nvSpPr>
           <p:cNvPr id="2" name="Slide Image Placeholder 1"/>
           <p:cNvSpPr>
-            <a:spLocks noGrp="1"/>
+            <a:spLocks xmlns:a="http://schemas.openxmlformats.org/drawingml/2006/main" noGrp="1"/>
           </p:cNvSpPr>
           <p:nvPr>
             <p:ph type="sldImg" idx="0"/>
@@ -2090,7 +2091,7 @@
         <p:nvSpPr>
           <p:cNvPr id="3" name="Notes Placeholder 2"/>
           <p:cNvSpPr>
-            <a:spLocks noGrp="1"/>
+            <a:spLocks xmlns:a="http://schemas.openxmlformats.org/drawingml/2006/main" noGrp="1"/>
           </p:cNvSpPr>
           <p:nvPr>
             <p:ph type="body" idx="1"/>
@@ -2098,24 +2099,24 @@
         </p:nvSpPr>
         <p:spPr/>
         <p:txBody>
-          <a:bodyPr/>
-          <a:lstStyle/>
-          <a:p>
+          <a:bodyPr xmlns:a="http://schemas.openxmlformats.org/drawingml/2006/main"/>
+          <a:lstStyle xmlns:a="http://schemas.openxmlformats.org/drawingml/2006/main"/>
+          <a:p xmlns:a="http://schemas.openxmlformats.org/drawingml/2006/main">
             <a:r>
               <a:t>This is where the developmental drive comes to rest: realisation in coexistence.</a:t>
             </a:r>
           </a:p>
-          <a:p>
+          <a:p xmlns:a="http://schemas.openxmlformats.org/drawingml/2006/main">
             <a:r>
               <a:t>The drive settles when relationships across nature are fulfilled and made evident — not because the ground becomes a knower, but because the awakened sentient unit realises and evidences the coexistence in which it has always existed.</a:t>
             </a:r>
           </a:p>
-          <a:p>
-            <a:r>
-              <a:t>Realisation is bliss. Truth itself is abundance — coexistence; realisation of abundance is bliss; bliss is the living of the sentient unit. What is realised is the ground the unit was always saturated in.</a:t>
-            </a:r>
-          </a:p>
-          <a:p>
+          <a:p xmlns:a="http://schemas.openxmlformats.org/drawingml/2006/main">
+            <a:r>
+              <a:t>Realisation at atma is named ultimate bliss. Bliss names the harmony of buddhi and atma. What is known is existence as coexistence: nature saturated in Omnipresence. Understanding becomes evident as authenticity in work, behaviour, and participation. The next slide examines how it is presented, communicated, and expressed.</a:t>
+            </a:r>
+          </a:p>
+          <a:p xmlns:a="http://schemas.openxmlformats.org/drawingml/2006/main">
             <a:r>
               <a:t>Three roles stay distinct: the sentient unit remains the knower; existence as coexistence remains the known; knowledge becomes evident as authentic conduct. They become coherent without becoming identical. The individual knower is not dissolved into a single universal Self.</a:t>
             </a:r>
@@ -2126,7 +2127,7 @@
         <p:nvSpPr>
           <p:cNvPr id="4" name="Slide Number Placeholder 3"/>
           <p:cNvSpPr>
-            <a:spLocks noGrp="1"/>
+            <a:spLocks xmlns:a="http://schemas.openxmlformats.org/drawingml/2006/main" noGrp="1"/>
           </p:cNvSpPr>
           <p:nvPr>
             <p:ph type="sldNum" idx="5"/>
@@ -2134,21 +2135,21 @@
         </p:nvSpPr>
         <p:spPr/>
         <p:txBody>
-          <a:bodyPr/>
-          <a:lstStyle/>
-          <a:p/>
+          <a:bodyPr xmlns:a="http://schemas.openxmlformats.org/drawingml/2006/main"/>
+          <a:lstStyle xmlns:a="http://schemas.openxmlformats.org/drawingml/2006/main"/>
+          <a:p xmlns:a="http://schemas.openxmlformats.org/drawingml/2006/main"/>
         </p:txBody>
       </p:sp>
     </p:spTree>
   </p:cSld>
   <p:clrMapOvr>
-    <a:masterClrMapping/>
+    <a:masterClrMapping xmlns:a="http://schemas.openxmlformats.org/drawingml/2006/main"/>
   </p:clrMapOvr>
 </p:notes>
 </file>
 
 <file path=ppt/notesSlides/notesSlide26.xml><?xml version="1.0" encoding="utf-8"?>
-<p:notes xmlns:a="http://schemas.openxmlformats.org/drawingml/2006/main" xmlns:p="http://schemas.openxmlformats.org/presentationml/2006/main">
+<p:notes xmlns:p="http://schemas.openxmlformats.org/presentationml/2006/main">
   <p:cSld>
     <p:spTree>
       <p:nvGrpSpPr>
@@ -2157,13 +2158,13 @@
         <p:nvPr/>
       </p:nvGrpSpPr>
       <p:grpSpPr>
-        <a:xfrm/>
+        <a:xfrm xmlns:a="http://schemas.openxmlformats.org/drawingml/2006/main"/>
       </p:grpSpPr>
       <p:sp>
         <p:nvSpPr>
           <p:cNvPr id="2" name="Slide Image Placeholder 1"/>
           <p:cNvSpPr>
-            <a:spLocks noGrp="1"/>
+            <a:spLocks xmlns:a="http://schemas.openxmlformats.org/drawingml/2006/main" noGrp="1"/>
           </p:cNvSpPr>
           <p:nvPr>
             <p:ph type="sldImg" idx="0"/>
@@ -2175,7 +2176,7 @@
         <p:nvSpPr>
           <p:cNvPr id="3" name="Notes Placeholder 2"/>
           <p:cNvSpPr>
-            <a:spLocks noGrp="1"/>
+            <a:spLocks xmlns:a="http://schemas.openxmlformats.org/drawingml/2006/main" noGrp="1"/>
           </p:cNvSpPr>
           <p:nvPr>
             <p:ph type="body" idx="1"/>
@@ -2183,36 +2184,36 @@
         </p:nvSpPr>
         <p:spPr/>
         <p:txBody>
-          <a:bodyPr/>
-          <a:lstStyle/>
-          <a:p>
-            <a:r>
-              <a:t>The drive comes to rest in awakened human beings — effort settled, understanding proven in daily conduct, and carried as a tradition.</a:t>
-            </a:r>
-          </a:p>
-          <a:p>
-            <a:r>
-              <a:t>Effort settled in realisation is T2. Understanding proven in conduct is T3.</a:t>
-            </a:r>
-          </a:p>
-          <a:p>
-            <a:r>
-              <a:t>Four goals at four levels: resolution in every person; prosperity in every family; fearlessness — trust — in society; coexistence with all of nature.</a:t>
-            </a:r>
-          </a:p>
-          <a:p>
-            <a:r>
-              <a:t>Five dimensions of continuity carry the tradition: education and formative culture; justice and preservation; health and restraint; production and work; exchange and storage.</a:t>
-            </a:r>
-          </a:p>
-          <a:p>
-            <a:r>
-              <a:t>And here is where the other half of the composition slide returns. Families and societies are not a further compositional tier — you cannot get a humane society by stacking bodies the way you stack molecules. They are relational achievements: they persist humanely while relationships are recognised, values fulfilled, evaluation completed, and mutual satisfaction achieved. Fear, force, or extraction can hold a group together for a while; on this account they do not make it an orderly society.</a:t>
-            </a:r>
-          </a:p>
-          <a:p>
-            <a:r>
-              <a:t>This is not an ideal bolted onto matter. On this account, the progression is designed to arrive here. Nature saturated in Omnipresence is bound for development until realisation. An awakened human tradition is what that progression delivers.</a:t>
+          <a:bodyPr xmlns:a="http://schemas.openxmlformats.org/drawingml/2006/main"/>
+          <a:lstStyle xmlns:a="http://schemas.openxmlformats.org/drawingml/2006/main"/>
+          <a:p xmlns:a="http://schemas.openxmlformats.org/drawingml/2006/main">
+            <a:r>
+              <a:t>How does understanding become available in living? The primary texts use three connected terms: presentation, communication, and expression.</a:t>
+            </a:r>
+          </a:p>
+          <a:p xmlns:a="http://schemas.openxmlformats.org/drawingml/2006/main">
+            <a:r>
+              <a:t>Presentation, prakashan, makes actuality evident through an accomplished and meaningful form. Something understood takes a form another can attend to.</a:t>
+            </a:r>
+          </a:p>
+          <a:p xmlns:a="http://schemas.openxmlformats.org/drawingml/2006/main">
+            <a:r>
+              <a:t>Communication, sampreshana, indicates completeness. The definition names constitutional completeness, activity completeness, and conduct completeness. Communication serves understanding and enabling another to understand. Words direct attention to the activity of units and its inherent meaning, including their properties, essential nature, and dharma.</a:t>
+            </a:r>
+          </a:p>
+          <a:p xmlns:a="http://schemas.openxmlformats.org/drawingml/2006/main">
+            <a:r>
+              <a:t>Expression, abhivyakti, is the mental, verbal, and bodily activity through which our existence is evidenced for all-round resolution, called abhyudaya. Understanding is expressed in speech, work, and humane behaviour.</a:t>
+            </a:r>
+          </a:p>
+          <a:p xmlns:a="http://schemas.openxmlformats.org/drawingml/2006/main">
+            <a:r>
+              <a:t>Art, kala, concerns how these activities take an accomplished form. It makes qualities evident and expression meaningful, bringing usefulness together with beauty. In making an object, art value enhances usefulness. In communicating understanding, art serves intelligibility and the purpose of resolution.</a:t>
+            </a:r>
+          </a:p>
+          <a:p xmlns:a="http://schemas.openxmlformats.org/drawingml/2006/main">
+            <a:r>
+              <a:t>These activities belong together in the participation of jeevan through the body. They carry understanding into the awakened human tradition on the next slide.</a:t>
             </a:r>
           </a:p>
         </p:txBody>
@@ -2221,7 +2222,7 @@
         <p:nvSpPr>
           <p:cNvPr id="4" name="Slide Number Placeholder 3"/>
           <p:cNvSpPr>
-            <a:spLocks noGrp="1"/>
+            <a:spLocks xmlns:a="http://schemas.openxmlformats.org/drawingml/2006/main" noGrp="1"/>
           </p:cNvSpPr>
           <p:nvPr>
             <p:ph type="sldNum" idx="5"/>
@@ -2229,21 +2230,21 @@
         </p:nvSpPr>
         <p:spPr/>
         <p:txBody>
-          <a:bodyPr/>
-          <a:lstStyle/>
-          <a:p/>
+          <a:bodyPr xmlns:a="http://schemas.openxmlformats.org/drawingml/2006/main"/>
+          <a:lstStyle xmlns:a="http://schemas.openxmlformats.org/drawingml/2006/main"/>
+          <a:p xmlns:a="http://schemas.openxmlformats.org/drawingml/2006/main"/>
         </p:txBody>
       </p:sp>
     </p:spTree>
   </p:cSld>
   <p:clrMapOvr>
-    <a:masterClrMapping/>
+    <a:masterClrMapping xmlns:a="http://schemas.openxmlformats.org/drawingml/2006/main"/>
   </p:clrMapOvr>
 </p:notes>
 </file>
 
 <file path=ppt/notesSlides/notesSlide27.xml><?xml version="1.0" encoding="utf-8"?>
-<p:notes xmlns:a="http://schemas.openxmlformats.org/drawingml/2006/main" xmlns:p="http://schemas.openxmlformats.org/presentationml/2006/main">
+<p:notes xmlns:p="http://schemas.openxmlformats.org/presentationml/2006/main">
   <p:cSld>
     <p:spTree>
       <p:nvGrpSpPr>
@@ -2252,13 +2253,13 @@
         <p:nvPr/>
       </p:nvGrpSpPr>
       <p:grpSpPr>
-        <a:xfrm/>
+        <a:xfrm xmlns:a="http://schemas.openxmlformats.org/drawingml/2006/main"/>
       </p:grpSpPr>
       <p:sp>
         <p:nvSpPr>
           <p:cNvPr id="2" name="Slide Image Placeholder 1"/>
           <p:cNvSpPr>
-            <a:spLocks noGrp="1"/>
+            <a:spLocks xmlns:a="http://schemas.openxmlformats.org/drawingml/2006/main" noGrp="1"/>
           </p:cNvSpPr>
           <p:nvPr>
             <p:ph type="sldImg" idx="0"/>
@@ -2270,7 +2271,7 @@
         <p:nvSpPr>
           <p:cNvPr id="3" name="Notes Placeholder 2"/>
           <p:cNvSpPr>
-            <a:spLocks noGrp="1"/>
+            <a:spLocks xmlns:a="http://schemas.openxmlformats.org/drawingml/2006/main" noGrp="1"/>
           </p:cNvSpPr>
           <p:nvPr>
             <p:ph type="body" idx="1"/>
@@ -2278,41 +2279,36 @@
         </p:nvSpPr>
         <p:spPr/>
         <p:txBody>
-          <a:bodyPr/>
-          <a:lstStyle/>
-          <a:p>
-            <a:r>
-              <a:t>Before the closing summary, I owe you an accounting of what kind of thing each part of this has been.</a:t>
-            </a:r>
-          </a:p>
-          <a:p>
-            <a:r>
-              <a:t>Different methods establish different things. They can support one another, but they are not interchangeable.</a:t>
-            </a:r>
-          </a:p>
-          <a:p>
-            <a:r>
-              <a:t>Logical exposition can show internal coherence. It cannot by itself prove empirical fact.</a:t>
-            </a:r>
-          </a:p>
-          <a:p>
-            <a:r>
-              <a:t>Study and self-examination can show intelligibility and first-person recognition. They cannot by themselves physically identify the sentient unit.</a:t>
-            </a:r>
-          </a:p>
-          <a:p>
-            <a:r>
-              <a:t>Practice and conduct-evidence can show effects in work, behaviour, and mutual satisfaction. They cannot by themselves measure the sentience threshold or the unit–body interface.</a:t>
-            </a:r>
-          </a:p>
-          <a:p>
-            <a:r>
-              <a:t>Realisation is this tradition’s claimed completion of knowing. It does not force agreement from other methods.</a:t>
-            </a:r>
-          </a:p>
-          <a:p>
-            <a:r>
-              <a:t>Publicly measurable physical claims remain answerable to instrument-based science. No accepted measurement currently identifies the sentience threshold, the unit–body interface, or post-body reassociation — the last of those being the claim I flagged on slide 16, that the sentient unit continues when a body ends and may later associate with another. Stating that plainly is part of responsible presentation.</a:t>
+          <a:bodyPr xmlns:a="http://schemas.openxmlformats.org/drawingml/2006/main"/>
+          <a:lstStyle xmlns:a="http://schemas.openxmlformats.org/drawingml/2006/main"/>
+          <a:p xmlns:a="http://schemas.openxmlformats.org/drawingml/2006/main">
+            <a:r>
+              <a:t>The drive comes to rest in awakened human beings — effort settled, understanding proven in daily conduct, and carried as a tradition.</a:t>
+            </a:r>
+          </a:p>
+          <a:p xmlns:a="http://schemas.openxmlformats.org/drawingml/2006/main">
+            <a:r>
+              <a:t>Effort settled in realisation is T2. Understanding proven in conduct is T3.</a:t>
+            </a:r>
+          </a:p>
+          <a:p xmlns:a="http://schemas.openxmlformats.org/drawingml/2006/main">
+            <a:r>
+              <a:t>Four goals at four levels: resolution in every person; prosperity in every family; fearlessness — trust — in society; coexistence with all of nature.</a:t>
+            </a:r>
+          </a:p>
+          <a:p xmlns:a="http://schemas.openxmlformats.org/drawingml/2006/main">
+            <a:r>
+              <a:t>Five dimensions of continuity carry the tradition: education and formative culture; justice and preservation; health and restraint; production and work; exchange and storage.</a:t>
+            </a:r>
+          </a:p>
+          <a:p xmlns:a="http://schemas.openxmlformats.org/drawingml/2006/main">
+            <a:r>
+              <a:t>And here is where the other half of the composition slide returns. Families and societies are not a further compositional tier — you cannot get a humane society by stacking bodies the way you stack molecules. They are relational achievements: they persist humanely while relationships are recognised, values fulfilled, evaluation completed, and mutual satisfaction achieved. Fear, force, or extraction can hold a group together for a while; on this account they do not make it an orderly society.</a:t>
+            </a:r>
+          </a:p>
+          <a:p xmlns:a="http://schemas.openxmlformats.org/drawingml/2006/main">
+            <a:r>
+              <a:t>This is not an ideal bolted onto matter. On this account, the progression is designed to arrive here. Nature saturated in Omnipresence is bound for development until realisation. An awakened human tradition is what that progression delivers.</a:t>
             </a:r>
           </a:p>
         </p:txBody>
@@ -2321,7 +2317,7 @@
         <p:nvSpPr>
           <p:cNvPr id="4" name="Slide Number Placeholder 3"/>
           <p:cNvSpPr>
-            <a:spLocks noGrp="1"/>
+            <a:spLocks xmlns:a="http://schemas.openxmlformats.org/drawingml/2006/main" noGrp="1"/>
           </p:cNvSpPr>
           <p:nvPr>
             <p:ph type="sldNum" idx="5"/>
@@ -2329,21 +2325,21 @@
         </p:nvSpPr>
         <p:spPr/>
         <p:txBody>
-          <a:bodyPr/>
-          <a:lstStyle/>
-          <a:p/>
+          <a:bodyPr xmlns:a="http://schemas.openxmlformats.org/drawingml/2006/main"/>
+          <a:lstStyle xmlns:a="http://schemas.openxmlformats.org/drawingml/2006/main"/>
+          <a:p xmlns:a="http://schemas.openxmlformats.org/drawingml/2006/main"/>
         </p:txBody>
       </p:sp>
     </p:spTree>
   </p:cSld>
   <p:clrMapOvr>
-    <a:masterClrMapping/>
+    <a:masterClrMapping xmlns:a="http://schemas.openxmlformats.org/drawingml/2006/main"/>
   </p:clrMapOvr>
 </p:notes>
 </file>
 
 <file path=ppt/notesSlides/notesSlide28.xml><?xml version="1.0" encoding="utf-8"?>
-<p:notes xmlns:a="http://schemas.openxmlformats.org/drawingml/2006/main" xmlns:p="http://schemas.openxmlformats.org/presentationml/2006/main">
+<p:notes xmlns:p="http://schemas.openxmlformats.org/presentationml/2006/main">
   <p:cSld>
     <p:spTree>
       <p:nvGrpSpPr>
@@ -2352,13 +2348,13 @@
         <p:nvPr/>
       </p:nvGrpSpPr>
       <p:grpSpPr>
-        <a:xfrm/>
+        <a:xfrm xmlns:a="http://schemas.openxmlformats.org/drawingml/2006/main"/>
       </p:grpSpPr>
       <p:sp>
         <p:nvSpPr>
           <p:cNvPr id="2" name="Slide Image Placeholder 1"/>
           <p:cNvSpPr>
-            <a:spLocks noGrp="1"/>
+            <a:spLocks xmlns:a="http://schemas.openxmlformats.org/drawingml/2006/main" noGrp="1"/>
           </p:cNvSpPr>
           <p:nvPr>
             <p:ph type="sldImg" idx="0"/>
@@ -2370,7 +2366,7 @@
         <p:nvSpPr>
           <p:cNvPr id="3" name="Notes Placeholder 2"/>
           <p:cNvSpPr>
-            <a:spLocks noGrp="1"/>
+            <a:spLocks xmlns:a="http://schemas.openxmlformats.org/drawingml/2006/main" noGrp="1"/>
           </p:cNvSpPr>
           <p:nvPr>
             <p:ph type="body" idx="1"/>
@@ -2378,46 +2374,41 @@
         </p:nvSpPr>
         <p:spPr/>
         <p:txBody>
-          <a:bodyPr/>
-          <a:lstStyle/>
-          <a:p>
-            <a:r>
-              <a:t>Let us close the loop on the six questions.</a:t>
-            </a:r>
-          </a:p>
-          <a:p>
-            <a:r>
-              <a:t>What is existence? Eternal coexistence: countless units saturated in all-pervasive Omnipresence.</a:t>
-            </a:r>
-          </a:p>
-          <a:p>
-            <a:r>
-              <a:t>What exists? Root atomic units; composite units and bodies; body–sentient-unit joint forms; and relational human assemblies — all saturated in the ground.</a:t>
-            </a:r>
-          </a:p>
-          <a:p>
-            <a:r>
-              <a:t>Does existence begin or end? No. Existence is perpetual. Configurations form, transform, and decompose.</a:t>
-            </a:r>
-          </a:p>
-          <a:p>
-            <a:r>
-              <a:t>What is the self? The constitutionally complete sentient unit working through the body.</a:t>
-            </a:r>
-          </a:p>
-          <a:p>
-            <a:r>
-              <a:t>Is the world real? Yes. Units, mutual relationships, and definite material fulfilment are real within perpetual coexistence.</a:t>
-            </a:r>
-          </a:p>
-          <a:p>
-            <a:r>
-              <a:t>How is it known? Through logical exposition, study and self-examination, practice, realisation, and conduct-evidence — without conflating those with instrument measurement of the sentience threshold. The lived test is evidence in humane conduct.</a:t>
-            </a:r>
-          </a:p>
-          <a:p>
-            <a:r>
-              <a:t>If we continue later, the natural next step is comparison with other traditions and with science — including open problems this study names for Madhyasth Darshan itself. Thank you.</a:t>
+          <a:bodyPr xmlns:a="http://schemas.openxmlformats.org/drawingml/2006/main"/>
+          <a:lstStyle xmlns:a="http://schemas.openxmlformats.org/drawingml/2006/main"/>
+          <a:p xmlns:a="http://schemas.openxmlformats.org/drawingml/2006/main">
+            <a:r>
+              <a:t>Before the closing summary, I owe you an accounting of what kind of thing each part of this has been.</a:t>
+            </a:r>
+          </a:p>
+          <a:p xmlns:a="http://schemas.openxmlformats.org/drawingml/2006/main">
+            <a:r>
+              <a:t>Different methods establish different things. They can support one another, but they are not interchangeable.</a:t>
+            </a:r>
+          </a:p>
+          <a:p xmlns:a="http://schemas.openxmlformats.org/drawingml/2006/main">
+            <a:r>
+              <a:t>Logical exposition can show internal coherence. It cannot by itself prove empirical fact.</a:t>
+            </a:r>
+          </a:p>
+          <a:p xmlns:a="http://schemas.openxmlformats.org/drawingml/2006/main">
+            <a:r>
+              <a:t>Study and self-examination can show intelligibility and first-person recognition. They cannot by themselves physically identify the sentient unit.</a:t>
+            </a:r>
+          </a:p>
+          <a:p xmlns:a="http://schemas.openxmlformats.org/drawingml/2006/main">
+            <a:r>
+              <a:t>Practice and conduct-evidence can show effects in work, behaviour, and mutual satisfaction. They cannot by themselves measure the sentience threshold or the unit–body interface.</a:t>
+            </a:r>
+          </a:p>
+          <a:p xmlns:a="http://schemas.openxmlformats.org/drawingml/2006/main">
+            <a:r>
+              <a:t>Realisation is this tradition’s claimed completion of knowing. It does not force agreement from other methods.</a:t>
+            </a:r>
+          </a:p>
+          <a:p xmlns:a="http://schemas.openxmlformats.org/drawingml/2006/main">
+            <a:r>
+              <a:t>Publicly measurable physical claims remain answerable to instrument-based science. No accepted measurement currently identifies the sentience threshold, the unit–body interface, or post-body reassociation — the last of those being the claim I flagged on slide 16, that the sentient unit continues when a body ends and may later associate with another. Stating that plainly is part of responsible presentation.</a:t>
             </a:r>
           </a:p>
         </p:txBody>
@@ -2426,7 +2417,7 @@
         <p:nvSpPr>
           <p:cNvPr id="4" name="Slide Number Placeholder 3"/>
           <p:cNvSpPr>
-            <a:spLocks noGrp="1"/>
+            <a:spLocks xmlns:a="http://schemas.openxmlformats.org/drawingml/2006/main" noGrp="1"/>
           </p:cNvSpPr>
           <p:nvPr>
             <p:ph type="sldNum" idx="5"/>
@@ -2434,21 +2425,21 @@
         </p:nvSpPr>
         <p:spPr/>
         <p:txBody>
-          <a:bodyPr/>
-          <a:lstStyle/>
-          <a:p/>
+          <a:bodyPr xmlns:a="http://schemas.openxmlformats.org/drawingml/2006/main"/>
+          <a:lstStyle xmlns:a="http://schemas.openxmlformats.org/drawingml/2006/main"/>
+          <a:p xmlns:a="http://schemas.openxmlformats.org/drawingml/2006/main"/>
         </p:txBody>
       </p:sp>
     </p:spTree>
   </p:cSld>
   <p:clrMapOvr>
-    <a:masterClrMapping/>
+    <a:masterClrMapping xmlns:a="http://schemas.openxmlformats.org/drawingml/2006/main"/>
   </p:clrMapOvr>
 </p:notes>
 </file>
 
-<file path=ppt/notesSlides/notesSlide3.xml><?xml version="1.0" encoding="utf-8"?>
-<p:notes xmlns:a="http://schemas.openxmlformats.org/drawingml/2006/main" xmlns:p="http://schemas.openxmlformats.org/presentationml/2006/main">
+<file path=ppt/notesSlides/notesSlide29.xml><?xml version="1.0" encoding="utf-8"?>
+<p:notes xmlns:p="http://schemas.openxmlformats.org/presentationml/2006/main">
   <p:cSld>
     <p:spTree>
       <p:nvGrpSpPr>
@@ -2457,13 +2448,13 @@
         <p:nvPr/>
       </p:nvGrpSpPr>
       <p:grpSpPr>
-        <a:xfrm/>
+        <a:xfrm xmlns:a="http://schemas.openxmlformats.org/drawingml/2006/main"/>
       </p:grpSpPr>
       <p:sp>
         <p:nvSpPr>
           <p:cNvPr id="2" name="Slide Image Placeholder 1"/>
           <p:cNvSpPr>
-            <a:spLocks noGrp="1"/>
+            <a:spLocks xmlns:a="http://schemas.openxmlformats.org/drawingml/2006/main" noGrp="1"/>
           </p:cNvSpPr>
           <p:nvPr>
             <p:ph type="sldImg" idx="0"/>
@@ -2475,7 +2466,7 @@
         <p:nvSpPr>
           <p:cNvPr id="3" name="Notes Placeholder 2"/>
           <p:cNvSpPr>
-            <a:spLocks noGrp="1"/>
+            <a:spLocks xmlns:a="http://schemas.openxmlformats.org/drawingml/2006/main" noGrp="1"/>
           </p:cNvSpPr>
           <p:nvPr>
             <p:ph type="body" idx="1"/>
@@ -2483,51 +2474,46 @@
         </p:nvSpPr>
         <p:spPr/>
         <p:txBody>
-          <a:bodyPr/>
-          <a:lstStyle/>
-          <a:p>
-            <a:r>
-              <a:t>Any serious account of reality has to face a small set of questions. Let us name them before we give this tradition’s answers.</a:t>
-            </a:r>
-          </a:p>
-          <a:p>
-            <a:r>
-              <a:t>What is existence? Is there one fundamental reality, or many — and how are they related?</a:t>
-            </a:r>
-          </a:p>
-          <a:p>
-            <a:r>
-              <a:t>What exists? What are the basic constituents, and what is each of them?</a:t>
-            </a:r>
-          </a:p>
-          <a:p>
-            <a:r>
-              <a:t>Does what exists begin? Did reality originate at some time — or do only configurations begin and end?</a:t>
-            </a:r>
-          </a:p>
-          <a:p>
-            <a:r>
-              <a:t>Does the self begin or end with the body?</a:t>
-            </a:r>
-          </a:p>
-          <a:p>
-            <a:r>
-              <a:t>Is the plural world finally real, or only an appearance?</a:t>
-            </a:r>
-          </a:p>
-          <a:p>
-            <a:r>
-              <a:t>And sixth: how can what exists be known — what must be understood, and at what scope?</a:t>
-            </a:r>
-          </a:p>
-          <a:p>
-            <a:r>
-              <a:t>Different traditions answer these differently. Madhyasth Darshan does not answer them with six separate doctrines. One picture — coexistence — is meant to answer all six at once.</a:t>
-            </a:r>
-          </a:p>
-          <a:p>
-            <a:r>
-              <a:t>We will return to this list at the end with the answers filled in. Along the way you will also see how knowing widens, where the developmental drive comes to rest, and how different kinds of evidence are kept distinct.</a:t>
+          <a:bodyPr xmlns:a="http://schemas.openxmlformats.org/drawingml/2006/main"/>
+          <a:lstStyle xmlns:a="http://schemas.openxmlformats.org/drawingml/2006/main"/>
+          <a:p xmlns:a="http://schemas.openxmlformats.org/drawingml/2006/main">
+            <a:r>
+              <a:t>Let us close the loop on the six questions.</a:t>
+            </a:r>
+          </a:p>
+          <a:p xmlns:a="http://schemas.openxmlformats.org/drawingml/2006/main">
+            <a:r>
+              <a:t>What is existence? Eternal coexistence: countless units saturated in all-pervasive Omnipresence.</a:t>
+            </a:r>
+          </a:p>
+          <a:p xmlns:a="http://schemas.openxmlformats.org/drawingml/2006/main">
+            <a:r>
+              <a:t>What exists? Root atomic units; composite units and bodies; body–sentient-unit joint forms; and relational human assemblies — all saturated in the ground.</a:t>
+            </a:r>
+          </a:p>
+          <a:p xmlns:a="http://schemas.openxmlformats.org/drawingml/2006/main">
+            <a:r>
+              <a:t>Does existence begin or end? No. Existence is perpetual. Configurations form, transform, and decompose.</a:t>
+            </a:r>
+          </a:p>
+          <a:p xmlns:a="http://schemas.openxmlformats.org/drawingml/2006/main">
+            <a:r>
+              <a:t>What is the self? The constitutionally complete sentient unit working through the body.</a:t>
+            </a:r>
+          </a:p>
+          <a:p xmlns:a="http://schemas.openxmlformats.org/drawingml/2006/main">
+            <a:r>
+              <a:t>Is the world real? Yes. Units, mutual relationships, and definite material fulfilment are real within perpetual coexistence.</a:t>
+            </a:r>
+          </a:p>
+          <a:p xmlns:a="http://schemas.openxmlformats.org/drawingml/2006/main">
+            <a:r>
+              <a:t>How is it known? Through logical exposition, study and self-examination, practice, realisation, and conduct-evidence — without conflating those with instrument measurement of the sentience threshold. The lived test is evidence in humane conduct.</a:t>
+            </a:r>
+          </a:p>
+          <a:p xmlns:a="http://schemas.openxmlformats.org/drawingml/2006/main">
+            <a:r>
+              <a:t>If we continue later, the natural next step is comparison with other traditions and with science — including open problems this study names for Madhyasth Darshan itself. Thank you.</a:t>
             </a:r>
           </a:p>
         </p:txBody>
@@ -2536,7 +2522,7 @@
         <p:nvSpPr>
           <p:cNvPr id="4" name="Slide Number Placeholder 3"/>
           <p:cNvSpPr>
-            <a:spLocks noGrp="1"/>
+            <a:spLocks xmlns:a="http://schemas.openxmlformats.org/drawingml/2006/main" noGrp="1"/>
           </p:cNvSpPr>
           <p:nvPr>
             <p:ph type="sldNum" idx="5"/>
@@ -2544,21 +2530,21 @@
         </p:nvSpPr>
         <p:spPr/>
         <p:txBody>
-          <a:bodyPr/>
-          <a:lstStyle/>
-          <a:p/>
+          <a:bodyPr xmlns:a="http://schemas.openxmlformats.org/drawingml/2006/main"/>
+          <a:lstStyle xmlns:a="http://schemas.openxmlformats.org/drawingml/2006/main"/>
+          <a:p xmlns:a="http://schemas.openxmlformats.org/drawingml/2006/main"/>
         </p:txBody>
       </p:sp>
     </p:spTree>
   </p:cSld>
   <p:clrMapOvr>
-    <a:masterClrMapping/>
+    <a:masterClrMapping xmlns:a="http://schemas.openxmlformats.org/drawingml/2006/main"/>
   </p:clrMapOvr>
 </p:notes>
 </file>
 
-<file path=ppt/notesSlides/notesSlide4.xml><?xml version="1.0" encoding="utf-8"?>
-<p:notes xmlns:a="http://schemas.openxmlformats.org/drawingml/2006/main" xmlns:p="http://schemas.openxmlformats.org/presentationml/2006/main">
+<file path=ppt/notesSlides/notesSlide3.xml><?xml version="1.0" encoding="utf-8"?>
+<p:notes xmlns:p="http://schemas.openxmlformats.org/presentationml/2006/main">
   <p:cSld>
     <p:spTree>
       <p:nvGrpSpPr>
@@ -2567,13 +2553,13 @@
         <p:nvPr/>
       </p:nvGrpSpPr>
       <p:grpSpPr>
-        <a:xfrm/>
+        <a:xfrm xmlns:a="http://schemas.openxmlformats.org/drawingml/2006/main"/>
       </p:grpSpPr>
       <p:sp>
         <p:nvSpPr>
           <p:cNvPr id="2" name="Slide Image Placeholder 1"/>
           <p:cNvSpPr>
-            <a:spLocks noGrp="1"/>
+            <a:spLocks xmlns:a="http://schemas.openxmlformats.org/drawingml/2006/main" noGrp="1"/>
           </p:cNvSpPr>
           <p:nvPr>
             <p:ph type="sldImg" idx="0"/>
@@ -2585,7 +2571,7 @@
         <p:nvSpPr>
           <p:cNvPr id="3" name="Notes Placeholder 2"/>
           <p:cNvSpPr>
-            <a:spLocks noGrp="1"/>
+            <a:spLocks xmlns:a="http://schemas.openxmlformats.org/drawingml/2006/main" noGrp="1"/>
           </p:cNvSpPr>
           <p:nvPr>
             <p:ph type="body" idx="1"/>
@@ -2593,31 +2579,51 @@
         </p:nvSpPr>
         <p:spPr/>
         <p:txBody>
-          <a:bodyPr/>
-          <a:lstStyle/>
-          <a:p>
-            <a:r>
-              <a:t>This map is the organising picture for what follows. You do not need to memorise every node. Use it as a place to return when later slides feel dense.</a:t>
-            </a:r>
-          </a:p>
-          <a:p>
-            <a:r>
-              <a:t>At the top: coexistence — the ground and countless units, inseparable without losing their distinction. Then, on the unit side: four aspects of every unit; relationships; four orders of nature; and two developmental lines.</a:t>
-            </a:r>
-          </a:p>
-          <a:p>
-            <a:r>
-              <a:t>Notice the fork. Bodies belong to compositional building. The sentient unit is the result of a different line — development in an atom. The two meet in animal and human living.</a:t>
-            </a:r>
-          </a:p>
-          <a:p>
-            <a:r>
-              <a:t>Later we will name three milestones on the sentient path: the arrival of sentience, then settlement of inner seeking, then authentic conduct. Those are not further material stages.</a:t>
-            </a:r>
-          </a:p>
-          <a:p>
-            <a:r>
-              <a:t>Most of the deck is a zoom into one region of this map.</a:t>
+          <a:bodyPr xmlns:a="http://schemas.openxmlformats.org/drawingml/2006/main"/>
+          <a:lstStyle xmlns:a="http://schemas.openxmlformats.org/drawingml/2006/main"/>
+          <a:p xmlns:a="http://schemas.openxmlformats.org/drawingml/2006/main">
+            <a:r>
+              <a:t>Any serious account of reality has to face a small set of questions. Let us name them before we give this tradition’s answers.</a:t>
+            </a:r>
+          </a:p>
+          <a:p xmlns:a="http://schemas.openxmlformats.org/drawingml/2006/main">
+            <a:r>
+              <a:t>What is existence? Is there one fundamental reality, or many — and how are they related?</a:t>
+            </a:r>
+          </a:p>
+          <a:p xmlns:a="http://schemas.openxmlformats.org/drawingml/2006/main">
+            <a:r>
+              <a:t>What exists? What are the basic constituents, and what is each of them?</a:t>
+            </a:r>
+          </a:p>
+          <a:p xmlns:a="http://schemas.openxmlformats.org/drawingml/2006/main">
+            <a:r>
+              <a:t>Does what exists begin? Did reality originate at some time — or do only configurations begin and end?</a:t>
+            </a:r>
+          </a:p>
+          <a:p xmlns:a="http://schemas.openxmlformats.org/drawingml/2006/main">
+            <a:r>
+              <a:t>Does the self begin or end with the body?</a:t>
+            </a:r>
+          </a:p>
+          <a:p xmlns:a="http://schemas.openxmlformats.org/drawingml/2006/main">
+            <a:r>
+              <a:t>Is the plural world finally real, or only an appearance?</a:t>
+            </a:r>
+          </a:p>
+          <a:p xmlns:a="http://schemas.openxmlformats.org/drawingml/2006/main">
+            <a:r>
+              <a:t>And sixth: how can what exists be known — what must be understood, and at what scope?</a:t>
+            </a:r>
+          </a:p>
+          <a:p xmlns:a="http://schemas.openxmlformats.org/drawingml/2006/main">
+            <a:r>
+              <a:t>Different traditions answer these differently. Madhyasth Darshan does not answer them with six separate doctrines. One picture — coexistence — is meant to answer all six at once.</a:t>
+            </a:r>
+          </a:p>
+          <a:p xmlns:a="http://schemas.openxmlformats.org/drawingml/2006/main">
+            <a:r>
+              <a:t>We will return to this list at the end with the answers filled in. Along the way you will also see how knowing widens, where the developmental drive comes to rest, and how different kinds of evidence are kept distinct.</a:t>
             </a:r>
           </a:p>
         </p:txBody>
@@ -2626,7 +2632,7 @@
         <p:nvSpPr>
           <p:cNvPr id="4" name="Slide Number Placeholder 3"/>
           <p:cNvSpPr>
-            <a:spLocks noGrp="1"/>
+            <a:spLocks xmlns:a="http://schemas.openxmlformats.org/drawingml/2006/main" noGrp="1"/>
           </p:cNvSpPr>
           <p:nvPr>
             <p:ph type="sldNum" idx="5"/>
@@ -2634,21 +2640,21 @@
         </p:nvSpPr>
         <p:spPr/>
         <p:txBody>
-          <a:bodyPr/>
-          <a:lstStyle/>
-          <a:p/>
+          <a:bodyPr xmlns:a="http://schemas.openxmlformats.org/drawingml/2006/main"/>
+          <a:lstStyle xmlns:a="http://schemas.openxmlformats.org/drawingml/2006/main"/>
+          <a:p xmlns:a="http://schemas.openxmlformats.org/drawingml/2006/main"/>
         </p:txBody>
       </p:sp>
     </p:spTree>
   </p:cSld>
   <p:clrMapOvr>
-    <a:masterClrMapping/>
+    <a:masterClrMapping xmlns:a="http://schemas.openxmlformats.org/drawingml/2006/main"/>
   </p:clrMapOvr>
 </p:notes>
 </file>
 
-<file path=ppt/notesSlides/notesSlide5.xml><?xml version="1.0" encoding="utf-8"?>
-<p:notes xmlns:a="http://schemas.openxmlformats.org/drawingml/2006/main" xmlns:p="http://schemas.openxmlformats.org/presentationml/2006/main">
+<file path=ppt/notesSlides/notesSlide4.xml><?xml version="1.0" encoding="utf-8"?>
+<p:notes xmlns:p="http://schemas.openxmlformats.org/presentationml/2006/main">
   <p:cSld>
     <p:spTree>
       <p:nvGrpSpPr>
@@ -2657,13 +2663,13 @@
         <p:nvPr/>
       </p:nvGrpSpPr>
       <p:grpSpPr>
-        <a:xfrm/>
+        <a:xfrm xmlns:a="http://schemas.openxmlformats.org/drawingml/2006/main"/>
       </p:grpSpPr>
       <p:sp>
         <p:nvSpPr>
           <p:cNvPr id="2" name="Slide Image Placeholder 1"/>
           <p:cNvSpPr>
-            <a:spLocks noGrp="1"/>
+            <a:spLocks xmlns:a="http://schemas.openxmlformats.org/drawingml/2006/main" noGrp="1"/>
           </p:cNvSpPr>
           <p:nvPr>
             <p:ph type="sldImg" idx="0"/>
@@ -2675,7 +2681,7 @@
         <p:nvSpPr>
           <p:cNvPr id="3" name="Notes Placeholder 2"/>
           <p:cNvSpPr>
-            <a:spLocks noGrp="1"/>
+            <a:spLocks xmlns:a="http://schemas.openxmlformats.org/drawingml/2006/main" noGrp="1"/>
           </p:cNvSpPr>
           <p:nvPr>
             <p:ph type="body" idx="1"/>
@@ -2683,46 +2689,31 @@
         </p:nvSpPr>
         <p:spPr/>
         <p:txBody>
-          <a:bodyPr/>
-          <a:lstStyle/>
-          <a:p>
-            <a:r>
-              <a:t>We now enter the foundations — what this account says exists.</a:t>
-            </a:r>
-          </a:p>
-          <a:p>
-            <a:r>
-              <a:t>Existence has two inseparable aspects.</a:t>
-            </a:r>
-          </a:p>
-          <a:p>
-            <a:r>
-              <a:t>First, the ground — Omnipresence. Formless, all-pervasive, transparent, permeating, non-transforming, immeasurable. Actionless energy: it acts not at all, yet every unit is energised and regulated in it. There is no place where it is absent.</a:t>
-            </a:r>
-          </a:p>
-          <a:p>
-            <a:r>
-              <a:t>Hold on to two of those words, because the next slide is built on them. *Transparent* and *permeating*. The texts say transparence, permeability, and pervasiveness taken together are what show the ground to be one indivisible reality. Permeating is the strong one: the ground does not merely surround a unit from outside, it passes through it. That will matter in about ninety seconds.</a:t>
-            </a:r>
-          </a:p>
-          <a:p>
-            <a:r>
-              <a:t>Second, units of nature. Formful, active, countable. Each is bounded and saturated in the ground. Each has form, capacities, a way of participating, and an inseparable innateness — we will walk those four shortly.</a:t>
-            </a:r>
-          </a:p>
-          <a:p>
-            <a:r>
-              <a:t>Do not collapse levels. At the root, nature is analysed as atomic units — a centre with orbiting parts. Compounds and bodies are composite units. Body and sentient unit together are a joint form. Families and societies are relational assemblies.</a:t>
-            </a:r>
-          </a:p>
-          <a:p>
-            <a:r>
-              <a:t>These two poles were never separate. Separation of a unit from the saturated whole never happens. The ground does not change. Nature saturated in it is dynamic. Therefore all change is unit-activity.</a:t>
-            </a:r>
-          </a:p>
-          <a:p>
-            <a:r>
-              <a:t>One naming caution. The texts list many English names for the ground — including Knowledge and Consciousness. Those names do not mean a mind that knows. Active knowing belongs to the sentient unit, never to the ground.</a:t>
+          <a:bodyPr xmlns:a="http://schemas.openxmlformats.org/drawingml/2006/main"/>
+          <a:lstStyle xmlns:a="http://schemas.openxmlformats.org/drawingml/2006/main"/>
+          <a:p xmlns:a="http://schemas.openxmlformats.org/drawingml/2006/main">
+            <a:r>
+              <a:t>This map is the organising picture for what follows. You do not need to memorise every node. Use it as a place to return when later slides feel dense.</a:t>
+            </a:r>
+          </a:p>
+          <a:p xmlns:a="http://schemas.openxmlformats.org/drawingml/2006/main">
+            <a:r>
+              <a:t>At the top: coexistence — the ground and countless units, inseparable without losing their distinction. Then, on the unit side: four aspects of every unit; relationships; four orders of nature; and two developmental lines.</a:t>
+            </a:r>
+          </a:p>
+          <a:p xmlns:a="http://schemas.openxmlformats.org/drawingml/2006/main">
+            <a:r>
+              <a:t>Notice the fork. Bodies belong to compositional building. The sentient unit is the result of a different line — development in an atom. The two meet in animal and human living.</a:t>
+            </a:r>
+          </a:p>
+          <a:p xmlns:a="http://schemas.openxmlformats.org/drawingml/2006/main">
+            <a:r>
+              <a:t>Later we will name three milestones on the sentient path: the arrival of sentience, then settlement of inner seeking, then authentic conduct. Those are not further material stages.</a:t>
+            </a:r>
+          </a:p>
+          <a:p xmlns:a="http://schemas.openxmlformats.org/drawingml/2006/main">
+            <a:r>
+              <a:t>Most of the deck is a zoom into one region of this map.</a:t>
             </a:r>
           </a:p>
         </p:txBody>
@@ -2731,7 +2722,7 @@
         <p:nvSpPr>
           <p:cNvPr id="4" name="Slide Number Placeholder 3"/>
           <p:cNvSpPr>
-            <a:spLocks noGrp="1"/>
+            <a:spLocks xmlns:a="http://schemas.openxmlformats.org/drawingml/2006/main" noGrp="1"/>
           </p:cNvSpPr>
           <p:nvPr>
             <p:ph type="sldNum" idx="5"/>
@@ -2739,21 +2730,21 @@
         </p:nvSpPr>
         <p:spPr/>
         <p:txBody>
-          <a:bodyPr/>
-          <a:lstStyle/>
-          <a:p/>
+          <a:bodyPr xmlns:a="http://schemas.openxmlformats.org/drawingml/2006/main"/>
+          <a:lstStyle xmlns:a="http://schemas.openxmlformats.org/drawingml/2006/main"/>
+          <a:p xmlns:a="http://schemas.openxmlformats.org/drawingml/2006/main"/>
         </p:txBody>
       </p:sp>
     </p:spTree>
   </p:cSld>
   <p:clrMapOvr>
-    <a:masterClrMapping/>
+    <a:masterClrMapping xmlns:a="http://schemas.openxmlformats.org/drawingml/2006/main"/>
   </p:clrMapOvr>
 </p:notes>
 </file>
 
-<file path=ppt/notesSlides/notesSlide6.xml><?xml version="1.0" encoding="utf-8"?>
-<p:notes xmlns:a="http://schemas.openxmlformats.org/drawingml/2006/main" xmlns:p="http://schemas.openxmlformats.org/presentationml/2006/main">
+<file path=ppt/notesSlides/notesSlide5.xml><?xml version="1.0" encoding="utf-8"?>
+<p:notes xmlns:p="http://schemas.openxmlformats.org/presentationml/2006/main">
   <p:cSld>
     <p:spTree>
       <p:nvGrpSpPr>
@@ -2762,13 +2753,13 @@
         <p:nvPr/>
       </p:nvGrpSpPr>
       <p:grpSpPr>
-        <a:xfrm/>
+        <a:xfrm xmlns:a="http://schemas.openxmlformats.org/drawingml/2006/main"/>
       </p:grpSpPr>
       <p:sp>
         <p:nvSpPr>
           <p:cNvPr id="2" name="Slide Image Placeholder 1"/>
           <p:cNvSpPr>
-            <a:spLocks noGrp="1"/>
+            <a:spLocks xmlns:a="http://schemas.openxmlformats.org/drawingml/2006/main" noGrp="1"/>
           </p:cNvSpPr>
           <p:nvPr>
             <p:ph type="sldImg" idx="0"/>
@@ -2780,7 +2771,7 @@
         <p:nvSpPr>
           <p:cNvPr id="3" name="Notes Placeholder 2"/>
           <p:cNvSpPr>
-            <a:spLocks noGrp="1"/>
+            <a:spLocks xmlns:a="http://schemas.openxmlformats.org/drawingml/2006/main" noGrp="1"/>
           </p:cNvSpPr>
           <p:nvPr>
             <p:ph type="body" idx="1"/>
@@ -2788,56 +2779,46 @@
         </p:nvSpPr>
         <p:spPr/>
         <p:txBody>
-          <a:bodyPr/>
-          <a:lstStyle/>
-          <a:p>
-            <a:r>
-              <a:t>How are ground and units related? The texts have one word for it: saturation. Every formful unit is soaked, submerged, and surrounded in Omnipresence.</a:t>
-            </a:r>
-          </a:p>
-          <a:p>
-            <a:r>
-              <a:t>Now, why is that true rather than merely asserted? Because the ground is permeating — the word from the last slide. Take a unit and divide it. Divide the fragments. Divide those. However far you go, every fragment is still soaked, still submerged, still surrounded. There is no cut you can make that leaves a piece standing outside the ground.</a:t>
-            </a:r>
-          </a:p>
-          <a:p>
-            <a:r>
-              <a:t>Two things follow immediately, and they are worth stating slowly.</a:t>
-            </a:r>
-          </a:p>
-          <a:p>
-            <a:r>
-              <a:t>One: a unit cannot be annihilated. To annihilate it you would need a fragment separated from what it is saturated in, and no division produces that.</a:t>
-            </a:r>
-          </a:p>
-          <a:p>
-            <a:r>
-              <a:t>Two: saturation is a condition, not an event. There is no moment at which units existed on their own and were later joined to the ground. If someone asks you *when* saturation happened, the answer is that the question does not apply.</a:t>
-            </a:r>
-          </a:p>
-          <a:p>
-            <a:r>
-              <a:t>Here is the part I want you to notice, because it is easy to read past. Soaked, submerged, surrounded are not three words for one relation. Each carries its own entailment, and the three cards on the slide follow them in order.</a:t>
-            </a:r>
-          </a:p>
-          <a:p>
-            <a:r>
-              <a:t>Soaked gives forcefulness. Being soaked *is* forcefulness — the unit is the bearer of definite relative power. On the force side of the same bond, the texts call this basic impulsion.</a:t>
-            </a:r>
-          </a:p>
-          <a:p>
-            <a:r>
-              <a:t>Submerged gives energy-fullness. The ground is on every side of the unit, so the unit is never devoid of the energy evident in its activity. The texts state the relation as a bare identity: unit-ness plus energy-fullness is activeness. And activity is never one thing at a time — always effort, motion, and result together.</a:t>
-            </a:r>
-          </a:p>
-          <a:p>
-            <a:r>
-              <a:t>Surrounded gives regulation. Because the formless reality stands between units, each is held at a definite distance from the others. That is where law and orderliness come from — not from a statute issued from outside. We will come back to this on slide 22.</a:t>
-            </a:r>
-          </a:p>
-          <a:p>
-            <a:r>
-              <a:t>Recognition and participation in orderliness follow from the same bond, and slide 8 takes them up in their own right. And please hear the caution: this is a claim about what existence is like, not a proposed laboratory transfer mechanism. Nor does saturation destine any unit to become sentient.</a:t>
+          <a:bodyPr xmlns:a="http://schemas.openxmlformats.org/drawingml/2006/main"/>
+          <a:lstStyle xmlns:a="http://schemas.openxmlformats.org/drawingml/2006/main"/>
+          <a:p xmlns:a="http://schemas.openxmlformats.org/drawingml/2006/main">
+            <a:r>
+              <a:t>We now enter the foundations — what this account says exists.</a:t>
+            </a:r>
+          </a:p>
+          <a:p xmlns:a="http://schemas.openxmlformats.org/drawingml/2006/main">
+            <a:r>
+              <a:t>Existence has two inseparable aspects.</a:t>
+            </a:r>
+          </a:p>
+          <a:p xmlns:a="http://schemas.openxmlformats.org/drawingml/2006/main">
+            <a:r>
+              <a:t>First, the ground — Omnipresence. Formless, all-pervasive, transparent, permeating, non-transforming, immeasurable. Actionless energy: it acts not at all, yet every unit is energised and regulated in it. There is no place where it is absent.</a:t>
+            </a:r>
+          </a:p>
+          <a:p xmlns:a="http://schemas.openxmlformats.org/drawingml/2006/main">
+            <a:r>
+              <a:t>Two words make this relation clearer. *Permeating* concerns the unit: the pervasive reality passes through every unit, which remains saturated in it. *Transparent* concerns mutuality: units become manifest to one another through imaging, which provides a basis of recognition. Transparency, permeability, and pervasiveness together evidence one indivisible reality.</a:t>
+            </a:r>
+          </a:p>
+          <a:p xmlns:a="http://schemas.openxmlformats.org/drawingml/2006/main">
+            <a:r>
+              <a:t>Second, units of nature. Formful, active, countable. Each is bounded and saturated in the ground. Each has form, capacities, a way of participating, and an inseparable innateness — we will walk those four shortly.</a:t>
+            </a:r>
+          </a:p>
+          <a:p xmlns:a="http://schemas.openxmlformats.org/drawingml/2006/main">
+            <a:r>
+              <a:t>Do not collapse levels. At the root, nature is analysed as atomic units — a centre with orbiting parts. Compounds and bodies are composite units. Body and sentient unit together are a joint form. Families and societies are relational assemblies.</a:t>
+            </a:r>
+          </a:p>
+          <a:p xmlns:a="http://schemas.openxmlformats.org/drawingml/2006/main">
+            <a:r>
+              <a:t>These two poles were never separate. Separation of a unit from the saturated whole never happens. The ground does not change. Nature saturated in it is dynamic. Therefore all change is unit-activity.</a:t>
+            </a:r>
+          </a:p>
+          <a:p xmlns:a="http://schemas.openxmlformats.org/drawingml/2006/main">
+            <a:r>
+              <a:t>One naming caution. The texts list many English names for the ground — including Knowledge and Consciousness. Those names do not mean a mind that knows. Active knowing belongs to the sentient unit, never to the ground.</a:t>
             </a:r>
           </a:p>
         </p:txBody>
@@ -2846,7 +2827,7 @@
         <p:nvSpPr>
           <p:cNvPr id="4" name="Slide Number Placeholder 3"/>
           <p:cNvSpPr>
-            <a:spLocks noGrp="1"/>
+            <a:spLocks xmlns:a="http://schemas.openxmlformats.org/drawingml/2006/main" noGrp="1"/>
           </p:cNvSpPr>
           <p:nvPr>
             <p:ph type="sldNum" idx="5"/>
@@ -2854,21 +2835,21 @@
         </p:nvSpPr>
         <p:spPr/>
         <p:txBody>
-          <a:bodyPr/>
-          <a:lstStyle/>
-          <a:p/>
+          <a:bodyPr xmlns:a="http://schemas.openxmlformats.org/drawingml/2006/main"/>
+          <a:lstStyle xmlns:a="http://schemas.openxmlformats.org/drawingml/2006/main"/>
+          <a:p xmlns:a="http://schemas.openxmlformats.org/drawingml/2006/main"/>
         </p:txBody>
       </p:sp>
     </p:spTree>
   </p:cSld>
   <p:clrMapOvr>
-    <a:masterClrMapping/>
+    <a:masterClrMapping xmlns:a="http://schemas.openxmlformats.org/drawingml/2006/main"/>
   </p:clrMapOvr>
 </p:notes>
 </file>
 
-<file path=ppt/notesSlides/notesSlide7.xml><?xml version="1.0" encoding="utf-8"?>
-<p:notes xmlns:a="http://schemas.openxmlformats.org/drawingml/2006/main" xmlns:p="http://schemas.openxmlformats.org/presentationml/2006/main">
+<file path=ppt/notesSlides/notesSlide6.xml><?xml version="1.0" encoding="utf-8"?>
+<p:notes xmlns:p="http://schemas.openxmlformats.org/presentationml/2006/main">
   <p:cSld>
     <p:spTree>
       <p:nvGrpSpPr>
@@ -2877,13 +2858,13 @@
         <p:nvPr/>
       </p:nvGrpSpPr>
       <p:grpSpPr>
-        <a:xfrm/>
+        <a:xfrm xmlns:a="http://schemas.openxmlformats.org/drawingml/2006/main"/>
       </p:grpSpPr>
       <p:sp>
         <p:nvSpPr>
           <p:cNvPr id="2" name="Slide Image Placeholder 1"/>
           <p:cNvSpPr>
-            <a:spLocks noGrp="1"/>
+            <a:spLocks xmlns:a="http://schemas.openxmlformats.org/drawingml/2006/main" noGrp="1"/>
           </p:cNvSpPr>
           <p:nvPr>
             <p:ph type="sldImg" idx="0"/>
@@ -2895,7 +2876,7 @@
         <p:nvSpPr>
           <p:cNvPr id="3" name="Notes Placeholder 2"/>
           <p:cNvSpPr>
-            <a:spLocks noGrp="1"/>
+            <a:spLocks xmlns:a="http://schemas.openxmlformats.org/drawingml/2006/main" noGrp="1"/>
           </p:cNvSpPr>
           <p:nvPr>
             <p:ph type="body" idx="1"/>
@@ -2903,31 +2884,36 @@
         </p:nvSpPr>
         <p:spPr/>
         <p:txBody>
-          <a:bodyPr/>
-          <a:lstStyle/>
-          <a:p>
-            <a:r>
-              <a:t>One consequence of the last slide deserves its own moment, because it answers the second of our opening questions.</a:t>
-            </a:r>
-          </a:p>
-          <a:p>
-            <a:r>
-              <a:t>If no division of a unit can put any fragment outside the ground, then nothing that exists can be annihilated. And nothing arises from non-being either. So existence does not begin and does not end. What begins and ends is composition — particular arrangements of units.</a:t>
-            </a:r>
-          </a:p>
-          <a:p>
-            <a:r>
-              <a:t>Notice carefully what that does and does not claim. A compound decomposes. A body dies. Those organisations genuinely end. What continues is their constituents, in other relations. Perpetuity belongs to coexistence, not to any particular configuration.</a:t>
-            </a:r>
-          </a:p>
-          <a:p>
-            <a:r>
-              <a:t>Second point, and this one matters for how you hear the rest of the session. The texts call Omnipresence the supreme cause, and that phrase invites a misreading. It is cause only in the sustaining sense — no activity exists apart from nature saturated in it. It starts no particular change. Composition, decomposition, and development occur as unit-activity in mutuality. Karma and humane conduct belong to the human joint form. So there is no creator in this account, and no ruler issuing instructions.</a:t>
-            </a:r>
-          </a:p>
-          <a:p>
-            <a:r>
-              <a:t>Third, time. Time here is not a container existing alongside the ground and the units. Time is the duration of activity, reckoned from recurrent activities — a rotation, a year. The ground does not transform, so it is not temporal in the way unit-activity is measured.</a:t>
+          <a:bodyPr xmlns:a="http://schemas.openxmlformats.org/drawingml/2006/main"/>
+          <a:lstStyle xmlns:a="http://schemas.openxmlformats.org/drawingml/2006/main"/>
+          <a:p xmlns:a="http://schemas.openxmlformats.org/drawingml/2006/main">
+            <a:r>
+              <a:t>Saturation names the inseparability of units and Omnipresence. Every formful unit is soaked, submerged, and surrounded in the same pervasive reality.</a:t>
+            </a:r>
+          </a:p>
+          <a:p xmlns:a="http://schemas.openxmlformats.org/drawingml/2006/main">
+            <a:r>
+              <a:t>Because that reality is permeating, dividing a unit leaves every fragment saturated in it. There is no fragment outside the ground. This is why the texts connect saturation with non-annihilation, and why saturation names an ever-present condition.</a:t>
+            </a:r>
+          </a:p>
+          <a:p xmlns:a="http://schemas.openxmlformats.org/drawingml/2006/main">
+            <a:r>
+              <a:t>The three descriptions have overlapping connections. Soakedness is evidenced as energy-fullness and forcefulness. The unit bears energy and definite relative power. The texts explicitly locate the root of its manifestness, or prakashmanata, in force-endowment while saturated in Omnipresence.</a:t>
+            </a:r>
+          </a:p>
+          <a:p xmlns:a="http://schemas.openxmlformats.org/drawingml/2006/main">
+            <a:r>
+              <a:t>Submersion is expressed in activeness and recognition in mutuality. Units are present in the same pervasive reality and are imaged to one another. The formula linking unit-ness and energy-fullness with activeness belongs to this connected account.</a:t>
+            </a:r>
+          </a:p>
+          <a:p xmlns:a="http://schemas.openxmlformats.org/drawingml/2006/main">
+            <a:r>
+              <a:t>Surroundedness is evidenced as regulation. Units remain in definite relations and regulate their activities through their own mediative organisation. Slide 22 develops this.</a:t>
+            </a:r>
+          </a:p>
+          <a:p xmlns:a="http://schemas.openxmlformats.org/drawingml/2006/main">
+            <a:r>
+              <a:t>These descriptions belong together. The source passages connect them in more than one way, so each card should be read as part of one saturation. Slide 8 develops imaging and recognition. This is the darshan's ontological account; a quantitative physical mechanism would require further evidence.</a:t>
             </a:r>
           </a:p>
         </p:txBody>
@@ -2936,7 +2922,7 @@
         <p:nvSpPr>
           <p:cNvPr id="4" name="Slide Number Placeholder 3"/>
           <p:cNvSpPr>
-            <a:spLocks noGrp="1"/>
+            <a:spLocks xmlns:a="http://schemas.openxmlformats.org/drawingml/2006/main" noGrp="1"/>
           </p:cNvSpPr>
           <p:nvPr>
             <p:ph type="sldNum" idx="5"/>
@@ -2944,21 +2930,21 @@
         </p:nvSpPr>
         <p:spPr/>
         <p:txBody>
-          <a:bodyPr/>
-          <a:lstStyle/>
-          <a:p/>
+          <a:bodyPr xmlns:a="http://schemas.openxmlformats.org/drawingml/2006/main"/>
+          <a:lstStyle xmlns:a="http://schemas.openxmlformats.org/drawingml/2006/main"/>
+          <a:p xmlns:a="http://schemas.openxmlformats.org/drawingml/2006/main"/>
         </p:txBody>
       </p:sp>
     </p:spTree>
   </p:cSld>
   <p:clrMapOvr>
-    <a:masterClrMapping/>
+    <a:masterClrMapping xmlns:a="http://schemas.openxmlformats.org/drawingml/2006/main"/>
   </p:clrMapOvr>
 </p:notes>
 </file>
 
-<file path=ppt/notesSlides/notesSlide8.xml><?xml version="1.0" encoding="utf-8"?>
-<p:notes xmlns:a="http://schemas.openxmlformats.org/drawingml/2006/main" xmlns:p="http://schemas.openxmlformats.org/presentationml/2006/main">
+<file path=ppt/notesSlides/notesSlide7.xml><?xml version="1.0" encoding="utf-8"?>
+<p:notes xmlns:p="http://schemas.openxmlformats.org/presentationml/2006/main">
   <p:cSld>
     <p:spTree>
       <p:nvGrpSpPr>
@@ -2967,13 +2953,13 @@
         <p:nvPr/>
       </p:nvGrpSpPr>
       <p:grpSpPr>
-        <a:xfrm/>
+        <a:xfrm xmlns:a="http://schemas.openxmlformats.org/drawingml/2006/main"/>
       </p:grpSpPr>
       <p:sp>
         <p:nvSpPr>
           <p:cNvPr id="2" name="Slide Image Placeholder 1"/>
           <p:cNvSpPr>
-            <a:spLocks noGrp="1"/>
+            <a:spLocks xmlns:a="http://schemas.openxmlformats.org/drawingml/2006/main" noGrp="1"/>
           </p:cNvSpPr>
           <p:nvPr>
             <p:ph type="sldImg" idx="0"/>
@@ -2985,7 +2971,7 @@
         <p:nvSpPr>
           <p:cNvPr id="3" name="Notes Placeholder 2"/>
           <p:cNvSpPr>
-            <a:spLocks noGrp="1"/>
+            <a:spLocks xmlns:a="http://schemas.openxmlformats.org/drawingml/2006/main" noGrp="1"/>
           </p:cNvSpPr>
           <p:nvPr>
             <p:ph type="body" idx="1"/>
@@ -2993,46 +2979,31 @@
         </p:nvSpPr>
         <p:spPr/>
         <p:txBody>
-          <a:bodyPr/>
-          <a:lstStyle/>
-          <a:p>
-            <a:r>
-              <a:t>So far the relation I have described runs between each unit and the ground. There is a second relation, and without it nothing else in this account works — not value, not relationship, not justice, and not the drive we are about to follow.</a:t>
-            </a:r>
-          </a:p>
-          <a:p>
-            <a:r>
-              <a:t>Here is where it comes from. Existence is countless units, each with definite limits, in one pervasive reality. That fact — bounded plurality — is itself what makes recognition possible. The text puts it almost casually: “a provision for one unit to recognise another got manifest in existence.” Because there are many bounded things in one ground, each one stands in definite relation to the others.</a:t>
-            </a:r>
-          </a:p>
-          <a:p>
-            <a:r>
-              <a:t>So complementarity is *given* in coexistence. Not created by us. Not agreed between parties. Not a value we project onto a neutral world. It is a feature of what exists.</a:t>
-            </a:r>
-          </a:p>
-          <a:p>
-            <a:r>
-              <a:t>Three things follow, and they are the three cards.</a:t>
-            </a:r>
-          </a:p>
-          <a:p>
-            <a:r>
-              <a:t>Recognition first. A unit recognises another by responding according to definite constitution, distance, force, and relation. No cognition is involved — please do not hear "recognition" as a mental act. Heat is accepted and redistributed by matter. Particles hold definite distance in an atom. Atoms combine in definite ways and not others. That is recognition in the insentient orders, and the texts name the equipment for it: capacity, ability, receptivity.</a:t>
-            </a:r>
-          </a:p>
-          <a:p>
-            <a:r>
-              <a:t>Complementarity second. Nothing in nature exists in isolation, and each unit is a whole along with its environment. Now the consequence people find surprising: value, in the universal sense, is essentiality and participation in orderliness — the definite conduct through which a unit complements others. Usefulness is that essentiality as it appears in objects; it is not the whole of value. Value is ontological here. It is not assigned by an observer, and it is not a human invention layered on top of physics.</a:t>
-            </a:r>
-          </a:p>
-          <a:p>
-            <a:r>
-              <a:t>Fulfilment third. Fulfilment is the participation that follows recognition, according to constitution and order. Below the human order it is definite — it happens. At the human order it must be achieved, through knowing and believing. Which is precisely why, at the human order alone, it can fail.</a:t>
-            </a:r>
-          </a:p>
-          <a:p>
-            <a:r>
-              <a:t>And now the sentence I want you to carry through the rest of the session, because everything from here specifies it: the completeness drive is the drive to fulfil this complementarity. When we get to the composing line, the texts call it a natural inclination toward coexistence. When we get to the sentience threshold, it is hungry atoms and overfull atoms completing each other. When we get to justice, it is complementarity fulfilled knowingly between human beings. Same thing, three registers.</a:t>
+          <a:bodyPr xmlns:a="http://schemas.openxmlformats.org/drawingml/2006/main"/>
+          <a:lstStyle xmlns:a="http://schemas.openxmlformats.org/drawingml/2006/main"/>
+          <a:p xmlns:a="http://schemas.openxmlformats.org/drawingml/2006/main">
+            <a:r>
+              <a:t>One consequence of the last slide deserves its own moment, because it answers the second of our opening questions.</a:t>
+            </a:r>
+          </a:p>
+          <a:p xmlns:a="http://schemas.openxmlformats.org/drawingml/2006/main">
+            <a:r>
+              <a:t>If no division of a unit can put any fragment outside the ground, then nothing that exists can be annihilated. And nothing arises from non-being either. So existence does not begin and does not end. What begins and ends is composition — particular arrangements of units.</a:t>
+            </a:r>
+          </a:p>
+          <a:p xmlns:a="http://schemas.openxmlformats.org/drawingml/2006/main">
+            <a:r>
+              <a:t>Notice carefully what that does and does not claim. A compound decomposes. A body dies. Those organisations genuinely end. What continues is their constituents, in other relations. Perpetuity belongs to coexistence, not to any particular configuration.</a:t>
+            </a:r>
+          </a:p>
+          <a:p xmlns:a="http://schemas.openxmlformats.org/drawingml/2006/main">
+            <a:r>
+              <a:t>Second point, and this one matters for how you hear the rest of the session. The texts call Omnipresence the supreme cause, and that phrase invites a misreading. It is cause only in the sustaining sense — no activity exists apart from nature saturated in it. It starts no particular change. Composition, decomposition, and development occur as unit-activity in mutuality. Karma and humane conduct belong to the human joint form. So there is no creator in this account, and no ruler issuing instructions.</a:t>
+            </a:r>
+          </a:p>
+          <a:p xmlns:a="http://schemas.openxmlformats.org/drawingml/2006/main">
+            <a:r>
+              <a:t>Third, time. Time here is not a container existing alongside the ground and the units. Time is the duration of activity, reckoned from recurrent activities — a rotation, a year. The ground does not transform, so it is not temporal in the way unit-activity is measured.</a:t>
             </a:r>
           </a:p>
         </p:txBody>
@@ -3041,7 +3012,7 @@
         <p:nvSpPr>
           <p:cNvPr id="4" name="Slide Number Placeholder 3"/>
           <p:cNvSpPr>
-            <a:spLocks noGrp="1"/>
+            <a:spLocks xmlns:a="http://schemas.openxmlformats.org/drawingml/2006/main" noGrp="1"/>
           </p:cNvSpPr>
           <p:nvPr>
             <p:ph type="sldNum" idx="5"/>
@@ -3049,21 +3020,21 @@
         </p:nvSpPr>
         <p:spPr/>
         <p:txBody>
-          <a:bodyPr/>
-          <a:lstStyle/>
-          <a:p/>
+          <a:bodyPr xmlns:a="http://schemas.openxmlformats.org/drawingml/2006/main"/>
+          <a:lstStyle xmlns:a="http://schemas.openxmlformats.org/drawingml/2006/main"/>
+          <a:p xmlns:a="http://schemas.openxmlformats.org/drawingml/2006/main"/>
         </p:txBody>
       </p:sp>
     </p:spTree>
   </p:cSld>
   <p:clrMapOvr>
-    <a:masterClrMapping/>
+    <a:masterClrMapping xmlns:a="http://schemas.openxmlformats.org/drawingml/2006/main"/>
   </p:clrMapOvr>
 </p:notes>
 </file>
 
-<file path=ppt/notesSlides/notesSlide9.xml><?xml version="1.0" encoding="utf-8"?>
-<p:notes xmlns:a="http://schemas.openxmlformats.org/drawingml/2006/main" xmlns:p="http://schemas.openxmlformats.org/presentationml/2006/main">
+<file path=ppt/notesSlides/notesSlide8.xml><?xml version="1.0" encoding="utf-8"?>
+<p:notes xmlns:p="http://schemas.openxmlformats.org/presentationml/2006/main">
   <p:cSld>
     <p:spTree>
       <p:nvGrpSpPr>
@@ -3072,13 +3043,13 @@
         <p:nvPr/>
       </p:nvGrpSpPr>
       <p:grpSpPr>
-        <a:xfrm/>
+        <a:xfrm xmlns:a="http://schemas.openxmlformats.org/drawingml/2006/main"/>
       </p:grpSpPr>
       <p:sp>
         <p:nvSpPr>
           <p:cNvPr id="2" name="Slide Image Placeholder 1"/>
           <p:cNvSpPr>
-            <a:spLocks noGrp="1"/>
+            <a:spLocks xmlns:a="http://schemas.openxmlformats.org/drawingml/2006/main" noGrp="1"/>
           </p:cNvSpPr>
           <p:nvPr>
             <p:ph type="sldImg" idx="0"/>
@@ -3090,7 +3061,7 @@
         <p:nvSpPr>
           <p:cNvPr id="3" name="Notes Placeholder 2"/>
           <p:cNvSpPr>
-            <a:spLocks noGrp="1"/>
+            <a:spLocks xmlns:a="http://schemas.openxmlformats.org/drawingml/2006/main" noGrp="1"/>
           </p:cNvSpPr>
           <p:nvPr>
             <p:ph type="body" idx="1"/>
@@ -3098,46 +3069,46 @@
         </p:nvSpPr>
         <p:spPr/>
         <p:txBody>
-          <a:bodyPr/>
-          <a:lstStyle/>
-          <a:p>
-            <a:r>
-              <a:t>What is every unit? Four inseparable aspects — not a static checklist pasted onto things, but how a definite bearer shows up in the world.</a:t>
-            </a:r>
-          </a:p>
-          <a:p>
-            <a:r>
-              <a:t>Form is real boundary and configuration. Take the peepal tree on the slide: one bounded living form with trunk, branches, leaves, and roots.</a:t>
-            </a:r>
-          </a:p>
-          <a:p>
-            <a:r>
-              <a:t>Properties — capacities and relative effects. In the peepal: nutrition, growth, repair, seed production, degeneration under definite conditions.</a:t>
-            </a:r>
-          </a:p>
-          <a:p>
-            <a:r>
-              <a:t>Essential nature is usefulness in context: vitalising while the living organisation holds; devitalising when it breaks down.</a:t>
-            </a:r>
-          </a:p>
-          <a:p>
-            <a:r>
-              <a:t>Innateness — dharma in this technical sense — is what cannot be separated from the unit, plus order-specific fulfilment. For the peepal: existence plus growth. Seed-conformance is how it conducts itself, not an extra label piled on top.</a:t>
-            </a:r>
-          </a:p>
-          <a:p>
-            <a:r>
-              <a:t>Form is real; what another unit encounters is its definite presentation in mutual facing. In non-sentient nature these aspects are definite. Misreading arises mainly in human living, when the sentient unit mistakes the body for the self.</a:t>
-            </a:r>
-          </a:p>
-          <a:p>
-            <a:r>
-              <a:t>And notice: the tree as a composite can die while its material constituents persist. Persistence of existence is not persistence of one configuration.</a:t>
-            </a:r>
-          </a:p>
-          <a:p>
-            <a:r>
-              <a:t>The same unit is known in three complementary aspects, not three worlds. Inherent truth is what the unit is. Positional truth is how it stands among others. Existential truth is that it exists in Omnipresence.</a:t>
+          <a:bodyPr xmlns:a="http://schemas.openxmlformats.org/drawingml/2006/main"/>
+          <a:lstStyle xmlns:a="http://schemas.openxmlformats.org/drawingml/2006/main"/>
+          <a:p xmlns:a="http://schemas.openxmlformats.org/drawingml/2006/main">
+            <a:r>
+              <a:t>So far the relation I have described runs between each unit and the ground. There is a second relation, and without it nothing else in this account works — not value, not relationship, not justice, and not the drive we are about to follow.</a:t>
+            </a:r>
+          </a:p>
+          <a:p xmlns:a="http://schemas.openxmlformats.org/drawingml/2006/main">
+            <a:r>
+              <a:t>Here is where it comes from. Existence is countless units, each with definite limits, in one pervasive reality. That fact — bounded plurality — is itself what makes recognition possible. The text puts it almost casually: “a provision for one unit to recognise another got manifest in existence.” Because there are many bounded things in one ground, each one stands in definite relation to the others.</a:t>
+            </a:r>
+          </a:p>
+          <a:p xmlns:a="http://schemas.openxmlformats.org/drawingml/2006/main">
+            <a:r>
+              <a:t>So complementarity is *given* in coexistence. Not created by us. Not agreed between parties. Not a value we project onto a neutral world. It is a feature of what exists.</a:t>
+            </a:r>
+          </a:p>
+          <a:p xmlns:a="http://schemas.openxmlformats.org/drawingml/2006/main">
+            <a:r>
+              <a:t>Three things follow, and they are the three cards.</a:t>
+            </a:r>
+          </a:p>
+          <a:p xmlns:a="http://schemas.openxmlformats.org/drawingml/2006/main">
+            <a:r>
+              <a:t>Recognition first. Units are imaged to one another in mutual facing. The image, called pratibimb, provides a basis of mutual recognition. This includes insentient units. Their relative powers also exert effects: heat exchange and particle relations illustrate responsiveness. Imaging and influence have distinct roles in the same mutuality. Neither implies that an insentient unit understands as a person does. Human understanding involves the knowing activities of jeevan.</a:t>
+            </a:r>
+          </a:p>
+          <a:p xmlns:a="http://schemas.openxmlformats.org/drawingml/2006/main">
+            <a:r>
+              <a:t>Complementarity second. Nothing in nature exists in isolation, and each unit is a whole along with its environment. Now the consequence people find surprising: value, in the universal sense, is essentiality and participation in orderliness — the definite conduct through which a unit complements others. Usefulness is that essentiality as it appears in objects; it is not the whole of value. Value is ontological here. It is not assigned by an observer, and it is not a human invention layered on top of physics.</a:t>
+            </a:r>
+          </a:p>
+          <a:p xmlns:a="http://schemas.openxmlformats.org/drawingml/2006/main">
+            <a:r>
+              <a:t>Fulfilment third. Fulfilment is the participation that follows recognition, according to constitution and order. Below the human order it is definite — it happens. At the human order it must be achieved, through knowing and believing. Which is precisely why, at the human order alone, it can fail.</a:t>
+            </a:r>
+          </a:p>
+          <a:p xmlns:a="http://schemas.openxmlformats.org/drawingml/2006/main">
+            <a:r>
+              <a:t>And now the sentence I want you to carry through the rest of the session, because everything from here specifies it: the completeness drive is the drive to fulfil this complementarity. When we get to the composing line, the texts call it a natural inclination toward coexistence. When we get to the sentience threshold, it is hungry atoms and overfull atoms completing each other. When we get to justice, it is complementarity fulfilled knowingly between human beings. Same thing, three registers.</a:t>
             </a:r>
           </a:p>
         </p:txBody>
@@ -3146,7 +3117,7 @@
         <p:nvSpPr>
           <p:cNvPr id="4" name="Slide Number Placeholder 3"/>
           <p:cNvSpPr>
-            <a:spLocks noGrp="1"/>
+            <a:spLocks xmlns:a="http://schemas.openxmlformats.org/drawingml/2006/main" noGrp="1"/>
           </p:cNvSpPr>
           <p:nvPr>
             <p:ph type="sldNum" idx="5"/>
@@ -3154,15 +3125,120 @@
         </p:nvSpPr>
         <p:spPr/>
         <p:txBody>
-          <a:bodyPr/>
-          <a:lstStyle/>
-          <a:p/>
+          <a:bodyPr xmlns:a="http://schemas.openxmlformats.org/drawingml/2006/main"/>
+          <a:lstStyle xmlns:a="http://schemas.openxmlformats.org/drawingml/2006/main"/>
+          <a:p xmlns:a="http://schemas.openxmlformats.org/drawingml/2006/main"/>
         </p:txBody>
       </p:sp>
     </p:spTree>
   </p:cSld>
   <p:clrMapOvr>
-    <a:masterClrMapping/>
+    <a:masterClrMapping xmlns:a="http://schemas.openxmlformats.org/drawingml/2006/main"/>
+  </p:clrMapOvr>
+</p:notes>
+</file>
+
+<file path=ppt/notesSlides/notesSlide9.xml><?xml version="1.0" encoding="utf-8"?>
+<p:notes xmlns:p="http://schemas.openxmlformats.org/presentationml/2006/main">
+  <p:cSld>
+    <p:spTree>
+      <p:nvGrpSpPr>
+        <p:cNvPr id="1" name=""/>
+        <p:cNvGrpSpPr/>
+        <p:nvPr/>
+      </p:nvGrpSpPr>
+      <p:grpSpPr>
+        <a:xfrm xmlns:a="http://schemas.openxmlformats.org/drawingml/2006/main"/>
+      </p:grpSpPr>
+      <p:sp>
+        <p:nvSpPr>
+          <p:cNvPr id="2" name="Slide Image Placeholder 1"/>
+          <p:cNvSpPr>
+            <a:spLocks xmlns:a="http://schemas.openxmlformats.org/drawingml/2006/main" noGrp="1"/>
+          </p:cNvSpPr>
+          <p:nvPr>
+            <p:ph type="sldImg" idx="0"/>
+          </p:nvPr>
+        </p:nvSpPr>
+        <p:spPr/>
+      </p:sp>
+      <p:sp>
+        <p:nvSpPr>
+          <p:cNvPr id="3" name="Notes Placeholder 2"/>
+          <p:cNvSpPr>
+            <a:spLocks xmlns:a="http://schemas.openxmlformats.org/drawingml/2006/main" noGrp="1"/>
+          </p:cNvSpPr>
+          <p:nvPr>
+            <p:ph type="body" idx="1"/>
+          </p:nvPr>
+        </p:nvSpPr>
+        <p:spPr/>
+        <p:txBody>
+          <a:bodyPr xmlns:a="http://schemas.openxmlformats.org/drawingml/2006/main"/>
+          <a:lstStyle xmlns:a="http://schemas.openxmlformats.org/drawingml/2006/main"/>
+          <a:p xmlns:a="http://schemas.openxmlformats.org/drawingml/2006/main">
+            <a:r>
+              <a:t>What is every unit? Four inseparable aspects — not a static checklist pasted onto things, but how a definite bearer shows up in the world.</a:t>
+            </a:r>
+          </a:p>
+          <a:p xmlns:a="http://schemas.openxmlformats.org/drawingml/2006/main">
+            <a:r>
+              <a:t>Form is the real configuration of the unit: shape, volume, and density. The constituted unit is bimb. Its image in mutual facing is pratibimb, and being imaged is pratibimban. Take the peepal tree: one bounded living form with trunk, branches, leaves, and roots.</a:t>
+            </a:r>
+          </a:p>
+          <a:p xmlns:a="http://schemas.openxmlformats.org/drawingml/2006/main">
+            <a:r>
+              <a:t>Properties are relative powers inseparable from their bearer. In the peepal, nutrition, repair, seed production, and degeneration become effective under definite conditions.</a:t>
+            </a:r>
+          </a:p>
+          <a:p xmlns:a="http://schemas.openxmlformats.org/drawingml/2006/main">
+            <a:r>
+              <a:t>Essential nature is usefulness in context: vitalising while the living organisation holds; devitalising when it breaks down.</a:t>
+            </a:r>
+          </a:p>
+          <a:p xmlns:a="http://schemas.openxmlformats.org/drawingml/2006/main">
+            <a:r>
+              <a:t>Innateness — dharma in this technical sense — is what cannot be separated from the unit, plus order-specific fulfilment. For the peepal: existence plus growth. Seed-conformance is how it conducts itself, not an extra label piled on top.</a:t>
+            </a:r>
+          </a:p>
+          <a:p xmlns:a="http://schemas.openxmlformats.org/drawingml/2006/main">
+            <a:r>
+              <a:t>The whole unit is manifest, or prakashman, with all four aspects. Imaging is central to prakash. This is a claim about how units are manifest to one another; completed human understanding also requires knowing their relations and fulfilment. An image alone does not deliver that understanding. Animal recognition of essential nature becomes evident in friendliness and opposition; human living brings the exchange of values and evaluation of dharma.</a:t>
+            </a:r>
+          </a:p>
+          <a:p xmlns:a="http://schemas.openxmlformats.org/drawingml/2006/main">
+            <a:r>
+              <a:t>And notice: the tree as a composite can die while its material constituents persist. Persistence of existence is not persistence of one configuration.</a:t>
+            </a:r>
+          </a:p>
+          <a:p xmlns:a="http://schemas.openxmlformats.org/drawingml/2006/main">
+            <a:r>
+              <a:t>The same unit is known in three complementary aspects, not three worlds. Inherent truth is what the unit is. Positional truth is how it stands among others. Existential truth is that it exists in Omnipresence.</a:t>
+            </a:r>
+          </a:p>
+        </p:txBody>
+      </p:sp>
+      <p:sp>
+        <p:nvSpPr>
+          <p:cNvPr id="4" name="Slide Number Placeholder 3"/>
+          <p:cNvSpPr>
+            <a:spLocks xmlns:a="http://schemas.openxmlformats.org/drawingml/2006/main" noGrp="1"/>
+          </p:cNvSpPr>
+          <p:nvPr>
+            <p:ph type="sldNum" idx="5"/>
+          </p:nvPr>
+        </p:nvSpPr>
+        <p:spPr/>
+        <p:txBody>
+          <a:bodyPr xmlns:a="http://schemas.openxmlformats.org/drawingml/2006/main"/>
+          <a:lstStyle xmlns:a="http://schemas.openxmlformats.org/drawingml/2006/main"/>
+          <a:p xmlns:a="http://schemas.openxmlformats.org/drawingml/2006/main"/>
+        </p:txBody>
+      </p:sp>
+    </p:spTree>
+  </p:cSld>
+  <p:clrMapOvr>
+    <a:masterClrMapping xmlns:a="http://schemas.openxmlformats.org/drawingml/2006/main"/>
   </p:clrMapOvr>
 </p:notes>
 </file>
@@ -3212,7 +3288,7 @@
   </p:cSld>
   <p:clrMap bg1="lt1" tx1="dk1" bg2="dk2" tx2="lt2" accent1="accent1" accent2="accent2" accent3="accent3" accent4="accent4" accent5="accent5" accent6="accent6" hlink="hlink" folHlink="folHlink"/>
   <p:sldLayoutIdLst>
-    <p:sldLayoutId xmlns:r="http://schemas.openxmlformats.org/officeDocument/2006/relationships" id="2147483649" r:id="R2110124672a94979"/>
+    <p:sldLayoutId xmlns:r="http://schemas.openxmlformats.org/officeDocument/2006/relationships" id="2147483649" r:id="Re7697e0dc1d940ac"/>
   </p:sldLayoutIdLst>
   <p:hf sldNum="0" hdr="0" ftr="0" dt="0"/>
   <p:txStyles>
@@ -4791,7 +4867,7 @@
                 <a:ea typeface="Calibri"/>
                 <a:cs typeface="Calibri"/>
               </a:rPr>
-              <a:t>Primary texts of Shri A. Nagraj — MVD · KD · SB · JV (tr. Rakesh Gupta)</a:t>
+              <a:t>Primary texts of Shri A. Nagraj: MVD, KD, SB, JV and Hindi Paribhasha Samhita</a:t>
             </a:r>
           </a:p>
         </p:txBody>
@@ -17466,7 +17542,7 @@
                 <a:ea typeface="Calibri"/>
                 <a:cs typeface="Calibri"/>
               </a:rPr>
-              <a:t>Jeevan is a constitutionally complete sentient atom. All five faculties and all ten activities belong to it. Animal bodies limit their expression. The human body can express the full range, yet delusion can leave only four and a half effectively organised. Study brings understanding; practice evidences and stabilises it — it does not create missing faculties.</a:t>
+              <a:t>Jeevan bears all five faculties and ten activities. Animal bodies limit their expression; the human medium supports the full range. Inward reflection (pratyavartan) deepens knowing. Imaging between units (pratibimban) provides a basis of recognition.</a:t>
             </a:r>
           </a:p>
         </p:txBody>
@@ -19137,7 +19213,7 @@
                 <a:ea typeface="Calibri"/>
                 <a:cs typeface="Calibri"/>
               </a:rPr>
-              <a:t>Happiness, peace, contentment, and bliss name harmonies within jeevan, not passing moods and not a fourth sequence after T1–T3. All four are what the knowledge order seeks — and only the first is reached by sensory living.</a:t>
+              <a:t>The four harmonies belong to the knowledge-order account of awakening. Bliss is harmony of buddhi and atma; realisation at atma is named ultimate bliss (paramanand). Animal living expresses hope to live through its bodily medium.</a:t>
             </a:r>
           </a:p>
         </p:txBody>
@@ -19327,7 +19403,7 @@
                 <a:ea typeface="Calibri"/>
                 <a:cs typeface="Calibri"/>
               </a:rPr>
-              <a:t>KD §3.12, p. 110–113 (projection–reflection)  ·  JV p. 61 (values ladder)</a:t>
+              <a:t>JV pp. 61, 138  ·  MVD pp. 100–101, 328–346  ·  KD §3.12 (projection and inward reflection)</a:t>
             </a:r>
           </a:p>
         </p:txBody>
@@ -19957,7 +20033,7 @@
                 <a:ea typeface="Calibri"/>
                 <a:cs typeface="Calibri"/>
               </a:rPr>
-              <a:t>How sentient living becomes awakened conduct  —  the human joint form, jeevan’s faculties, the four harmonies, and why the higher three are reached only through performed action: evaluation, realisation, and participation in humane order.</a:t>
+              <a:t>How sentient living becomes awakened conduct: the human joint form, jeevan’s faculties and harmonies, evaluation, realisation, and the expression of understanding through humane conduct.</a:t>
             </a:r>
           </a:p>
         </p:txBody>
@@ -20368,7 +20444,7 @@
                 <a:ea typeface="Calibri"/>
                 <a:cs typeface="Calibri"/>
               </a:rPr>
-              <a:t>Every jeevan bears the same five faculties and ten activities. In animal living, bodily limits keep jeevan's activity within sensory satisfaction and the first harmony. The human body can express all ten — yet by default human evaluation uses the same sensory criteria.</a:t>
+              <a:t>Every jeevan bears five faculties and ten activities. Animal living expresses hope to live within the limits of its bodily medium. The human body supports the full range, while delusion can keep evaluation centred on pleasure, health and profit.</a:t>
             </a:r>
           </a:p>
         </p:txBody>
@@ -21692,7 +21768,7 @@
                 <a:ea typeface="Calibri"/>
                 <a:cs typeface="Calibri"/>
               </a:rPr>
-              <a:t>KD CH. 1 · WHY KNOWING IS NOT ENOUGH</a:t>
+              <a:t>KD CH. 1 · UNDERSTANDING EVIDENCED IN CONDUCT</a:t>
             </a:r>
           </a:p>
         </p:txBody>
@@ -21804,7 +21880,7 @@
                 <a:ea typeface="Calibri"/>
                 <a:cs typeface="Calibri"/>
               </a:rPr>
-              <a:t>Below the human order, fulfilment is definite and needs no deciding. Animal jeevan's activity remains within sensory satisfaction under species-conformance; peace, contentment, and bliss are not in view. The human order is where complementarity must be fulfilled knowingly — study alone does not fulfil it. Book knowledge is half the work; the other half is conduct that fulfils relationships.</a:t>
+              <a:t>Below the human order, fulfilment follows definite conformance. In human living, understanding must become work and behaviour that fulfil relationships. Study, practice, result and purpose become coherent as knowing is evidenced in conduct.</a:t>
             </a:r>
             <a:r>
               <a:rPr sz="1250" b="0" i="0" u="none" cap="none">
@@ -24432,7 +24508,7 @@
                 <a:ea typeface="Calibri"/>
                 <a:cs typeface="Calibri"/>
               </a:rPr>
-              <a:t>KD names six perspectives: pleasant, healthy, profit, justice, dharma, and truth. They widen from sensation, body, and gain to relationship, orderliness, and coexistence. Justice has a dual role: a member of the sixfold set and the principle of fulfilled relationship. The diagram highlights the final three.</a:t>
+              <a:t>Human evaluation requires understanding what is recognised. Six perspectives range from pleasant, healthy and profitable to justice, dharma and truth. Justice also names fulfilled relationship. The diagram highlights the final three.</a:t>
             </a:r>
           </a:p>
         </p:txBody>
@@ -26346,7 +26422,7 @@
                 <a:ea typeface="Calibri"/>
                 <a:cs typeface="Calibri"/>
               </a:rPr>
-              <a:t>form  ·  real structure reflected in mutual facing</a:t>
+              <a:t>form  ·  real structure imaged in mutual facing</a:t>
             </a:r>
           </a:p>
         </p:txBody>
@@ -26402,7 +26478,7 @@
                 <a:ea typeface="Calibri"/>
                 <a:cs typeface="Calibri"/>
               </a:rPr>
-              <a:t>each rung widens the mutual context in which a real unit is understood; the top is a different kind of knowing — coexistence realised, not merely another observed aspect</a:t>
+              <a:t>All four aspects belong to the manifest unit. These rungs widen the context of human understanding; an image alone does not deliver completed knowledge.</a:t>
             </a:r>
           </a:p>
         </p:txBody>
@@ -27304,7 +27380,7 @@
       </p:sp>
       <p:cxnSp>
         <p:nvCxnSpPr>
-          <p:cNvPr id="1158" name="Google Shape;445;p18"/>
+          <p:cNvPr id="1195" name="Google Shape;445;p18"/>
           <p:cNvCxnSpPr/>
           <p:nvPr/>
         </p:nvCxnSpPr>
@@ -27385,7 +27461,7 @@
       </p:sp>
       <p:cxnSp>
         <p:nvCxnSpPr>
-          <p:cNvPr id="1160" name="Google Shape;447;p18"/>
+          <p:cNvPr id="1197" name="Google Shape;447;p18"/>
           <p:cNvCxnSpPr/>
           <p:nvPr/>
         </p:nvCxnSpPr>
@@ -27515,7 +27591,7 @@
                 <a:ea typeface="Calibri"/>
                 <a:cs typeface="Calibri"/>
               </a:rPr>
-              <a:t>The ladders meet at the top: coexistence itself, known and acted on in the core self, is felt as bliss — each lower pair, likewise, only when acted on, not merely known (§1.8, §1.13). MVD p. 11 · JV pp. 61, 120, 138 · MVD pp. 78, 101, 137</a:t>
+              <a:t>Ultimate bliss: realisation at atma. Bliss: buddhi–atma harmony.  ·  PS pp. 119, 121  ·  MVD pp. 100–101  ·  JV pp. 61, 138</a:t>
             </a:r>
           </a:p>
         </p:txBody>
@@ -27971,7 +28047,7 @@
                 <a:ea typeface="Cambria"/>
                 <a:cs typeface="Cambria"/>
               </a:rPr>
-              <a:t>Realisation is bliss</a:t>
+              <a:t>Realisation and ultimate bliss</a:t>
             </a:r>
           </a:p>
         </p:txBody>
@@ -28027,7 +28103,7 @@
                 <a:ea typeface="Calibri"/>
                 <a:cs typeface="Calibri"/>
               </a:rPr>
-              <a:t>“Truth itself is abundance (coexistence), realisation of abundance itself is bliss, bliss itself is jeevan.” And it is knowledge itself: what is realised is the ground the unit was always soaked in.</a:t>
+              <a:t>Realisation at atma is named ultimate bliss. Bliss names the harmony of buddhi and atma. Understanding becomes evident through authentic work, behaviour and participation.</a:t>
             </a:r>
           </a:p>
         </p:txBody>
@@ -28587,7 +28663,7 @@
                 <a:ea typeface="Calibri"/>
                 <a:cs typeface="Calibri"/>
               </a:rPr>
-              <a:t>— SB p. 81 (realisation and authenticity)  ·  SB p. 116; MVD p. 126 (threefold knowledge)  ·  KD §§3.17–3.18 (knowledge, knower, known)</a:t>
+              <a:t>SB pp. 81, 116  ·  MVD pp. 100–101, 126, 328  ·  KD §§3.17–3.18  ·  Study §§1.8, 1.13</a:t>
             </a:r>
           </a:p>
         </p:txBody>
@@ -28603,6 +28679,1135 @@
 </file>
 
 <file path=ppt/slides/slide26.xml><?xml version="1.0" encoding="utf-8"?>
+<p:sld xmlns:p="http://schemas.openxmlformats.org/presentationml/2006/main">
+  <p:cSld>
+    <p:bg>
+      <p:bgPr>
+        <a:solidFill xmlns:a="http://schemas.openxmlformats.org/drawingml/2006/main">
+          <a:srgbClr val="FFFFFF"/>
+        </a:solidFill>
+      </p:bgPr>
+    </p:bg>
+    <p:spTree>
+      <p:nvGrpSpPr>
+        <p:cNvPr id="1" name=""/>
+        <p:cNvGrpSpPr/>
+        <p:nvPr/>
+      </p:nvGrpSpPr>
+      <p:grpSpPr>
+        <a:xfrm xmlns:a="http://schemas.openxmlformats.org/drawingml/2006/main"/>
+      </p:grpSpPr>
+      <p:sp>
+        <p:nvSpPr>
+          <p:cNvPr id="94" name="Google Shape;94;p6">
+            <a:extLst xmlns:a="http://schemas.openxmlformats.org/drawingml/2006/main">
+              <a:ext uri="{FF2B5EF4-FFF2-40B4-BE49-F238E27FC236}">
+                <a16:creationId xmlns:a16="http://schemas.microsoft.com/office/drawing/2014/main" id="{7E09CA70-3709-4185-A286-A0C79A3CD052}"/>
+              </a:ext>
+            </a:extLst>
+          </p:cNvPr>
+          <p:cNvSpPr>
+            <a:spLocks xmlns:a="http://schemas.openxmlformats.org/drawingml/2006/main" noGrp="1"/>
+          </p:cNvSpPr>
+          <p:nvPr/>
+        </p:nvSpPr>
+        <p:spPr>
+          <a:xfrm xmlns:a="http://schemas.openxmlformats.org/drawingml/2006/main">
+            <a:off x="457200" y="384048"/>
+            <a:ext cx="365760" cy="365760"/>
+          </a:xfrm>
+          <a:prstGeom xmlns:a="http://schemas.openxmlformats.org/drawingml/2006/main" prst="ellipse">
+            <a:avLst/>
+          </a:prstGeom>
+          <a:noFill xmlns:a="http://schemas.openxmlformats.org/drawingml/2006/main"/>
+          <a:ln xmlns:a="http://schemas.openxmlformats.org/drawingml/2006/main" w="15875" cmpd="sng">
+            <a:solidFill>
+              <a:srgbClr val="3B4A7A"/>
+            </a:solidFill>
+            <a:prstDash val="solid"/>
+            <a:headEnd type="none" w="sm" len="sm"/>
+            <a:tailEnd type="none" w="sm" len="sm"/>
+          </a:ln>
+        </p:spPr>
+        <p:txBody>
+          <a:bodyPr xmlns:a="http://schemas.openxmlformats.org/drawingml/2006/main" spcFirstLastPara="1" wrap="square" lIns="91425" tIns="91425" rIns="91425" bIns="91425" anchor="ctr">
+            <a:noAutofit/>
+          </a:bodyPr>
+          <a:lstStyle xmlns:a="http://schemas.openxmlformats.org/drawingml/2006/main"/>
+          <a:p xmlns:a="http://schemas.openxmlformats.org/drawingml/2006/main">
+            <a:pPr marL="0" indent="0" algn="l">
+              <a:spcBef>
+                <a:spcPts val="0"/>
+              </a:spcBef>
+              <a:spcAft>
+                <a:spcPts val="0"/>
+              </a:spcAft>
+              <a:buNone/>
+            </a:pPr>
+          </a:p>
+        </p:txBody>
+      </p:sp>
+      <p:sp>
+        <p:nvSpPr>
+          <p:cNvPr id="95" name="Google Shape;95;p6">
+            <a:extLst xmlns:a="http://schemas.openxmlformats.org/drawingml/2006/main">
+              <a:ext uri="{FF2B5EF4-FFF2-40B4-BE49-F238E27FC236}">
+                <a16:creationId xmlns:a16="http://schemas.microsoft.com/office/drawing/2014/main" id="{2FD50D5A-65A0-4F61-9AE8-297CD8BF0014}"/>
+              </a:ext>
+            </a:extLst>
+          </p:cNvPr>
+          <p:cNvSpPr>
+            <a:spLocks xmlns:a="http://schemas.openxmlformats.org/drawingml/2006/main" noGrp="1"/>
+          </p:cNvSpPr>
+          <p:nvPr/>
+        </p:nvSpPr>
+        <p:spPr>
+          <a:xfrm xmlns:a="http://schemas.openxmlformats.org/drawingml/2006/main">
+            <a:off x="530352" y="457200"/>
+            <a:ext cx="219456" cy="219456"/>
+          </a:xfrm>
+          <a:prstGeom xmlns:a="http://schemas.openxmlformats.org/drawingml/2006/main" prst="ellipse">
+            <a:avLst/>
+          </a:prstGeom>
+          <a:noFill xmlns:a="http://schemas.openxmlformats.org/drawingml/2006/main"/>
+          <a:ln xmlns:a="http://schemas.openxmlformats.org/drawingml/2006/main" w="15875" cmpd="sng">
+            <a:solidFill>
+              <a:srgbClr val="3B4A7A"/>
+            </a:solidFill>
+            <a:prstDash val="solid"/>
+            <a:headEnd type="none" w="sm" len="sm"/>
+            <a:tailEnd type="none" w="sm" len="sm"/>
+          </a:ln>
+        </p:spPr>
+        <p:txBody>
+          <a:bodyPr xmlns:a="http://schemas.openxmlformats.org/drawingml/2006/main" spcFirstLastPara="1" wrap="square" lIns="91425" tIns="91425" rIns="91425" bIns="91425" anchor="ctr">
+            <a:noAutofit/>
+          </a:bodyPr>
+          <a:lstStyle xmlns:a="http://schemas.openxmlformats.org/drawingml/2006/main"/>
+          <a:p xmlns:a="http://schemas.openxmlformats.org/drawingml/2006/main">
+            <a:pPr marL="0" indent="0" algn="l">
+              <a:spcBef>
+                <a:spcPts val="0"/>
+              </a:spcBef>
+              <a:spcAft>
+                <a:spcPts val="0"/>
+              </a:spcAft>
+              <a:buNone/>
+            </a:pPr>
+          </a:p>
+        </p:txBody>
+      </p:sp>
+      <p:sp>
+        <p:nvSpPr>
+          <p:cNvPr id="96" name="Google Shape;96;p6">
+            <a:extLst xmlns:a="http://schemas.openxmlformats.org/drawingml/2006/main">
+              <a:ext uri="{FF2B5EF4-FFF2-40B4-BE49-F238E27FC236}">
+                <a16:creationId xmlns:a16="http://schemas.microsoft.com/office/drawing/2014/main" id="{F0A7EF7D-982B-46DA-8DD8-E6CF99CE992E}"/>
+              </a:ext>
+            </a:extLst>
+          </p:cNvPr>
+          <p:cNvSpPr>
+            <a:spLocks xmlns:a="http://schemas.openxmlformats.org/drawingml/2006/main" noGrp="1"/>
+          </p:cNvSpPr>
+          <p:nvPr/>
+        </p:nvSpPr>
+        <p:spPr>
+          <a:xfrm xmlns:a="http://schemas.openxmlformats.org/drawingml/2006/main">
+            <a:off x="592531" y="519379"/>
+            <a:ext cx="95098" cy="95098"/>
+          </a:xfrm>
+          <a:prstGeom xmlns:a="http://schemas.openxmlformats.org/drawingml/2006/main" prst="ellipse">
+            <a:avLst/>
+          </a:prstGeom>
+          <a:solidFill xmlns:a="http://schemas.openxmlformats.org/drawingml/2006/main">
+            <a:srgbClr val="C9821E"/>
+          </a:solidFill>
+          <a:ln xmlns:a="http://schemas.openxmlformats.org/drawingml/2006/main">
+            <a:noFill/>
+          </a:ln>
+        </p:spPr>
+        <p:txBody>
+          <a:bodyPr xmlns:a="http://schemas.openxmlformats.org/drawingml/2006/main" spcFirstLastPara="1" wrap="square" lIns="91425" tIns="91425" rIns="91425" bIns="91425" anchor="ctr">
+            <a:noAutofit/>
+          </a:bodyPr>
+          <a:lstStyle xmlns:a="http://schemas.openxmlformats.org/drawingml/2006/main"/>
+          <a:p xmlns:a="http://schemas.openxmlformats.org/drawingml/2006/main">
+            <a:pPr marL="0" indent="0" algn="l">
+              <a:spcBef>
+                <a:spcPts val="0"/>
+              </a:spcBef>
+              <a:spcAft>
+                <a:spcPts val="0"/>
+              </a:spcAft>
+              <a:buNone/>
+            </a:pPr>
+          </a:p>
+        </p:txBody>
+      </p:sp>
+      <p:sp>
+        <p:nvSpPr>
+          <p:cNvPr id="97" name="Google Shape;97;p6">
+            <a:extLst xmlns:a="http://schemas.openxmlformats.org/drawingml/2006/main">
+              <a:ext uri="{FF2B5EF4-FFF2-40B4-BE49-F238E27FC236}">
+                <a16:creationId xmlns:a16="http://schemas.microsoft.com/office/drawing/2014/main" id="{3858CC98-154A-4B7E-AFFA-BA5BA35680C4}"/>
+              </a:ext>
+            </a:extLst>
+          </p:cNvPr>
+          <p:cNvSpPr>
+            <a:spLocks xmlns:a="http://schemas.openxmlformats.org/drawingml/2006/main" noGrp="1"/>
+          </p:cNvSpPr>
+          <p:nvPr/>
+        </p:nvSpPr>
+        <p:spPr>
+          <a:xfrm xmlns:a="http://schemas.openxmlformats.org/drawingml/2006/main">
+            <a:off x="960120" y="256032"/>
+            <a:ext cx="7680960" cy="237744"/>
+          </a:xfrm>
+          <a:prstGeom xmlns:a="http://schemas.openxmlformats.org/drawingml/2006/main" prst="rect">
+            <a:avLst/>
+          </a:prstGeom>
+          <a:noFill xmlns:a="http://schemas.openxmlformats.org/drawingml/2006/main"/>
+          <a:ln xmlns:a="http://schemas.openxmlformats.org/drawingml/2006/main">
+            <a:noFill/>
+          </a:ln>
+        </p:spPr>
+        <p:txBody>
+          <a:bodyPr xmlns:a="http://schemas.openxmlformats.org/drawingml/2006/main" spcFirstLastPara="1" wrap="square" lIns="0" tIns="0" rIns="0" bIns="0" anchor="ctr">
+            <a:noAutofit/>
+          </a:bodyPr>
+          <a:lstStyle xmlns:a="http://schemas.openxmlformats.org/drawingml/2006/main"/>
+          <a:p xmlns:a="http://schemas.openxmlformats.org/drawingml/2006/main">
+            <a:pPr marL="0" indent="0" algn="l">
+              <a:spcBef>
+                <a:spcPts val="0"/>
+              </a:spcBef>
+              <a:spcAft>
+                <a:spcPts val="0"/>
+              </a:spcAft>
+              <a:buNone/>
+            </a:pPr>
+            <a:r>
+              <a:rPr sz="1050" b="1" i="0" u="none" cap="none">
+                <a:solidFill>
+                  <a:srgbClr val="9A6414"/>
+                </a:solidFill>
+                <a:latin typeface="Calibri"/>
+                <a:ea typeface="Calibri"/>
+                <a:cs typeface="Calibri"/>
+              </a:rPr>
+              <a:t>§1.13 · PRESENTATION, COMMUNICATION, EXPRESSION AND ART</a:t>
+            </a:r>
+          </a:p>
+        </p:txBody>
+      </p:sp>
+      <p:sp>
+        <p:nvSpPr>
+          <p:cNvPr id="98" name="Google Shape;98;p6">
+            <a:extLst xmlns:a="http://schemas.openxmlformats.org/drawingml/2006/main">
+              <a:ext uri="{FF2B5EF4-FFF2-40B4-BE49-F238E27FC236}">
+                <a16:creationId xmlns:a16="http://schemas.microsoft.com/office/drawing/2014/main" id="{9174C86C-8A33-413C-96B8-C2699E1BE6CE}"/>
+              </a:ext>
+            </a:extLst>
+          </p:cNvPr>
+          <p:cNvSpPr>
+            <a:spLocks xmlns:a="http://schemas.openxmlformats.org/drawingml/2006/main" noGrp="1"/>
+          </p:cNvSpPr>
+          <p:nvPr/>
+        </p:nvSpPr>
+        <p:spPr>
+          <a:xfrm xmlns:a="http://schemas.openxmlformats.org/drawingml/2006/main">
+            <a:off x="960120" y="457200"/>
+            <a:ext cx="7726680" cy="566928"/>
+          </a:xfrm>
+          <a:prstGeom xmlns:a="http://schemas.openxmlformats.org/drawingml/2006/main" prst="rect">
+            <a:avLst/>
+          </a:prstGeom>
+          <a:noFill xmlns:a="http://schemas.openxmlformats.org/drawingml/2006/main"/>
+          <a:ln xmlns:a="http://schemas.openxmlformats.org/drawingml/2006/main">
+            <a:noFill/>
+          </a:ln>
+        </p:spPr>
+        <p:txBody>
+          <a:bodyPr xmlns:a="http://schemas.openxmlformats.org/drawingml/2006/main" spcFirstLastPara="1" wrap="square" lIns="0" tIns="0" rIns="0" bIns="0" anchor="ctr">
+            <a:noAutofit/>
+          </a:bodyPr>
+          <a:lstStyle xmlns:a="http://schemas.openxmlformats.org/drawingml/2006/main"/>
+          <a:p xmlns:a="http://schemas.openxmlformats.org/drawingml/2006/main">
+            <a:pPr marL="0" indent="0" algn="l">
+              <a:spcBef>
+                <a:spcPts val="0"/>
+              </a:spcBef>
+              <a:spcAft>
+                <a:spcPts val="0"/>
+              </a:spcAft>
+              <a:buNone/>
+            </a:pPr>
+            <a:r>
+              <a:rPr sz="3000" b="1" i="0" u="none" cap="none">
+                <a:solidFill>
+                  <a:srgbClr val="1E2447"/>
+                </a:solidFill>
+                <a:latin typeface="Cambria"/>
+                <a:ea typeface="Cambria"/>
+                <a:cs typeface="Cambria"/>
+              </a:rPr>
+              <a:t>Understanding in Expression</a:t>
+            </a:r>
+          </a:p>
+        </p:txBody>
+      </p:sp>
+      <p:sp>
+        <p:nvSpPr>
+          <p:cNvPr id="99" name="Google Shape;99;p6">
+            <a:extLst xmlns:a="http://schemas.openxmlformats.org/drawingml/2006/main">
+              <a:ext uri="{FF2B5EF4-FFF2-40B4-BE49-F238E27FC236}">
+                <a16:creationId xmlns:a16="http://schemas.microsoft.com/office/drawing/2014/main" id="{13839739-2064-4FB0-BDE7-EDAD103F9CAE}"/>
+              </a:ext>
+            </a:extLst>
+          </p:cNvPr>
+          <p:cNvSpPr>
+            <a:spLocks xmlns:a="http://schemas.openxmlformats.org/drawingml/2006/main" noGrp="1"/>
+          </p:cNvSpPr>
+          <p:nvPr/>
+        </p:nvSpPr>
+        <p:spPr>
+          <a:xfrm xmlns:a="http://schemas.openxmlformats.org/drawingml/2006/main">
+            <a:off x="640080" y="1207008"/>
+            <a:ext cx="7955280" cy="640080"/>
+          </a:xfrm>
+          <a:prstGeom xmlns:a="http://schemas.openxmlformats.org/drawingml/2006/main" prst="rect">
+            <a:avLst/>
+          </a:prstGeom>
+          <a:noFill xmlns:a="http://schemas.openxmlformats.org/drawingml/2006/main"/>
+          <a:ln xmlns:a="http://schemas.openxmlformats.org/drawingml/2006/main">
+            <a:noFill/>
+          </a:ln>
+        </p:spPr>
+        <p:txBody>
+          <a:bodyPr xmlns:a="http://schemas.openxmlformats.org/drawingml/2006/main" spcFirstLastPara="1" wrap="square" lIns="0" tIns="0" rIns="0" bIns="0" anchor="ctr">
+            <a:noAutofit/>
+          </a:bodyPr>
+          <a:lstStyle xmlns:a="http://schemas.openxmlformats.org/drawingml/2006/main"/>
+          <a:p xmlns:a="http://schemas.openxmlformats.org/drawingml/2006/main">
+            <a:pPr marL="0" indent="0" algn="l">
+              <a:spcBef>
+                <a:spcPts val="0"/>
+              </a:spcBef>
+              <a:spcAft>
+                <a:spcPts val="0"/>
+              </a:spcAft>
+              <a:buNone/>
+            </a:pPr>
+            <a:r>
+              <a:rPr sz="1300" b="0" i="0" u="none" cap="none">
+                <a:solidFill>
+                  <a:srgbClr val="5A6377"/>
+                </a:solidFill>
+                <a:latin typeface="Calibri"/>
+                <a:ea typeface="Calibri"/>
+                <a:cs typeface="Calibri"/>
+              </a:rPr>
+              <a:t>Understanding takes form in presentation, communication and conduct. Art (kala) makes these expressions meaningful and brings usefulness together with beauty.</a:t>
+            </a:r>
+          </a:p>
+        </p:txBody>
+      </p:sp>
+      <p:sp>
+        <p:nvSpPr>
+          <p:cNvPr id="100" name="Google Shape;100;p6">
+            <a:extLst xmlns:a="http://schemas.openxmlformats.org/drawingml/2006/main">
+              <a:ext uri="{FF2B5EF4-FFF2-40B4-BE49-F238E27FC236}">
+                <a16:creationId xmlns:a16="http://schemas.microsoft.com/office/drawing/2014/main" id="{327DEA87-8D26-40AB-8462-BC68336B88F2}"/>
+              </a:ext>
+            </a:extLst>
+          </p:cNvPr>
+          <p:cNvSpPr>
+            <a:spLocks xmlns:a="http://schemas.openxmlformats.org/drawingml/2006/main" noGrp="1"/>
+          </p:cNvSpPr>
+          <p:nvPr/>
+        </p:nvSpPr>
+        <p:spPr>
+          <a:xfrm xmlns:a="http://schemas.openxmlformats.org/drawingml/2006/main">
+            <a:off x="640080" y="2011680"/>
+            <a:ext cx="2615184" cy="2395728"/>
+          </a:xfrm>
+          <a:prstGeom xmlns:a="http://schemas.openxmlformats.org/drawingml/2006/main" prst="roundRect">
+            <a:avLst>
+              <a:gd name="adj" fmla="val 3817"/>
+            </a:avLst>
+          </a:prstGeom>
+          <a:solidFill xmlns:a="http://schemas.openxmlformats.org/drawingml/2006/main">
+            <a:srgbClr val="EEF1F8"/>
+          </a:solidFill>
+          <a:ln xmlns:a="http://schemas.openxmlformats.org/drawingml/2006/main">
+            <a:noFill/>
+          </a:ln>
+          <a:effectLst xmlns:a="http://schemas.openxmlformats.org/drawingml/2006/main">
+            <a:outerShdw blurRad="88900" dist="25400" dir="2700000" algn="bl" rotWithShape="0">
+              <a:srgbClr val="000000">
+                <a:alpha val="12941"/>
+              </a:srgbClr>
+            </a:outerShdw>
+          </a:effectLst>
+        </p:spPr>
+        <p:txBody>
+          <a:bodyPr xmlns:a="http://schemas.openxmlformats.org/drawingml/2006/main" spcFirstLastPara="1" wrap="square" lIns="91425" tIns="91425" rIns="91425" bIns="91425" anchor="ctr">
+            <a:noAutofit/>
+          </a:bodyPr>
+          <a:lstStyle xmlns:a="http://schemas.openxmlformats.org/drawingml/2006/main"/>
+          <a:p xmlns:a="http://schemas.openxmlformats.org/drawingml/2006/main">
+            <a:pPr marL="0" indent="0" algn="l">
+              <a:spcBef>
+                <a:spcPts val="0"/>
+              </a:spcBef>
+              <a:spcAft>
+                <a:spcPts val="0"/>
+              </a:spcAft>
+              <a:buNone/>
+            </a:pPr>
+          </a:p>
+        </p:txBody>
+      </p:sp>
+      <p:sp>
+        <p:nvSpPr>
+          <p:cNvPr id="101" name="Google Shape;101;p6">
+            <a:extLst xmlns:a="http://schemas.openxmlformats.org/drawingml/2006/main">
+              <a:ext uri="{FF2B5EF4-FFF2-40B4-BE49-F238E27FC236}">
+                <a16:creationId xmlns:a16="http://schemas.microsoft.com/office/drawing/2014/main" id="{CB3BAE7F-4C87-4373-953F-C237568559FD}"/>
+              </a:ext>
+            </a:extLst>
+          </p:cNvPr>
+          <p:cNvSpPr>
+            <a:spLocks xmlns:a="http://schemas.openxmlformats.org/drawingml/2006/main" noGrp="1"/>
+          </p:cNvSpPr>
+          <p:nvPr/>
+        </p:nvSpPr>
+        <p:spPr>
+          <a:xfrm xmlns:a="http://schemas.openxmlformats.org/drawingml/2006/main">
+            <a:off x="841248" y="2212848"/>
+            <a:ext cx="457200" cy="457200"/>
+          </a:xfrm>
+          <a:prstGeom xmlns:a="http://schemas.openxmlformats.org/drawingml/2006/main" prst="ellipse">
+            <a:avLst/>
+          </a:prstGeom>
+          <a:solidFill xmlns:a="http://schemas.openxmlformats.org/drawingml/2006/main">
+            <a:srgbClr val="3B4A7A"/>
+          </a:solidFill>
+          <a:ln xmlns:a="http://schemas.openxmlformats.org/drawingml/2006/main">
+            <a:noFill/>
+          </a:ln>
+        </p:spPr>
+        <p:txBody>
+          <a:bodyPr xmlns:a="http://schemas.openxmlformats.org/drawingml/2006/main" spcFirstLastPara="1" wrap="square" lIns="91425" tIns="91425" rIns="91425" bIns="91425" anchor="ctr">
+            <a:noAutofit/>
+          </a:bodyPr>
+          <a:lstStyle xmlns:a="http://schemas.openxmlformats.org/drawingml/2006/main"/>
+          <a:p xmlns:a="http://schemas.openxmlformats.org/drawingml/2006/main">
+            <a:pPr marL="0" indent="0" algn="l">
+              <a:spcBef>
+                <a:spcPts val="0"/>
+              </a:spcBef>
+              <a:spcAft>
+                <a:spcPts val="0"/>
+              </a:spcAft>
+              <a:buNone/>
+            </a:pPr>
+          </a:p>
+        </p:txBody>
+      </p:sp>
+      <p:pic>
+        <p:nvPicPr>
+          <p:cNvPr id="127" name="Google Shape;102;p6"/>
+          <p:cNvPicPr>
+            <a:picLocks xmlns:a="http://schemas.openxmlformats.org/drawingml/2006/main" noChangeAspect="1"/>
+          </p:cNvPicPr>
+          <p:nvPr/>
+        </p:nvPicPr>
+        <p:blipFill rotWithShape="1">
+          <a:blip xmlns:r="http://schemas.openxmlformats.org/officeDocument/2006/relationships" xmlns:a="http://schemas.openxmlformats.org/drawingml/2006/main" r:embed="R93abef0cb9d8472e">
+            <a:alphaModFix/>
+          </a:blip>
+          <a:srcRect xmlns:a="http://schemas.openxmlformats.org/drawingml/2006/main" l="0" t="0" r="0" b="0"/>
+          <a:stretch xmlns:a="http://schemas.openxmlformats.org/drawingml/2006/main"/>
+        </p:blipFill>
+        <p:spPr>
+          <a:xfrm xmlns:a="http://schemas.openxmlformats.org/drawingml/2006/main">
+            <a:off x="960120" y="2331720"/>
+            <a:ext cx="219456" cy="219456"/>
+          </a:xfrm>
+          <a:prstGeom xmlns:a="http://schemas.openxmlformats.org/drawingml/2006/main" prst="rect">
+            <a:avLst/>
+          </a:prstGeom>
+          <a:ln xmlns:a="http://schemas.openxmlformats.org/drawingml/2006/main">
+            <a:noFill/>
+          </a:ln>
+        </p:spPr>
+      </p:pic>
+      <p:sp>
+        <p:nvSpPr>
+          <p:cNvPr id="103" name="Google Shape;103;p6">
+            <a:extLst xmlns:a="http://schemas.openxmlformats.org/drawingml/2006/main">
+              <a:ext uri="{FF2B5EF4-FFF2-40B4-BE49-F238E27FC236}">
+                <a16:creationId xmlns:a16="http://schemas.microsoft.com/office/drawing/2014/main" id="{02D2D627-5AF5-47FA-8232-5A9E97879D36}"/>
+              </a:ext>
+            </a:extLst>
+          </p:cNvPr>
+          <p:cNvSpPr>
+            <a:spLocks xmlns:a="http://schemas.openxmlformats.org/drawingml/2006/main" noGrp="1"/>
+          </p:cNvSpPr>
+          <p:nvPr/>
+        </p:nvSpPr>
+        <p:spPr>
+          <a:xfrm xmlns:a="http://schemas.openxmlformats.org/drawingml/2006/main">
+            <a:off x="841248" y="2761488"/>
+            <a:ext cx="2240280" cy="292608"/>
+          </a:xfrm>
+          <a:prstGeom xmlns:a="http://schemas.openxmlformats.org/drawingml/2006/main" prst="rect">
+            <a:avLst/>
+          </a:prstGeom>
+          <a:noFill xmlns:a="http://schemas.openxmlformats.org/drawingml/2006/main"/>
+          <a:ln xmlns:a="http://schemas.openxmlformats.org/drawingml/2006/main">
+            <a:noFill/>
+          </a:ln>
+        </p:spPr>
+        <p:txBody>
+          <a:bodyPr xmlns:a="http://schemas.openxmlformats.org/drawingml/2006/main" spcFirstLastPara="1" wrap="square" lIns="0" tIns="0" rIns="0" bIns="0" anchor="ctr">
+            <a:noAutofit/>
+          </a:bodyPr>
+          <a:lstStyle xmlns:a="http://schemas.openxmlformats.org/drawingml/2006/main"/>
+          <a:p xmlns:a="http://schemas.openxmlformats.org/drawingml/2006/main">
+            <a:pPr marL="0" indent="0" algn="l">
+              <a:spcBef>
+                <a:spcPts val="0"/>
+              </a:spcBef>
+              <a:spcAft>
+                <a:spcPts val="0"/>
+              </a:spcAft>
+              <a:buNone/>
+            </a:pPr>
+            <a:r>
+              <a:rPr sz="1450" b="1" i="0" u="none" cap="none">
+                <a:solidFill>
+                  <a:srgbClr val="1E2447"/>
+                </a:solidFill>
+                <a:latin typeface="Cambria"/>
+                <a:ea typeface="Cambria"/>
+                <a:cs typeface="Cambria"/>
+              </a:rPr>
+              <a:t>Presentation</a:t>
+            </a:r>
+          </a:p>
+        </p:txBody>
+      </p:sp>
+      <p:sp>
+        <p:nvSpPr>
+          <p:cNvPr id="104" name="Google Shape;104;p6">
+            <a:extLst xmlns:a="http://schemas.openxmlformats.org/drawingml/2006/main">
+              <a:ext uri="{FF2B5EF4-FFF2-40B4-BE49-F238E27FC236}">
+                <a16:creationId xmlns:a16="http://schemas.microsoft.com/office/drawing/2014/main" id="{442FCA58-9151-49E2-85D7-AD46DE83D878}"/>
+              </a:ext>
+            </a:extLst>
+          </p:cNvPr>
+          <p:cNvSpPr>
+            <a:spLocks xmlns:a="http://schemas.openxmlformats.org/drawingml/2006/main" noGrp="1"/>
+          </p:cNvSpPr>
+          <p:nvPr/>
+        </p:nvSpPr>
+        <p:spPr>
+          <a:xfrm xmlns:a="http://schemas.openxmlformats.org/drawingml/2006/main">
+            <a:off x="841248" y="3090672"/>
+            <a:ext cx="2240280" cy="1234440"/>
+          </a:xfrm>
+          <a:prstGeom xmlns:a="http://schemas.openxmlformats.org/drawingml/2006/main" prst="rect">
+            <a:avLst/>
+          </a:prstGeom>
+          <a:noFill xmlns:a="http://schemas.openxmlformats.org/drawingml/2006/main"/>
+          <a:ln xmlns:a="http://schemas.openxmlformats.org/drawingml/2006/main">
+            <a:noFill/>
+          </a:ln>
+        </p:spPr>
+        <p:txBody>
+          <a:bodyPr xmlns:a="http://schemas.openxmlformats.org/drawingml/2006/main" spcFirstLastPara="1" wrap="square" lIns="0" tIns="0" rIns="0" bIns="0" anchor="ctr">
+            <a:noAutofit/>
+          </a:bodyPr>
+          <a:lstStyle xmlns:a="http://schemas.openxmlformats.org/drawingml/2006/main"/>
+          <a:p xmlns:a="http://schemas.openxmlformats.org/drawingml/2006/main">
+            <a:pPr marL="0" indent="0" algn="l">
+              <a:spcBef>
+                <a:spcPts val="0"/>
+              </a:spcBef>
+              <a:spcAft>
+                <a:spcPts val="0"/>
+              </a:spcAft>
+              <a:buNone/>
+            </a:pPr>
+            <a:r>
+              <a:rPr sz="1050" b="0" i="0" u="none" cap="none">
+                <a:solidFill>
+                  <a:srgbClr val="5A6377"/>
+                </a:solidFill>
+                <a:latin typeface="Calibri"/>
+                <a:ea typeface="Calibri"/>
+                <a:cs typeface="Calibri"/>
+              </a:rPr>
+              <a:t>Prakashan makes actuality evident through an accomplished and meaningful form. What is understood becomes available for another to attend to.</a:t>
+            </a:r>
+          </a:p>
+        </p:txBody>
+      </p:sp>
+      <p:sp>
+        <p:nvSpPr>
+          <p:cNvPr id="105" name="Google Shape;105;p6">
+            <a:extLst xmlns:a="http://schemas.openxmlformats.org/drawingml/2006/main">
+              <a:ext uri="{FF2B5EF4-FFF2-40B4-BE49-F238E27FC236}">
+                <a16:creationId xmlns:a16="http://schemas.microsoft.com/office/drawing/2014/main" id="{BFB21583-45C3-4066-8C04-8D41606400F3}"/>
+              </a:ext>
+            </a:extLst>
+          </p:cNvPr>
+          <p:cNvSpPr>
+            <a:spLocks xmlns:a="http://schemas.openxmlformats.org/drawingml/2006/main" noGrp="1"/>
+          </p:cNvSpPr>
+          <p:nvPr/>
+        </p:nvSpPr>
+        <p:spPr>
+          <a:xfrm xmlns:a="http://schemas.openxmlformats.org/drawingml/2006/main">
+            <a:off x="3392424" y="2011680"/>
+            <a:ext cx="2615184" cy="2395728"/>
+          </a:xfrm>
+          <a:prstGeom xmlns:a="http://schemas.openxmlformats.org/drawingml/2006/main" prst="roundRect">
+            <a:avLst>
+              <a:gd name="adj" fmla="val 3817"/>
+            </a:avLst>
+          </a:prstGeom>
+          <a:solidFill xmlns:a="http://schemas.openxmlformats.org/drawingml/2006/main">
+            <a:srgbClr val="EEF1F8"/>
+          </a:solidFill>
+          <a:ln xmlns:a="http://schemas.openxmlformats.org/drawingml/2006/main">
+            <a:noFill/>
+          </a:ln>
+          <a:effectLst xmlns:a="http://schemas.openxmlformats.org/drawingml/2006/main">
+            <a:outerShdw blurRad="88900" dist="25400" dir="2700000" algn="bl" rotWithShape="0">
+              <a:srgbClr val="000000">
+                <a:alpha val="12941"/>
+              </a:srgbClr>
+            </a:outerShdw>
+          </a:effectLst>
+        </p:spPr>
+        <p:txBody>
+          <a:bodyPr xmlns:a="http://schemas.openxmlformats.org/drawingml/2006/main" spcFirstLastPara="1" wrap="square" lIns="91425" tIns="91425" rIns="91425" bIns="91425" anchor="ctr">
+            <a:noAutofit/>
+          </a:bodyPr>
+          <a:lstStyle xmlns:a="http://schemas.openxmlformats.org/drawingml/2006/main"/>
+          <a:p xmlns:a="http://schemas.openxmlformats.org/drawingml/2006/main">
+            <a:pPr marL="0" indent="0" algn="l">
+              <a:spcBef>
+                <a:spcPts val="0"/>
+              </a:spcBef>
+              <a:spcAft>
+                <a:spcPts val="0"/>
+              </a:spcAft>
+              <a:buNone/>
+            </a:pPr>
+          </a:p>
+        </p:txBody>
+      </p:sp>
+      <p:sp>
+        <p:nvSpPr>
+          <p:cNvPr id="106" name="Google Shape;106;p6">
+            <a:extLst xmlns:a="http://schemas.openxmlformats.org/drawingml/2006/main">
+              <a:ext uri="{FF2B5EF4-FFF2-40B4-BE49-F238E27FC236}">
+                <a16:creationId xmlns:a16="http://schemas.microsoft.com/office/drawing/2014/main" id="{FE0963FB-0ABF-408C-B796-25F3570E91F4}"/>
+              </a:ext>
+            </a:extLst>
+          </p:cNvPr>
+          <p:cNvSpPr>
+            <a:spLocks xmlns:a="http://schemas.openxmlformats.org/drawingml/2006/main" noGrp="1"/>
+          </p:cNvSpPr>
+          <p:nvPr/>
+        </p:nvSpPr>
+        <p:spPr>
+          <a:xfrm xmlns:a="http://schemas.openxmlformats.org/drawingml/2006/main">
+            <a:off x="3593592" y="2212848"/>
+            <a:ext cx="457200" cy="457200"/>
+          </a:xfrm>
+          <a:prstGeom xmlns:a="http://schemas.openxmlformats.org/drawingml/2006/main" prst="ellipse">
+            <a:avLst/>
+          </a:prstGeom>
+          <a:solidFill xmlns:a="http://schemas.openxmlformats.org/drawingml/2006/main">
+            <a:srgbClr val="3B4A7A"/>
+          </a:solidFill>
+          <a:ln xmlns:a="http://schemas.openxmlformats.org/drawingml/2006/main">
+            <a:noFill/>
+          </a:ln>
+        </p:spPr>
+        <p:txBody>
+          <a:bodyPr xmlns:a="http://schemas.openxmlformats.org/drawingml/2006/main" spcFirstLastPara="1" wrap="square" lIns="91425" tIns="91425" rIns="91425" bIns="91425" anchor="ctr">
+            <a:noAutofit/>
+          </a:bodyPr>
+          <a:lstStyle xmlns:a="http://schemas.openxmlformats.org/drawingml/2006/main"/>
+          <a:p xmlns:a="http://schemas.openxmlformats.org/drawingml/2006/main">
+            <a:pPr marL="0" indent="0" algn="l">
+              <a:spcBef>
+                <a:spcPts val="0"/>
+              </a:spcBef>
+              <a:spcAft>
+                <a:spcPts val="0"/>
+              </a:spcAft>
+              <a:buNone/>
+            </a:pPr>
+          </a:p>
+        </p:txBody>
+      </p:sp>
+      <p:pic>
+        <p:nvPicPr>
+          <p:cNvPr id="132" name="Google Shape;107;p6"/>
+          <p:cNvPicPr>
+            <a:picLocks xmlns:a="http://schemas.openxmlformats.org/drawingml/2006/main" noChangeAspect="1"/>
+          </p:cNvPicPr>
+          <p:nvPr/>
+        </p:nvPicPr>
+        <p:blipFill rotWithShape="1">
+          <a:blip xmlns:r="http://schemas.openxmlformats.org/officeDocument/2006/relationships" xmlns:a="http://schemas.openxmlformats.org/drawingml/2006/main" r:embed="Ra4c06424480d43bb">
+            <a:alphaModFix/>
+          </a:blip>
+          <a:srcRect xmlns:a="http://schemas.openxmlformats.org/drawingml/2006/main" l="0" t="0" r="0" b="0"/>
+          <a:stretch xmlns:a="http://schemas.openxmlformats.org/drawingml/2006/main"/>
+        </p:blipFill>
+        <p:spPr>
+          <a:xfrm xmlns:a="http://schemas.openxmlformats.org/drawingml/2006/main">
+            <a:off x="3712464" y="2331720"/>
+            <a:ext cx="219456" cy="219456"/>
+          </a:xfrm>
+          <a:prstGeom xmlns:a="http://schemas.openxmlformats.org/drawingml/2006/main" prst="rect">
+            <a:avLst/>
+          </a:prstGeom>
+          <a:ln xmlns:a="http://schemas.openxmlformats.org/drawingml/2006/main">
+            <a:noFill/>
+          </a:ln>
+        </p:spPr>
+      </p:pic>
+      <p:sp>
+        <p:nvSpPr>
+          <p:cNvPr id="108" name="Google Shape;108;p6">
+            <a:extLst xmlns:a="http://schemas.openxmlformats.org/drawingml/2006/main">
+              <a:ext uri="{FF2B5EF4-FFF2-40B4-BE49-F238E27FC236}">
+                <a16:creationId xmlns:a16="http://schemas.microsoft.com/office/drawing/2014/main" id="{45AD0337-6E9F-4E07-A605-1EBFCB05343A}"/>
+              </a:ext>
+            </a:extLst>
+          </p:cNvPr>
+          <p:cNvSpPr>
+            <a:spLocks xmlns:a="http://schemas.openxmlformats.org/drawingml/2006/main" noGrp="1"/>
+          </p:cNvSpPr>
+          <p:nvPr/>
+        </p:nvSpPr>
+        <p:spPr>
+          <a:xfrm xmlns:a="http://schemas.openxmlformats.org/drawingml/2006/main">
+            <a:off x="3593592" y="2761488"/>
+            <a:ext cx="2240280" cy="292608"/>
+          </a:xfrm>
+          <a:prstGeom xmlns:a="http://schemas.openxmlformats.org/drawingml/2006/main" prst="rect">
+            <a:avLst/>
+          </a:prstGeom>
+          <a:noFill xmlns:a="http://schemas.openxmlformats.org/drawingml/2006/main"/>
+          <a:ln xmlns:a="http://schemas.openxmlformats.org/drawingml/2006/main">
+            <a:noFill/>
+          </a:ln>
+        </p:spPr>
+        <p:txBody>
+          <a:bodyPr xmlns:a="http://schemas.openxmlformats.org/drawingml/2006/main" spcFirstLastPara="1" wrap="square" lIns="0" tIns="0" rIns="0" bIns="0" anchor="ctr">
+            <a:noAutofit/>
+          </a:bodyPr>
+          <a:lstStyle xmlns:a="http://schemas.openxmlformats.org/drawingml/2006/main"/>
+          <a:p xmlns:a="http://schemas.openxmlformats.org/drawingml/2006/main">
+            <a:pPr marL="0" indent="0" algn="l">
+              <a:spcBef>
+                <a:spcPts val="0"/>
+              </a:spcBef>
+              <a:spcAft>
+                <a:spcPts val="0"/>
+              </a:spcAft>
+              <a:buNone/>
+            </a:pPr>
+            <a:r>
+              <a:rPr sz="1450" b="1" i="0" u="none" cap="none">
+                <a:solidFill>
+                  <a:srgbClr val="1E2447"/>
+                </a:solidFill>
+                <a:latin typeface="Cambria"/>
+                <a:ea typeface="Cambria"/>
+                <a:cs typeface="Cambria"/>
+              </a:rPr>
+              <a:t>Communication</a:t>
+            </a:r>
+          </a:p>
+        </p:txBody>
+      </p:sp>
+      <p:sp>
+        <p:nvSpPr>
+          <p:cNvPr id="109" name="Google Shape;109;p6">
+            <a:extLst xmlns:a="http://schemas.openxmlformats.org/drawingml/2006/main">
+              <a:ext uri="{FF2B5EF4-FFF2-40B4-BE49-F238E27FC236}">
+                <a16:creationId xmlns:a16="http://schemas.microsoft.com/office/drawing/2014/main" id="{DCA2BB7D-29F2-470E-9C21-735047DE802B}"/>
+              </a:ext>
+            </a:extLst>
+          </p:cNvPr>
+          <p:cNvSpPr>
+            <a:spLocks xmlns:a="http://schemas.openxmlformats.org/drawingml/2006/main" noGrp="1"/>
+          </p:cNvSpPr>
+          <p:nvPr/>
+        </p:nvSpPr>
+        <p:spPr>
+          <a:xfrm xmlns:a="http://schemas.openxmlformats.org/drawingml/2006/main">
+            <a:off x="3593592" y="3090672"/>
+            <a:ext cx="2240280" cy="1234440"/>
+          </a:xfrm>
+          <a:prstGeom xmlns:a="http://schemas.openxmlformats.org/drawingml/2006/main" prst="rect">
+            <a:avLst/>
+          </a:prstGeom>
+          <a:noFill xmlns:a="http://schemas.openxmlformats.org/drawingml/2006/main"/>
+          <a:ln xmlns:a="http://schemas.openxmlformats.org/drawingml/2006/main">
+            <a:noFill/>
+          </a:ln>
+        </p:spPr>
+        <p:txBody>
+          <a:bodyPr xmlns:a="http://schemas.openxmlformats.org/drawingml/2006/main" spcFirstLastPara="1" wrap="square" lIns="0" tIns="0" rIns="0" bIns="0" anchor="ctr">
+            <a:noAutofit/>
+          </a:bodyPr>
+          <a:lstStyle xmlns:a="http://schemas.openxmlformats.org/drawingml/2006/main"/>
+          <a:p xmlns:a="http://schemas.openxmlformats.org/drawingml/2006/main">
+            <a:pPr marL="0" indent="0" algn="l">
+              <a:spcBef>
+                <a:spcPts val="0"/>
+              </a:spcBef>
+              <a:spcAft>
+                <a:spcPts val="0"/>
+              </a:spcAft>
+              <a:buNone/>
+            </a:pPr>
+            <a:r>
+              <a:rPr sz="1050" b="0" i="0" u="none" cap="none">
+                <a:solidFill>
+                  <a:srgbClr val="5A6377"/>
+                </a:solidFill>
+                <a:latin typeface="Calibri"/>
+                <a:ea typeface="Calibri"/>
+                <a:cs typeface="Calibri"/>
+              </a:rPr>
+              <a:t>Sampreshana indicates completeness: constitutional, activity and conduct completeness. Communication serves understanding and enabling another to understand.</a:t>
+            </a:r>
+          </a:p>
+        </p:txBody>
+      </p:sp>
+      <p:sp>
+        <p:nvSpPr>
+          <p:cNvPr id="110" name="Google Shape;110;p6">
+            <a:extLst xmlns:a="http://schemas.openxmlformats.org/drawingml/2006/main">
+              <a:ext uri="{FF2B5EF4-FFF2-40B4-BE49-F238E27FC236}">
+                <a16:creationId xmlns:a16="http://schemas.microsoft.com/office/drawing/2014/main" id="{8450D6FC-AF89-4184-B577-A101F82100A0}"/>
+              </a:ext>
+            </a:extLst>
+          </p:cNvPr>
+          <p:cNvSpPr>
+            <a:spLocks xmlns:a="http://schemas.openxmlformats.org/drawingml/2006/main" noGrp="1"/>
+          </p:cNvSpPr>
+          <p:nvPr/>
+        </p:nvSpPr>
+        <p:spPr>
+          <a:xfrm xmlns:a="http://schemas.openxmlformats.org/drawingml/2006/main">
+            <a:off x="6144768" y="2011680"/>
+            <a:ext cx="2615184" cy="2395728"/>
+          </a:xfrm>
+          <a:prstGeom xmlns:a="http://schemas.openxmlformats.org/drawingml/2006/main" prst="roundRect">
+            <a:avLst>
+              <a:gd name="adj" fmla="val 3817"/>
+            </a:avLst>
+          </a:prstGeom>
+          <a:solidFill xmlns:a="http://schemas.openxmlformats.org/drawingml/2006/main">
+            <a:srgbClr val="EEF1F8"/>
+          </a:solidFill>
+          <a:ln xmlns:a="http://schemas.openxmlformats.org/drawingml/2006/main">
+            <a:noFill/>
+          </a:ln>
+          <a:effectLst xmlns:a="http://schemas.openxmlformats.org/drawingml/2006/main">
+            <a:outerShdw blurRad="88900" dist="25400" dir="2700000" algn="bl" rotWithShape="0">
+              <a:srgbClr val="000000">
+                <a:alpha val="12941"/>
+              </a:srgbClr>
+            </a:outerShdw>
+          </a:effectLst>
+        </p:spPr>
+        <p:txBody>
+          <a:bodyPr xmlns:a="http://schemas.openxmlformats.org/drawingml/2006/main" spcFirstLastPara="1" wrap="square" lIns="91425" tIns="91425" rIns="91425" bIns="91425" anchor="ctr">
+            <a:noAutofit/>
+          </a:bodyPr>
+          <a:lstStyle xmlns:a="http://schemas.openxmlformats.org/drawingml/2006/main"/>
+          <a:p xmlns:a="http://schemas.openxmlformats.org/drawingml/2006/main">
+            <a:pPr marL="0" indent="0" algn="l">
+              <a:spcBef>
+                <a:spcPts val="0"/>
+              </a:spcBef>
+              <a:spcAft>
+                <a:spcPts val="0"/>
+              </a:spcAft>
+              <a:buNone/>
+            </a:pPr>
+          </a:p>
+        </p:txBody>
+      </p:sp>
+      <p:sp>
+        <p:nvSpPr>
+          <p:cNvPr id="111" name="Google Shape;111;p6">
+            <a:extLst xmlns:a="http://schemas.openxmlformats.org/drawingml/2006/main">
+              <a:ext uri="{FF2B5EF4-FFF2-40B4-BE49-F238E27FC236}">
+                <a16:creationId xmlns:a16="http://schemas.microsoft.com/office/drawing/2014/main" id="{272AE6F5-3A10-43A6-8A9B-DACCA9D60ABB}"/>
+              </a:ext>
+            </a:extLst>
+          </p:cNvPr>
+          <p:cNvSpPr>
+            <a:spLocks xmlns:a="http://schemas.openxmlformats.org/drawingml/2006/main" noGrp="1"/>
+          </p:cNvSpPr>
+          <p:nvPr/>
+        </p:nvSpPr>
+        <p:spPr>
+          <a:xfrm xmlns:a="http://schemas.openxmlformats.org/drawingml/2006/main">
+            <a:off x="6345936" y="2212848"/>
+            <a:ext cx="457200" cy="457200"/>
+          </a:xfrm>
+          <a:prstGeom xmlns:a="http://schemas.openxmlformats.org/drawingml/2006/main" prst="ellipse">
+            <a:avLst/>
+          </a:prstGeom>
+          <a:solidFill xmlns:a="http://schemas.openxmlformats.org/drawingml/2006/main">
+            <a:srgbClr val="3B4A7A"/>
+          </a:solidFill>
+          <a:ln xmlns:a="http://schemas.openxmlformats.org/drawingml/2006/main">
+            <a:noFill/>
+          </a:ln>
+        </p:spPr>
+        <p:txBody>
+          <a:bodyPr xmlns:a="http://schemas.openxmlformats.org/drawingml/2006/main" spcFirstLastPara="1" wrap="square" lIns="91425" tIns="91425" rIns="91425" bIns="91425" anchor="ctr">
+            <a:noAutofit/>
+          </a:bodyPr>
+          <a:lstStyle xmlns:a="http://schemas.openxmlformats.org/drawingml/2006/main"/>
+          <a:p xmlns:a="http://schemas.openxmlformats.org/drawingml/2006/main">
+            <a:pPr marL="0" indent="0" algn="l">
+              <a:spcBef>
+                <a:spcPts val="0"/>
+              </a:spcBef>
+              <a:spcAft>
+                <a:spcPts val="0"/>
+              </a:spcAft>
+              <a:buNone/>
+            </a:pPr>
+          </a:p>
+        </p:txBody>
+      </p:sp>
+      <p:pic>
+        <p:nvPicPr>
+          <p:cNvPr id="137" name="Google Shape;112;p6"/>
+          <p:cNvPicPr>
+            <a:picLocks xmlns:a="http://schemas.openxmlformats.org/drawingml/2006/main" noChangeAspect="1"/>
+          </p:cNvPicPr>
+          <p:nvPr/>
+        </p:nvPicPr>
+        <p:blipFill rotWithShape="1">
+          <a:blip xmlns:r="http://schemas.openxmlformats.org/officeDocument/2006/relationships" xmlns:a="http://schemas.openxmlformats.org/drawingml/2006/main" r:embed="Rca6ea26f8152479d">
+            <a:alphaModFix/>
+          </a:blip>
+          <a:srcRect xmlns:a="http://schemas.openxmlformats.org/drawingml/2006/main" l="0" t="0" r="0" b="0"/>
+          <a:stretch xmlns:a="http://schemas.openxmlformats.org/drawingml/2006/main"/>
+        </p:blipFill>
+        <p:spPr>
+          <a:xfrm xmlns:a="http://schemas.openxmlformats.org/drawingml/2006/main">
+            <a:off x="6464808" y="2331720"/>
+            <a:ext cx="219456" cy="219456"/>
+          </a:xfrm>
+          <a:prstGeom xmlns:a="http://schemas.openxmlformats.org/drawingml/2006/main" prst="rect">
+            <a:avLst/>
+          </a:prstGeom>
+          <a:ln xmlns:a="http://schemas.openxmlformats.org/drawingml/2006/main">
+            <a:noFill/>
+          </a:ln>
+        </p:spPr>
+      </p:pic>
+      <p:sp>
+        <p:nvSpPr>
+          <p:cNvPr id="113" name="Google Shape;113;p6">
+            <a:extLst xmlns:a="http://schemas.openxmlformats.org/drawingml/2006/main">
+              <a:ext uri="{FF2B5EF4-FFF2-40B4-BE49-F238E27FC236}">
+                <a16:creationId xmlns:a16="http://schemas.microsoft.com/office/drawing/2014/main" id="{5F84AE7E-4FE8-443E-9D4D-C2B305EA31A4}"/>
+              </a:ext>
+            </a:extLst>
+          </p:cNvPr>
+          <p:cNvSpPr>
+            <a:spLocks xmlns:a="http://schemas.openxmlformats.org/drawingml/2006/main" noGrp="1"/>
+          </p:cNvSpPr>
+          <p:nvPr/>
+        </p:nvSpPr>
+        <p:spPr>
+          <a:xfrm xmlns:a="http://schemas.openxmlformats.org/drawingml/2006/main">
+            <a:off x="6345936" y="2761488"/>
+            <a:ext cx="2240280" cy="292608"/>
+          </a:xfrm>
+          <a:prstGeom xmlns:a="http://schemas.openxmlformats.org/drawingml/2006/main" prst="rect">
+            <a:avLst/>
+          </a:prstGeom>
+          <a:noFill xmlns:a="http://schemas.openxmlformats.org/drawingml/2006/main"/>
+          <a:ln xmlns:a="http://schemas.openxmlformats.org/drawingml/2006/main">
+            <a:noFill/>
+          </a:ln>
+        </p:spPr>
+        <p:txBody>
+          <a:bodyPr xmlns:a="http://schemas.openxmlformats.org/drawingml/2006/main" spcFirstLastPara="1" wrap="square" lIns="0" tIns="0" rIns="0" bIns="0" anchor="ctr">
+            <a:noAutofit/>
+          </a:bodyPr>
+          <a:lstStyle xmlns:a="http://schemas.openxmlformats.org/drawingml/2006/main"/>
+          <a:p xmlns:a="http://schemas.openxmlformats.org/drawingml/2006/main">
+            <a:pPr marL="0" indent="0" algn="l">
+              <a:spcBef>
+                <a:spcPts val="0"/>
+              </a:spcBef>
+              <a:spcAft>
+                <a:spcPts val="0"/>
+              </a:spcAft>
+              <a:buNone/>
+            </a:pPr>
+            <a:r>
+              <a:rPr sz="1450" b="1" i="0" u="none" cap="none">
+                <a:solidFill>
+                  <a:srgbClr val="1E2447"/>
+                </a:solidFill>
+                <a:latin typeface="Cambria"/>
+                <a:ea typeface="Cambria"/>
+                <a:cs typeface="Cambria"/>
+              </a:rPr>
+              <a:t>Expression</a:t>
+            </a:r>
+          </a:p>
+        </p:txBody>
+      </p:sp>
+      <p:sp>
+        <p:nvSpPr>
+          <p:cNvPr id="114" name="Google Shape;114;p6">
+            <a:extLst xmlns:a="http://schemas.openxmlformats.org/drawingml/2006/main">
+              <a:ext uri="{FF2B5EF4-FFF2-40B4-BE49-F238E27FC236}">
+                <a16:creationId xmlns:a16="http://schemas.microsoft.com/office/drawing/2014/main" id="{6AD95588-B95F-4284-90AE-532BA6D1F501}"/>
+              </a:ext>
+            </a:extLst>
+          </p:cNvPr>
+          <p:cNvSpPr>
+            <a:spLocks xmlns:a="http://schemas.openxmlformats.org/drawingml/2006/main" noGrp="1"/>
+          </p:cNvSpPr>
+          <p:nvPr/>
+        </p:nvSpPr>
+        <p:spPr>
+          <a:xfrm xmlns:a="http://schemas.openxmlformats.org/drawingml/2006/main">
+            <a:off x="6345936" y="3090672"/>
+            <a:ext cx="2240280" cy="1234440"/>
+          </a:xfrm>
+          <a:prstGeom xmlns:a="http://schemas.openxmlformats.org/drawingml/2006/main" prst="rect">
+            <a:avLst/>
+          </a:prstGeom>
+          <a:noFill xmlns:a="http://schemas.openxmlformats.org/drawingml/2006/main"/>
+          <a:ln xmlns:a="http://schemas.openxmlformats.org/drawingml/2006/main">
+            <a:noFill/>
+          </a:ln>
+        </p:spPr>
+        <p:txBody>
+          <a:bodyPr xmlns:a="http://schemas.openxmlformats.org/drawingml/2006/main" spcFirstLastPara="1" wrap="square" lIns="0" tIns="0" rIns="0" bIns="0" anchor="ctr">
+            <a:noAutofit/>
+          </a:bodyPr>
+          <a:lstStyle xmlns:a="http://schemas.openxmlformats.org/drawingml/2006/main"/>
+          <a:p xmlns:a="http://schemas.openxmlformats.org/drawingml/2006/main">
+            <a:pPr marL="0" indent="0" algn="l">
+              <a:spcBef>
+                <a:spcPts val="0"/>
+              </a:spcBef>
+              <a:spcAft>
+                <a:spcPts val="0"/>
+              </a:spcAft>
+              <a:buNone/>
+            </a:pPr>
+            <a:r>
+              <a:rPr sz="1050" b="0" i="0" u="none" cap="none">
+                <a:solidFill>
+                  <a:srgbClr val="5A6377"/>
+                </a:solidFill>
+                <a:latin typeface="Calibri"/>
+                <a:ea typeface="Calibri"/>
+                <a:cs typeface="Calibri"/>
+              </a:rPr>
+              <a:t>Abhivyakti is mental, verbal and bodily activity for all-round resolution (abhyudaya). Understanding is evidenced in speech, work and humane behaviour.</a:t>
+            </a:r>
+          </a:p>
+        </p:txBody>
+      </p:sp>
+      <p:sp>
+        <p:nvSpPr>
+          <p:cNvPr id="115" name="Google Shape;115;p6">
+            <a:extLst xmlns:a="http://schemas.openxmlformats.org/drawingml/2006/main">
+              <a:ext uri="{FF2B5EF4-FFF2-40B4-BE49-F238E27FC236}">
+                <a16:creationId xmlns:a16="http://schemas.microsoft.com/office/drawing/2014/main" id="{62AA3251-112D-4D49-9F6A-820023242B56}"/>
+              </a:ext>
+            </a:extLst>
+          </p:cNvPr>
+          <p:cNvSpPr>
+            <a:spLocks xmlns:a="http://schemas.openxmlformats.org/drawingml/2006/main" noGrp="1"/>
+          </p:cNvSpPr>
+          <p:nvPr/>
+        </p:nvSpPr>
+        <p:spPr>
+          <a:xfrm xmlns:a="http://schemas.openxmlformats.org/drawingml/2006/main">
+            <a:off x="502920" y="4828032"/>
+            <a:ext cx="8138160" cy="256032"/>
+          </a:xfrm>
+          <a:prstGeom xmlns:a="http://schemas.openxmlformats.org/drawingml/2006/main" prst="rect">
+            <a:avLst/>
+          </a:prstGeom>
+          <a:noFill xmlns:a="http://schemas.openxmlformats.org/drawingml/2006/main"/>
+          <a:ln xmlns:a="http://schemas.openxmlformats.org/drawingml/2006/main">
+            <a:noFill/>
+          </a:ln>
+        </p:spPr>
+        <p:txBody>
+          <a:bodyPr xmlns:a="http://schemas.openxmlformats.org/drawingml/2006/main" spcFirstLastPara="1" wrap="square" lIns="0" tIns="0" rIns="0" bIns="0" anchor="ctr">
+            <a:noAutofit/>
+          </a:bodyPr>
+          <a:lstStyle xmlns:a="http://schemas.openxmlformats.org/drawingml/2006/main"/>
+          <a:p xmlns:a="http://schemas.openxmlformats.org/drawingml/2006/main">
+            <a:pPr marL="0" indent="0" algn="l">
+              <a:spcBef>
+                <a:spcPts val="0"/>
+              </a:spcBef>
+              <a:spcAft>
+                <a:spcPts val="0"/>
+              </a:spcAft>
+              <a:buNone/>
+            </a:pPr>
+            <a:r>
+              <a:rPr sz="950" b="0" i="1" u="none" cap="none">
+                <a:solidFill>
+                  <a:srgbClr val="5A6377"/>
+                </a:solidFill>
+                <a:latin typeface="Calibri"/>
+                <a:ea typeface="Calibri"/>
+                <a:cs typeface="Calibri"/>
+              </a:rPr>
+              <a:t>These connected activities involve jeevan through the body.  ·  PS pp. 22, 56, 119, 206  ·  MVD pp. 109–110, 328</a:t>
+            </a:r>
+          </a:p>
+        </p:txBody>
+      </p:sp>
+    </p:spTree>
+    <p:extLst>
+      <p:ext uri="{BB962C8B-B14F-4D97-AF65-F5344CB8AC3E}">
+        <p14:creationId xmlns:p14="http://schemas.microsoft.com/office/powerpoint/2010/main" val="1131588340"/>
+      </p:ext>
+    </p:extLst>
+  </p:cSld>
+</p:sld>
+</file>
+
+<file path=ppt/slides/slide27.xml><?xml version="1.0" encoding="utf-8"?>
 <p:sld xmlns:p="http://schemas.openxmlformats.org/presentationml/2006/main">
   <p:cSld>
     <p:bg>
@@ -29940,7 +31145,7 @@
 </p:sld>
 </file>
 
-<file path=ppt/slides/slide27.xml><?xml version="1.0" encoding="utf-8"?>
+<file path=ppt/slides/slide28.xml><?xml version="1.0" encoding="utf-8"?>
 <p:sld xmlns:p="http://schemas.openxmlformats.org/presentationml/2006/main">
   <p:cSld>
     <p:bg>
@@ -31245,7 +32450,7 @@
 </p:sld>
 </file>
 
-<file path=ppt/slides/slide28.xml><?xml version="1.0" encoding="utf-8"?>
+<file path=ppt/slides/slide29.xml><?xml version="1.0" encoding="utf-8"?>
 <p:sld xmlns:p="http://schemas.openxmlformats.org/presentationml/2006/main">
   <p:cSld>
     <p:bg>
@@ -32675,7 +33880,7 @@
           <p:nvPr/>
         </p:nvPicPr>
         <p:blipFill rotWithShape="1">
-          <a:blip xmlns:r="http://schemas.openxmlformats.org/officeDocument/2006/relationships" xmlns:a="http://schemas.openxmlformats.org/drawingml/2006/main" r:embed="R07d244b533a54820">
+          <a:blip xmlns:r="http://schemas.openxmlformats.org/officeDocument/2006/relationships" xmlns:a="http://schemas.openxmlformats.org/drawingml/2006/main" r:embed="Rdec17b2b07df4dea">
             <a:alphaModFix/>
           </a:blip>
           <a:srcRect xmlns:a="http://schemas.openxmlformats.org/drawingml/2006/main" l="0" t="0" r="0" b="0"/>
@@ -32817,7 +34022,7 @@
           <p:nvPr/>
         </p:nvPicPr>
         <p:blipFill rotWithShape="1">
-          <a:blip xmlns:r="http://schemas.openxmlformats.org/officeDocument/2006/relationships" xmlns:a="http://schemas.openxmlformats.org/drawingml/2006/main" r:embed="R07d244b533a54820">
+          <a:blip xmlns:r="http://schemas.openxmlformats.org/officeDocument/2006/relationships" xmlns:a="http://schemas.openxmlformats.org/drawingml/2006/main" r:embed="Rdec17b2b07df4dea">
             <a:alphaModFix/>
           </a:blip>
           <a:srcRect xmlns:a="http://schemas.openxmlformats.org/drawingml/2006/main" l="0" t="0" r="0" b="0"/>
@@ -32959,7 +34164,7 @@
           <p:nvPr/>
         </p:nvPicPr>
         <p:blipFill rotWithShape="1">
-          <a:blip xmlns:r="http://schemas.openxmlformats.org/officeDocument/2006/relationships" xmlns:a="http://schemas.openxmlformats.org/drawingml/2006/main" r:embed="R07d244b533a54820">
+          <a:blip xmlns:r="http://schemas.openxmlformats.org/officeDocument/2006/relationships" xmlns:a="http://schemas.openxmlformats.org/drawingml/2006/main" r:embed="Rdec17b2b07df4dea">
             <a:alphaModFix/>
           </a:blip>
           <a:srcRect xmlns:a="http://schemas.openxmlformats.org/drawingml/2006/main" l="0" t="0" r="0" b="0"/>
@@ -33101,7 +34306,7 @@
           <p:nvPr/>
         </p:nvPicPr>
         <p:blipFill rotWithShape="1">
-          <a:blip xmlns:r="http://schemas.openxmlformats.org/officeDocument/2006/relationships" xmlns:a="http://schemas.openxmlformats.org/drawingml/2006/main" r:embed="R07d244b533a54820">
+          <a:blip xmlns:r="http://schemas.openxmlformats.org/officeDocument/2006/relationships" xmlns:a="http://schemas.openxmlformats.org/drawingml/2006/main" r:embed="Rdec17b2b07df4dea">
             <a:alphaModFix/>
           </a:blip>
           <a:srcRect xmlns:a="http://schemas.openxmlformats.org/drawingml/2006/main" l="0" t="0" r="0" b="0"/>
@@ -33243,7 +34448,7 @@
           <p:nvPr/>
         </p:nvPicPr>
         <p:blipFill rotWithShape="1">
-          <a:blip xmlns:r="http://schemas.openxmlformats.org/officeDocument/2006/relationships" xmlns:a="http://schemas.openxmlformats.org/drawingml/2006/main" r:embed="R07d244b533a54820">
+          <a:blip xmlns:r="http://schemas.openxmlformats.org/officeDocument/2006/relationships" xmlns:a="http://schemas.openxmlformats.org/drawingml/2006/main" r:embed="Rdec17b2b07df4dea">
             <a:alphaModFix/>
           </a:blip>
           <a:srcRect xmlns:a="http://schemas.openxmlformats.org/drawingml/2006/main" l="0" t="0" r="0" b="0"/>
@@ -33385,7 +34590,7 @@
           <p:nvPr/>
         </p:nvPicPr>
         <p:blipFill rotWithShape="1">
-          <a:blip xmlns:r="http://schemas.openxmlformats.org/officeDocument/2006/relationships" xmlns:a="http://schemas.openxmlformats.org/drawingml/2006/main" r:embed="R07d244b533a54820">
+          <a:blip xmlns:r="http://schemas.openxmlformats.org/officeDocument/2006/relationships" xmlns:a="http://schemas.openxmlformats.org/drawingml/2006/main" r:embed="Rdec17b2b07df4dea">
             <a:alphaModFix/>
           </a:blip>
           <a:srcRect xmlns:a="http://schemas.openxmlformats.org/drawingml/2006/main" l="0" t="0" r="0" b="0"/>
@@ -33936,13 +35141,13 @@
           <p:nvPr/>
         </p:nvPicPr>
         <p:blipFill>
-          <a:blip xmlns:r="http://schemas.openxmlformats.org/officeDocument/2006/relationships" xmlns:a="http://schemas.openxmlformats.org/drawingml/2006/main" r:embed="Raa476ea641584eaa"/>
+          <a:blip xmlns:r="http://schemas.openxmlformats.org/officeDocument/2006/relationships" xmlns:a="http://schemas.openxmlformats.org/drawingml/2006/main" r:embed="Rf717914a7d6f4cde"/>
           <a:stretch xmlns:a="http://schemas.openxmlformats.org/drawingml/2006/main"/>
         </p:blipFill>
         <p:spPr>
           <a:xfrm xmlns:a="http://schemas.openxmlformats.org/drawingml/2006/main" flipH="0" flipV="0">
-            <a:off x="1429494" y="0"/>
-            <a:ext cx="6285012" cy="4905375"/>
+            <a:off x="1698852" y="0"/>
+            <a:ext cx="5746296" cy="4905375"/>
           </a:xfrm>
           <a:prstGeom xmlns:a="http://schemas.openxmlformats.org/drawingml/2006/main" prst="rect">
             <a:avLst/>
@@ -34310,7 +35515,7 @@
                 <a:ea typeface="Calibri"/>
                 <a:cs typeface="Calibri"/>
               </a:rPr>
-              <a:t>Formless, all-pervasive, transparent, permeating, non-transforming, immeasurable — actionless energy. Transparence, permeability, and pervasiveness together evidence it as one indivisible reality. It acts not at all, yet every unit is energised and regulated in it. It has no absent place.</a:t>
+              <a:t>Formless, all-pervasive, non-transforming and actionless. It permeates every unit and is transparent in mutuality, where units are imaged and recognised. Every unit is energised and regulated in it. It has no absent place.</a:t>
             </a:r>
           </a:p>
           <a:p xmlns:a="http://schemas.openxmlformats.org/drawingml/2006/main">
@@ -35334,7 +36539,7 @@
                 <a:ea typeface="Calibri"/>
                 <a:cs typeface="Calibri"/>
               </a:rPr>
-              <a:t>bounded units in definite mutual facing; form is reflected, while effects, essentiality, and fulfilment are evidenced in coexistence</a:t>
+              <a:t>Units are manifest in mutual facing. Imaging provides a basis of recognition; relative powers exert effects.</a:t>
             </a:r>
           </a:p>
         </p:txBody>
@@ -35390,7 +36595,7 @@
                 <a:ea typeface="Calibri"/>
                 <a:cs typeface="Calibri"/>
               </a:rPr>
-              <a:t>“Existence itself is eternally manifest in the form of coexistence” — SB pp. 46, 48  ·  MVD pp. 11, 34  ·  JV p. 18</a:t>
+              <a:t>SB pp. 46, 48, 248–252  ·  MVD pp. 11, 32, 34  ·  PS p. 114  ·  JV p. 18</a:t>
             </a:r>
           </a:p>
         </p:txBody>
@@ -35851,7 +37056,7 @@
           <p:nvPr/>
         </p:nvPicPr>
         <p:blipFill rotWithShape="1">
-          <a:blip xmlns:r="http://schemas.openxmlformats.org/officeDocument/2006/relationships" xmlns:a="http://schemas.openxmlformats.org/drawingml/2006/main" r:embed="R568c85c70f744fe8">
+          <a:blip xmlns:r="http://schemas.openxmlformats.org/officeDocument/2006/relationships" xmlns:a="http://schemas.openxmlformats.org/drawingml/2006/main" r:embed="R3071fc9e65b645cd">
             <a:alphaModFix/>
           </a:blip>
           <a:srcRect xmlns:a="http://schemas.openxmlformats.org/drawingml/2006/main" l="0" t="0" r="0" b="0"/>
@@ -35921,7 +37126,7 @@
                 <a:ea typeface="Cambria"/>
                 <a:cs typeface="Cambria"/>
               </a:rPr>
-              <a:t>Soaked → forcefulness</a:t>
+              <a:t>Soaked</a:t>
             </a:r>
           </a:p>
         </p:txBody>
@@ -35977,7 +37182,7 @@
                 <a:ea typeface="Calibri"/>
                 <a:cs typeface="Calibri"/>
               </a:rPr>
-              <a:t>Being soaked is forcefulness itself. The unit is the bearer of definite relative power; read on the force side, the same bond is what the texts call basic impulsion.</a:t>
+              <a:t>Energy-fullness and forcefulness: the unit is endowed with energy and bears definite relative power. Force-endowment in saturation is the root of its manifestness (prakashmanata).</a:t>
             </a:r>
           </a:p>
         </p:txBody>
@@ -36094,7 +37299,7 @@
           <p:nvPr/>
         </p:nvPicPr>
         <p:blipFill rotWithShape="1">
-          <a:blip xmlns:r="http://schemas.openxmlformats.org/officeDocument/2006/relationships" xmlns:a="http://schemas.openxmlformats.org/drawingml/2006/main" r:embed="Rbeb856ebe720419c">
+          <a:blip xmlns:r="http://schemas.openxmlformats.org/officeDocument/2006/relationships" xmlns:a="http://schemas.openxmlformats.org/drawingml/2006/main" r:embed="R451869a7ece64706">
             <a:alphaModFix/>
           </a:blip>
           <a:srcRect xmlns:a="http://schemas.openxmlformats.org/drawingml/2006/main" l="0" t="0" r="0" b="0"/>
@@ -36164,7 +37369,7 @@
                 <a:ea typeface="Cambria"/>
                 <a:cs typeface="Cambria"/>
               </a:rPr>
-              <a:t>Submerged → energy</a:t>
+              <a:t>Submerged</a:t>
             </a:r>
           </a:p>
         </p:txBody>
@@ -36220,7 +37425,7 @@
                 <a:ea typeface="Calibri"/>
                 <a:cs typeface="Calibri"/>
               </a:rPr>
-              <a:t>Energy-fullness: the pervasive reality is on every side, so the unit is never devoid of the energy evident in its activity. “Unit-ness (ikaitva) + energy-fullness = activeness,” and activity is always effort, motion, and result.</a:t>
+              <a:t>Activeness and mutual recognition: units are present in one pervasive reality and become manifest to one another through imaging. Unit-ness with energy-fullness is activeness.</a:t>
             </a:r>
           </a:p>
         </p:txBody>
@@ -36337,7 +37542,7 @@
           <p:nvPr/>
         </p:nvPicPr>
         <p:blipFill rotWithShape="1">
-          <a:blip xmlns:r="http://schemas.openxmlformats.org/officeDocument/2006/relationships" xmlns:a="http://schemas.openxmlformats.org/drawingml/2006/main" r:embed="Rbf65f7d724a94252">
+          <a:blip xmlns:r="http://schemas.openxmlformats.org/officeDocument/2006/relationships" xmlns:a="http://schemas.openxmlformats.org/drawingml/2006/main" r:embed="R46f036df4a2c4f08">
             <a:alphaModFix/>
           </a:blip>
           <a:srcRect xmlns:a="http://schemas.openxmlformats.org/drawingml/2006/main" l="0" t="0" r="0" b="0"/>
@@ -36407,7 +37612,7 @@
                 <a:ea typeface="Cambria"/>
                 <a:cs typeface="Cambria"/>
               </a:rPr>
-              <a:t>Surrounded → regulation</a:t>
+              <a:t>Surrounded</a:t>
             </a:r>
           </a:p>
         </p:txBody>
@@ -36463,7 +37668,7 @@
                 <a:ea typeface="Calibri"/>
                 <a:cs typeface="Calibri"/>
               </a:rPr>
-              <a:t>Surroundedness is what establishes regulation: units are held at definite distance from one another by the formless reality standing between them. Law follows from this, not from an external command.</a:t>
+              <a:t>Regulation: units remain in definite relations within the pervasive reality. Their own mediative organisation evidences law and definite conduct.</a:t>
             </a:r>
           </a:p>
         </p:txBody>
@@ -36519,7 +37724,7 @@
                 <a:ea typeface="Calibri"/>
                 <a:cs typeface="Calibri"/>
               </a:rPr>
-              <a:t>The texts state the resulting chain as saturation → energy-fullness → forcefulness → recognition → participation in orderliness; recognition and fulfilment are taken up on slide 8. An ontological entailment, not a measurable transfer mechanism. — SB pp. 46, 57, 79, 243; MVD pp. 32–33, 40</a:t>
+              <a:t>These are overlapping descriptions of one saturation. Imaging and recognition continue on slide 8.  ·  SB pp. 57, 69, 79, 248  ·  MVD pp. 32–33, 40  ·  PS pp. 114, 121</a:t>
             </a:r>
           </a:p>
         </p:txBody>
@@ -36980,7 +38185,7 @@
           <p:nvPr/>
         </p:nvPicPr>
         <p:blipFill rotWithShape="1">
-          <a:blip xmlns:r="http://schemas.openxmlformats.org/officeDocument/2006/relationships" xmlns:a="http://schemas.openxmlformats.org/drawingml/2006/main" r:embed="R526dd5ed2a5140a9">
+          <a:blip xmlns:r="http://schemas.openxmlformats.org/officeDocument/2006/relationships" xmlns:a="http://schemas.openxmlformats.org/drawingml/2006/main" r:embed="Rfdc80c21bfba487b">
             <a:alphaModFix/>
           </a:blip>
           <a:srcRect xmlns:a="http://schemas.openxmlformats.org/drawingml/2006/main" l="0" t="0" r="0" b="0"/>
@@ -37223,7 +38428,7 @@
           <p:nvPr/>
         </p:nvPicPr>
         <p:blipFill rotWithShape="1">
-          <a:blip xmlns:r="http://schemas.openxmlformats.org/officeDocument/2006/relationships" xmlns:a="http://schemas.openxmlformats.org/drawingml/2006/main" r:embed="Ra44519b4fac24678">
+          <a:blip xmlns:r="http://schemas.openxmlformats.org/officeDocument/2006/relationships" xmlns:a="http://schemas.openxmlformats.org/drawingml/2006/main" r:embed="R5fcb61efad304602">
             <a:alphaModFix/>
           </a:blip>
           <a:srcRect xmlns:a="http://schemas.openxmlformats.org/drawingml/2006/main" l="0" t="0" r="0" b="0"/>
@@ -37466,7 +38671,7 @@
           <p:nvPr/>
         </p:nvPicPr>
         <p:blipFill rotWithShape="1">
-          <a:blip xmlns:r="http://schemas.openxmlformats.org/officeDocument/2006/relationships" xmlns:a="http://schemas.openxmlformats.org/drawingml/2006/main" r:embed="R835fd9b123634f6b">
+          <a:blip xmlns:r="http://schemas.openxmlformats.org/officeDocument/2006/relationships" xmlns:a="http://schemas.openxmlformats.org/drawingml/2006/main" r:embed="R71c8318f06a5490a">
             <a:alphaModFix/>
           </a:blip>
           <a:srcRect xmlns:a="http://schemas.openxmlformats.org/drawingml/2006/main" l="0" t="0" r="0" b="0"/>
@@ -37880,7 +39085,7 @@
                 <a:ea typeface="Calibri"/>
                 <a:cs typeface="Calibri"/>
               </a:rPr>
-              <a:t>§1.2 · §1.4 · THE SECOND BOND</a:t>
+              <a:t>§§1.2–1.4 · MANIFESTNESS AND MUTUAL RECOGNITION</a:t>
             </a:r>
           </a:p>
         </p:txBody>
@@ -37992,7 +39197,7 @@
                 <a:ea typeface="Calibri"/>
                 <a:cs typeface="Calibri"/>
               </a:rPr>
-              <a:t>Saturation binds every unit to the ground. A second relation binds units to one another. Bounded plurality — countless units, each with definite limits, in one pervasive reality — is itself what provisions recognition: “a provision for one unit to recognise another got manifest in existence.” Complementarity is given in coexistence. It is not created by us and not negotiated.</a:t>
+              <a:t>Units saturated in one pervasive reality stand in mutual facing. Imaging makes a unit manifest to another and provides a basis of recognition. Its relative powers also exert effects. Complementarity belongs to this coexistence and is fulfilled according to constitution and order.</a:t>
             </a:r>
           </a:p>
         </p:txBody>
@@ -38109,7 +39314,7 @@
           <p:nvPr/>
         </p:nvPicPr>
         <p:blipFill rotWithShape="1">
-          <a:blip xmlns:r="http://schemas.openxmlformats.org/officeDocument/2006/relationships" xmlns:a="http://schemas.openxmlformats.org/drawingml/2006/main" r:embed="Rb7a54a25afca4a24">
+          <a:blip xmlns:r="http://schemas.openxmlformats.org/officeDocument/2006/relationships" xmlns:a="http://schemas.openxmlformats.org/drawingml/2006/main" r:embed="R5cd7d4f6c9164856">
             <a:alphaModFix/>
           </a:blip>
           <a:srcRect xmlns:a="http://schemas.openxmlformats.org/drawingml/2006/main" l="0" t="0" r="0" b="0"/>
@@ -38235,7 +39440,7 @@
                 <a:ea typeface="Calibri"/>
                 <a:cs typeface="Calibri"/>
               </a:rPr>
-              <a:t>A unit recognises another by responding according to definite constitution, distance, force, and relation — no cognition required. Heat accepted and redistributed; particles holding definite distance. The equipment is named: capacity, ability, receptivity.</a:t>
+              <a:t>Image (pratibimb) is a basis of mutual recognition, including in insentient nature. Heat exchange and particle relations illustrate responsiveness. Human understanding requires the knowing activities of jeevan.</a:t>
             </a:r>
           </a:p>
         </p:txBody>
@@ -38352,7 +39557,7 @@
           <p:nvPr/>
         </p:nvPicPr>
         <p:blipFill rotWithShape="1">
-          <a:blip xmlns:r="http://schemas.openxmlformats.org/officeDocument/2006/relationships" xmlns:a="http://schemas.openxmlformats.org/drawingml/2006/main" r:embed="Rec4a061207d041be">
+          <a:blip xmlns:r="http://schemas.openxmlformats.org/officeDocument/2006/relationships" xmlns:a="http://schemas.openxmlformats.org/drawingml/2006/main" r:embed="Ra1d326a62f4e429d">
             <a:alphaModFix/>
           </a:blip>
           <a:srcRect xmlns:a="http://schemas.openxmlformats.org/drawingml/2006/main" l="0" t="0" r="0" b="0"/>
@@ -38595,7 +39800,7 @@
           <p:nvPr/>
         </p:nvPicPr>
         <p:blipFill rotWithShape="1">
-          <a:blip xmlns:r="http://schemas.openxmlformats.org/officeDocument/2006/relationships" xmlns:a="http://schemas.openxmlformats.org/drawingml/2006/main" r:embed="R7cf61c14e8514020">
+          <a:blip xmlns:r="http://schemas.openxmlformats.org/officeDocument/2006/relationships" xmlns:a="http://schemas.openxmlformats.org/drawingml/2006/main" r:embed="Rc5e5f3521a344644">
             <a:alphaModFix/>
           </a:blip>
           <a:srcRect xmlns:a="http://schemas.openxmlformats.org/drawingml/2006/main" l="0" t="0" r="0" b="0"/>
@@ -38777,29 +39982,7 @@
                 <a:ea typeface="Calibri"/>
                 <a:cs typeface="Calibri"/>
               </a:rPr>
-              <a:t>The completeness drive is the drive to fulfil this complementarity: composition is the natural inclination toward coexistence, </a:t>
-            </a:r>
-            <a:r>
-              <a:rPr sz="950" b="0" i="1" u="none" cap="none">
-                <a:solidFill>
-                  <a:srgbClr val="5A6377"/>
-                </a:solidFill>
-                <a:latin typeface="Calibri"/>
-                <a:ea typeface="Calibri"/>
-                <a:cs typeface="Calibri"/>
-              </a:rPr>
-              <a:t>the sentience threshold is hungry and overfull atoms completing each other</a:t>
-            </a:r>
-            <a:r>
-              <a:rPr sz="950" b="0" i="1" u="none" cap="none">
-                <a:solidFill>
-                  <a:srgbClr val="5A6377"/>
-                </a:solidFill>
-                <a:latin typeface="Calibri"/>
-                <a:ea typeface="Calibri"/>
-                <a:cs typeface="Calibri"/>
-              </a:rPr>
-              <a:t>, and justice is the human form of the same thing. — SB pp. 49–50, 53, 57, 62; MVD pp. 32, 62; JV pp. 43, 67, 69</a:t>
+              <a:t>Imaging supports recognition; human evaluation requires understanding.  ·  PS p. 121  ·  SB pp. 49–53, 248–252  ·  MVD p. 32  ·  JV pp. 43, 69</a:t>
             </a:r>
           </a:p>
         </p:txBody>
@@ -39402,7 +40585,7 @@
                 <a:ea typeface="Calibri"/>
                 <a:cs typeface="Calibri"/>
               </a:rPr>
-              <a:t>Real boundary and configuration. Example: this peepal tree is one bounded living form with a definite trunk, branches, leaves, and roots.</a:t>
+              <a:t>The constituted unit is bimb; its image is pratibimb. This peepal tree has a definite shape, volume and density, with trunk, branches, leaves and roots.</a:t>
             </a:r>
           </a:p>
         </p:txBody>
@@ -39717,7 +40900,7 @@
                 <a:ea typeface="Calibri"/>
                 <a:cs typeface="Calibri"/>
               </a:rPr>
-              <a:t>Guna is capacity and relative effect. In the peepal: nutrition, growth, repair, seed production, and degeneration become evident under definite conditions.</a:t>
+              <a:t>Guna means relative powers and their effects. The peepal’s nutrition, repair, seed production and degeneration become effective in definite conditions.</a:t>
             </a:r>
           </a:p>
         </p:txBody>
@@ -40452,7 +41635,7 @@
                 <a:ea typeface="Calibri"/>
                 <a:cs typeface="Calibri"/>
               </a:rPr>
-              <a:t>The tree as a composite form can die and decompose while its constituent material units persist and enter other compositions. Persistence of existence is not persistence of one configuration.</a:t>
+              <a:t>The whole unit is manifest (prakashman) with all four aspects. Imaging (pratibimban) is central to prakash. An image provides a basis of recognition; understanding the unit also requires its relations and fulfilment. The tree can die while its material constituents persist.</a:t>
             </a:r>
           </a:p>
         </p:txBody>
@@ -40508,7 +41691,7 @@
                 <a:ea typeface="Calibri"/>
                 <a:cs typeface="Calibri"/>
               </a:rPr>
-              <a:t>MVD pp. 11, 42, 47, 50–51  ·  SB pp. 55, 71, 86</a:t>
+              <a:t>MVD pp. 45, 47, 50–51  ·  SB pp. 249–252, 256–257  ·  PS pp. 119, 121, 135</a:t>
             </a:r>
           </a:p>
         </p:txBody>

--- a/Studies/The-Ontology-of-Coexistence/The-Ontology-of-Existence-Madhyasth-Darshan.pptx
+++ b/Studies/The-Ontology-of-Coexistence/The-Ontology-of-Existence-Madhyasth-Darshan.pptx
@@ -2,41 +2,41 @@
 <file path=ppt/presentation.xml><?xml version="1.0" encoding="utf-8"?>
 <p:presentation xmlns:p="http://schemas.openxmlformats.org/presentationml/2006/main">
   <p:sldMasterIdLst>
-    <p:sldMasterId xmlns:r="http://schemas.openxmlformats.org/officeDocument/2006/relationships" id="2147483648" r:id="R4b6a22f3eab34b84"/>
+    <p:sldMasterId xmlns:r="http://schemas.openxmlformats.org/officeDocument/2006/relationships" id="2147483648" r:id="Rb99068a038c3426b"/>
   </p:sldMasterIdLst>
   <p:notesMasterIdLst>
-    <p:notesMasterId xmlns:r="http://schemas.openxmlformats.org/officeDocument/2006/relationships" r:id="R90bc957ecea84c6f"/>
+    <p:notesMasterId xmlns:r="http://schemas.openxmlformats.org/officeDocument/2006/relationships" r:id="Ra9d8cfa726104afb"/>
   </p:notesMasterIdLst>
   <p:sldIdLst>
-    <p:sldId xmlns:r="http://schemas.openxmlformats.org/officeDocument/2006/relationships" id="256" r:id="R43cce1505ab24e46"/>
-    <p:sldId xmlns:r="http://schemas.openxmlformats.org/officeDocument/2006/relationships" id="257" r:id="R81340e3a6e4e4321"/>
-    <p:sldId xmlns:r="http://schemas.openxmlformats.org/officeDocument/2006/relationships" id="258" r:id="R6579f0ff329b4d4c"/>
-    <p:sldId xmlns:r="http://schemas.openxmlformats.org/officeDocument/2006/relationships" id="259" r:id="R244e429c630049e3"/>
-    <p:sldId xmlns:r="http://schemas.openxmlformats.org/officeDocument/2006/relationships" id="260" r:id="Rd7ff98c8399b493f"/>
-    <p:sldId xmlns:r="http://schemas.openxmlformats.org/officeDocument/2006/relationships" id="261" r:id="R6ef06ae285bb4f47"/>
-    <p:sldId xmlns:r="http://schemas.openxmlformats.org/officeDocument/2006/relationships" id="262" r:id="Rb7f3a9e921cf4cef"/>
-    <p:sldId xmlns:r="http://schemas.openxmlformats.org/officeDocument/2006/relationships" id="263" r:id="Rab192b4fc3e24760"/>
-    <p:sldId xmlns:r="http://schemas.openxmlformats.org/officeDocument/2006/relationships" id="264" r:id="Re89a9eb74f364e99"/>
-    <p:sldId xmlns:r="http://schemas.openxmlformats.org/officeDocument/2006/relationships" id="265" r:id="Rc7e0f778bef84f5e"/>
-    <p:sldId xmlns:r="http://schemas.openxmlformats.org/officeDocument/2006/relationships" id="266" r:id="R8cb4bd1868c24556"/>
-    <p:sldId xmlns:r="http://schemas.openxmlformats.org/officeDocument/2006/relationships" id="267" r:id="Re03695870ec54e24"/>
-    <p:sldId xmlns:r="http://schemas.openxmlformats.org/officeDocument/2006/relationships" id="268" r:id="R05b0fee9ebbb4d71"/>
-    <p:sldId xmlns:r="http://schemas.openxmlformats.org/officeDocument/2006/relationships" id="269" r:id="R848868b1a79a47ac"/>
-    <p:sldId xmlns:r="http://schemas.openxmlformats.org/officeDocument/2006/relationships" id="270" r:id="Rf0a612bf33be43b2"/>
-    <p:sldId xmlns:r="http://schemas.openxmlformats.org/officeDocument/2006/relationships" id="271" r:id="R20587271494f44ab"/>
-    <p:sldId xmlns:r="http://schemas.openxmlformats.org/officeDocument/2006/relationships" id="272" r:id="R1d9e14a3f4654a00"/>
-    <p:sldId xmlns:r="http://schemas.openxmlformats.org/officeDocument/2006/relationships" id="273" r:id="R097d58afe07641f5"/>
-    <p:sldId xmlns:r="http://schemas.openxmlformats.org/officeDocument/2006/relationships" id="274" r:id="R6080883952844bb0"/>
-    <p:sldId xmlns:r="http://schemas.openxmlformats.org/officeDocument/2006/relationships" id="275" r:id="R656e3721fd3a4e3f"/>
-    <p:sldId xmlns:r="http://schemas.openxmlformats.org/officeDocument/2006/relationships" id="276" r:id="R45cc94adc9d7435f"/>
-    <p:sldId xmlns:r="http://schemas.openxmlformats.org/officeDocument/2006/relationships" id="277" r:id="R19238237be054855"/>
-    <p:sldId xmlns:r="http://schemas.openxmlformats.org/officeDocument/2006/relationships" id="278" r:id="Rc060f52729f74e66"/>
-    <p:sldId xmlns:r="http://schemas.openxmlformats.org/officeDocument/2006/relationships" id="279" r:id="R8f26ce1c97be4f62"/>
-    <p:sldId xmlns:r="http://schemas.openxmlformats.org/officeDocument/2006/relationships" id="280" r:id="R0e5453380f104c7e"/>
-    <p:sldId xmlns:r="http://schemas.openxmlformats.org/officeDocument/2006/relationships" id="281" r:id="R2191a9673ac04124"/>
-    <p:sldId xmlns:r="http://schemas.openxmlformats.org/officeDocument/2006/relationships" id="282" r:id="R403cd68193b14ebb"/>
-    <p:sldId xmlns:r="http://schemas.openxmlformats.org/officeDocument/2006/relationships" id="283" r:id="R18f750a2a95340a2"/>
-    <p:sldId xmlns:r="http://schemas.openxmlformats.org/officeDocument/2006/relationships" id="284" r:id="R8e80d585f0e742a0"/>
+    <p:sldId xmlns:r="http://schemas.openxmlformats.org/officeDocument/2006/relationships" id="256" r:id="Rb35e6c39136040d9"/>
+    <p:sldId xmlns:r="http://schemas.openxmlformats.org/officeDocument/2006/relationships" id="257" r:id="R42b916a74187495a"/>
+    <p:sldId xmlns:r="http://schemas.openxmlformats.org/officeDocument/2006/relationships" id="258" r:id="Rb9baf66fbba74622"/>
+    <p:sldId xmlns:r="http://schemas.openxmlformats.org/officeDocument/2006/relationships" id="259" r:id="R174882e548d1466e"/>
+    <p:sldId xmlns:r="http://schemas.openxmlformats.org/officeDocument/2006/relationships" id="260" r:id="R4977231e3ba741ec"/>
+    <p:sldId xmlns:r="http://schemas.openxmlformats.org/officeDocument/2006/relationships" id="261" r:id="R64ee5d102da54184"/>
+    <p:sldId xmlns:r="http://schemas.openxmlformats.org/officeDocument/2006/relationships" id="262" r:id="Ra89aad03a3ec4f66"/>
+    <p:sldId xmlns:r="http://schemas.openxmlformats.org/officeDocument/2006/relationships" id="263" r:id="R8651193f06b2454b"/>
+    <p:sldId xmlns:r="http://schemas.openxmlformats.org/officeDocument/2006/relationships" id="264" r:id="R4da1fdee300247b8"/>
+    <p:sldId xmlns:r="http://schemas.openxmlformats.org/officeDocument/2006/relationships" id="265" r:id="Rb84d5cb6c0354879"/>
+    <p:sldId xmlns:r="http://schemas.openxmlformats.org/officeDocument/2006/relationships" id="266" r:id="R7dfbe544d1c94910"/>
+    <p:sldId xmlns:r="http://schemas.openxmlformats.org/officeDocument/2006/relationships" id="267" r:id="R47303522ded14044"/>
+    <p:sldId xmlns:r="http://schemas.openxmlformats.org/officeDocument/2006/relationships" id="268" r:id="Rc331f1e58da84f4b"/>
+    <p:sldId xmlns:r="http://schemas.openxmlformats.org/officeDocument/2006/relationships" id="269" r:id="R2bed2181f9f146e7"/>
+    <p:sldId xmlns:r="http://schemas.openxmlformats.org/officeDocument/2006/relationships" id="270" r:id="R7665f7a02a1c4955"/>
+    <p:sldId xmlns:r="http://schemas.openxmlformats.org/officeDocument/2006/relationships" id="271" r:id="R8b7ab1deb59d42d2"/>
+    <p:sldId xmlns:r="http://schemas.openxmlformats.org/officeDocument/2006/relationships" id="272" r:id="R182ba4b1ee7b4755"/>
+    <p:sldId xmlns:r="http://schemas.openxmlformats.org/officeDocument/2006/relationships" id="273" r:id="Rb94fd631904b4880"/>
+    <p:sldId xmlns:r="http://schemas.openxmlformats.org/officeDocument/2006/relationships" id="274" r:id="R67e0c6a8bf844042"/>
+    <p:sldId xmlns:r="http://schemas.openxmlformats.org/officeDocument/2006/relationships" id="275" r:id="R087d48705b2140fa"/>
+    <p:sldId xmlns:r="http://schemas.openxmlformats.org/officeDocument/2006/relationships" id="276" r:id="R83303adf5acb4602"/>
+    <p:sldId xmlns:r="http://schemas.openxmlformats.org/officeDocument/2006/relationships" id="277" r:id="R15fbb8a39dee4b36"/>
+    <p:sldId xmlns:r="http://schemas.openxmlformats.org/officeDocument/2006/relationships" id="278" r:id="R6f6581197b7c42e7"/>
+    <p:sldId xmlns:r="http://schemas.openxmlformats.org/officeDocument/2006/relationships" id="279" r:id="R29a20a07a1e34140"/>
+    <p:sldId xmlns:r="http://schemas.openxmlformats.org/officeDocument/2006/relationships" id="280" r:id="Rdc70c46e1d964534"/>
+    <p:sldId xmlns:r="http://schemas.openxmlformats.org/officeDocument/2006/relationships" id="281" r:id="R34c96f2eb0544c71"/>
+    <p:sldId xmlns:r="http://schemas.openxmlformats.org/officeDocument/2006/relationships" id="282" r:id="Ra27b9738f5fa480e"/>
+    <p:sldId xmlns:r="http://schemas.openxmlformats.org/officeDocument/2006/relationships" id="283" r:id="Rc51a80f845ce4a77"/>
+    <p:sldId xmlns:r="http://schemas.openxmlformats.org/officeDocument/2006/relationships" id="284" r:id="R13132ddc5c8f42dd"/>
   </p:sldIdLst>
   <p:sldSz cx="9144000" cy="5143500"/>
   <p:notesSz cx="6858000" cy="9144000"/>
@@ -593,7 +593,7 @@
           </a:p>
           <a:p xmlns:a="http://schemas.openxmlformats.org/drawingml/2006/main">
             <a:r>
-              <a:t>Two kinds of mutuality matter. A relationship is mutuality whose expectations are definite in the completeness of the bond — parent and child. A contact (*sampark*) is mutuality where expectations are voluntary — neighbours who share a wall.</a:t>
+              <a:t>Two kinds of mutuality matter. A relationship carries definite expectations towards completeness — parent and child, for example. In a contact (*sampark*), the particular exchange is voluntarily undertaken, as when neighbours agree to share the upkeep of a wall. Both remain answerable to justice and humane conduct.</a:t>
             </a:r>
           </a:p>
           <a:p xmlns:a="http://schemas.openxmlformats.org/drawingml/2006/main">
@@ -973,7 +973,7 @@
           </a:p>
           <a:p xmlns:a="http://schemas.openxmlformats.org/drawingml/2006/main">
             <a:r>
-              <a:t>T1 is constitutional completeness: the immortality of result. A developing atom becomes a sentient unit — jeevan. Status shifts from physicochemical to what the texts call delusional — meaning the body is mistaken for the self. That is a stage label, not a psychiatric diagnosis.</a:t>
+              <a:t>T1 is constitutional completeness: the immortality of result. A developing atom becomes a sentient unit — jeevan. Its standing changes from physicochemical to sentient before realisation, on what the texts call the delusional plane. In human living, delusion means mistaking the body for the self. In animal living, expression is limited by the bodily medium. The plane name should not turn that limitation into a human error or a psychiatric diagnosis.</a:t>
             </a:r>
           </a:p>
           <a:p xmlns:a="http://schemas.openxmlformats.org/drawingml/2006/main">
@@ -1083,7 +1083,7 @@
           </a:p>
           <a:p xmlns:a="http://schemas.openxmlformats.org/drawingml/2006/main">
             <a:r>
-              <a:t>**Progressions** — existential, way of existence, development, awakening — say how the drive *moves*. The first names the definite sequence in which the orders become manifest; the second, the conformance by which each order keeps its conduct; the third, physicochemical and atomic development up to T1; the fourth, qualitative development inside a complete sentient unit toward T2 and T3.</a:t>
+              <a:t>**Order and development** are described by four terms: existential progression, way of existence, development progression, and awakening progression. The first names the definite order in which the orders become manifest; the second, the conformance by which each order keeps its conduct; the third, physicochemical and atomic development up to T1; the fourth, qualitative development inside a complete sentient unit toward T2 and T3.</a:t>
             </a:r>
           </a:p>
           <a:p xmlns:a="http://schemas.openxmlformats.org/drawingml/2006/main">
@@ -1358,12 +1358,12 @@
           </a:p>
           <a:p xmlns:a="http://schemas.openxmlformats.org/drawingml/2006/main">
             <a:r>
-              <a:t>Structurally, the centre is the core self. Around it: resolve, desire, thought, and hope — the texts’ buddhi, chitta, vritti, and mun.</a:t>
-            </a:r>
-          </a:p>
-          <a:p xmlns:a="http://schemas.openxmlformats.org/drawingml/2006/main">
-            <a:r>
-              <a:t>Each works outward and inward. Hope selects and tastes. Thought analyses and deliberates. Desire visualises and contemplates — and directly apprehends. Resolve resolves and comprehends. The core self authenticates and realises. Tasting at hope has three orientations: sensory, value-based, and goal-based. Awakening changes which of these governs what is accepted. Projection of realisation is authenticity, resolve, visualisation, analysis, and selection into living conduct.</a:t>
+              <a:t>Structurally, atma is the centre. Four faculties surround it: buddhi, chitta, vritti, and mun. The texts distinguish these faculties from their characteristic powers: evidence, resoluteness, desire, thought, and hope.</a:t>
+            </a:r>
+          </a:p>
+          <a:p xmlns:a="http://schemas.openxmlformats.org/drawingml/2006/main">
+            <a:r>
+              <a:t>Each characteristic power has outward and inward activities. Mun selects and tastes; vritti analyses and deliberates; chitta visualises and contemplates, including direct apprehension; buddhi resolves and comprehends; atma evidences authenticity and realises. Tasting at mun has three orientations: sensory, value-based, and goal-based. Awakening changes which governs what is accepted. Projection expresses understanding through authenticity, resolve, visualisation, analysis, and selection into living conduct.</a:t>
             </a:r>
           </a:p>
           <a:p xmlns:a="http://schemas.openxmlformats.org/drawingml/2006/main">
@@ -1463,6 +1463,11 @@
           </a:p>
           <a:p xmlns:a="http://schemas.openxmlformats.org/drawingml/2006/main">
             <a:r>
+              <a:t>Their fulfilment is cumulative: resolution; resolution with prosperity; these with fearlessness; and all three in coexistence. Each fuller fulfilment retains the preceding content. These are principal correspondences within one life, not separate compartments or a promise that acquiring goods automatically produces peace.</a:t>
+            </a:r>
+          </a:p>
+          <a:p xmlns:a="http://schemas.openxmlformats.org/drawingml/2006/main">
+            <a:r>
               <a:t>The living cycle is: reflection feeds projection, and projection feeds deeper reflection — that is what living means here. Continuous happiness is harmony evidenced in resolved living, not a sensory spike.</a:t>
             </a:r>
           </a:p>
@@ -1543,12 +1548,12 @@
           </a:p>
           <a:p xmlns:a="http://schemas.openxmlformats.org/drawingml/2006/main">
             <a:r>
-              <a:t>First: what is real, and how it is ordered. There is an all-pervasive ground and countable units, and two bonds — each unit to the ground, and each unit to the others. The second of those is complementarity, and it is given rather than made: because there are many bounded things in one ground, each stands in definite relation to the rest. Each unit has a definite form, capacities, a way of participating, and an inseparable innateness, and these show up in mutual relations across four orders of nature. Because no unit can be separated from the ground, existence itself neither begins nor ends.</a:t>
-            </a:r>
-          </a:p>
-          <a:p xmlns:a="http://schemas.openxmlformats.org/drawingml/2006/main">
-            <a:r>
-              <a:t>Second: how development proceeds along two lines that must not be collapsed. And the reason it proceeds at all — the drive is to fulfil that complementarity. One line builds larger configurations — particles, molecules, cells, bodies — but never exceeds the order of the things it is built from. The other is development in an atom that can become a complete sentient unit. Across both, activity is effort, motion, and result together — not three separate steps.</a:t>
+              <a:t>First: what is real, and how it is ordered. There is an all-pervasive ground and countable units, and two bonds — each unit to the ground, and each unit to the others. The second of those is complementarity: each unit stands in definite relations to the rest. Every unit has form, capacities, a way of participating, and an inseparable innateness, expressed across four orders of nature. The darshan connects their inseparability from the ground with its claim that existence neither begins nor ends.</a:t>
+            </a:r>
+          </a:p>
+          <a:p xmlns:a="http://schemas.openxmlformats.org/drawingml/2006/main">
+            <a:r>
+              <a:t>Second: how development proceeds along two lines. Composition forms molecules, cells and bodies; material constituents can enter pranic organisation and return to the material order through disintegration. This does not by itself produce a sentient unit. Development in an atom reaches constitutional completeness as jeevan. Across both lines, activity includes effort, motion and result together.</a:t>
             </a:r>
           </a:p>
           <a:p xmlns:a="http://schemas.openxmlformats.org/drawingml/2006/main">
@@ -1668,7 +1673,7 @@
           </a:p>
           <a:p xmlns:a="http://schemas.openxmlformats.org/drawingml/2006/main">
             <a:r>
-              <a:t>And one thing awakening is *not*: it is not preferring the right things, and it is not having the right insight. The next slide is about why.</a:t>
+              <a:t>Awakening requires more than preferring the right things or having an insight that does not guide conduct. The next slide explains how understanding becomes effective in living.</a:t>
             </a:r>
           </a:p>
         </p:txBody>
@@ -1853,7 +1858,7 @@
           </a:p>
           <a:p xmlns:a="http://schemas.openxmlformats.org/drawingml/2006/main">
             <a:r>
-              <a:t>Conformance has order-specific modes. Material: structural or result conformance. Bio: seed-conformance. Animal: species-conformance, inherited from gestation. Human: *sanskar*-conformance — achieved through knowing, believing, recognising, and fulfilling, rather than inherited. That last one is why education and tradition matter so much here: they can reproduce confusion just as easily as they can support awakening.</a:t>
+              <a:t>Conformance has order-specific modes. Material: structural or result conformance. Bio: seed-conformance. Animal: species-conformance, inherited from gestation. Human: *sanskar*-conformance — conduct follows acquired acceptances and dispositions. These can express delusion or awakened understanding. That is why education and tradition matter: they can reproduce confusion or support awakening.</a:t>
             </a:r>
           </a:p>
           <a:p xmlns:a="http://schemas.openxmlformats.org/drawingml/2006/main">
@@ -2028,7 +2033,7 @@
           </a:p>
           <a:p xmlns:a="http://schemas.openxmlformats.org/drawingml/2006/main">
             <a:r>
-              <a:t>On the right: how knowing happens within the sentient unit. Hope tastes and selects. Thought deliberates. Desire contemplates and directly apprehends. Resolve comprehends and resolves. The core self realises through truth. Happiness, peace, contentment, and bliss name harmonies between paired faculties. Realisation at the core is named ultimate bliss.</a:t>
+              <a:t>On the right: how knowing happens within the sentient unit. Mun tastes and selects. Vritti deliberates. Chitta contemplates and directly apprehends. Buddhi comprehends and resolves. Atma realises in truth. Happiness, peace, contentment, and bliss name harmonies between paired faculties. Realisation at atma is named ultimate bliss.</a:t>
             </a:r>
           </a:p>
           <a:p xmlns:a="http://schemas.openxmlformats.org/drawingml/2006/main">
@@ -2283,7 +2288,7 @@
           <a:lstStyle xmlns:a="http://schemas.openxmlformats.org/drawingml/2006/main"/>
           <a:p xmlns:a="http://schemas.openxmlformats.org/drawingml/2006/main">
             <a:r>
-              <a:t>The drive comes to rest in awakened human beings — effort settled, understanding proven in daily conduct, and carried as a tradition.</a:t>
+              <a:t>Conduct completeness is realised understanding expressed continuously by the individual. Humane participation and education transmit it through an awakened tradition. Individual completeness contributes to social completeness; it does not wait for the entire society to be complete.</a:t>
             </a:r>
           </a:p>
           <a:p xmlns:a="http://schemas.openxmlformats.org/drawingml/2006/main">
@@ -2298,7 +2303,7 @@
           </a:p>
           <a:p xmlns:a="http://schemas.openxmlformats.org/drawingml/2006/main">
             <a:r>
-              <a:t>Five dimensions of continuity carry the tradition: education and formative culture; justice and preservation; health and restraint; production and work; exchange and storage.</a:t>
+              <a:t>Five social systems carry that continuity: education and formative culture; justice and preservation; health and restraint; production and work; exchange and storage. These differ from the four dimensions of a person's living — realisation, thought, behaviour and work.</a:t>
             </a:r>
           </a:p>
           <a:p xmlns:a="http://schemas.openxmlformats.org/drawingml/2006/main">
@@ -2308,7 +2313,7 @@
           </a:p>
           <a:p xmlns:a="http://schemas.openxmlformats.org/drawingml/2006/main">
             <a:r>
-              <a:t>This is not an ideal bolted onto matter. On this account, the progression is designed to arrive here. Nature saturated in Omnipresence is bound for development until realisation. An awakened human tradition is what that progression delivers.</a:t>
+              <a:t>MD connects this social aim with human dharma as happiness, values fulfilled in relationships, and understanding expressed in conduct. Nature is oriented towards development and realisation; an awakened human tradition requires people to understand, practise, and transmit that understanding. The ontology gives this participation a purpose without making humane institutions automatic.</a:t>
             </a:r>
           </a:p>
         </p:txBody>
@@ -2988,7 +2993,7 @@
           </a:p>
           <a:p xmlns:a="http://schemas.openxmlformats.org/drawingml/2006/main">
             <a:r>
-              <a:t>If no division of a unit can put any fragment outside the ground, then nothing that exists can be annihilated. And nothing arises from non-being either. So existence does not begin and does not end. What begins and ends is composition — particular arrangements of units.</a:t>
+              <a:t>Division leaves every fragment saturated in the ground. Madhyasth Darshan connects this inseparability with its claim that what exists is not annihilated and does not arise from non-being. Existence is perpetual; particular arrangements of units begin and end. The doctrine is explicit, although inseparability alone does not independently prove every claim of persistence.</a:t>
             </a:r>
           </a:p>
           <a:p xmlns:a="http://schemas.openxmlformats.org/drawingml/2006/main">
@@ -3193,7 +3198,7 @@
           </a:p>
           <a:p xmlns:a="http://schemas.openxmlformats.org/drawingml/2006/main">
             <a:r>
-              <a:t>Essential nature is usefulness in context: vitalising while the living organisation holds; devitalising when it breaks down.</a:t>
+              <a:t>Essential nature is usefulness in mutuality. The peepal's effects are vitalising or devitalising according to the affected body and conditions. Its being alive or decomposing does not alone decide which effect it has on another body.</a:t>
             </a:r>
           </a:p>
           <a:p xmlns:a="http://schemas.openxmlformats.org/drawingml/2006/main">
@@ -3288,7 +3293,7 @@
   </p:cSld>
   <p:clrMap bg1="lt1" tx1="dk1" bg2="dk2" tx2="lt2" accent1="accent1" accent2="accent2" accent3="accent3" accent4="accent4" accent5="accent5" accent6="accent6" hlink="hlink" folHlink="folHlink"/>
   <p:sldLayoutIdLst>
-    <p:sldLayoutId xmlns:r="http://schemas.openxmlformats.org/officeDocument/2006/relationships" id="2147483649" r:id="Re7697e0dc1d940ac"/>
+    <p:sldLayoutId xmlns:r="http://schemas.openxmlformats.org/officeDocument/2006/relationships" id="2147483649" r:id="R81450a0ef2d6408a"/>
   </p:sldLayoutIdLst>
   <p:hf sldNum="0" hdr="0" ftr="0" dt="0"/>
   <p:txStyles>
@@ -5491,7 +5496,7 @@
                 <a:ea typeface="Cambria"/>
                 <a:cs typeface="Cambria"/>
               </a:rPr>
-              <a:t>Association</a:t>
+              <a:t>Contact</a:t>
             </a:r>
           </a:p>
         </p:txBody>
@@ -5547,7 +5552,7 @@
                 <a:ea typeface="Calibri"/>
                 <a:cs typeface="Calibri"/>
               </a:rPr>
-              <a:t>Mutuality where expectations are voluntary — e.g. neighbours who share a wall.</a:t>
+              <a:t>A voluntarily undertaken exchange, such as neighbours sharing upkeep of a wall. Justice and humane duties still apply.</a:t>
             </a:r>
           </a:p>
         </p:txBody>
@@ -6247,7 +6252,18 @@
                 <a:ea typeface="Calibri"/>
                 <a:cs typeface="Calibri"/>
               </a:rPr>
-              <a:t>Human evaluation may err; understanding aligns knowing → believing → recognising → fulfilling. Established values arise as relationships are fulfilled; expressed values carry them in conduct.</a:t>
+              <a:t>Human evaluation may err; understanding aligns knowing → believing → recognising → fulfilling. </a:t>
+            </a:r>
+            <a:r>
+              <a:rPr sz="1100" b="0" i="1" u="none" cap="none">
+                <a:solidFill>
+                  <a:srgbClr val="5A6377"/>
+                </a:solidFill>
+                <a:latin typeface="Calibri"/>
+                <a:ea typeface="Calibri"/>
+                <a:cs typeface="Calibri"/>
+              </a:rPr>
+              <a:t>Established values become evident as relationships are fulfilled; expressed values carry them in conduct.</a:t>
             </a:r>
           </a:p>
         </p:txBody>
@@ -8776,7 +8792,7 @@
                 <a:ea typeface="Calibri"/>
                 <a:cs typeface="Calibri"/>
               </a:rPr>
-              <a:t>result becomes indestructible</a:t>
+              <a:t>constitution stabilises as jeevan</a:t>
             </a:r>
           </a:p>
         </p:txBody>
@@ -11168,7 +11184,7 @@
                 <a:ea typeface="Calibri"/>
                 <a:cs typeface="Calibri"/>
               </a:rPr>
-              <a:t>sentient; body mistaken for self</a:t>
+              <a:t>sentient before realisation</a:t>
             </a:r>
           </a:p>
         </p:txBody>
@@ -12988,7 +13004,7 @@
                           <a:ea typeface="Calibri"/>
                           <a:cs typeface="Calibri"/>
                         </a:rPr>
-                        <a:t>Progressions (§1.9.1)</a:t>
+                        <a:t>Order and development (§1.9.1)</a:t>
                       </a:r>
                     </a:p>
                   </a:txBody>
@@ -13090,7 +13106,7 @@
                           <a:ea typeface="Calibri"/>
                           <a:cs typeface="Calibri"/>
                         </a:rPr>
-                        <a:t>how the drive proceeds</a:t>
+                        <a:t>sequence, conformance, development</a:t>
                       </a:r>
                     </a:p>
                   </a:txBody>
@@ -13692,7 +13708,7 @@
                 <a:ea typeface="Calibri"/>
                 <a:cs typeface="Calibri"/>
               </a:rPr>
-              <a:t>One drive, described four ways. Orders say what kind of thing a unit is; progressions say how the drive moves; planes say how far it has come; human types say how a human life is oriented. T1 separates physicochemical from sentient standing; T2 and T3 are completeness within awakened jeevan — no fifth plane is added.</a:t>
+              <a:t>The terms distinguish manifestation, conformance, development, and human orientation. Orders and planes answer different questions. T1 establishes sentient standing; T2 and T3 concern completeness of understanding and conduct within jeevan. No fifth plane is added.</a:t>
             </a:r>
           </a:p>
         </p:txBody>
@@ -15652,7 +15668,18 @@
                 <a:ea typeface="Calibri"/>
                 <a:cs typeface="Calibri"/>
               </a:rPr>
-              <a:t>MVD pp. 13, 115, 288–289 · SB pp. 91–92 · JV pp. 20, 54</a:t>
+              <a:t>MVD pp. 13, 115, 288–289 · SB pp. 91–92 · </a:t>
+            </a:r>
+            <a:r>
+              <a:rPr sz="950" b="0" i="1" u="none" cap="none">
+                <a:solidFill>
+                  <a:srgbClr val="5A6377"/>
+                </a:solidFill>
+                <a:latin typeface="Calibri"/>
+                <a:ea typeface="Calibri"/>
+                <a:cs typeface="Calibri"/>
+              </a:rPr>
+              <a:t>JV PDF pp. 20, 55</a:t>
             </a:r>
           </a:p>
         </p:txBody>
@@ -16575,7 +16602,7 @@
                           <a:ea typeface="Calibri"/>
                           <a:cs typeface="Calibri"/>
                         </a:rPr>
-                        <a:t>Faculty / strength</a:t>
+                        <a:t>Faculty</a:t>
                       </a:r>
                     </a:p>
                   </a:txBody>
@@ -16730,7 +16757,7 @@
                           <a:ea typeface="Calibri"/>
                           <a:cs typeface="Calibri"/>
                         </a:rPr>
-                        <a:t>Hope (mun)</a:t>
+                        <a:t>Mun</a:t>
                       </a:r>
                     </a:p>
                   </a:txBody>
@@ -16885,7 +16912,7 @@
                           <a:ea typeface="Calibri"/>
                           <a:cs typeface="Calibri"/>
                         </a:rPr>
-                        <a:t>Thought (vritti)</a:t>
+                        <a:t>Vritti</a:t>
                       </a:r>
                     </a:p>
                   </a:txBody>
@@ -17040,7 +17067,7 @@
                           <a:ea typeface="Calibri"/>
                           <a:cs typeface="Calibri"/>
                         </a:rPr>
-                        <a:t>Desire (chitta)</a:t>
+                        <a:t>Chitta</a:t>
                       </a:r>
                     </a:p>
                   </a:txBody>
@@ -17195,7 +17222,7 @@
                           <a:ea typeface="Calibri"/>
                           <a:cs typeface="Calibri"/>
                         </a:rPr>
-                        <a:t>Resolve (buddhi)</a:t>
+                        <a:t>Buddhi</a:t>
                       </a:r>
                     </a:p>
                   </a:txBody>
@@ -17350,7 +17377,7 @@
                           <a:ea typeface="Calibri"/>
                           <a:cs typeface="Calibri"/>
                         </a:rPr>
-                        <a:t>Core self (atma)</a:t>
+                        <a:t>Atma</a:t>
                       </a:r>
                     </a:p>
                   </a:txBody>
@@ -19213,7 +19240,7 @@
                 <a:ea typeface="Calibri"/>
                 <a:cs typeface="Calibri"/>
               </a:rPr>
-              <a:t>The four harmonies belong to the knowledge-order account of awakening. Bliss is harmony of buddhi and atma; realisation at atma is named ultimate bliss (paramanand). Animal living expresses hope to live through its bodily medium.</a:t>
+              <a:t>Fulfilment is cumulative: resolution; resolution with prosperity; both with fearlessness; all three in coexistence. These are principal correspondences, not separate compartments. Bliss is buddhi–atma harmony; realisation at atma is ultimate bliss (paramanand).</a:t>
             </a:r>
           </a:p>
         </p:txBody>
@@ -19805,7 +19832,7 @@
                 <a:ea typeface="Calibri"/>
                 <a:cs typeface="Calibri"/>
               </a:rPr>
-              <a:t>What is real, and how it is ordered  —  coexistence is the bond of an all-pervasive ground and countable units; each definite unit bears form, guna, svabhav, and dharma, whose expression becomes evident in mutuality across four orders. Because no unit can be separated from the ground, existence neither begins nor ends.</a:t>
+              <a:t>What is real, and how it is ordered — coexistence is the inseparability of the pervasive ground and real units. Each unit has form, properties, essential nature and dharma, expressed in mutuality across four orders. The darshan holds coexistence to be perpetual.</a:t>
             </a:r>
           </a:p>
         </p:txBody>
@@ -19919,7 +19946,7 @@
                 <a:ea typeface="Calibri"/>
                 <a:cs typeface="Calibri"/>
               </a:rPr>
-              <a:t>How two developmental lines proceed  —  compositional progression forms larger configurations but never exceeds the order of its constituents, while development in the atom can reach constitutional completeness as sentient jeevan. Every activity is effort–motion–result.</a:t>
+              <a:t>How two developmental lines proceed — composition can form pranic organisation from material constituents. It does not by itself produce jeevan: development in the atom reaches constitutional completeness. Every activity includes effort, motion and result.</a:t>
             </a:r>
           </a:p>
         </p:txBody>
@@ -21480,7 +21507,7 @@
                 <a:ea typeface="Calibri"/>
                 <a:cs typeface="Calibri"/>
               </a:rPr>
-              <a:t>Peace, contentment, and bliss are not reached by preference or insight alone — they require the higher faculties recognised, studied, and acted on (§1.7.1).</a:t>
+              <a:t>Peace, contentment, and bliss concern coherent understanding expressed in living. Study and insight must guide work, behaviour, and relationships (§1.7.1).</a:t>
             </a:r>
           </a:p>
         </p:txBody>
@@ -23918,7 +23945,7 @@
                           <a:ea typeface="Calibri"/>
                           <a:cs typeface="Calibri"/>
                         </a:rPr>
-                        <a:t>sanskar-conformance (achieved through understanding)</a:t>
+                        <a:t>sanskar-conformance (acquired dispositions)</a:t>
                       </a:r>
                     </a:p>
                   </a:txBody>
@@ -26646,7 +26673,18 @@
                 <a:ea typeface="Calibri"/>
                 <a:cs typeface="Calibri"/>
               </a:rPr>
-              <a:t>Core self (atma)   </a:t>
+              <a:t>Atma</a:t>
+            </a:r>
+            <a:r>
+              <a:rPr sz="1150" b="1" i="0" u="none" cap="none">
+                <a:solidFill>
+                  <a:srgbClr val="9A6414"/>
+                </a:solidFill>
+                <a:latin typeface="Calibri"/>
+                <a:ea typeface="Calibri"/>
+                <a:cs typeface="Calibri"/>
+              </a:rPr>
+              <a:t>   </a:t>
             </a:r>
             <a:r>
               <a:rPr sz="900" b="0" i="0" u="none" cap="none">
@@ -26769,7 +26807,18 @@
                 <a:ea typeface="Calibri"/>
                 <a:cs typeface="Calibri"/>
               </a:rPr>
-              <a:t>Resolve (buddhi)   </a:t>
+              <a:t>Buddhi</a:t>
+            </a:r>
+            <a:r>
+              <a:rPr sz="1150" b="1" i="0" u="none" cap="none">
+                <a:solidFill>
+                  <a:srgbClr val="1E2447"/>
+                </a:solidFill>
+                <a:latin typeface="Calibri"/>
+                <a:ea typeface="Calibri"/>
+                <a:cs typeface="Calibri"/>
+              </a:rPr>
+              <a:t>   </a:t>
             </a:r>
             <a:r>
               <a:rPr sz="900" b="0" i="0" u="none" cap="none">
@@ -26892,7 +26941,18 @@
                 <a:ea typeface="Calibri"/>
                 <a:cs typeface="Calibri"/>
               </a:rPr>
-              <a:t>Desire (chitta)   </a:t>
+              <a:t>Chitta</a:t>
+            </a:r>
+            <a:r>
+              <a:rPr sz="1150" b="1" i="0" u="none" cap="none">
+                <a:solidFill>
+                  <a:srgbClr val="1E2447"/>
+                </a:solidFill>
+                <a:latin typeface="Calibri"/>
+                <a:ea typeface="Calibri"/>
+                <a:cs typeface="Calibri"/>
+              </a:rPr>
+              <a:t>   </a:t>
             </a:r>
             <a:r>
               <a:rPr sz="900" b="0" i="0" u="none" cap="none">
@@ -27015,7 +27075,18 @@
                 <a:ea typeface="Calibri"/>
                 <a:cs typeface="Calibri"/>
               </a:rPr>
-              <a:t>Thought (vritti)   </a:t>
+              <a:t>Vritti</a:t>
+            </a:r>
+            <a:r>
+              <a:rPr sz="1150" b="1" i="0" u="none" cap="none">
+                <a:solidFill>
+                  <a:srgbClr val="1E2447"/>
+                </a:solidFill>
+                <a:latin typeface="Calibri"/>
+                <a:ea typeface="Calibri"/>
+                <a:cs typeface="Calibri"/>
+              </a:rPr>
+              <a:t>   </a:t>
             </a:r>
             <a:r>
               <a:rPr sz="900" b="0" i="0" u="none" cap="none">
@@ -27138,7 +27209,18 @@
                 <a:ea typeface="Calibri"/>
                 <a:cs typeface="Calibri"/>
               </a:rPr>
-              <a:t>Hope (mun)   </a:t>
+              <a:t>Mun</a:t>
+            </a:r>
+            <a:r>
+              <a:rPr sz="1150" b="1" i="0" u="none" cap="none">
+                <a:solidFill>
+                  <a:srgbClr val="1E2447"/>
+                </a:solidFill>
+                <a:latin typeface="Calibri"/>
+                <a:ea typeface="Calibri"/>
+                <a:cs typeface="Calibri"/>
+              </a:rPr>
+              <a:t>   </a:t>
             </a:r>
             <a:r>
               <a:rPr sz="900" b="0" i="0" u="none" cap="none">
@@ -27380,7 +27462,7 @@
       </p:sp>
       <p:cxnSp>
         <p:nvCxnSpPr>
-          <p:cNvPr id="1195" name="Google Shape;445;p18"/>
+          <p:cNvPr id="1232" name="Google Shape;445;p18"/>
           <p:cNvCxnSpPr/>
           <p:nvPr/>
         </p:nvCxnSpPr>
@@ -27461,7 +27543,7 @@
       </p:sp>
       <p:cxnSp>
         <p:nvCxnSpPr>
-          <p:cNvPr id="1197" name="Google Shape;447;p18"/>
+          <p:cNvPr id="1234" name="Google Shape;447;p18"/>
           <p:cNvCxnSpPr/>
           <p:nvPr/>
         </p:nvCxnSpPr>
@@ -29124,7 +29206,7 @@
           <p:nvPr/>
         </p:nvPicPr>
         <p:blipFill rotWithShape="1">
-          <a:blip xmlns:r="http://schemas.openxmlformats.org/officeDocument/2006/relationships" xmlns:a="http://schemas.openxmlformats.org/drawingml/2006/main" r:embed="R93abef0cb9d8472e">
+          <a:blip xmlns:r="http://schemas.openxmlformats.org/officeDocument/2006/relationships" xmlns:a="http://schemas.openxmlformats.org/drawingml/2006/main" r:embed="Re641d6045a2c4424">
             <a:alphaModFix/>
           </a:blip>
           <a:srcRect xmlns:a="http://schemas.openxmlformats.org/drawingml/2006/main" l="0" t="0" r="0" b="0"/>
@@ -29367,7 +29449,7 @@
           <p:nvPr/>
         </p:nvPicPr>
         <p:blipFill rotWithShape="1">
-          <a:blip xmlns:r="http://schemas.openxmlformats.org/officeDocument/2006/relationships" xmlns:a="http://schemas.openxmlformats.org/drawingml/2006/main" r:embed="Ra4c06424480d43bb">
+          <a:blip xmlns:r="http://schemas.openxmlformats.org/officeDocument/2006/relationships" xmlns:a="http://schemas.openxmlformats.org/drawingml/2006/main" r:embed="Rcbf398d21725414b">
             <a:alphaModFix/>
           </a:blip>
           <a:srcRect xmlns:a="http://schemas.openxmlformats.org/drawingml/2006/main" l="0" t="0" r="0" b="0"/>
@@ -29610,7 +29692,7 @@
           <p:nvPr/>
         </p:nvPicPr>
         <p:blipFill rotWithShape="1">
-          <a:blip xmlns:r="http://schemas.openxmlformats.org/officeDocument/2006/relationships" xmlns:a="http://schemas.openxmlformats.org/drawingml/2006/main" r:embed="Rca6ea26f8152479d">
+          <a:blip xmlns:r="http://schemas.openxmlformats.org/officeDocument/2006/relationships" xmlns:a="http://schemas.openxmlformats.org/drawingml/2006/main" r:embed="R4065b8611e5247f1">
             <a:alphaModFix/>
           </a:blip>
           <a:srcRect xmlns:a="http://schemas.openxmlformats.org/drawingml/2006/main" l="0" t="0" r="0" b="0"/>
@@ -30318,7 +30400,7 @@
                 <a:ea typeface="Calibri"/>
                 <a:cs typeface="Calibri"/>
               </a:rPr>
-              <a:t>THE CULMINATION  ·  BUILT INTO THE DESIGN</a:t>
+              <a:t>CONTINUITY THROUGH HUMANE PARTICIPATION</a:t>
             </a:r>
           </a:p>
         </p:txBody>
@@ -30430,7 +30512,7 @@
                 <a:ea typeface="Calibri"/>
                 <a:cs typeface="Calibri"/>
               </a:rPr>
-              <a:t>The drive toward completeness comes to rest in awakened human beings — effort settled, understanding proven in daily conduct and sustained as tradition.</a:t>
+              <a:t>Conduct completeness is realised understanding expressed continuously by the individual. Humane participation and education transmit it through an awakened tradition.</a:t>
             </a:r>
           </a:p>
         </p:txBody>
@@ -31130,7 +31212,18 @@
                 <a:ea typeface="Calibri"/>
                 <a:cs typeface="Calibri"/>
               </a:rPr>
-              <a:t>Five dimensions of continuity: education–sanskar · justice–preservation · health–restraint · production–work · exchange–storage.  ·  Families and societies are relational achievements, not a further compositional tier (§1.10).</a:t>
+              <a:t>Five social systems:</a:t>
+            </a:r>
+            <a:r>
+              <a:rPr sz="1150" b="0" i="0" u="none" cap="none">
+                <a:solidFill>
+                  <a:srgbClr val="8E9BC4"/>
+                </a:solidFill>
+                <a:latin typeface="Calibri"/>
+                <a:ea typeface="Calibri"/>
+                <a:cs typeface="Calibri"/>
+              </a:rPr>
+              <a:t> education–sanskar · justice–preservation · health–restraint · production–work · exchange–storage.  ·  Families and societies are relational achievements, not a further compositional tier (§1.10).</a:t>
             </a:r>
           </a:p>
         </p:txBody>
@@ -33880,7 +33973,7 @@
           <p:nvPr/>
         </p:nvPicPr>
         <p:blipFill rotWithShape="1">
-          <a:blip xmlns:r="http://schemas.openxmlformats.org/officeDocument/2006/relationships" xmlns:a="http://schemas.openxmlformats.org/drawingml/2006/main" r:embed="Rdec17b2b07df4dea">
+          <a:blip xmlns:r="http://schemas.openxmlformats.org/officeDocument/2006/relationships" xmlns:a="http://schemas.openxmlformats.org/drawingml/2006/main" r:embed="R6e8fa682d5224bed">
             <a:alphaModFix/>
           </a:blip>
           <a:srcRect xmlns:a="http://schemas.openxmlformats.org/drawingml/2006/main" l="0" t="0" r="0" b="0"/>
@@ -34022,7 +34115,7 @@
           <p:nvPr/>
         </p:nvPicPr>
         <p:blipFill rotWithShape="1">
-          <a:blip xmlns:r="http://schemas.openxmlformats.org/officeDocument/2006/relationships" xmlns:a="http://schemas.openxmlformats.org/drawingml/2006/main" r:embed="Rdec17b2b07df4dea">
+          <a:blip xmlns:r="http://schemas.openxmlformats.org/officeDocument/2006/relationships" xmlns:a="http://schemas.openxmlformats.org/drawingml/2006/main" r:embed="R6e8fa682d5224bed">
             <a:alphaModFix/>
           </a:blip>
           <a:srcRect xmlns:a="http://schemas.openxmlformats.org/drawingml/2006/main" l="0" t="0" r="0" b="0"/>
@@ -34164,7 +34257,7 @@
           <p:nvPr/>
         </p:nvPicPr>
         <p:blipFill rotWithShape="1">
-          <a:blip xmlns:r="http://schemas.openxmlformats.org/officeDocument/2006/relationships" xmlns:a="http://schemas.openxmlformats.org/drawingml/2006/main" r:embed="Rdec17b2b07df4dea">
+          <a:blip xmlns:r="http://schemas.openxmlformats.org/officeDocument/2006/relationships" xmlns:a="http://schemas.openxmlformats.org/drawingml/2006/main" r:embed="R6e8fa682d5224bed">
             <a:alphaModFix/>
           </a:blip>
           <a:srcRect xmlns:a="http://schemas.openxmlformats.org/drawingml/2006/main" l="0" t="0" r="0" b="0"/>
@@ -34306,7 +34399,7 @@
           <p:nvPr/>
         </p:nvPicPr>
         <p:blipFill rotWithShape="1">
-          <a:blip xmlns:r="http://schemas.openxmlformats.org/officeDocument/2006/relationships" xmlns:a="http://schemas.openxmlformats.org/drawingml/2006/main" r:embed="Rdec17b2b07df4dea">
+          <a:blip xmlns:r="http://schemas.openxmlformats.org/officeDocument/2006/relationships" xmlns:a="http://schemas.openxmlformats.org/drawingml/2006/main" r:embed="R6e8fa682d5224bed">
             <a:alphaModFix/>
           </a:blip>
           <a:srcRect xmlns:a="http://schemas.openxmlformats.org/drawingml/2006/main" l="0" t="0" r="0" b="0"/>
@@ -34448,7 +34541,7 @@
           <p:nvPr/>
         </p:nvPicPr>
         <p:blipFill rotWithShape="1">
-          <a:blip xmlns:r="http://schemas.openxmlformats.org/officeDocument/2006/relationships" xmlns:a="http://schemas.openxmlformats.org/drawingml/2006/main" r:embed="Rdec17b2b07df4dea">
+          <a:blip xmlns:r="http://schemas.openxmlformats.org/officeDocument/2006/relationships" xmlns:a="http://schemas.openxmlformats.org/drawingml/2006/main" r:embed="R6e8fa682d5224bed">
             <a:alphaModFix/>
           </a:blip>
           <a:srcRect xmlns:a="http://schemas.openxmlformats.org/drawingml/2006/main" l="0" t="0" r="0" b="0"/>
@@ -34590,7 +34683,7 @@
           <p:nvPr/>
         </p:nvPicPr>
         <p:blipFill rotWithShape="1">
-          <a:blip xmlns:r="http://schemas.openxmlformats.org/officeDocument/2006/relationships" xmlns:a="http://schemas.openxmlformats.org/drawingml/2006/main" r:embed="Rdec17b2b07df4dea">
+          <a:blip xmlns:r="http://schemas.openxmlformats.org/officeDocument/2006/relationships" xmlns:a="http://schemas.openxmlformats.org/drawingml/2006/main" r:embed="R6e8fa682d5224bed">
             <a:alphaModFix/>
           </a:blip>
           <a:srcRect xmlns:a="http://schemas.openxmlformats.org/drawingml/2006/main" l="0" t="0" r="0" b="0"/>
@@ -35141,7 +35234,7 @@
           <p:nvPr/>
         </p:nvPicPr>
         <p:blipFill>
-          <a:blip xmlns:r="http://schemas.openxmlformats.org/officeDocument/2006/relationships" xmlns:a="http://schemas.openxmlformats.org/drawingml/2006/main" r:embed="Rf717914a7d6f4cde"/>
+          <a:blip xmlns:r="http://schemas.openxmlformats.org/officeDocument/2006/relationships" xmlns:a="http://schemas.openxmlformats.org/drawingml/2006/main" r:embed="Ra2106575f79a4c71"/>
           <a:stretch xmlns:a="http://schemas.openxmlformats.org/drawingml/2006/main"/>
         </p:blipFill>
         <p:spPr>
@@ -36939,7 +37032,7 @@
                 <a:ea typeface="Calibri"/>
                 <a:cs typeface="Calibri"/>
               </a:rPr>
-              <a:t>Saturation holds because the pervasive reality is permeating: however often a unit is divided, every fragment stays soaked, submerged, and surrounded. No division leaves a remainder outside the ground — so no unit can be annihilated, and saturation is a condition, never an event.</a:t>
+              <a:t>The pervasive reality permeates every unit. However often a unit is divided, every fragment remains soaked, submerged and surrounded. The texts connect this inseparability with their doctrine of non-annihilation. Saturation names an ever-present condition.</a:t>
             </a:r>
           </a:p>
         </p:txBody>
@@ -37056,7 +37149,7 @@
           <p:nvPr/>
         </p:nvPicPr>
         <p:blipFill rotWithShape="1">
-          <a:blip xmlns:r="http://schemas.openxmlformats.org/officeDocument/2006/relationships" xmlns:a="http://schemas.openxmlformats.org/drawingml/2006/main" r:embed="R3071fc9e65b645cd">
+          <a:blip xmlns:r="http://schemas.openxmlformats.org/officeDocument/2006/relationships" xmlns:a="http://schemas.openxmlformats.org/drawingml/2006/main" r:embed="Rc9682936b5ea4eff">
             <a:alphaModFix/>
           </a:blip>
           <a:srcRect xmlns:a="http://schemas.openxmlformats.org/drawingml/2006/main" l="0" t="0" r="0" b="0"/>
@@ -37299,7 +37392,7 @@
           <p:nvPr/>
         </p:nvPicPr>
         <p:blipFill rotWithShape="1">
-          <a:blip xmlns:r="http://schemas.openxmlformats.org/officeDocument/2006/relationships" xmlns:a="http://schemas.openxmlformats.org/drawingml/2006/main" r:embed="R451869a7ece64706">
+          <a:blip xmlns:r="http://schemas.openxmlformats.org/officeDocument/2006/relationships" xmlns:a="http://schemas.openxmlformats.org/drawingml/2006/main" r:embed="R02a4cd57e62d4213">
             <a:alphaModFix/>
           </a:blip>
           <a:srcRect xmlns:a="http://schemas.openxmlformats.org/drawingml/2006/main" l="0" t="0" r="0" b="0"/>
@@ -37542,7 +37635,7 @@
           <p:nvPr/>
         </p:nvPicPr>
         <p:blipFill rotWithShape="1">
-          <a:blip xmlns:r="http://schemas.openxmlformats.org/officeDocument/2006/relationships" xmlns:a="http://schemas.openxmlformats.org/drawingml/2006/main" r:embed="R46f036df4a2c4f08">
+          <a:blip xmlns:r="http://schemas.openxmlformats.org/officeDocument/2006/relationships" xmlns:a="http://schemas.openxmlformats.org/drawingml/2006/main" r:embed="R975977d9cf794884">
             <a:alphaModFix/>
           </a:blip>
           <a:srcRect xmlns:a="http://schemas.openxmlformats.org/drawingml/2006/main" l="0" t="0" r="0" b="0"/>
@@ -38068,7 +38161,7 @@
                 <a:ea typeface="Calibri"/>
                 <a:cs typeface="Calibri"/>
               </a:rPr>
-              <a:t>Nothing existent becomes non-existent, and nothing arises from non-being. Because no unit can be separated from what it is saturated in, what changes is composition and association — never existence itself.</a:t>
+              <a:t>Madhyasth Darshan holds that what exists neither arises from non-being nor disappears into it. Configurations form, change and end within perpetual coexistence. Inseparability from the ground is part of this account, not an independent proof of every persistence claim.</a:t>
             </a:r>
           </a:p>
         </p:txBody>
@@ -38185,7 +38278,7 @@
           <p:nvPr/>
         </p:nvPicPr>
         <p:blipFill rotWithShape="1">
-          <a:blip xmlns:r="http://schemas.openxmlformats.org/officeDocument/2006/relationships" xmlns:a="http://schemas.openxmlformats.org/drawingml/2006/main" r:embed="Rfdc80c21bfba487b">
+          <a:blip xmlns:r="http://schemas.openxmlformats.org/officeDocument/2006/relationships" xmlns:a="http://schemas.openxmlformats.org/drawingml/2006/main" r:embed="R20200b20765d4f4d">
             <a:alphaModFix/>
           </a:blip>
           <a:srcRect xmlns:a="http://schemas.openxmlformats.org/drawingml/2006/main" l="0" t="0" r="0" b="0"/>
@@ -38428,7 +38521,7 @@
           <p:nvPr/>
         </p:nvPicPr>
         <p:blipFill rotWithShape="1">
-          <a:blip xmlns:r="http://schemas.openxmlformats.org/officeDocument/2006/relationships" xmlns:a="http://schemas.openxmlformats.org/drawingml/2006/main" r:embed="R5fcb61efad304602">
+          <a:blip xmlns:r="http://schemas.openxmlformats.org/officeDocument/2006/relationships" xmlns:a="http://schemas.openxmlformats.org/drawingml/2006/main" r:embed="Rbf059940d7ad4c13">
             <a:alphaModFix/>
           </a:blip>
           <a:srcRect xmlns:a="http://schemas.openxmlformats.org/drawingml/2006/main" l="0" t="0" r="0" b="0"/>
@@ -38671,7 +38764,7 @@
           <p:nvPr/>
         </p:nvPicPr>
         <p:blipFill rotWithShape="1">
-          <a:blip xmlns:r="http://schemas.openxmlformats.org/officeDocument/2006/relationships" xmlns:a="http://schemas.openxmlformats.org/drawingml/2006/main" r:embed="R71c8318f06a5490a">
+          <a:blip xmlns:r="http://schemas.openxmlformats.org/officeDocument/2006/relationships" xmlns:a="http://schemas.openxmlformats.org/drawingml/2006/main" r:embed="R775a05c1e0ca4f49">
             <a:alphaModFix/>
           </a:blip>
           <a:srcRect xmlns:a="http://schemas.openxmlformats.org/drawingml/2006/main" l="0" t="0" r="0" b="0"/>
@@ -38853,7 +38946,29 @@
                 <a:ea typeface="Calibri"/>
                 <a:cs typeface="Calibri"/>
               </a:rPr>
-              <a:t>“Brahma is truth, the world is perpetual” affirms both the pervasive ground and the reality of the world without making any configuration permanent. — SB pp. 57, 70; MVD p. 40  ·  Study §§1.2, 1.14; full treatment of kaal in Nature of Time</a:t>
+              <a:t>“Brahma is truth, the world is perpetual” affirms both the pervasive ground and the reality of the world without making any configuration permanent. — </a:t>
+            </a:r>
+            <a:r>
+              <a:rPr sz="950" b="0" i="1" u="none" cap="none">
+                <a:solidFill>
+                  <a:srgbClr val="5A6377"/>
+                </a:solidFill>
+                <a:latin typeface="Calibri"/>
+                <a:ea typeface="Calibri"/>
+                <a:cs typeface="Calibri"/>
+              </a:rPr>
+              <a:t>SB pp. 57, 70, 251; MVD p. 13</a:t>
+            </a:r>
+            <a:r>
+              <a:rPr sz="950" b="0" i="1" u="none" cap="none">
+                <a:solidFill>
+                  <a:srgbClr val="5A6377"/>
+                </a:solidFill>
+                <a:latin typeface="Calibri"/>
+                <a:ea typeface="Calibri"/>
+                <a:cs typeface="Calibri"/>
+              </a:rPr>
+              <a:t>  ·  Study §§1.2, 1.14; full treatment of kaal in Nature of Time</a:t>
             </a:r>
           </a:p>
         </p:txBody>
@@ -39314,7 +39429,7 @@
           <p:nvPr/>
         </p:nvPicPr>
         <p:blipFill rotWithShape="1">
-          <a:blip xmlns:r="http://schemas.openxmlformats.org/officeDocument/2006/relationships" xmlns:a="http://schemas.openxmlformats.org/drawingml/2006/main" r:embed="R5cd7d4f6c9164856">
+          <a:blip xmlns:r="http://schemas.openxmlformats.org/officeDocument/2006/relationships" xmlns:a="http://schemas.openxmlformats.org/drawingml/2006/main" r:embed="R6a53cca24852477f">
             <a:alphaModFix/>
           </a:blip>
           <a:srcRect xmlns:a="http://schemas.openxmlformats.org/drawingml/2006/main" l="0" t="0" r="0" b="0"/>
@@ -39557,7 +39672,7 @@
           <p:nvPr/>
         </p:nvPicPr>
         <p:blipFill rotWithShape="1">
-          <a:blip xmlns:r="http://schemas.openxmlformats.org/officeDocument/2006/relationships" xmlns:a="http://schemas.openxmlformats.org/drawingml/2006/main" r:embed="Ra1d326a62f4e429d">
+          <a:blip xmlns:r="http://schemas.openxmlformats.org/officeDocument/2006/relationships" xmlns:a="http://schemas.openxmlformats.org/drawingml/2006/main" r:embed="R99b7eb538e31430d">
             <a:alphaModFix/>
           </a:blip>
           <a:srcRect xmlns:a="http://schemas.openxmlformats.org/drawingml/2006/main" l="0" t="0" r="0" b="0"/>
@@ -39800,7 +39915,7 @@
           <p:nvPr/>
         </p:nvPicPr>
         <p:blipFill rotWithShape="1">
-          <a:blip xmlns:r="http://schemas.openxmlformats.org/officeDocument/2006/relationships" xmlns:a="http://schemas.openxmlformats.org/drawingml/2006/main" r:embed="Rc5e5f3521a344644">
+          <a:blip xmlns:r="http://schemas.openxmlformats.org/officeDocument/2006/relationships" xmlns:a="http://schemas.openxmlformats.org/drawingml/2006/main" r:embed="R78685d6988b24b3e">
             <a:alphaModFix/>
           </a:blip>
           <a:srcRect xmlns:a="http://schemas.openxmlformats.org/drawingml/2006/main" l="0" t="0" r="0" b="0"/>
@@ -41215,7 +41330,7 @@
                 <a:ea typeface="Calibri"/>
                 <a:cs typeface="Calibri"/>
               </a:rPr>
-              <a:t>Svabhav is usefulness in context. For the peepal: vitalising while its living organisation is maintained; devitalising when that organisation breaks down.</a:t>
+              <a:t>Svabhav is usefulness in mutuality. The peepal’s effects are vitalising or devitalising according to the affected body and conditions.</a:t>
             </a:r>
           </a:p>
         </p:txBody>

--- a/Studies/The-Ontology-of-Coexistence/The-Ontology-of-Existence-Madhyasth-Darshan.pptx
+++ b/Studies/The-Ontology-of-Coexistence/The-Ontology-of-Existence-Madhyasth-Darshan.pptx
@@ -2,41 +2,41 @@
 <file path=ppt/presentation.xml><?xml version="1.0" encoding="utf-8"?>
 <p:presentation xmlns:p="http://schemas.openxmlformats.org/presentationml/2006/main">
   <p:sldMasterIdLst>
-    <p:sldMasterId xmlns:r="http://schemas.openxmlformats.org/officeDocument/2006/relationships" id="2147483648" r:id="Rb99068a038c3426b"/>
+    <p:sldMasterId xmlns:r="http://schemas.openxmlformats.org/officeDocument/2006/relationships" id="2147483648" r:id="R2e4f82c25fac4902"/>
   </p:sldMasterIdLst>
   <p:notesMasterIdLst>
-    <p:notesMasterId xmlns:r="http://schemas.openxmlformats.org/officeDocument/2006/relationships" r:id="Ra9d8cfa726104afb"/>
+    <p:notesMasterId xmlns:r="http://schemas.openxmlformats.org/officeDocument/2006/relationships" r:id="R788d91d943d54c43"/>
   </p:notesMasterIdLst>
   <p:sldIdLst>
-    <p:sldId xmlns:r="http://schemas.openxmlformats.org/officeDocument/2006/relationships" id="256" r:id="Rb35e6c39136040d9"/>
-    <p:sldId xmlns:r="http://schemas.openxmlformats.org/officeDocument/2006/relationships" id="257" r:id="R42b916a74187495a"/>
-    <p:sldId xmlns:r="http://schemas.openxmlformats.org/officeDocument/2006/relationships" id="258" r:id="Rb9baf66fbba74622"/>
-    <p:sldId xmlns:r="http://schemas.openxmlformats.org/officeDocument/2006/relationships" id="259" r:id="R174882e548d1466e"/>
-    <p:sldId xmlns:r="http://schemas.openxmlformats.org/officeDocument/2006/relationships" id="260" r:id="R4977231e3ba741ec"/>
-    <p:sldId xmlns:r="http://schemas.openxmlformats.org/officeDocument/2006/relationships" id="261" r:id="R64ee5d102da54184"/>
-    <p:sldId xmlns:r="http://schemas.openxmlformats.org/officeDocument/2006/relationships" id="262" r:id="Ra89aad03a3ec4f66"/>
-    <p:sldId xmlns:r="http://schemas.openxmlformats.org/officeDocument/2006/relationships" id="263" r:id="R8651193f06b2454b"/>
-    <p:sldId xmlns:r="http://schemas.openxmlformats.org/officeDocument/2006/relationships" id="264" r:id="R4da1fdee300247b8"/>
-    <p:sldId xmlns:r="http://schemas.openxmlformats.org/officeDocument/2006/relationships" id="265" r:id="Rb84d5cb6c0354879"/>
-    <p:sldId xmlns:r="http://schemas.openxmlformats.org/officeDocument/2006/relationships" id="266" r:id="R7dfbe544d1c94910"/>
-    <p:sldId xmlns:r="http://schemas.openxmlformats.org/officeDocument/2006/relationships" id="267" r:id="R47303522ded14044"/>
-    <p:sldId xmlns:r="http://schemas.openxmlformats.org/officeDocument/2006/relationships" id="268" r:id="Rc331f1e58da84f4b"/>
-    <p:sldId xmlns:r="http://schemas.openxmlformats.org/officeDocument/2006/relationships" id="269" r:id="R2bed2181f9f146e7"/>
-    <p:sldId xmlns:r="http://schemas.openxmlformats.org/officeDocument/2006/relationships" id="270" r:id="R7665f7a02a1c4955"/>
-    <p:sldId xmlns:r="http://schemas.openxmlformats.org/officeDocument/2006/relationships" id="271" r:id="R8b7ab1deb59d42d2"/>
-    <p:sldId xmlns:r="http://schemas.openxmlformats.org/officeDocument/2006/relationships" id="272" r:id="R182ba4b1ee7b4755"/>
-    <p:sldId xmlns:r="http://schemas.openxmlformats.org/officeDocument/2006/relationships" id="273" r:id="Rb94fd631904b4880"/>
-    <p:sldId xmlns:r="http://schemas.openxmlformats.org/officeDocument/2006/relationships" id="274" r:id="R67e0c6a8bf844042"/>
-    <p:sldId xmlns:r="http://schemas.openxmlformats.org/officeDocument/2006/relationships" id="275" r:id="R087d48705b2140fa"/>
-    <p:sldId xmlns:r="http://schemas.openxmlformats.org/officeDocument/2006/relationships" id="276" r:id="R83303adf5acb4602"/>
-    <p:sldId xmlns:r="http://schemas.openxmlformats.org/officeDocument/2006/relationships" id="277" r:id="R15fbb8a39dee4b36"/>
-    <p:sldId xmlns:r="http://schemas.openxmlformats.org/officeDocument/2006/relationships" id="278" r:id="R6f6581197b7c42e7"/>
-    <p:sldId xmlns:r="http://schemas.openxmlformats.org/officeDocument/2006/relationships" id="279" r:id="R29a20a07a1e34140"/>
-    <p:sldId xmlns:r="http://schemas.openxmlformats.org/officeDocument/2006/relationships" id="280" r:id="Rdc70c46e1d964534"/>
-    <p:sldId xmlns:r="http://schemas.openxmlformats.org/officeDocument/2006/relationships" id="281" r:id="R34c96f2eb0544c71"/>
-    <p:sldId xmlns:r="http://schemas.openxmlformats.org/officeDocument/2006/relationships" id="282" r:id="Ra27b9738f5fa480e"/>
-    <p:sldId xmlns:r="http://schemas.openxmlformats.org/officeDocument/2006/relationships" id="283" r:id="Rc51a80f845ce4a77"/>
-    <p:sldId xmlns:r="http://schemas.openxmlformats.org/officeDocument/2006/relationships" id="284" r:id="R13132ddc5c8f42dd"/>
+    <p:sldId xmlns:r="http://schemas.openxmlformats.org/officeDocument/2006/relationships" id="256" r:id="R2d25d1b7a4d74bb6"/>
+    <p:sldId xmlns:r="http://schemas.openxmlformats.org/officeDocument/2006/relationships" id="257" r:id="R94f21870a36c43c1"/>
+    <p:sldId xmlns:r="http://schemas.openxmlformats.org/officeDocument/2006/relationships" id="258" r:id="R40a174403f19425d"/>
+    <p:sldId xmlns:r="http://schemas.openxmlformats.org/officeDocument/2006/relationships" id="259" r:id="Rae061024d76342f5"/>
+    <p:sldId xmlns:r="http://schemas.openxmlformats.org/officeDocument/2006/relationships" id="260" r:id="R7e5e7dd09d034233"/>
+    <p:sldId xmlns:r="http://schemas.openxmlformats.org/officeDocument/2006/relationships" id="261" r:id="R5505fca6b53b4c6a"/>
+    <p:sldId xmlns:r="http://schemas.openxmlformats.org/officeDocument/2006/relationships" id="262" r:id="R035796ecf8254620"/>
+    <p:sldId xmlns:r="http://schemas.openxmlformats.org/officeDocument/2006/relationships" id="263" r:id="Rdb832b2c367e479c"/>
+    <p:sldId xmlns:r="http://schemas.openxmlformats.org/officeDocument/2006/relationships" id="264" r:id="Rd75de82672214d49"/>
+    <p:sldId xmlns:r="http://schemas.openxmlformats.org/officeDocument/2006/relationships" id="265" r:id="R03a42b395c6144af"/>
+    <p:sldId xmlns:r="http://schemas.openxmlformats.org/officeDocument/2006/relationships" id="266" r:id="R9b8d1407da0546c2"/>
+    <p:sldId xmlns:r="http://schemas.openxmlformats.org/officeDocument/2006/relationships" id="267" r:id="R601c976477774714"/>
+    <p:sldId xmlns:r="http://schemas.openxmlformats.org/officeDocument/2006/relationships" id="268" r:id="R4298fecfb8f74a4c"/>
+    <p:sldId xmlns:r="http://schemas.openxmlformats.org/officeDocument/2006/relationships" id="269" r:id="R4b10987da1c94598"/>
+    <p:sldId xmlns:r="http://schemas.openxmlformats.org/officeDocument/2006/relationships" id="270" r:id="R77974004db9244a7"/>
+    <p:sldId xmlns:r="http://schemas.openxmlformats.org/officeDocument/2006/relationships" id="271" r:id="R12c90905a2db465c"/>
+    <p:sldId xmlns:r="http://schemas.openxmlformats.org/officeDocument/2006/relationships" id="272" r:id="R7fd3129de93c4f6e"/>
+    <p:sldId xmlns:r="http://schemas.openxmlformats.org/officeDocument/2006/relationships" id="273" r:id="R2cfbe9d0c87c4812"/>
+    <p:sldId xmlns:r="http://schemas.openxmlformats.org/officeDocument/2006/relationships" id="274" r:id="R4ef756abc53d471a"/>
+    <p:sldId xmlns:r="http://schemas.openxmlformats.org/officeDocument/2006/relationships" id="275" r:id="Red4dccfc14f542d3"/>
+    <p:sldId xmlns:r="http://schemas.openxmlformats.org/officeDocument/2006/relationships" id="276" r:id="R396f0dd1115448cb"/>
+    <p:sldId xmlns:r="http://schemas.openxmlformats.org/officeDocument/2006/relationships" id="277" r:id="R1a8550259e634866"/>
+    <p:sldId xmlns:r="http://schemas.openxmlformats.org/officeDocument/2006/relationships" id="278" r:id="Rf29199777d54422b"/>
+    <p:sldId xmlns:r="http://schemas.openxmlformats.org/officeDocument/2006/relationships" id="279" r:id="R1ee5f107e9e849a4"/>
+    <p:sldId xmlns:r="http://schemas.openxmlformats.org/officeDocument/2006/relationships" id="280" r:id="R8cecbc25ef9841f5"/>
+    <p:sldId xmlns:r="http://schemas.openxmlformats.org/officeDocument/2006/relationships" id="281" r:id="R017b547987204fbb"/>
+    <p:sldId xmlns:r="http://schemas.openxmlformats.org/officeDocument/2006/relationships" id="282" r:id="R1b596326f7ba4232"/>
+    <p:sldId xmlns:r="http://schemas.openxmlformats.org/officeDocument/2006/relationships" id="283" r:id="R3c18fe2a55c6422d"/>
+    <p:sldId xmlns:r="http://schemas.openxmlformats.org/officeDocument/2006/relationships" id="284" r:id="Re3bbc87702da4525"/>
   </p:sldIdLst>
   <p:sldSz cx="9144000" cy="5143500"/>
   <p:notesSz cx="6858000" cy="9144000"/>
@@ -3293,7 +3293,7 @@
   </p:cSld>
   <p:clrMap bg1="lt1" tx1="dk1" bg2="dk2" tx2="lt2" accent1="accent1" accent2="accent2" accent3="accent3" accent4="accent4" accent5="accent5" accent6="accent6" hlink="hlink" folHlink="folHlink"/>
   <p:sldLayoutIdLst>
-    <p:sldLayoutId xmlns:r="http://schemas.openxmlformats.org/officeDocument/2006/relationships" id="2147483649" r:id="R81450a0ef2d6408a"/>
+    <p:sldLayoutId xmlns:r="http://schemas.openxmlformats.org/officeDocument/2006/relationships" id="2147483649" r:id="R6930d8afa9b84085"/>
   </p:sldLayoutIdLst>
   <p:hf sldNum="0" hdr="0" ftr="0" dt="0"/>
   <p:txStyles>
@@ -5104,7 +5104,18 @@
                 <a:ea typeface="Calibri"/>
                 <a:cs typeface="Calibri"/>
               </a:rPr>
-              <a:t>§1.4 · COMPLEMENTARITY BECOMES VALUE</a:t>
+              <a:t>§1.13.1</a:t>
+            </a:r>
+            <a:r>
+              <a:rPr sz="1050" b="1" i="0" u="none" cap="none">
+                <a:solidFill>
+                  <a:srgbClr val="9A6414"/>
+                </a:solidFill>
+                <a:latin typeface="Calibri"/>
+                <a:ea typeface="Calibri"/>
+                <a:cs typeface="Calibri"/>
+              </a:rPr>
+              <a:t> · COMPLEMENTARITY BECOMES VALUE</a:t>
             </a:r>
           </a:p>
         </p:txBody>
@@ -6551,7 +6562,7 @@
                 <a:ea typeface="Calibri"/>
                 <a:cs typeface="Calibri"/>
               </a:rPr>
-              <a:t>§1.5</a:t>
+              <a:t>§1.6</a:t>
             </a:r>
           </a:p>
         </p:txBody>
@@ -8056,7 +8067,29 @@
                 <a:ea typeface="Calibri"/>
                 <a:cs typeface="Calibri"/>
               </a:rPr>
-              <a:t>MOVEMENT 2  ·  §1.6 · TWO DEVELOPMENTS · ONE ACTIVITY STRUCTURE</a:t>
+              <a:t>MOVEMENT 2  ·  </a:t>
+            </a:r>
+            <a:r>
+              <a:rPr sz="1050" b="1" i="0" u="none" cap="none">
+                <a:solidFill>
+                  <a:srgbClr val="9A6414"/>
+                </a:solidFill>
+                <a:latin typeface="Calibri"/>
+                <a:ea typeface="Calibri"/>
+                <a:cs typeface="Calibri"/>
+              </a:rPr>
+              <a:t>§§1.7, 1.11</a:t>
+            </a:r>
+            <a:r>
+              <a:rPr sz="1050" b="1" i="0" u="none" cap="none">
+                <a:solidFill>
+                  <a:srgbClr val="9A6414"/>
+                </a:solidFill>
+                <a:latin typeface="Calibri"/>
+                <a:ea typeface="Calibri"/>
+                <a:cs typeface="Calibri"/>
+              </a:rPr>
+              <a:t> · TWO DEVELOPMENTS · ONE ACTIVITY STRUCTURE</a:t>
             </a:r>
           </a:p>
         </p:txBody>
@@ -9242,7 +9275,18 @@
                 <a:ea typeface="Calibri"/>
                 <a:cs typeface="Calibri"/>
               </a:rPr>
-              <a:t>§1.5–§1.6 · TWO PATHS, ONE JOINT FORM</a:t>
+              <a:t>§§1.6–1.7</a:t>
+            </a:r>
+            <a:r>
+              <a:rPr sz="1050" b="1" i="0" u="none" cap="none">
+                <a:solidFill>
+                  <a:srgbClr val="9A6414"/>
+                </a:solidFill>
+                <a:latin typeface="Calibri"/>
+                <a:ea typeface="Calibri"/>
+                <a:cs typeface="Calibri"/>
+              </a:rPr>
+              <a:t> · TWO PATHS, ONE JOINT FORM</a:t>
             </a:r>
           </a:p>
         </p:txBody>
@@ -10457,7 +10501,18 @@
                 <a:ea typeface="Calibri"/>
                 <a:cs typeface="Calibri"/>
               </a:rPr>
-              <a:t>MVD pp. 13, 26, 79–80  ·  SB pp. 55, 76–77  ·  Study §§1.5–1.6, 1.9</a:t>
+              <a:t>MVD pp. 13, 26, 79–80  ·  SB pp. 55, 76–77  ·  Study </a:t>
+            </a:r>
+            <a:r>
+              <a:rPr sz="950" b="0" i="1" u="none" cap="none">
+                <a:solidFill>
+                  <a:srgbClr val="5A6377"/>
+                </a:solidFill>
+                <a:latin typeface="Calibri"/>
+                <a:ea typeface="Calibri"/>
+                <a:cs typeface="Calibri"/>
+              </a:rPr>
+              <a:t>§§1.6–1.7, 1.12</a:t>
             </a:r>
           </a:p>
         </p:txBody>
@@ -10689,7 +10744,7 @@
                 <a:ea typeface="Calibri"/>
                 <a:cs typeface="Calibri"/>
               </a:rPr>
-              <a:t>§1.6</a:t>
+              <a:t>§§1.7, 1.11</a:t>
             </a:r>
           </a:p>
         </p:txBody>
@@ -12491,7 +12546,18 @@
                 <a:ea typeface="Calibri"/>
                 <a:cs typeface="Calibri"/>
               </a:rPr>
-              <a:t>§1.6 · §1.9 · THE COMPLETENESS DRIVE</a:t>
+              <a:t>§§1.7, 1.11–1.12</a:t>
+            </a:r>
+            <a:r>
+              <a:rPr sz="1050" b="1" i="0" u="none" cap="none">
+                <a:solidFill>
+                  <a:srgbClr val="9A6414"/>
+                </a:solidFill>
+                <a:latin typeface="Calibri"/>
+                <a:ea typeface="Calibri"/>
+                <a:cs typeface="Calibri"/>
+              </a:rPr>
+              <a:t> · THE COMPLETENESS DRIVE</a:t>
             </a:r>
           </a:p>
         </p:txBody>
@@ -12798,7 +12864,29 @@
                           <a:ea typeface="Calibri"/>
                           <a:cs typeface="Calibri"/>
                         </a:rPr>
-                        <a:t>Orders (§1.5)</a:t>
+                        <a:t>Orders (</a:t>
+                      </a:r>
+                      <a:r>
+                        <a:rPr sz="1100" u="none" cap="none">
+                          <a:solidFill>
+                            <a:srgbClr val="1E2447"/>
+                          </a:solidFill>
+                          <a:latin typeface="Calibri"/>
+                          <a:ea typeface="Calibri"/>
+                          <a:cs typeface="Calibri"/>
+                        </a:rPr>
+                        <a:t>§1.6</a:t>
+                      </a:r>
+                      <a:r>
+                        <a:rPr sz="1100" u="none" cap="none">
+                          <a:solidFill>
+                            <a:srgbClr val="1E2447"/>
+                          </a:solidFill>
+                          <a:latin typeface="Calibri"/>
+                          <a:ea typeface="Calibri"/>
+                          <a:cs typeface="Calibri"/>
+                        </a:rPr>
+                        <a:t>)</a:t>
                       </a:r>
                     </a:p>
                   </a:txBody>
@@ -13004,7 +13092,29 @@
                           <a:ea typeface="Calibri"/>
                           <a:cs typeface="Calibri"/>
                         </a:rPr>
-                        <a:t>Order and development (§1.9.1)</a:t>
+                        <a:t>Order and development (</a:t>
+                      </a:r>
+                      <a:r>
+                        <a:rPr sz="1100" u="none" cap="none">
+                          <a:solidFill>
+                            <a:srgbClr val="1E2447"/>
+                          </a:solidFill>
+                          <a:latin typeface="Calibri"/>
+                          <a:ea typeface="Calibri"/>
+                          <a:cs typeface="Calibri"/>
+                        </a:rPr>
+                        <a:t>§1.12.1</a:t>
+                      </a:r>
+                      <a:r>
+                        <a:rPr sz="1100" u="none" cap="none">
+                          <a:solidFill>
+                            <a:srgbClr val="1E2447"/>
+                          </a:solidFill>
+                          <a:latin typeface="Calibri"/>
+                          <a:ea typeface="Calibri"/>
+                          <a:cs typeface="Calibri"/>
+                        </a:rPr>
+                        <a:t>)</a:t>
                       </a:r>
                     </a:p>
                   </a:txBody>
@@ -13210,7 +13320,29 @@
                           <a:ea typeface="Calibri"/>
                           <a:cs typeface="Calibri"/>
                         </a:rPr>
-                        <a:t>Planes (§1.9.2)</a:t>
+                        <a:t>Planes (</a:t>
+                      </a:r>
+                      <a:r>
+                        <a:rPr sz="1100" u="none" cap="none">
+                          <a:solidFill>
+                            <a:srgbClr val="1E2447"/>
+                          </a:solidFill>
+                          <a:latin typeface="Calibri"/>
+                          <a:ea typeface="Calibri"/>
+                          <a:cs typeface="Calibri"/>
+                        </a:rPr>
+                        <a:t>§1.12.2</a:t>
+                      </a:r>
+                      <a:r>
+                        <a:rPr sz="1100" u="none" cap="none">
+                          <a:solidFill>
+                            <a:srgbClr val="1E2447"/>
+                          </a:solidFill>
+                          <a:latin typeface="Calibri"/>
+                          <a:ea typeface="Calibri"/>
+                          <a:cs typeface="Calibri"/>
+                        </a:rPr>
+                        <a:t>)</a:t>
                       </a:r>
                     </a:p>
                   </a:txBody>
@@ -13416,7 +13548,29 @@
                           <a:ea typeface="Calibri"/>
                           <a:cs typeface="Calibri"/>
                         </a:rPr>
-                        <a:t>Human types (§1.9.2)</a:t>
+                        <a:t>Human types (</a:t>
+                      </a:r>
+                      <a:r>
+                        <a:rPr sz="1100" u="none" cap="none">
+                          <a:solidFill>
+                            <a:srgbClr val="1E2447"/>
+                          </a:solidFill>
+                          <a:latin typeface="Calibri"/>
+                          <a:ea typeface="Calibri"/>
+                          <a:cs typeface="Calibri"/>
+                        </a:rPr>
+                        <a:t>§1.12.2</a:t>
+                      </a:r>
+                      <a:r>
+                        <a:rPr sz="1100" u="none" cap="none">
+                          <a:solidFill>
+                            <a:srgbClr val="1E2447"/>
+                          </a:solidFill>
+                          <a:latin typeface="Calibri"/>
+                          <a:ea typeface="Calibri"/>
+                          <a:cs typeface="Calibri"/>
+                        </a:rPr>
+                        <a:t>)</a:t>
                       </a:r>
                     </a:p>
                   </a:txBody>
@@ -13764,7 +13918,18 @@
                 <a:ea typeface="Calibri"/>
                 <a:cs typeface="Calibri"/>
               </a:rPr>
-              <a:t>Study §1.6, §§1.9.1–1.9.2  ·  Conceptual map, classification key  ·  MVD pp. 5, 8  ·  SB pp. 50–51</a:t>
+              <a:t>Study §§1.7, 1.11–1.12</a:t>
+            </a:r>
+            <a:r>
+              <a:rPr sz="950" b="0" i="1" u="none" cap="none">
+                <a:solidFill>
+                  <a:srgbClr val="5A6377"/>
+                </a:solidFill>
+                <a:latin typeface="Calibri"/>
+                <a:ea typeface="Calibri"/>
+                <a:cs typeface="Calibri"/>
+              </a:rPr>
+              <a:t>  ·  Conceptual map, classification key  ·  MVD pp. 5, 8  ·  SB pp. 50–51</a:t>
             </a:r>
           </a:p>
         </p:txBody>
@@ -13996,7 +14161,7 @@
                 <a:ea typeface="Calibri"/>
                 <a:cs typeface="Calibri"/>
               </a:rPr>
-              <a:t>§1.6.1</a:t>
+              <a:t>§1.7.1</a:t>
             </a:r>
           </a:p>
         </p:txBody>
@@ -14952,7 +15117,29 @@
                 <a:ea typeface="Calibri"/>
                 <a:cs typeface="Calibri"/>
               </a:rPr>
-              <a:t>MOVEMENT 3  ·  §1.7 · THE HUMAN JOINT FORM</a:t>
+              <a:t>MOVEMENT 3  ·  </a:t>
+            </a:r>
+            <a:r>
+              <a:rPr sz="1050" b="1" i="0" u="none" cap="none">
+                <a:solidFill>
+                  <a:srgbClr val="9A6414"/>
+                </a:solidFill>
+                <a:latin typeface="Calibri"/>
+                <a:ea typeface="Calibri"/>
+                <a:cs typeface="Calibri"/>
+              </a:rPr>
+              <a:t>§1.8</a:t>
+            </a:r>
+            <a:r>
+              <a:rPr sz="1050" b="1" i="0" u="none" cap="none">
+                <a:solidFill>
+                  <a:srgbClr val="9A6414"/>
+                </a:solidFill>
+                <a:latin typeface="Calibri"/>
+                <a:ea typeface="Calibri"/>
+                <a:cs typeface="Calibri"/>
+              </a:rPr>
+              <a:t> · THE HUMAN JOINT FORM</a:t>
             </a:r>
           </a:p>
         </p:txBody>
@@ -15911,7 +16098,18 @@
                 <a:ea typeface="Calibri"/>
                 <a:cs typeface="Calibri"/>
               </a:rPr>
-              <a:t>§1.7 · CONSTITUTIONALLY COMPLETE</a:t>
+              <a:t>§1.8</a:t>
+            </a:r>
+            <a:r>
+              <a:rPr sz="1050" b="1" i="0" u="none" cap="none">
+                <a:solidFill>
+                  <a:srgbClr val="9A6414"/>
+                </a:solidFill>
+                <a:latin typeface="Calibri"/>
+                <a:ea typeface="Calibri"/>
+                <a:cs typeface="Calibri"/>
+              </a:rPr>
+              <a:t> · CONSTITUTIONALLY COMPLETE</a:t>
             </a:r>
           </a:p>
         </p:txBody>
@@ -17857,7 +18055,7 @@
                 <a:ea typeface="Calibri"/>
                 <a:cs typeface="Calibri"/>
               </a:rPr>
-              <a:t>§1.8</a:t>
+              <a:t>§1.9</a:t>
             </a:r>
             <a:r>
               <a:rPr sz="1050" b="1" i="0" u="none" cap="none">
@@ -20348,7 +20546,7 @@
                 <a:ea typeface="Calibri"/>
                 <a:cs typeface="Calibri"/>
               </a:rPr>
-              <a:t>§§ 1.7–1.8, 1.10, 1.12, 1.15</a:t>
+              <a:t>§§1.8–1.9, 1.13, 1.15</a:t>
             </a:r>
             <a:r>
               <a:rPr sz="1050" b="1" i="0" u="none" cap="none">
@@ -21507,7 +21705,29 @@
                 <a:ea typeface="Calibri"/>
                 <a:cs typeface="Calibri"/>
               </a:rPr>
-              <a:t>Peace, contentment, and bliss concern coherent understanding expressed in living. Study and insight must guide work, behaviour, and relationships (§1.7.1).</a:t>
+              <a:t>Peace, contentment, and bliss concern coherent understanding expressed in living. Study and insight must guide work, behaviour, and relationships (</a:t>
+            </a:r>
+            <a:r>
+              <a:rPr sz="1100" b="0" i="1" u="none" cap="none">
+                <a:solidFill>
+                  <a:srgbClr val="5A6377"/>
+                </a:solidFill>
+                <a:latin typeface="Calibri"/>
+                <a:ea typeface="Calibri"/>
+                <a:cs typeface="Calibri"/>
+              </a:rPr>
+              <a:t>§1.10</a:t>
+            </a:r>
+            <a:r>
+              <a:rPr sz="1100" b="0" i="1" u="none" cap="none">
+                <a:solidFill>
+                  <a:srgbClr val="5A6377"/>
+                </a:solidFill>
+                <a:latin typeface="Calibri"/>
+                <a:ea typeface="Calibri"/>
+                <a:cs typeface="Calibri"/>
+              </a:rPr>
+              <a:t>).</a:t>
             </a:r>
           </a:p>
         </p:txBody>
@@ -22875,7 +23095,18 @@
                 <a:ea typeface="Calibri"/>
                 <a:cs typeface="Calibri"/>
               </a:rPr>
-              <a:t>“Activity together with aspiration is karma itself … it is the balance of desire, karma, and result that is the accomplishment of the desire.” — KD Ch. 1, pp. 1–2  ·  Study §1.7.1</a:t>
+              <a:t>“Activity together with aspiration is karma itself … it is the balance of desire, karma, and result that is the accomplishment of the desire.” — KD Ch. 1, pp. 1–2  ·  Study </a:t>
+            </a:r>
+            <a:r>
+              <a:rPr sz="950" b="0" i="1" u="none" cap="none">
+                <a:solidFill>
+                  <a:srgbClr val="5A6377"/>
+                </a:solidFill>
+                <a:latin typeface="Calibri"/>
+                <a:ea typeface="Calibri"/>
+                <a:cs typeface="Calibri"/>
+              </a:rPr>
+              <a:t>§1.10</a:t>
             </a:r>
           </a:p>
         </p:txBody>
@@ -23107,7 +23338,18 @@
                 <a:ea typeface="Calibri"/>
                 <a:cs typeface="Calibri"/>
               </a:rPr>
-              <a:t>§1.11 · REGULATION — WHAT SURROUNDEDNESS ESTABLISHES</a:t>
+              <a:t>§1.6.1</a:t>
+            </a:r>
+            <a:r>
+              <a:rPr sz="1050" b="1" i="0" u="none" cap="none">
+                <a:solidFill>
+                  <a:srgbClr val="9A6414"/>
+                </a:solidFill>
+                <a:latin typeface="Calibri"/>
+                <a:ea typeface="Calibri"/>
+                <a:cs typeface="Calibri"/>
+              </a:rPr>
+              <a:t> · REGULATION — WHAT SURROUNDEDNESS ESTABLISHES</a:t>
             </a:r>
           </a:p>
         </p:txBody>
@@ -24423,7 +24665,18 @@
                 <a:ea typeface="Calibri"/>
                 <a:cs typeface="Calibri"/>
               </a:rPr>
-              <a:t>§1.12 · EVALUATIVE PERSPECTIVES</a:t>
+              <a:t>§1.13.2 ·</a:t>
+            </a:r>
+            <a:r>
+              <a:rPr sz="1050" b="1" i="0" u="none" cap="none">
+                <a:solidFill>
+                  <a:srgbClr val="9A6414"/>
+                </a:solidFill>
+                <a:latin typeface="Calibri"/>
+                <a:ea typeface="Calibri"/>
+                <a:cs typeface="Calibri"/>
+              </a:rPr>
+              <a:t> EVALUATIVE PERSPECTIVES</a:t>
             </a:r>
           </a:p>
         </p:txBody>
@@ -25427,7 +25680,18 @@
                 <a:ea typeface="Calibri"/>
                 <a:cs typeface="Calibri"/>
               </a:rPr>
-              <a:t>§1.12–§1.12.1 · KD pp. 10, 13, 60, 86</a:t>
+              <a:t>§§1.13.2–1.13.3</a:t>
+            </a:r>
+            <a:r>
+              <a:rPr sz="1125" b="0" i="1" u="none" cap="none">
+                <a:solidFill>
+                  <a:srgbClr val="5A6377"/>
+                </a:solidFill>
+                <a:latin typeface="Calibri"/>
+                <a:ea typeface="Calibri"/>
+                <a:cs typeface="Calibri"/>
+              </a:rPr>
+              <a:t> · KD pp. 10, 13, 60, 86</a:t>
             </a:r>
           </a:p>
         </p:txBody>
@@ -25659,7 +25923,18 @@
                 <a:ea typeface="Calibri"/>
                 <a:cs typeface="Calibri"/>
               </a:rPr>
-              <a:t>§§1.3–1.4, 1.7–1.13 · THE EPISTEMIC LADDER</a:t>
+              <a:t>§§1.3, 1.8–1.9, 1.13–1.14</a:t>
+            </a:r>
+            <a:r>
+              <a:rPr sz="1050" b="1" i="0" u="none" cap="none">
+                <a:solidFill>
+                  <a:srgbClr val="9A6414"/>
+                </a:solidFill>
+                <a:latin typeface="Calibri"/>
+                <a:ea typeface="Calibri"/>
+                <a:cs typeface="Calibri"/>
+              </a:rPr>
+              <a:t> · THE EPISTEMIC LADDER</a:t>
             </a:r>
           </a:p>
         </p:txBody>
@@ -25998,7 +26273,29 @@
                 <a:ea typeface="Calibri"/>
                 <a:cs typeface="Calibri"/>
               </a:rPr>
-              <a:t>relationships  ·  shared expectations weighed by justice, dharma, and truth (§1.12)</a:t>
+              <a:t>relationships  ·  shared expectations weighed by justice, dharma, and truth (</a:t>
+            </a:r>
+            <a:r>
+              <a:rPr sz="1150" b="1" i="0" u="none" cap="none">
+                <a:solidFill>
+                  <a:srgbClr val="1E2447"/>
+                </a:solidFill>
+                <a:latin typeface="Calibri"/>
+                <a:ea typeface="Calibri"/>
+                <a:cs typeface="Calibri"/>
+              </a:rPr>
+              <a:t>§1.13.2</a:t>
+            </a:r>
+            <a:r>
+              <a:rPr sz="1150" b="1" i="0" u="none" cap="none">
+                <a:solidFill>
+                  <a:srgbClr val="1E2447"/>
+                </a:solidFill>
+                <a:latin typeface="Calibri"/>
+                <a:ea typeface="Calibri"/>
+                <a:cs typeface="Calibri"/>
+              </a:rPr>
+              <a:t>)</a:t>
             </a:r>
           </a:p>
         </p:txBody>
@@ -27462,7 +27759,7 @@
       </p:sp>
       <p:cxnSp>
         <p:nvCxnSpPr>
-          <p:cNvPr id="1232" name="Google Shape;445;p18"/>
+          <p:cNvPr id="1269" name="Google Shape;445;p18"/>
           <p:cNvCxnSpPr/>
           <p:nvPr/>
         </p:nvCxnSpPr>
@@ -27543,7 +27840,7 @@
       </p:sp>
       <p:cxnSp>
         <p:nvCxnSpPr>
-          <p:cNvPr id="1234" name="Google Shape;447;p18"/>
+          <p:cNvPr id="1271" name="Google Shape;447;p18"/>
           <p:cNvCxnSpPr/>
           <p:nvPr/>
         </p:nvCxnSpPr>
@@ -27905,7 +28202,18 @@
                 <a:ea typeface="Calibri"/>
                 <a:cs typeface="Calibri"/>
               </a:rPr>
-              <a:t>§1.13 · WHERE THE DRIVE TERMINATES</a:t>
+              <a:t>§1.14 ·</a:t>
+            </a:r>
+            <a:r>
+              <a:rPr sz="1050" b="1" i="0" u="none" cap="none">
+                <a:solidFill>
+                  <a:srgbClr val="9A6414"/>
+                </a:solidFill>
+                <a:latin typeface="Calibri"/>
+                <a:ea typeface="Calibri"/>
+                <a:cs typeface="Calibri"/>
+              </a:rPr>
+              <a:t> WHERE THE DRIVE TERMINATES</a:t>
             </a:r>
           </a:p>
         </p:txBody>
@@ -28745,7 +29053,18 @@
                 <a:ea typeface="Calibri"/>
                 <a:cs typeface="Calibri"/>
               </a:rPr>
-              <a:t>SB pp. 81, 116  ·  MVD pp. 100–101, 126, 328  ·  KD §§3.17–3.18  ·  Study §§1.8, 1.13</a:t>
+              <a:t>SB pp. 81, 116  ·  MVD pp. 100–101, 126, 328  ·  KD §§3.17–3.18  ·  Study </a:t>
+            </a:r>
+            <a:r>
+              <a:rPr sz="950" b="0" i="1" u="none" cap="none">
+                <a:solidFill>
+                  <a:srgbClr val="5A6377"/>
+                </a:solidFill>
+                <a:latin typeface="Calibri"/>
+                <a:ea typeface="Calibri"/>
+                <a:cs typeface="Calibri"/>
+              </a:rPr>
+              <a:t>§§1.9, 1.14</a:t>
             </a:r>
           </a:p>
         </p:txBody>
@@ -28977,7 +29296,18 @@
                 <a:ea typeface="Calibri"/>
                 <a:cs typeface="Calibri"/>
               </a:rPr>
-              <a:t>§1.13 · PRESENTATION, COMMUNICATION, EXPRESSION AND ART</a:t>
+              <a:t>§1.14</a:t>
+            </a:r>
+            <a:r>
+              <a:rPr sz="1050" b="1" i="0" u="none" cap="none">
+                <a:solidFill>
+                  <a:srgbClr val="9A6414"/>
+                </a:solidFill>
+                <a:latin typeface="Calibri"/>
+                <a:ea typeface="Calibri"/>
+                <a:cs typeface="Calibri"/>
+              </a:rPr>
+              <a:t> · PRESENTATION, COMMUNICATION, EXPRESSION AND ART</a:t>
             </a:r>
           </a:p>
         </p:txBody>
@@ -29206,7 +29536,7 @@
           <p:nvPr/>
         </p:nvPicPr>
         <p:blipFill rotWithShape="1">
-          <a:blip xmlns:r="http://schemas.openxmlformats.org/officeDocument/2006/relationships" xmlns:a="http://schemas.openxmlformats.org/drawingml/2006/main" r:embed="Re641d6045a2c4424">
+          <a:blip xmlns:r="http://schemas.openxmlformats.org/officeDocument/2006/relationships" xmlns:a="http://schemas.openxmlformats.org/drawingml/2006/main" r:embed="R1cea122611994016">
             <a:alphaModFix/>
           </a:blip>
           <a:srcRect xmlns:a="http://schemas.openxmlformats.org/drawingml/2006/main" l="0" t="0" r="0" b="0"/>
@@ -29449,7 +29779,7 @@
           <p:nvPr/>
         </p:nvPicPr>
         <p:blipFill rotWithShape="1">
-          <a:blip xmlns:r="http://schemas.openxmlformats.org/officeDocument/2006/relationships" xmlns:a="http://schemas.openxmlformats.org/drawingml/2006/main" r:embed="Rcbf398d21725414b">
+          <a:blip xmlns:r="http://schemas.openxmlformats.org/officeDocument/2006/relationships" xmlns:a="http://schemas.openxmlformats.org/drawingml/2006/main" r:embed="R0af4dfdde2484c41">
             <a:alphaModFix/>
           </a:blip>
           <a:srcRect xmlns:a="http://schemas.openxmlformats.org/drawingml/2006/main" l="0" t="0" r="0" b="0"/>
@@ -29692,7 +30022,7 @@
           <p:nvPr/>
         </p:nvPicPr>
         <p:blipFill rotWithShape="1">
-          <a:blip xmlns:r="http://schemas.openxmlformats.org/officeDocument/2006/relationships" xmlns:a="http://schemas.openxmlformats.org/drawingml/2006/main" r:embed="R4065b8611e5247f1">
+          <a:blip xmlns:r="http://schemas.openxmlformats.org/officeDocument/2006/relationships" xmlns:a="http://schemas.openxmlformats.org/drawingml/2006/main" r:embed="Rdd193523ec034249">
             <a:alphaModFix/>
           </a:blip>
           <a:srcRect xmlns:a="http://schemas.openxmlformats.org/drawingml/2006/main" l="0" t="0" r="0" b="0"/>
@@ -31223,7 +31553,29 @@
                 <a:ea typeface="Calibri"/>
                 <a:cs typeface="Calibri"/>
               </a:rPr>
-              <a:t> education–sanskar · justice–preservation · health–restraint · production–work · exchange–storage.  ·  Families and societies are relational achievements, not a further compositional tier (§1.10).</a:t>
+              <a:t> education–sanskar · justice–preservation · health–restraint · production–work · exchange–storage.  ·  Families and societies are relational achievements, not a further compositional tier (</a:t>
+            </a:r>
+            <a:r>
+              <a:rPr sz="1150" b="0" i="0" u="none" cap="none">
+                <a:solidFill>
+                  <a:srgbClr val="8E9BC4"/>
+                </a:solidFill>
+                <a:latin typeface="Calibri"/>
+                <a:ea typeface="Calibri"/>
+                <a:cs typeface="Calibri"/>
+              </a:rPr>
+              <a:t>§1.13.3</a:t>
+            </a:r>
+            <a:r>
+              <a:rPr sz="1150" b="0" i="0" u="none" cap="none">
+                <a:solidFill>
+                  <a:srgbClr val="8E9BC4"/>
+                </a:solidFill>
+                <a:latin typeface="Calibri"/>
+                <a:ea typeface="Calibri"/>
+                <a:cs typeface="Calibri"/>
+              </a:rPr>
+              <a:t>).</a:t>
             </a:r>
           </a:p>
         </p:txBody>
@@ -33973,7 +34325,7 @@
           <p:nvPr/>
         </p:nvPicPr>
         <p:blipFill rotWithShape="1">
-          <a:blip xmlns:r="http://schemas.openxmlformats.org/officeDocument/2006/relationships" xmlns:a="http://schemas.openxmlformats.org/drawingml/2006/main" r:embed="R6e8fa682d5224bed">
+          <a:blip xmlns:r="http://schemas.openxmlformats.org/officeDocument/2006/relationships" xmlns:a="http://schemas.openxmlformats.org/drawingml/2006/main" r:embed="R2ff6ae67d31449ab">
             <a:alphaModFix/>
           </a:blip>
           <a:srcRect xmlns:a="http://schemas.openxmlformats.org/drawingml/2006/main" l="0" t="0" r="0" b="0"/>
@@ -34115,7 +34467,7 @@
           <p:nvPr/>
         </p:nvPicPr>
         <p:blipFill rotWithShape="1">
-          <a:blip xmlns:r="http://schemas.openxmlformats.org/officeDocument/2006/relationships" xmlns:a="http://schemas.openxmlformats.org/drawingml/2006/main" r:embed="R6e8fa682d5224bed">
+          <a:blip xmlns:r="http://schemas.openxmlformats.org/officeDocument/2006/relationships" xmlns:a="http://schemas.openxmlformats.org/drawingml/2006/main" r:embed="R2ff6ae67d31449ab">
             <a:alphaModFix/>
           </a:blip>
           <a:srcRect xmlns:a="http://schemas.openxmlformats.org/drawingml/2006/main" l="0" t="0" r="0" b="0"/>
@@ -34257,7 +34609,7 @@
           <p:nvPr/>
         </p:nvPicPr>
         <p:blipFill rotWithShape="1">
-          <a:blip xmlns:r="http://schemas.openxmlformats.org/officeDocument/2006/relationships" xmlns:a="http://schemas.openxmlformats.org/drawingml/2006/main" r:embed="R6e8fa682d5224bed">
+          <a:blip xmlns:r="http://schemas.openxmlformats.org/officeDocument/2006/relationships" xmlns:a="http://schemas.openxmlformats.org/drawingml/2006/main" r:embed="R2ff6ae67d31449ab">
             <a:alphaModFix/>
           </a:blip>
           <a:srcRect xmlns:a="http://schemas.openxmlformats.org/drawingml/2006/main" l="0" t="0" r="0" b="0"/>
@@ -34399,7 +34751,7 @@
           <p:nvPr/>
         </p:nvPicPr>
         <p:blipFill rotWithShape="1">
-          <a:blip xmlns:r="http://schemas.openxmlformats.org/officeDocument/2006/relationships" xmlns:a="http://schemas.openxmlformats.org/drawingml/2006/main" r:embed="R6e8fa682d5224bed">
+          <a:blip xmlns:r="http://schemas.openxmlformats.org/officeDocument/2006/relationships" xmlns:a="http://schemas.openxmlformats.org/drawingml/2006/main" r:embed="R2ff6ae67d31449ab">
             <a:alphaModFix/>
           </a:blip>
           <a:srcRect xmlns:a="http://schemas.openxmlformats.org/drawingml/2006/main" l="0" t="0" r="0" b="0"/>
@@ -34541,7 +34893,7 @@
           <p:nvPr/>
         </p:nvPicPr>
         <p:blipFill rotWithShape="1">
-          <a:blip xmlns:r="http://schemas.openxmlformats.org/officeDocument/2006/relationships" xmlns:a="http://schemas.openxmlformats.org/drawingml/2006/main" r:embed="R6e8fa682d5224bed">
+          <a:blip xmlns:r="http://schemas.openxmlformats.org/officeDocument/2006/relationships" xmlns:a="http://schemas.openxmlformats.org/drawingml/2006/main" r:embed="R2ff6ae67d31449ab">
             <a:alphaModFix/>
           </a:blip>
           <a:srcRect xmlns:a="http://schemas.openxmlformats.org/drawingml/2006/main" l="0" t="0" r="0" b="0"/>
@@ -34683,7 +35035,7 @@
           <p:nvPr/>
         </p:nvPicPr>
         <p:blipFill rotWithShape="1">
-          <a:blip xmlns:r="http://schemas.openxmlformats.org/officeDocument/2006/relationships" xmlns:a="http://schemas.openxmlformats.org/drawingml/2006/main" r:embed="R6e8fa682d5224bed">
+          <a:blip xmlns:r="http://schemas.openxmlformats.org/officeDocument/2006/relationships" xmlns:a="http://schemas.openxmlformats.org/drawingml/2006/main" r:embed="R2ff6ae67d31449ab">
             <a:alphaModFix/>
           </a:blip>
           <a:srcRect xmlns:a="http://schemas.openxmlformats.org/drawingml/2006/main" l="0" t="0" r="0" b="0"/>
@@ -35234,7 +35586,7 @@
           <p:nvPr/>
         </p:nvPicPr>
         <p:blipFill>
-          <a:blip xmlns:r="http://schemas.openxmlformats.org/officeDocument/2006/relationships" xmlns:a="http://schemas.openxmlformats.org/drawingml/2006/main" r:embed="Ra2106575f79a4c71"/>
+          <a:blip xmlns:r="http://schemas.openxmlformats.org/officeDocument/2006/relationships" xmlns:a="http://schemas.openxmlformats.org/drawingml/2006/main" r:embed="R8bd1f18499af4986"/>
           <a:stretch xmlns:a="http://schemas.openxmlformats.org/drawingml/2006/main"/>
         </p:blipFill>
         <p:spPr>
@@ -37149,7 +37501,7 @@
           <p:nvPr/>
         </p:nvPicPr>
         <p:blipFill rotWithShape="1">
-          <a:blip xmlns:r="http://schemas.openxmlformats.org/officeDocument/2006/relationships" xmlns:a="http://schemas.openxmlformats.org/drawingml/2006/main" r:embed="Rc9682936b5ea4eff">
+          <a:blip xmlns:r="http://schemas.openxmlformats.org/officeDocument/2006/relationships" xmlns:a="http://schemas.openxmlformats.org/drawingml/2006/main" r:embed="R0fbef038adc44fce">
             <a:alphaModFix/>
           </a:blip>
           <a:srcRect xmlns:a="http://schemas.openxmlformats.org/drawingml/2006/main" l="0" t="0" r="0" b="0"/>
@@ -37392,7 +37744,7 @@
           <p:nvPr/>
         </p:nvPicPr>
         <p:blipFill rotWithShape="1">
-          <a:blip xmlns:r="http://schemas.openxmlformats.org/officeDocument/2006/relationships" xmlns:a="http://schemas.openxmlformats.org/drawingml/2006/main" r:embed="R02a4cd57e62d4213">
+          <a:blip xmlns:r="http://schemas.openxmlformats.org/officeDocument/2006/relationships" xmlns:a="http://schemas.openxmlformats.org/drawingml/2006/main" r:embed="Rd7703b056a6d4494">
             <a:alphaModFix/>
           </a:blip>
           <a:srcRect xmlns:a="http://schemas.openxmlformats.org/drawingml/2006/main" l="0" t="0" r="0" b="0"/>
@@ -37635,7 +37987,7 @@
           <p:nvPr/>
         </p:nvPicPr>
         <p:blipFill rotWithShape="1">
-          <a:blip xmlns:r="http://schemas.openxmlformats.org/officeDocument/2006/relationships" xmlns:a="http://schemas.openxmlformats.org/drawingml/2006/main" r:embed="R975977d9cf794884">
+          <a:blip xmlns:r="http://schemas.openxmlformats.org/officeDocument/2006/relationships" xmlns:a="http://schemas.openxmlformats.org/drawingml/2006/main" r:embed="R2ced93fd8aa94665">
             <a:alphaModFix/>
           </a:blip>
           <a:srcRect xmlns:a="http://schemas.openxmlformats.org/drawingml/2006/main" l="0" t="0" r="0" b="0"/>
@@ -38049,7 +38401,18 @@
                 <a:ea typeface="Calibri"/>
                 <a:cs typeface="Calibri"/>
               </a:rPr>
-              <a:t>§1.14 · PERPETUITY, CAUSE, AND TIME</a:t>
+              <a:t>§1.4</a:t>
+            </a:r>
+            <a:r>
+              <a:rPr sz="1050" b="1" i="0" u="none" cap="none">
+                <a:solidFill>
+                  <a:srgbClr val="9A6414"/>
+                </a:solidFill>
+                <a:latin typeface="Calibri"/>
+                <a:ea typeface="Calibri"/>
+                <a:cs typeface="Calibri"/>
+              </a:rPr>
+              <a:t> · PERPETUITY, CAUSE, AND TIME</a:t>
             </a:r>
           </a:p>
         </p:txBody>
@@ -38278,7 +38641,7 @@
           <p:nvPr/>
         </p:nvPicPr>
         <p:blipFill rotWithShape="1">
-          <a:blip xmlns:r="http://schemas.openxmlformats.org/officeDocument/2006/relationships" xmlns:a="http://schemas.openxmlformats.org/drawingml/2006/main" r:embed="R20200b20765d4f4d">
+          <a:blip xmlns:r="http://schemas.openxmlformats.org/officeDocument/2006/relationships" xmlns:a="http://schemas.openxmlformats.org/drawingml/2006/main" r:embed="R64dcd851bab542d0">
             <a:alphaModFix/>
           </a:blip>
           <a:srcRect xmlns:a="http://schemas.openxmlformats.org/drawingml/2006/main" l="0" t="0" r="0" b="0"/>
@@ -38521,7 +38884,7 @@
           <p:nvPr/>
         </p:nvPicPr>
         <p:blipFill rotWithShape="1">
-          <a:blip xmlns:r="http://schemas.openxmlformats.org/officeDocument/2006/relationships" xmlns:a="http://schemas.openxmlformats.org/drawingml/2006/main" r:embed="Rbf059940d7ad4c13">
+          <a:blip xmlns:r="http://schemas.openxmlformats.org/officeDocument/2006/relationships" xmlns:a="http://schemas.openxmlformats.org/drawingml/2006/main" r:embed="Rdd30731170fd4984">
             <a:alphaModFix/>
           </a:blip>
           <a:srcRect xmlns:a="http://schemas.openxmlformats.org/drawingml/2006/main" l="0" t="0" r="0" b="0"/>
@@ -38764,7 +39127,7 @@
           <p:nvPr/>
         </p:nvPicPr>
         <p:blipFill rotWithShape="1">
-          <a:blip xmlns:r="http://schemas.openxmlformats.org/officeDocument/2006/relationships" xmlns:a="http://schemas.openxmlformats.org/drawingml/2006/main" r:embed="R775a05c1e0ca4f49">
+          <a:blip xmlns:r="http://schemas.openxmlformats.org/officeDocument/2006/relationships" xmlns:a="http://schemas.openxmlformats.org/drawingml/2006/main" r:embed="Rcc4b8ba560444ae2">
             <a:alphaModFix/>
           </a:blip>
           <a:srcRect xmlns:a="http://schemas.openxmlformats.org/drawingml/2006/main" l="0" t="0" r="0" b="0"/>
@@ -38968,7 +39331,29 @@
                 <a:ea typeface="Calibri"/>
                 <a:cs typeface="Calibri"/>
               </a:rPr>
-              <a:t>  ·  Study §§1.2, 1.14; full treatment of kaal in Nature of Time</a:t>
+              <a:t>  ·  Study </a:t>
+            </a:r>
+            <a:r>
+              <a:rPr sz="950" b="0" i="1" u="none" cap="none">
+                <a:solidFill>
+                  <a:srgbClr val="5A6377"/>
+                </a:solidFill>
+                <a:latin typeface="Calibri"/>
+                <a:ea typeface="Calibri"/>
+                <a:cs typeface="Calibri"/>
+              </a:rPr>
+              <a:t>§§1.2, 1.4</a:t>
+            </a:r>
+            <a:r>
+              <a:rPr sz="950" b="0" i="1" u="none" cap="none">
+                <a:solidFill>
+                  <a:srgbClr val="5A6377"/>
+                </a:solidFill>
+                <a:latin typeface="Calibri"/>
+                <a:ea typeface="Calibri"/>
+                <a:cs typeface="Calibri"/>
+              </a:rPr>
+              <a:t>; full treatment of kaal in Nature of Time</a:t>
             </a:r>
           </a:p>
         </p:txBody>
@@ -39200,7 +39585,18 @@
                 <a:ea typeface="Calibri"/>
                 <a:cs typeface="Calibri"/>
               </a:rPr>
-              <a:t>§§1.2–1.4 · MANIFESTNESS AND MUTUAL RECOGNITION</a:t>
+              <a:t>§§1.2–1.3, 1.13.1</a:t>
+            </a:r>
+            <a:r>
+              <a:rPr sz="1050" b="1" i="0" u="none" cap="none">
+                <a:solidFill>
+                  <a:srgbClr val="9A6414"/>
+                </a:solidFill>
+                <a:latin typeface="Calibri"/>
+                <a:ea typeface="Calibri"/>
+                <a:cs typeface="Calibri"/>
+              </a:rPr>
+              <a:t> · MANIFESTNESS AND MUTUAL RECOGNITION</a:t>
             </a:r>
           </a:p>
         </p:txBody>
@@ -39429,7 +39825,7 @@
           <p:nvPr/>
         </p:nvPicPr>
         <p:blipFill rotWithShape="1">
-          <a:blip xmlns:r="http://schemas.openxmlformats.org/officeDocument/2006/relationships" xmlns:a="http://schemas.openxmlformats.org/drawingml/2006/main" r:embed="R6a53cca24852477f">
+          <a:blip xmlns:r="http://schemas.openxmlformats.org/officeDocument/2006/relationships" xmlns:a="http://schemas.openxmlformats.org/drawingml/2006/main" r:embed="Rab97a9655a8b4633">
             <a:alphaModFix/>
           </a:blip>
           <a:srcRect xmlns:a="http://schemas.openxmlformats.org/drawingml/2006/main" l="0" t="0" r="0" b="0"/>
@@ -39672,7 +40068,7 @@
           <p:nvPr/>
         </p:nvPicPr>
         <p:blipFill rotWithShape="1">
-          <a:blip xmlns:r="http://schemas.openxmlformats.org/officeDocument/2006/relationships" xmlns:a="http://schemas.openxmlformats.org/drawingml/2006/main" r:embed="R99b7eb538e31430d">
+          <a:blip xmlns:r="http://schemas.openxmlformats.org/officeDocument/2006/relationships" xmlns:a="http://schemas.openxmlformats.org/drawingml/2006/main" r:embed="R88af4cc2af5d4a02">
             <a:alphaModFix/>
           </a:blip>
           <a:srcRect xmlns:a="http://schemas.openxmlformats.org/drawingml/2006/main" l="0" t="0" r="0" b="0"/>
@@ -39915,7 +40311,7 @@
           <p:nvPr/>
         </p:nvPicPr>
         <p:blipFill rotWithShape="1">
-          <a:blip xmlns:r="http://schemas.openxmlformats.org/officeDocument/2006/relationships" xmlns:a="http://schemas.openxmlformats.org/drawingml/2006/main" r:embed="R78685d6988b24b3e">
+          <a:blip xmlns:r="http://schemas.openxmlformats.org/officeDocument/2006/relationships" xmlns:a="http://schemas.openxmlformats.org/drawingml/2006/main" r:embed="R5d7a93f20973475c">
             <a:alphaModFix/>
           </a:blip>
           <a:srcRect xmlns:a="http://schemas.openxmlformats.org/drawingml/2006/main" l="0" t="0" r="0" b="0"/>

--- a/Studies/The-Ontology-of-Coexistence/The-Ontology-of-Existence-Madhyasth-Darshan.pptx
+++ b/Studies/The-Ontology-of-Coexistence/The-Ontology-of-Existence-Madhyasth-Darshan.pptx
@@ -2,41 +2,41 @@
 <file path=ppt/presentation.xml><?xml version="1.0" encoding="utf-8"?>
 <p:presentation xmlns:p="http://schemas.openxmlformats.org/presentationml/2006/main">
   <p:sldMasterIdLst>
-    <p:sldMasterId xmlns:r="http://schemas.openxmlformats.org/officeDocument/2006/relationships" id="2147483648" r:id="R26dc17f0a4c54b14"/>
+    <p:sldMasterId xmlns:r="http://schemas.openxmlformats.org/officeDocument/2006/relationships" id="2147483648" r:id="R388e00381139496b"/>
   </p:sldMasterIdLst>
   <p:notesMasterIdLst>
-    <p:notesMasterId xmlns:r="http://schemas.openxmlformats.org/officeDocument/2006/relationships" r:id="R6c7f3daab4c941d6"/>
+    <p:notesMasterId xmlns:r="http://schemas.openxmlformats.org/officeDocument/2006/relationships" r:id="Re4f21cfc0aca4d45"/>
   </p:notesMasterIdLst>
   <p:sldIdLst>
-    <p:sldId xmlns:r="http://schemas.openxmlformats.org/officeDocument/2006/relationships" id="256" r:id="R7ed1c79b43014523"/>
-    <p:sldId xmlns:r="http://schemas.openxmlformats.org/officeDocument/2006/relationships" id="257" r:id="Rcba9d247f22b4b21"/>
-    <p:sldId xmlns:r="http://schemas.openxmlformats.org/officeDocument/2006/relationships" id="258" r:id="R6b38263f39d3477e"/>
-    <p:sldId xmlns:r="http://schemas.openxmlformats.org/officeDocument/2006/relationships" id="259" r:id="Ree9b4a731909464d"/>
-    <p:sldId xmlns:r="http://schemas.openxmlformats.org/officeDocument/2006/relationships" id="260" r:id="R299d79bc952a4939"/>
-    <p:sldId xmlns:r="http://schemas.openxmlformats.org/officeDocument/2006/relationships" id="261" r:id="R51a1d96d47b44615"/>
-    <p:sldId xmlns:r="http://schemas.openxmlformats.org/officeDocument/2006/relationships" id="262" r:id="R85bceaaaee3843d2"/>
-    <p:sldId xmlns:r="http://schemas.openxmlformats.org/officeDocument/2006/relationships" id="263" r:id="R65946d05a8dc4f3e"/>
-    <p:sldId xmlns:r="http://schemas.openxmlformats.org/officeDocument/2006/relationships" id="264" r:id="R4d1a08f09a6c4e76"/>
-    <p:sldId xmlns:r="http://schemas.openxmlformats.org/officeDocument/2006/relationships" id="265" r:id="R5ba004cab7994c63"/>
-    <p:sldId xmlns:r="http://schemas.openxmlformats.org/officeDocument/2006/relationships" id="266" r:id="R8391730f4b874e80"/>
-    <p:sldId xmlns:r="http://schemas.openxmlformats.org/officeDocument/2006/relationships" id="267" r:id="R5ab992cd4e5940cd"/>
-    <p:sldId xmlns:r="http://schemas.openxmlformats.org/officeDocument/2006/relationships" id="268" r:id="Raccf362c0bcc4c6e"/>
-    <p:sldId xmlns:r="http://schemas.openxmlformats.org/officeDocument/2006/relationships" id="269" r:id="R424ce8a1734a4239"/>
-    <p:sldId xmlns:r="http://schemas.openxmlformats.org/officeDocument/2006/relationships" id="270" r:id="R0c1a2f4361d9443a"/>
-    <p:sldId xmlns:r="http://schemas.openxmlformats.org/officeDocument/2006/relationships" id="271" r:id="Re3f0f0b1026e445f"/>
-    <p:sldId xmlns:r="http://schemas.openxmlformats.org/officeDocument/2006/relationships" id="272" r:id="Rbbcb622c63404a38"/>
-    <p:sldId xmlns:r="http://schemas.openxmlformats.org/officeDocument/2006/relationships" id="273" r:id="R027eea7240ba4142"/>
-    <p:sldId xmlns:r="http://schemas.openxmlformats.org/officeDocument/2006/relationships" id="274" r:id="Rf14e5bb44c114e69"/>
-    <p:sldId xmlns:r="http://schemas.openxmlformats.org/officeDocument/2006/relationships" id="275" r:id="R56242c4337144b9b"/>
-    <p:sldId xmlns:r="http://schemas.openxmlformats.org/officeDocument/2006/relationships" id="276" r:id="Re9ce0dceb55244b3"/>
-    <p:sldId xmlns:r="http://schemas.openxmlformats.org/officeDocument/2006/relationships" id="277" r:id="R945e1b7c84dc4650"/>
-    <p:sldId xmlns:r="http://schemas.openxmlformats.org/officeDocument/2006/relationships" id="278" r:id="Rb0e41dbafe7c43db"/>
-    <p:sldId xmlns:r="http://schemas.openxmlformats.org/officeDocument/2006/relationships" id="279" r:id="R5a320b00137c4da8"/>
-    <p:sldId xmlns:r="http://schemas.openxmlformats.org/officeDocument/2006/relationships" id="280" r:id="Rb4d2d8452d0b451b"/>
-    <p:sldId xmlns:r="http://schemas.openxmlformats.org/officeDocument/2006/relationships" id="281" r:id="R6623d7210841434d"/>
-    <p:sldId xmlns:r="http://schemas.openxmlformats.org/officeDocument/2006/relationships" id="282" r:id="R77fdabaaf91e4ac8"/>
-    <p:sldId xmlns:r="http://schemas.openxmlformats.org/officeDocument/2006/relationships" id="283" r:id="R72fa459b228f47ce"/>
-    <p:sldId xmlns:r="http://schemas.openxmlformats.org/officeDocument/2006/relationships" id="284" r:id="R8e9f99cc3cb94cd7"/>
+    <p:sldId xmlns:r="http://schemas.openxmlformats.org/officeDocument/2006/relationships" id="256" r:id="R41e9a533ec364630"/>
+    <p:sldId xmlns:r="http://schemas.openxmlformats.org/officeDocument/2006/relationships" id="257" r:id="Rd034aae41c354bb3"/>
+    <p:sldId xmlns:r="http://schemas.openxmlformats.org/officeDocument/2006/relationships" id="258" r:id="R38addf1f4b3e4b90"/>
+    <p:sldId xmlns:r="http://schemas.openxmlformats.org/officeDocument/2006/relationships" id="259" r:id="Rd446b5a533c747a0"/>
+    <p:sldId xmlns:r="http://schemas.openxmlformats.org/officeDocument/2006/relationships" id="260" r:id="Rd97751e356094ccd"/>
+    <p:sldId xmlns:r="http://schemas.openxmlformats.org/officeDocument/2006/relationships" id="261" r:id="R99c4675820df4525"/>
+    <p:sldId xmlns:r="http://schemas.openxmlformats.org/officeDocument/2006/relationships" id="262" r:id="R6be27b6a3cda4022"/>
+    <p:sldId xmlns:r="http://schemas.openxmlformats.org/officeDocument/2006/relationships" id="263" r:id="R318dc95f784d44b2"/>
+    <p:sldId xmlns:r="http://schemas.openxmlformats.org/officeDocument/2006/relationships" id="264" r:id="Rcd9382cc06474fa3"/>
+    <p:sldId xmlns:r="http://schemas.openxmlformats.org/officeDocument/2006/relationships" id="265" r:id="Rb41dd1b3c3644845"/>
+    <p:sldId xmlns:r="http://schemas.openxmlformats.org/officeDocument/2006/relationships" id="266" r:id="Rdb6b97e371e34923"/>
+    <p:sldId xmlns:r="http://schemas.openxmlformats.org/officeDocument/2006/relationships" id="267" r:id="R48709f4e5a5341fe"/>
+    <p:sldId xmlns:r="http://schemas.openxmlformats.org/officeDocument/2006/relationships" id="268" r:id="R47feca93d8a34b26"/>
+    <p:sldId xmlns:r="http://schemas.openxmlformats.org/officeDocument/2006/relationships" id="269" r:id="Rece2015381aa477e"/>
+    <p:sldId xmlns:r="http://schemas.openxmlformats.org/officeDocument/2006/relationships" id="270" r:id="R41973db7630746b6"/>
+    <p:sldId xmlns:r="http://schemas.openxmlformats.org/officeDocument/2006/relationships" id="271" r:id="R80af74615ee443a9"/>
+    <p:sldId xmlns:r="http://schemas.openxmlformats.org/officeDocument/2006/relationships" id="272" r:id="R10185a9b24a940e1"/>
+    <p:sldId xmlns:r="http://schemas.openxmlformats.org/officeDocument/2006/relationships" id="273" r:id="R752431d326714fc3"/>
+    <p:sldId xmlns:r="http://schemas.openxmlformats.org/officeDocument/2006/relationships" id="274" r:id="R87ad913278b442f3"/>
+    <p:sldId xmlns:r="http://schemas.openxmlformats.org/officeDocument/2006/relationships" id="275" r:id="Rdd81a705775d40f9"/>
+    <p:sldId xmlns:r="http://schemas.openxmlformats.org/officeDocument/2006/relationships" id="276" r:id="Rfd7adb97ba334329"/>
+    <p:sldId xmlns:r="http://schemas.openxmlformats.org/officeDocument/2006/relationships" id="277" r:id="Rc880ecfc00ec4133"/>
+    <p:sldId xmlns:r="http://schemas.openxmlformats.org/officeDocument/2006/relationships" id="278" r:id="R65f6b9533ce14d9d"/>
+    <p:sldId xmlns:r="http://schemas.openxmlformats.org/officeDocument/2006/relationships" id="279" r:id="R71e70a94617d46b6"/>
+    <p:sldId xmlns:r="http://schemas.openxmlformats.org/officeDocument/2006/relationships" id="280" r:id="R57fb06dbf93c4733"/>
+    <p:sldId xmlns:r="http://schemas.openxmlformats.org/officeDocument/2006/relationships" id="281" r:id="Re4dda241596c419a"/>
+    <p:sldId xmlns:r="http://schemas.openxmlformats.org/officeDocument/2006/relationships" id="282" r:id="Rd335dd17123d41f7"/>
+    <p:sldId xmlns:r="http://schemas.openxmlformats.org/officeDocument/2006/relationships" id="283" r:id="R113f93d5b7a04046"/>
+    <p:sldId xmlns:r="http://schemas.openxmlformats.org/officeDocument/2006/relationships" id="284" r:id="R32e1694d411e4a07"/>
   </p:sldIdLst>
   <p:sldSz cx="9144000" cy="5143500"/>
   <p:notesSz cx="6858000" cy="9144000"/>
@@ -2183,7 +2183,7 @@
           <a:lstStyle xmlns:a="http://schemas.openxmlformats.org/drawingml/2006/main"/>
           <a:p xmlns:a="http://schemas.openxmlformats.org/drawingml/2006/main">
             <a:r>
-              <a:t>Presentation, communication and expression have a scope throughout nature. Every unit makes its characteristic contribution evident according to its state, activity and order. In human living, the same vocabulary also describes the purposeful expression of understanding.</a:t>
+              <a:t>Every unit is prakashman, manifest through its form, properties, essential nature and dharma. Presentation, communication and expression describe this participation throughout nature. In sentient jeevan, manifestness includes its active faculties and the capacities it expresses through the body. Humans already communicate and express their capacities during awakening progression. With awakening, these activities carry realised understanding into meaningful presentation, communication and conduct. The three definitions here describe that fuller human fulfilment.</a:t>
             </a:r>
           </a:p>
           <a:p xmlns:a="http://schemas.openxmlformats.org/drawingml/2006/main">
@@ -2208,7 +2208,7 @@
           </a:p>
           <a:p xmlns:a="http://schemas.openxmlformats.org/drawingml/2006/main">
             <a:r>
-              <a:t>These activities overlap and work together. In awakened human living they involve jeevan through the body, carrying understanding into conduct and the humane tradition.</a:t>
+              <a:t>These are connected, overlapping aspects of sentient manifestation. Their fulfilment in awakened human living carries realised understanding through the body into conduct and the humane tradition.</a:t>
             </a:r>
           </a:p>
         </p:txBody>
@@ -2783,7 +2783,7 @@
           </a:p>
           <a:p xmlns:a="http://schemas.openxmlformats.org/drawingml/2006/main">
             <a:r>
-              <a:t>First, the ground — Omnipresence. Formless, all-pervasive, transparent, permeating, non-transforming, immeasurable. Actionless energy: it acts not at all, yet every unit is energised and regulated in it. There is no place where it is absent.</a:t>
+              <a:t>First, the ground — Omnipresence. Formless, all-pervasive, transparent, permeating, non-transforming, immeasurable. Actionless energy: it acts not at all, yet every unit is energised and regulated in it. There is no place where it is absent. The same pervasive reality is also named jyoti, light; realisation in it is described as enduring prakash.</a:t>
             </a:r>
           </a:p>
           <a:p xmlns:a="http://schemas.openxmlformats.org/drawingml/2006/main">
@@ -2893,7 +2893,7 @@
           </a:p>
           <a:p xmlns:a="http://schemas.openxmlformats.org/drawingml/2006/main">
             <a:r>
-              <a:t>These are connected aspects of one saturation. Energy becomes evident in activity, recognition in mutuality, and regulation in definite conduct. The unit is also manifest to others: the texts connect its manifestness with being force-endowed in Omnipresence.</a:t>
+              <a:t>These are connected aspects of one saturation. Energy becomes evident in activity, recognition in mutuality, and regulation in definite conduct. The ground is named jyoti, light; each unit saturated in it is prakashman, manifest. The texts explicitly connect this manifestness with satta permeating the unit and its being endowed with force. Manifestness belongs to all units, including sentient jeevan.</a:t>
             </a:r>
           </a:p>
           <a:p xmlns:a="http://schemas.openxmlformats.org/drawingml/2006/main">
@@ -3088,7 +3088,7 @@
           </a:p>
           <a:p xmlns:a="http://schemas.openxmlformats.org/drawingml/2006/main">
             <a:r>
-              <a:t>The whole unit is manifest, or prakashman, with all four aspects. Imaging is central to prakash. This is a claim about how units are manifest to one another; completed human understanding also requires knowing their relations and fulfilment. An image alone does not deliver that understanding. Animal recognition of essential nature becomes evident in friendliness and opposition; human living brings the exchange of values and evaluation of dharma.</a:t>
+              <a:t>The whole unit is manifest, or prakashman, with all four aspects, grounded in its saturation in satta. In the context of mutuality, prakash names a unit’s imaging. This describes how units are manifest to one another within the wider account of light and manifestness; completed human understanding also requires knowing their relations and fulfilment. An image alone does not deliver that understanding. Animal recognition of essential nature becomes evident in friendliness and opposition; human living brings the exchange of values and evaluation of dharma.</a:t>
             </a:r>
           </a:p>
           <a:p xmlns:a="http://schemas.openxmlformats.org/drawingml/2006/main">
@@ -3268,7 +3268,7 @@
   </p:cSld>
   <p:clrMap bg1="lt1" tx1="dk1" bg2="dk2" tx2="lt2" accent1="accent1" accent2="accent2" accent3="accent3" accent4="accent4" accent5="accent5" accent6="accent6" hlink="hlink" folHlink="folHlink"/>
   <p:sldLayoutIdLst>
-    <p:sldLayoutId xmlns:r="http://schemas.openxmlformats.org/officeDocument/2006/relationships" id="2147483649" r:id="Rf687c78d599f45fd"/>
+    <p:sldLayoutId xmlns:r="http://schemas.openxmlformats.org/officeDocument/2006/relationships" id="2147483649" r:id="Rccf15baee49a48d0"/>
   </p:sldLayoutIdLst>
   <p:hf sldNum="0" hdr="0" ftr="0" dt="0"/>
   <p:txStyles>
@@ -27669,7 +27669,7 @@
       </p:sp>
       <p:cxnSp>
         <p:nvCxnSpPr>
-          <p:cNvPr id="1306" name="Google Shape;445;p18"/>
+          <p:cNvPr id="1343" name="Google Shape;445;p18"/>
           <p:cNvCxnSpPr/>
           <p:nvPr/>
         </p:nvCxnSpPr>
@@ -27750,7 +27750,7 @@
       </p:sp>
       <p:cxnSp>
         <p:nvCxnSpPr>
-          <p:cNvPr id="1308" name="Google Shape;447;p18"/>
+          <p:cNvPr id="1345" name="Google Shape;447;p18"/>
           <p:cNvCxnSpPr/>
           <p:nvPr/>
         </p:nvCxnSpPr>
@@ -29329,7 +29329,7 @@
                 <a:ea typeface="Calibri"/>
                 <a:cs typeface="Calibri"/>
               </a:rPr>
-              <a:t>Every unit presents, communicates and expresses its form, properties, nature and dharma. In human living, these take the fuller forms below, serving understanding and all-round resolution.</a:t>
+              <a:t>Jeevan’s sentient capacities become manifest through the body. Humans express and communicate them during awakening progression; in full awakening, these activities carry realised understanding into conduct.</a:t>
             </a:r>
           </a:p>
         </p:txBody>
@@ -29446,7 +29446,7 @@
           <p:nvPr/>
         </p:nvPicPr>
         <p:blipFill rotWithShape="1">
-          <a:blip xmlns:r="http://schemas.openxmlformats.org/officeDocument/2006/relationships" xmlns:a="http://schemas.openxmlformats.org/drawingml/2006/main" r:embed="R97e3d4b47c7949c2">
+          <a:blip xmlns:r="http://schemas.openxmlformats.org/officeDocument/2006/relationships" xmlns:a="http://schemas.openxmlformats.org/drawingml/2006/main" r:embed="Rbeef1ba50dab4717">
             <a:alphaModFix/>
           </a:blip>
           <a:srcRect xmlns:a="http://schemas.openxmlformats.org/drawingml/2006/main" l="0" t="0" r="0" b="0"/>
@@ -29689,7 +29689,7 @@
           <p:nvPr/>
         </p:nvPicPr>
         <p:blipFill rotWithShape="1">
-          <a:blip xmlns:r="http://schemas.openxmlformats.org/officeDocument/2006/relationships" xmlns:a="http://schemas.openxmlformats.org/drawingml/2006/main" r:embed="R4db1bd9577594744">
+          <a:blip xmlns:r="http://schemas.openxmlformats.org/officeDocument/2006/relationships" xmlns:a="http://schemas.openxmlformats.org/drawingml/2006/main" r:embed="Rac6e0b5be9014e0d">
             <a:alphaModFix/>
           </a:blip>
           <a:srcRect xmlns:a="http://schemas.openxmlformats.org/drawingml/2006/main" l="0" t="0" r="0" b="0"/>
@@ -29932,7 +29932,7 @@
           <p:nvPr/>
         </p:nvPicPr>
         <p:blipFill rotWithShape="1">
-          <a:blip xmlns:r="http://schemas.openxmlformats.org/officeDocument/2006/relationships" xmlns:a="http://schemas.openxmlformats.org/drawingml/2006/main" r:embed="R64164c1fe10b4f23">
+          <a:blip xmlns:r="http://schemas.openxmlformats.org/officeDocument/2006/relationships" xmlns:a="http://schemas.openxmlformats.org/drawingml/2006/main" r:embed="Re775de770ff140c8">
             <a:alphaModFix/>
           </a:blip>
           <a:srcRect xmlns:a="http://schemas.openxmlformats.org/drawingml/2006/main" l="0" t="0" r="0" b="0"/>
@@ -30115,7 +30115,18 @@
                 <a:cs typeface="Calibri"/>
               </a:rPr>
               <a:t>Kala: skilful expression. Kala-mulya: beauty and convenience supporting an object’s usefulness.
-PS pp. 22, 56, 119, 206  ·  SB p. 179  ·  MVD pp. 109–110</a:t>
+PS pp. 22, 56, 119, 206  ·  </a:t>
+            </a:r>
+            <a:r>
+              <a:rPr sz="950" b="0" i="1" u="none" cap="none">
+                <a:solidFill>
+                  <a:srgbClr val="5A6377"/>
+                </a:solidFill>
+                <a:latin typeface="Calibri"/>
+                <a:ea typeface="Calibri"/>
+                <a:cs typeface="Calibri"/>
+              </a:rPr>
+              <a:t>SB pp. 52, 63, 66, 179  ·  MVD pp. 109–110, 328</a:t>
             </a:r>
           </a:p>
         </p:txBody>
@@ -34236,7 +34247,7 @@
           <p:nvPr/>
         </p:nvPicPr>
         <p:blipFill rotWithShape="1">
-          <a:blip xmlns:r="http://schemas.openxmlformats.org/officeDocument/2006/relationships" xmlns:a="http://schemas.openxmlformats.org/drawingml/2006/main" r:embed="R51b41a5c0f524c43">
+          <a:blip xmlns:r="http://schemas.openxmlformats.org/officeDocument/2006/relationships" xmlns:a="http://schemas.openxmlformats.org/drawingml/2006/main" r:embed="Rab090c9d22c0488e">
             <a:alphaModFix/>
           </a:blip>
           <a:srcRect xmlns:a="http://schemas.openxmlformats.org/drawingml/2006/main" l="0" t="0" r="0" b="0"/>
@@ -34378,7 +34389,7 @@
           <p:nvPr/>
         </p:nvPicPr>
         <p:blipFill rotWithShape="1">
-          <a:blip xmlns:r="http://schemas.openxmlformats.org/officeDocument/2006/relationships" xmlns:a="http://schemas.openxmlformats.org/drawingml/2006/main" r:embed="R51b41a5c0f524c43">
+          <a:blip xmlns:r="http://schemas.openxmlformats.org/officeDocument/2006/relationships" xmlns:a="http://schemas.openxmlformats.org/drawingml/2006/main" r:embed="Rab090c9d22c0488e">
             <a:alphaModFix/>
           </a:blip>
           <a:srcRect xmlns:a="http://schemas.openxmlformats.org/drawingml/2006/main" l="0" t="0" r="0" b="0"/>
@@ -34520,7 +34531,7 @@
           <p:nvPr/>
         </p:nvPicPr>
         <p:blipFill rotWithShape="1">
-          <a:blip xmlns:r="http://schemas.openxmlformats.org/officeDocument/2006/relationships" xmlns:a="http://schemas.openxmlformats.org/drawingml/2006/main" r:embed="R51b41a5c0f524c43">
+          <a:blip xmlns:r="http://schemas.openxmlformats.org/officeDocument/2006/relationships" xmlns:a="http://schemas.openxmlformats.org/drawingml/2006/main" r:embed="Rab090c9d22c0488e">
             <a:alphaModFix/>
           </a:blip>
           <a:srcRect xmlns:a="http://schemas.openxmlformats.org/drawingml/2006/main" l="0" t="0" r="0" b="0"/>
@@ -34662,7 +34673,7 @@
           <p:nvPr/>
         </p:nvPicPr>
         <p:blipFill rotWithShape="1">
-          <a:blip xmlns:r="http://schemas.openxmlformats.org/officeDocument/2006/relationships" xmlns:a="http://schemas.openxmlformats.org/drawingml/2006/main" r:embed="R51b41a5c0f524c43">
+          <a:blip xmlns:r="http://schemas.openxmlformats.org/officeDocument/2006/relationships" xmlns:a="http://schemas.openxmlformats.org/drawingml/2006/main" r:embed="Rab090c9d22c0488e">
             <a:alphaModFix/>
           </a:blip>
           <a:srcRect xmlns:a="http://schemas.openxmlformats.org/drawingml/2006/main" l="0" t="0" r="0" b="0"/>
@@ -34804,7 +34815,7 @@
           <p:nvPr/>
         </p:nvPicPr>
         <p:blipFill rotWithShape="1">
-          <a:blip xmlns:r="http://schemas.openxmlformats.org/officeDocument/2006/relationships" xmlns:a="http://schemas.openxmlformats.org/drawingml/2006/main" r:embed="R51b41a5c0f524c43">
+          <a:blip xmlns:r="http://schemas.openxmlformats.org/officeDocument/2006/relationships" xmlns:a="http://schemas.openxmlformats.org/drawingml/2006/main" r:embed="Rab090c9d22c0488e">
             <a:alphaModFix/>
           </a:blip>
           <a:srcRect xmlns:a="http://schemas.openxmlformats.org/drawingml/2006/main" l="0" t="0" r="0" b="0"/>
@@ -34946,7 +34957,7 @@
           <p:nvPr/>
         </p:nvPicPr>
         <p:blipFill rotWithShape="1">
-          <a:blip xmlns:r="http://schemas.openxmlformats.org/officeDocument/2006/relationships" xmlns:a="http://schemas.openxmlformats.org/drawingml/2006/main" r:embed="R51b41a5c0f524c43">
+          <a:blip xmlns:r="http://schemas.openxmlformats.org/officeDocument/2006/relationships" xmlns:a="http://schemas.openxmlformats.org/drawingml/2006/main" r:embed="Rab090c9d22c0488e">
             <a:alphaModFix/>
           </a:blip>
           <a:srcRect xmlns:a="http://schemas.openxmlformats.org/drawingml/2006/main" l="0" t="0" r="0" b="0"/>
@@ -35497,7 +35508,7 @@
           <p:nvPr/>
         </p:nvPicPr>
         <p:blipFill>
-          <a:blip xmlns:r="http://schemas.openxmlformats.org/officeDocument/2006/relationships" xmlns:a="http://schemas.openxmlformats.org/drawingml/2006/main" r:embed="R558b14c063f948b5"/>
+          <a:blip xmlns:r="http://schemas.openxmlformats.org/officeDocument/2006/relationships" xmlns:a="http://schemas.openxmlformats.org/drawingml/2006/main" r:embed="R6f640c4b95674b2d"/>
           <a:stretch xmlns:a="http://schemas.openxmlformats.org/drawingml/2006/main"/>
         </p:blipFill>
         <p:spPr>
@@ -35871,7 +35882,7 @@
                 <a:ea typeface="Calibri"/>
                 <a:cs typeface="Calibri"/>
               </a:rPr>
-              <a:t>Formless, all-pervasive, non-transforming and actionless. It permeates every unit and is transparent in mutuality, where units are imaged and recognised. Every unit is energised and regulated in it. It has no absent place.</a:t>
+              <a:t>Formless, all-pervasive, non-transforming and actionless. Also named jyoti (light), it permeates every unit and is transparent in mutuality. Saturated units are active and manifest (prakashman). It has no absent place.</a:t>
             </a:r>
           </a:p>
           <a:p xmlns:a="http://schemas.openxmlformats.org/drawingml/2006/main">
@@ -36951,7 +36962,29 @@
                 <a:ea typeface="Calibri"/>
                 <a:cs typeface="Calibri"/>
               </a:rPr>
-              <a:t>SB pp. 46, 48, 248–252  ·  MVD pp. 11, 32, 34  ·  PS p. 114  ·  JV p. 18</a:t>
+              <a:t>SB pp. 46, 48, 248–252  ·  MVD pp. 11, 32, 34  ·  </a:t>
+            </a:r>
+            <a:r>
+              <a:rPr sz="950" b="0" i="1" u="none" cap="none">
+                <a:solidFill>
+                  <a:srgbClr val="5A6377"/>
+                </a:solidFill>
+                <a:latin typeface="Calibri"/>
+                <a:ea typeface="Calibri"/>
+                <a:cs typeface="Calibri"/>
+              </a:rPr>
+              <a:t>PS pp. 114, 137</a:t>
+            </a:r>
+            <a:r>
+              <a:rPr sz="950" b="0" i="1" u="none" cap="none">
+                <a:solidFill>
+                  <a:srgbClr val="5A6377"/>
+                </a:solidFill>
+                <a:latin typeface="Calibri"/>
+                <a:ea typeface="Calibri"/>
+                <a:cs typeface="Calibri"/>
+              </a:rPr>
+              <a:t>  ·  JV p. 18</a:t>
             </a:r>
           </a:p>
         </p:txBody>
@@ -37412,7 +37445,7 @@
           <p:nvPr/>
         </p:nvPicPr>
         <p:blipFill rotWithShape="1">
-          <a:blip xmlns:r="http://schemas.openxmlformats.org/officeDocument/2006/relationships" xmlns:a="http://schemas.openxmlformats.org/drawingml/2006/main" r:embed="Rbbb04681cfd84f0b">
+          <a:blip xmlns:r="http://schemas.openxmlformats.org/officeDocument/2006/relationships" xmlns:a="http://schemas.openxmlformats.org/drawingml/2006/main" r:embed="R60478028fed94430">
             <a:alphaModFix/>
           </a:blip>
           <a:srcRect xmlns:a="http://schemas.openxmlformats.org/drawingml/2006/main" l="0" t="0" r="0" b="0"/>
@@ -37538,7 +37571,7 @@
                 <a:ea typeface="Calibri"/>
                 <a:cs typeface="Calibri"/>
               </a:rPr>
-              <a:t>The unit is endowed with energy and has definite relative power. This force-endowment is the root of its manifestness: its being evident to other units.</a:t>
+              <a:t>Permeation by satta grounds force-endowment and manifestness (prakashmanata). Each unit is energy-endowed, with definite relative powers.</a:t>
             </a:r>
           </a:p>
         </p:txBody>
@@ -37655,7 +37688,7 @@
           <p:nvPr/>
         </p:nvPicPr>
         <p:blipFill rotWithShape="1">
-          <a:blip xmlns:r="http://schemas.openxmlformats.org/officeDocument/2006/relationships" xmlns:a="http://schemas.openxmlformats.org/drawingml/2006/main" r:embed="R687d71b4b1e3451a">
+          <a:blip xmlns:r="http://schemas.openxmlformats.org/officeDocument/2006/relationships" xmlns:a="http://schemas.openxmlformats.org/drawingml/2006/main" r:embed="R77bb050624ca48bf">
             <a:alphaModFix/>
           </a:blip>
           <a:srcRect xmlns:a="http://schemas.openxmlformats.org/drawingml/2006/main" l="0" t="0" r="0" b="0"/>
@@ -37781,7 +37814,7 @@
                 <a:ea typeface="Calibri"/>
                 <a:cs typeface="Calibri"/>
               </a:rPr>
-              <a:t>Units are active in one pervasive reality and become manifest to one another through imaging. Energy-endowment and activity belong together.</a:t>
+              <a:t>Units remain active in the pervasive ground. Their images in mutual facing provide a basis of recognition. Energy-endowment and activity belong together.</a:t>
             </a:r>
           </a:p>
         </p:txBody>
@@ -37898,7 +37931,7 @@
           <p:nvPr/>
         </p:nvPicPr>
         <p:blipFill rotWithShape="1">
-          <a:blip xmlns:r="http://schemas.openxmlformats.org/officeDocument/2006/relationships" xmlns:a="http://schemas.openxmlformats.org/drawingml/2006/main" r:embed="Rba1a994c2da04f18">
+          <a:blip xmlns:r="http://schemas.openxmlformats.org/officeDocument/2006/relationships" xmlns:a="http://schemas.openxmlformats.org/drawingml/2006/main" r:embed="R730f6d8c24c74730">
             <a:alphaModFix/>
           </a:blip>
           <a:srcRect xmlns:a="http://schemas.openxmlformats.org/drawingml/2006/main" l="0" t="0" r="0" b="0"/>
@@ -38080,7 +38113,29 @@
                 <a:ea typeface="Calibri"/>
                 <a:cs typeface="Calibri"/>
               </a:rPr>
-              <a:t>These descriptions overlap. Imaging and recognition continue on slide 7.  ·  SB pp. 57, 69, 79, 248  ·  MVD pp. 32–33, 40  ·  PS pp. 114, 121</a:t>
+              <a:t>These descriptions overlap. Imaging and recognition continue on slide 7.  ·  SB pp. 57, 69, 79, 248  ·  </a:t>
+            </a:r>
+            <a:r>
+              <a:rPr sz="950" b="0" i="1" u="none" cap="none">
+                <a:solidFill>
+                  <a:srgbClr val="5A6377"/>
+                </a:solidFill>
+                <a:latin typeface="Calibri"/>
+                <a:ea typeface="Calibri"/>
+                <a:cs typeface="Calibri"/>
+              </a:rPr>
+              <a:t>AVD PDF pp. 115–116</a:t>
+            </a:r>
+            <a:r>
+              <a:rPr sz="950" b="0" i="1" u="none" cap="none">
+                <a:solidFill>
+                  <a:srgbClr val="5A6377"/>
+                </a:solidFill>
+                <a:latin typeface="Calibri"/>
+                <a:ea typeface="Calibri"/>
+                <a:cs typeface="Calibri"/>
+              </a:rPr>
+              <a:t>  ·  PS pp. 114, 121</a:t>
             </a:r>
           </a:p>
         </p:txBody>
@@ -38552,7 +38607,7 @@
           <p:nvPr/>
         </p:nvPicPr>
         <p:blipFill rotWithShape="1">
-          <a:blip xmlns:r="http://schemas.openxmlformats.org/officeDocument/2006/relationships" xmlns:a="http://schemas.openxmlformats.org/drawingml/2006/main" r:embed="Rd0b6f088f5b14d05">
+          <a:blip xmlns:r="http://schemas.openxmlformats.org/officeDocument/2006/relationships" xmlns:a="http://schemas.openxmlformats.org/drawingml/2006/main" r:embed="R83aca33a03a146e1">
             <a:alphaModFix/>
           </a:blip>
           <a:srcRect xmlns:a="http://schemas.openxmlformats.org/drawingml/2006/main" l="0" t="0" r="0" b="0"/>
@@ -38795,7 +38850,7 @@
           <p:nvPr/>
         </p:nvPicPr>
         <p:blipFill rotWithShape="1">
-          <a:blip xmlns:r="http://schemas.openxmlformats.org/officeDocument/2006/relationships" xmlns:a="http://schemas.openxmlformats.org/drawingml/2006/main" r:embed="Rb734a8a987d44910">
+          <a:blip xmlns:r="http://schemas.openxmlformats.org/officeDocument/2006/relationships" xmlns:a="http://schemas.openxmlformats.org/drawingml/2006/main" r:embed="R667e578a5fb349ff">
             <a:alphaModFix/>
           </a:blip>
           <a:srcRect xmlns:a="http://schemas.openxmlformats.org/drawingml/2006/main" l="0" t="0" r="0" b="0"/>
@@ -39038,7 +39093,7 @@
           <p:nvPr/>
         </p:nvPicPr>
         <p:blipFill rotWithShape="1">
-          <a:blip xmlns:r="http://schemas.openxmlformats.org/officeDocument/2006/relationships" xmlns:a="http://schemas.openxmlformats.org/drawingml/2006/main" r:embed="R69647d449b9046b5">
+          <a:blip xmlns:r="http://schemas.openxmlformats.org/officeDocument/2006/relationships" xmlns:a="http://schemas.openxmlformats.org/drawingml/2006/main" r:embed="R3af91f88232c4d55">
             <a:alphaModFix/>
           </a:blip>
           <a:srcRect xmlns:a="http://schemas.openxmlformats.org/drawingml/2006/main" l="0" t="0" r="0" b="0"/>
@@ -40873,7 +40928,7 @@
                 <a:ea typeface="Calibri"/>
                 <a:cs typeface="Calibri"/>
               </a:rPr>
-              <a:t>The whole unit is manifest (prakashman) with all four aspects. Imaging (pratibimban) is central to prakash. An image provides a basis of recognition; understanding the unit also requires its relations and fulfilment. The tree can die while its material constituents persist.</a:t>
+              <a:t>The whole unit is manifest (prakashman) with all four aspects through saturation in satta. In the imaging context, prakash names the unit’s being imaged. An image supports recognition; human understanding also requires relations and fulfilment. The tree can die while its material constituents persist.</a:t>
             </a:r>
           </a:p>
         </p:txBody>
@@ -41401,7 +41456,7 @@
           <p:nvPr/>
         </p:nvPicPr>
         <p:blipFill rotWithShape="1">
-          <a:blip xmlns:r="http://schemas.openxmlformats.org/officeDocument/2006/relationships" xmlns:a="http://schemas.openxmlformats.org/drawingml/2006/main" r:embed="R82996ebfd5974aa0">
+          <a:blip xmlns:r="http://schemas.openxmlformats.org/officeDocument/2006/relationships" xmlns:a="http://schemas.openxmlformats.org/drawingml/2006/main" r:embed="R4309ea82831a4909">
             <a:alphaModFix/>
           </a:blip>
           <a:srcRect xmlns:a="http://schemas.openxmlformats.org/drawingml/2006/main" l="0" t="0" r="0" b="0"/>
@@ -41644,7 +41699,7 @@
           <p:nvPr/>
         </p:nvPicPr>
         <p:blipFill rotWithShape="1">
-          <a:blip xmlns:r="http://schemas.openxmlformats.org/officeDocument/2006/relationships" xmlns:a="http://schemas.openxmlformats.org/drawingml/2006/main" r:embed="Rb8e14d41b2b94826">
+          <a:blip xmlns:r="http://schemas.openxmlformats.org/officeDocument/2006/relationships" xmlns:a="http://schemas.openxmlformats.org/drawingml/2006/main" r:embed="R652459c6135e4133">
             <a:alphaModFix/>
           </a:blip>
           <a:srcRect xmlns:a="http://schemas.openxmlformats.org/drawingml/2006/main" l="0" t="0" r="0" b="0"/>
@@ -41887,7 +41942,7 @@
           <p:nvPr/>
         </p:nvPicPr>
         <p:blipFill rotWithShape="1">
-          <a:blip xmlns:r="http://schemas.openxmlformats.org/officeDocument/2006/relationships" xmlns:a="http://schemas.openxmlformats.org/drawingml/2006/main" r:embed="R077af4fd903d498a">
+          <a:blip xmlns:r="http://schemas.openxmlformats.org/officeDocument/2006/relationships" xmlns:a="http://schemas.openxmlformats.org/drawingml/2006/main" r:embed="R258b4be7ee2948e0">
             <a:alphaModFix/>
           </a:blip>
           <a:srcRect xmlns:a="http://schemas.openxmlformats.org/drawingml/2006/main" l="0" t="0" r="0" b="0"/>

--- a/Studies/The-Ontology-of-Coexistence/The-Ontology-of-Existence-Madhyasth-Darshan.pptx
+++ b/Studies/The-Ontology-of-Coexistence/The-Ontology-of-Existence-Madhyasth-Darshan.pptx
@@ -2,41 +2,41 @@
 <file path=ppt/presentation.xml><?xml version="1.0" encoding="utf-8"?>
 <p:presentation xmlns:p="http://schemas.openxmlformats.org/presentationml/2006/main">
   <p:sldMasterIdLst>
-    <p:sldMasterId xmlns:r="http://schemas.openxmlformats.org/officeDocument/2006/relationships" id="2147483648" r:id="R388e00381139496b"/>
+    <p:sldMasterId xmlns:r="http://schemas.openxmlformats.org/officeDocument/2006/relationships" id="2147483648" r:id="Rc60c548412b845a9"/>
   </p:sldMasterIdLst>
   <p:notesMasterIdLst>
-    <p:notesMasterId xmlns:r="http://schemas.openxmlformats.org/officeDocument/2006/relationships" r:id="Re4f21cfc0aca4d45"/>
+    <p:notesMasterId xmlns:r="http://schemas.openxmlformats.org/officeDocument/2006/relationships" r:id="R61833166a92d4d9a"/>
   </p:notesMasterIdLst>
   <p:sldIdLst>
-    <p:sldId xmlns:r="http://schemas.openxmlformats.org/officeDocument/2006/relationships" id="256" r:id="R41e9a533ec364630"/>
-    <p:sldId xmlns:r="http://schemas.openxmlformats.org/officeDocument/2006/relationships" id="257" r:id="Rd034aae41c354bb3"/>
-    <p:sldId xmlns:r="http://schemas.openxmlformats.org/officeDocument/2006/relationships" id="258" r:id="R38addf1f4b3e4b90"/>
-    <p:sldId xmlns:r="http://schemas.openxmlformats.org/officeDocument/2006/relationships" id="259" r:id="Rd446b5a533c747a0"/>
-    <p:sldId xmlns:r="http://schemas.openxmlformats.org/officeDocument/2006/relationships" id="260" r:id="Rd97751e356094ccd"/>
-    <p:sldId xmlns:r="http://schemas.openxmlformats.org/officeDocument/2006/relationships" id="261" r:id="R99c4675820df4525"/>
-    <p:sldId xmlns:r="http://schemas.openxmlformats.org/officeDocument/2006/relationships" id="262" r:id="R6be27b6a3cda4022"/>
-    <p:sldId xmlns:r="http://schemas.openxmlformats.org/officeDocument/2006/relationships" id="263" r:id="R318dc95f784d44b2"/>
-    <p:sldId xmlns:r="http://schemas.openxmlformats.org/officeDocument/2006/relationships" id="264" r:id="Rcd9382cc06474fa3"/>
-    <p:sldId xmlns:r="http://schemas.openxmlformats.org/officeDocument/2006/relationships" id="265" r:id="Rb41dd1b3c3644845"/>
-    <p:sldId xmlns:r="http://schemas.openxmlformats.org/officeDocument/2006/relationships" id="266" r:id="Rdb6b97e371e34923"/>
-    <p:sldId xmlns:r="http://schemas.openxmlformats.org/officeDocument/2006/relationships" id="267" r:id="R48709f4e5a5341fe"/>
-    <p:sldId xmlns:r="http://schemas.openxmlformats.org/officeDocument/2006/relationships" id="268" r:id="R47feca93d8a34b26"/>
-    <p:sldId xmlns:r="http://schemas.openxmlformats.org/officeDocument/2006/relationships" id="269" r:id="Rece2015381aa477e"/>
-    <p:sldId xmlns:r="http://schemas.openxmlformats.org/officeDocument/2006/relationships" id="270" r:id="R41973db7630746b6"/>
-    <p:sldId xmlns:r="http://schemas.openxmlformats.org/officeDocument/2006/relationships" id="271" r:id="R80af74615ee443a9"/>
-    <p:sldId xmlns:r="http://schemas.openxmlformats.org/officeDocument/2006/relationships" id="272" r:id="R10185a9b24a940e1"/>
-    <p:sldId xmlns:r="http://schemas.openxmlformats.org/officeDocument/2006/relationships" id="273" r:id="R752431d326714fc3"/>
-    <p:sldId xmlns:r="http://schemas.openxmlformats.org/officeDocument/2006/relationships" id="274" r:id="R87ad913278b442f3"/>
-    <p:sldId xmlns:r="http://schemas.openxmlformats.org/officeDocument/2006/relationships" id="275" r:id="Rdd81a705775d40f9"/>
-    <p:sldId xmlns:r="http://schemas.openxmlformats.org/officeDocument/2006/relationships" id="276" r:id="Rfd7adb97ba334329"/>
-    <p:sldId xmlns:r="http://schemas.openxmlformats.org/officeDocument/2006/relationships" id="277" r:id="Rc880ecfc00ec4133"/>
-    <p:sldId xmlns:r="http://schemas.openxmlformats.org/officeDocument/2006/relationships" id="278" r:id="R65f6b9533ce14d9d"/>
-    <p:sldId xmlns:r="http://schemas.openxmlformats.org/officeDocument/2006/relationships" id="279" r:id="R71e70a94617d46b6"/>
-    <p:sldId xmlns:r="http://schemas.openxmlformats.org/officeDocument/2006/relationships" id="280" r:id="R57fb06dbf93c4733"/>
-    <p:sldId xmlns:r="http://schemas.openxmlformats.org/officeDocument/2006/relationships" id="281" r:id="Re4dda241596c419a"/>
-    <p:sldId xmlns:r="http://schemas.openxmlformats.org/officeDocument/2006/relationships" id="282" r:id="Rd335dd17123d41f7"/>
-    <p:sldId xmlns:r="http://schemas.openxmlformats.org/officeDocument/2006/relationships" id="283" r:id="R113f93d5b7a04046"/>
-    <p:sldId xmlns:r="http://schemas.openxmlformats.org/officeDocument/2006/relationships" id="284" r:id="R32e1694d411e4a07"/>
+    <p:sldId xmlns:r="http://schemas.openxmlformats.org/officeDocument/2006/relationships" id="256" r:id="Rf3701083f24e4753"/>
+    <p:sldId xmlns:r="http://schemas.openxmlformats.org/officeDocument/2006/relationships" id="257" r:id="Rcc33e57f9c91499f"/>
+    <p:sldId xmlns:r="http://schemas.openxmlformats.org/officeDocument/2006/relationships" id="258" r:id="R5e7945a87e754aaf"/>
+    <p:sldId xmlns:r="http://schemas.openxmlformats.org/officeDocument/2006/relationships" id="259" r:id="Rbf2afbce72eb4847"/>
+    <p:sldId xmlns:r="http://schemas.openxmlformats.org/officeDocument/2006/relationships" id="260" r:id="Rc5e2b6117e864e4d"/>
+    <p:sldId xmlns:r="http://schemas.openxmlformats.org/officeDocument/2006/relationships" id="261" r:id="R31388e7c88ae458e"/>
+    <p:sldId xmlns:r="http://schemas.openxmlformats.org/officeDocument/2006/relationships" id="262" r:id="Rc3f8382af9d04675"/>
+    <p:sldId xmlns:r="http://schemas.openxmlformats.org/officeDocument/2006/relationships" id="263" r:id="R4bbf6b4c092b4946"/>
+    <p:sldId xmlns:r="http://schemas.openxmlformats.org/officeDocument/2006/relationships" id="264" r:id="R856b00ff4e984d96"/>
+    <p:sldId xmlns:r="http://schemas.openxmlformats.org/officeDocument/2006/relationships" id="265" r:id="Rde11a7c9d2fd40c0"/>
+    <p:sldId xmlns:r="http://schemas.openxmlformats.org/officeDocument/2006/relationships" id="266" r:id="R5f8f4ede99794f81"/>
+    <p:sldId xmlns:r="http://schemas.openxmlformats.org/officeDocument/2006/relationships" id="267" r:id="R315a1d78f69d4ff6"/>
+    <p:sldId xmlns:r="http://schemas.openxmlformats.org/officeDocument/2006/relationships" id="268" r:id="R8997fde8edcf4278"/>
+    <p:sldId xmlns:r="http://schemas.openxmlformats.org/officeDocument/2006/relationships" id="269" r:id="R2a1b0b014d284b7b"/>
+    <p:sldId xmlns:r="http://schemas.openxmlformats.org/officeDocument/2006/relationships" id="270" r:id="Rcd7a7d85698d479b"/>
+    <p:sldId xmlns:r="http://schemas.openxmlformats.org/officeDocument/2006/relationships" id="271" r:id="R4b66368af6a44210"/>
+    <p:sldId xmlns:r="http://schemas.openxmlformats.org/officeDocument/2006/relationships" id="272" r:id="Rdeefed849069497e"/>
+    <p:sldId xmlns:r="http://schemas.openxmlformats.org/officeDocument/2006/relationships" id="273" r:id="Rf80df657513444b3"/>
+    <p:sldId xmlns:r="http://schemas.openxmlformats.org/officeDocument/2006/relationships" id="274" r:id="Ref9242009dc648bc"/>
+    <p:sldId xmlns:r="http://schemas.openxmlformats.org/officeDocument/2006/relationships" id="275" r:id="Rb98bc0b0866241c3"/>
+    <p:sldId xmlns:r="http://schemas.openxmlformats.org/officeDocument/2006/relationships" id="276" r:id="R8133054df5014c12"/>
+    <p:sldId xmlns:r="http://schemas.openxmlformats.org/officeDocument/2006/relationships" id="277" r:id="R6121794f99254638"/>
+    <p:sldId xmlns:r="http://schemas.openxmlformats.org/officeDocument/2006/relationships" id="278" r:id="R1ba55feaa796431e"/>
+    <p:sldId xmlns:r="http://schemas.openxmlformats.org/officeDocument/2006/relationships" id="279" r:id="Rfe7191d554444ef1"/>
+    <p:sldId xmlns:r="http://schemas.openxmlformats.org/officeDocument/2006/relationships" id="280" r:id="R62a447633ce748b0"/>
+    <p:sldId xmlns:r="http://schemas.openxmlformats.org/officeDocument/2006/relationships" id="281" r:id="R34b72fb5474940dd"/>
+    <p:sldId xmlns:r="http://schemas.openxmlformats.org/officeDocument/2006/relationships" id="282" r:id="Rb1fc0de7e3b54ef8"/>
+    <p:sldId xmlns:r="http://schemas.openxmlformats.org/officeDocument/2006/relationships" id="283" r:id="Rc4fb2f7694754773"/>
+    <p:sldId xmlns:r="http://schemas.openxmlformats.org/officeDocument/2006/relationships" id="284" r:id="Rdc8419624a6145fb"/>
   </p:sldIdLst>
   <p:sldSz cx="9144000" cy="5143500"/>
   <p:notesSz cx="6858000" cy="9144000"/>
@@ -2783,7 +2783,7 @@
           </a:p>
           <a:p xmlns:a="http://schemas.openxmlformats.org/drawingml/2006/main">
             <a:r>
-              <a:t>First, the ground — Omnipresence. Formless, all-pervasive, transparent, permeating, non-transforming, immeasurable. Actionless energy: it acts not at all, yet every unit is energised and regulated in it. There is no place where it is absent. The same pervasive reality is also named jyoti, light; realisation in it is described as enduring prakash.</a:t>
+              <a:t>First, the ground — Omnipresence. Formless, all-pervasive, transparent, permeating, non-transforming, immeasurable. Actionless energy: it acts not at all, yet every unit is energised and regulated in it. There is no place where it is absent. The pervasive ground is prakash, light; realisation in it is described as enduring prakash.</a:t>
             </a:r>
           </a:p>
           <a:p xmlns:a="http://schemas.openxmlformats.org/drawingml/2006/main">
@@ -2893,7 +2893,7 @@
           </a:p>
           <a:p xmlns:a="http://schemas.openxmlformats.org/drawingml/2006/main">
             <a:r>
-              <a:t>These are connected aspects of one saturation. Energy becomes evident in activity, recognition in mutuality, and regulation in definite conduct. The ground is named jyoti, light; each unit saturated in it is prakashman, manifest. The texts explicitly connect this manifestness with satta permeating the unit and its being endowed with force. Manifestness belongs to all units, including sentient jeevan.</a:t>
+              <a:t>These are connected aspects of one saturation. Energy becomes evident in activity, recognition in mutuality, and regulation in definite conduct. The ground is prakash, light; each unit saturated in it is prakashman, manifest. The texts explicitly connect this manifestness with satta permeating the unit and its being endowed with force. Manifestness belongs to all units, including sentient jeevan.</a:t>
             </a:r>
           </a:p>
           <a:p xmlns:a="http://schemas.openxmlformats.org/drawingml/2006/main">
@@ -3268,7 +3268,7 @@
   </p:cSld>
   <p:clrMap bg1="lt1" tx1="dk1" bg2="dk2" tx2="lt2" accent1="accent1" accent2="accent2" accent3="accent3" accent4="accent4" accent5="accent5" accent6="accent6" hlink="hlink" folHlink="folHlink"/>
   <p:sldLayoutIdLst>
-    <p:sldLayoutId xmlns:r="http://schemas.openxmlformats.org/officeDocument/2006/relationships" id="2147483649" r:id="Rccf15baee49a48d0"/>
+    <p:sldLayoutId xmlns:r="http://schemas.openxmlformats.org/officeDocument/2006/relationships" id="2147483649" r:id="R648a55c00fc24910"/>
   </p:sldLayoutIdLst>
   <p:hf sldNum="0" hdr="0" ftr="0" dt="0"/>
   <p:txStyles>
@@ -27669,7 +27669,7 @@
       </p:sp>
       <p:cxnSp>
         <p:nvCxnSpPr>
-          <p:cNvPr id="1343" name="Google Shape;445;p18"/>
+          <p:cNvPr id="1380" name="Google Shape;445;p18"/>
           <p:cNvCxnSpPr/>
           <p:nvPr/>
         </p:nvCxnSpPr>
@@ -27750,7 +27750,7 @@
       </p:sp>
       <p:cxnSp>
         <p:nvCxnSpPr>
-          <p:cNvPr id="1345" name="Google Shape;447;p18"/>
+          <p:cNvPr id="1382" name="Google Shape;447;p18"/>
           <p:cNvCxnSpPr/>
           <p:nvPr/>
         </p:nvCxnSpPr>
@@ -29446,7 +29446,7 @@
           <p:nvPr/>
         </p:nvPicPr>
         <p:blipFill rotWithShape="1">
-          <a:blip xmlns:r="http://schemas.openxmlformats.org/officeDocument/2006/relationships" xmlns:a="http://schemas.openxmlformats.org/drawingml/2006/main" r:embed="Rbeef1ba50dab4717">
+          <a:blip xmlns:r="http://schemas.openxmlformats.org/officeDocument/2006/relationships" xmlns:a="http://schemas.openxmlformats.org/drawingml/2006/main" r:embed="R9455c43259144718">
             <a:alphaModFix/>
           </a:blip>
           <a:srcRect xmlns:a="http://schemas.openxmlformats.org/drawingml/2006/main" l="0" t="0" r="0" b="0"/>
@@ -29689,7 +29689,7 @@
           <p:nvPr/>
         </p:nvPicPr>
         <p:blipFill rotWithShape="1">
-          <a:blip xmlns:r="http://schemas.openxmlformats.org/officeDocument/2006/relationships" xmlns:a="http://schemas.openxmlformats.org/drawingml/2006/main" r:embed="Rac6e0b5be9014e0d">
+          <a:blip xmlns:r="http://schemas.openxmlformats.org/officeDocument/2006/relationships" xmlns:a="http://schemas.openxmlformats.org/drawingml/2006/main" r:embed="R3e519ae0af664ceb">
             <a:alphaModFix/>
           </a:blip>
           <a:srcRect xmlns:a="http://schemas.openxmlformats.org/drawingml/2006/main" l="0" t="0" r="0" b="0"/>
@@ -29932,7 +29932,7 @@
           <p:nvPr/>
         </p:nvPicPr>
         <p:blipFill rotWithShape="1">
-          <a:blip xmlns:r="http://schemas.openxmlformats.org/officeDocument/2006/relationships" xmlns:a="http://schemas.openxmlformats.org/drawingml/2006/main" r:embed="Re775de770ff140c8">
+          <a:blip xmlns:r="http://schemas.openxmlformats.org/officeDocument/2006/relationships" xmlns:a="http://schemas.openxmlformats.org/drawingml/2006/main" r:embed="R41428cec87e04a20">
             <a:alphaModFix/>
           </a:blip>
           <a:srcRect xmlns:a="http://schemas.openxmlformats.org/drawingml/2006/main" l="0" t="0" r="0" b="0"/>
@@ -34247,7 +34247,7 @@
           <p:nvPr/>
         </p:nvPicPr>
         <p:blipFill rotWithShape="1">
-          <a:blip xmlns:r="http://schemas.openxmlformats.org/officeDocument/2006/relationships" xmlns:a="http://schemas.openxmlformats.org/drawingml/2006/main" r:embed="Rab090c9d22c0488e">
+          <a:blip xmlns:r="http://schemas.openxmlformats.org/officeDocument/2006/relationships" xmlns:a="http://schemas.openxmlformats.org/drawingml/2006/main" r:embed="R7c93790924734689">
             <a:alphaModFix/>
           </a:blip>
           <a:srcRect xmlns:a="http://schemas.openxmlformats.org/drawingml/2006/main" l="0" t="0" r="0" b="0"/>
@@ -34389,7 +34389,7 @@
           <p:nvPr/>
         </p:nvPicPr>
         <p:blipFill rotWithShape="1">
-          <a:blip xmlns:r="http://schemas.openxmlformats.org/officeDocument/2006/relationships" xmlns:a="http://schemas.openxmlformats.org/drawingml/2006/main" r:embed="Rab090c9d22c0488e">
+          <a:blip xmlns:r="http://schemas.openxmlformats.org/officeDocument/2006/relationships" xmlns:a="http://schemas.openxmlformats.org/drawingml/2006/main" r:embed="R7c93790924734689">
             <a:alphaModFix/>
           </a:blip>
           <a:srcRect xmlns:a="http://schemas.openxmlformats.org/drawingml/2006/main" l="0" t="0" r="0" b="0"/>
@@ -34531,7 +34531,7 @@
           <p:nvPr/>
         </p:nvPicPr>
         <p:blipFill rotWithShape="1">
-          <a:blip xmlns:r="http://schemas.openxmlformats.org/officeDocument/2006/relationships" xmlns:a="http://schemas.openxmlformats.org/drawingml/2006/main" r:embed="Rab090c9d22c0488e">
+          <a:blip xmlns:r="http://schemas.openxmlformats.org/officeDocument/2006/relationships" xmlns:a="http://schemas.openxmlformats.org/drawingml/2006/main" r:embed="R7c93790924734689">
             <a:alphaModFix/>
           </a:blip>
           <a:srcRect xmlns:a="http://schemas.openxmlformats.org/drawingml/2006/main" l="0" t="0" r="0" b="0"/>
@@ -34673,7 +34673,7 @@
           <p:nvPr/>
         </p:nvPicPr>
         <p:blipFill rotWithShape="1">
-          <a:blip xmlns:r="http://schemas.openxmlformats.org/officeDocument/2006/relationships" xmlns:a="http://schemas.openxmlformats.org/drawingml/2006/main" r:embed="Rab090c9d22c0488e">
+          <a:blip xmlns:r="http://schemas.openxmlformats.org/officeDocument/2006/relationships" xmlns:a="http://schemas.openxmlformats.org/drawingml/2006/main" r:embed="R7c93790924734689">
             <a:alphaModFix/>
           </a:blip>
           <a:srcRect xmlns:a="http://schemas.openxmlformats.org/drawingml/2006/main" l="0" t="0" r="0" b="0"/>
@@ -34815,7 +34815,7 @@
           <p:nvPr/>
         </p:nvPicPr>
         <p:blipFill rotWithShape="1">
-          <a:blip xmlns:r="http://schemas.openxmlformats.org/officeDocument/2006/relationships" xmlns:a="http://schemas.openxmlformats.org/drawingml/2006/main" r:embed="Rab090c9d22c0488e">
+          <a:blip xmlns:r="http://schemas.openxmlformats.org/officeDocument/2006/relationships" xmlns:a="http://schemas.openxmlformats.org/drawingml/2006/main" r:embed="R7c93790924734689">
             <a:alphaModFix/>
           </a:blip>
           <a:srcRect xmlns:a="http://schemas.openxmlformats.org/drawingml/2006/main" l="0" t="0" r="0" b="0"/>
@@ -34957,7 +34957,7 @@
           <p:nvPr/>
         </p:nvPicPr>
         <p:blipFill rotWithShape="1">
-          <a:blip xmlns:r="http://schemas.openxmlformats.org/officeDocument/2006/relationships" xmlns:a="http://schemas.openxmlformats.org/drawingml/2006/main" r:embed="Rab090c9d22c0488e">
+          <a:blip xmlns:r="http://schemas.openxmlformats.org/officeDocument/2006/relationships" xmlns:a="http://schemas.openxmlformats.org/drawingml/2006/main" r:embed="R7c93790924734689">
             <a:alphaModFix/>
           </a:blip>
           <a:srcRect xmlns:a="http://schemas.openxmlformats.org/drawingml/2006/main" l="0" t="0" r="0" b="0"/>
@@ -35508,7 +35508,7 @@
           <p:nvPr/>
         </p:nvPicPr>
         <p:blipFill>
-          <a:blip xmlns:r="http://schemas.openxmlformats.org/officeDocument/2006/relationships" xmlns:a="http://schemas.openxmlformats.org/drawingml/2006/main" r:embed="R6f640c4b95674b2d"/>
+          <a:blip xmlns:r="http://schemas.openxmlformats.org/officeDocument/2006/relationships" xmlns:a="http://schemas.openxmlformats.org/drawingml/2006/main" r:embed="R3ec1ce94b8b44042"/>
           <a:stretch xmlns:a="http://schemas.openxmlformats.org/drawingml/2006/main"/>
         </p:blipFill>
         <p:spPr>
@@ -35882,7 +35882,29 @@
                 <a:ea typeface="Calibri"/>
                 <a:cs typeface="Calibri"/>
               </a:rPr>
-              <a:t>Formless, all-pervasive, non-transforming and actionless. Also named jyoti (light), it permeates every unit and is transparent in mutuality. Saturated units are active and manifest (prakashman). It has no absent place.</a:t>
+              <a:t>Formless, all-pervasive, non-transforming and actionless. </a:t>
+            </a:r>
+            <a:r>
+              <a:rPr sz="1250" b="0" i="0" u="none" cap="none">
+                <a:solidFill>
+                  <a:srgbClr val="5A6377"/>
+                </a:solidFill>
+                <a:latin typeface="Calibri"/>
+                <a:ea typeface="Calibri"/>
+                <a:cs typeface="Calibri"/>
+              </a:rPr>
+              <a:t>As prakash (light),</a:t>
+            </a:r>
+            <a:r>
+              <a:rPr sz="1250" b="0" i="0" u="none" cap="none">
+                <a:solidFill>
+                  <a:srgbClr val="5A6377"/>
+                </a:solidFill>
+                <a:latin typeface="Calibri"/>
+                <a:ea typeface="Calibri"/>
+                <a:cs typeface="Calibri"/>
+              </a:rPr>
+              <a:t> it permeates every unit and is transparent in mutuality. Saturated units are active and manifest (prakashman). It has no absent place.</a:t>
             </a:r>
           </a:p>
           <a:p xmlns:a="http://schemas.openxmlformats.org/drawingml/2006/main">
@@ -37445,7 +37467,7 @@
           <p:nvPr/>
         </p:nvPicPr>
         <p:blipFill rotWithShape="1">
-          <a:blip xmlns:r="http://schemas.openxmlformats.org/officeDocument/2006/relationships" xmlns:a="http://schemas.openxmlformats.org/drawingml/2006/main" r:embed="R60478028fed94430">
+          <a:blip xmlns:r="http://schemas.openxmlformats.org/officeDocument/2006/relationships" xmlns:a="http://schemas.openxmlformats.org/drawingml/2006/main" r:embed="R16092fe9cffc4f1b">
             <a:alphaModFix/>
           </a:blip>
           <a:srcRect xmlns:a="http://schemas.openxmlformats.org/drawingml/2006/main" l="0" t="0" r="0" b="0"/>
@@ -37688,7 +37710,7 @@
           <p:nvPr/>
         </p:nvPicPr>
         <p:blipFill rotWithShape="1">
-          <a:blip xmlns:r="http://schemas.openxmlformats.org/officeDocument/2006/relationships" xmlns:a="http://schemas.openxmlformats.org/drawingml/2006/main" r:embed="R77bb050624ca48bf">
+          <a:blip xmlns:r="http://schemas.openxmlformats.org/officeDocument/2006/relationships" xmlns:a="http://schemas.openxmlformats.org/drawingml/2006/main" r:embed="R5df44989debe4f9d">
             <a:alphaModFix/>
           </a:blip>
           <a:srcRect xmlns:a="http://schemas.openxmlformats.org/drawingml/2006/main" l="0" t="0" r="0" b="0"/>
@@ -37931,7 +37953,7 @@
           <p:nvPr/>
         </p:nvPicPr>
         <p:blipFill rotWithShape="1">
-          <a:blip xmlns:r="http://schemas.openxmlformats.org/officeDocument/2006/relationships" xmlns:a="http://schemas.openxmlformats.org/drawingml/2006/main" r:embed="R730f6d8c24c74730">
+          <a:blip xmlns:r="http://schemas.openxmlformats.org/officeDocument/2006/relationships" xmlns:a="http://schemas.openxmlformats.org/drawingml/2006/main" r:embed="R2d5403df97274114">
             <a:alphaModFix/>
           </a:blip>
           <a:srcRect xmlns:a="http://schemas.openxmlformats.org/drawingml/2006/main" l="0" t="0" r="0" b="0"/>
@@ -38607,7 +38629,7 @@
           <p:nvPr/>
         </p:nvPicPr>
         <p:blipFill rotWithShape="1">
-          <a:blip xmlns:r="http://schemas.openxmlformats.org/officeDocument/2006/relationships" xmlns:a="http://schemas.openxmlformats.org/drawingml/2006/main" r:embed="R83aca33a03a146e1">
+          <a:blip xmlns:r="http://schemas.openxmlformats.org/officeDocument/2006/relationships" xmlns:a="http://schemas.openxmlformats.org/drawingml/2006/main" r:embed="R36c3a7ddcc70466c">
             <a:alphaModFix/>
           </a:blip>
           <a:srcRect xmlns:a="http://schemas.openxmlformats.org/drawingml/2006/main" l="0" t="0" r="0" b="0"/>
@@ -38850,7 +38872,7 @@
           <p:nvPr/>
         </p:nvPicPr>
         <p:blipFill rotWithShape="1">
-          <a:blip xmlns:r="http://schemas.openxmlformats.org/officeDocument/2006/relationships" xmlns:a="http://schemas.openxmlformats.org/drawingml/2006/main" r:embed="R667e578a5fb349ff">
+          <a:blip xmlns:r="http://schemas.openxmlformats.org/officeDocument/2006/relationships" xmlns:a="http://schemas.openxmlformats.org/drawingml/2006/main" r:embed="R396e8f81bc8e4321">
             <a:alphaModFix/>
           </a:blip>
           <a:srcRect xmlns:a="http://schemas.openxmlformats.org/drawingml/2006/main" l="0" t="0" r="0" b="0"/>
@@ -39093,7 +39115,7 @@
           <p:nvPr/>
         </p:nvPicPr>
         <p:blipFill rotWithShape="1">
-          <a:blip xmlns:r="http://schemas.openxmlformats.org/officeDocument/2006/relationships" xmlns:a="http://schemas.openxmlformats.org/drawingml/2006/main" r:embed="R3af91f88232c4d55">
+          <a:blip xmlns:r="http://schemas.openxmlformats.org/officeDocument/2006/relationships" xmlns:a="http://schemas.openxmlformats.org/drawingml/2006/main" r:embed="R9277301ffa62439f">
             <a:alphaModFix/>
           </a:blip>
           <a:srcRect xmlns:a="http://schemas.openxmlformats.org/drawingml/2006/main" l="0" t="0" r="0" b="0"/>
@@ -41456,7 +41478,7 @@
           <p:nvPr/>
         </p:nvPicPr>
         <p:blipFill rotWithShape="1">
-          <a:blip xmlns:r="http://schemas.openxmlformats.org/officeDocument/2006/relationships" xmlns:a="http://schemas.openxmlformats.org/drawingml/2006/main" r:embed="R4309ea82831a4909">
+          <a:blip xmlns:r="http://schemas.openxmlformats.org/officeDocument/2006/relationships" xmlns:a="http://schemas.openxmlformats.org/drawingml/2006/main" r:embed="R38e062b78e5545fa">
             <a:alphaModFix/>
           </a:blip>
           <a:srcRect xmlns:a="http://schemas.openxmlformats.org/drawingml/2006/main" l="0" t="0" r="0" b="0"/>
@@ -41699,7 +41721,7 @@
           <p:nvPr/>
         </p:nvPicPr>
         <p:blipFill rotWithShape="1">
-          <a:blip xmlns:r="http://schemas.openxmlformats.org/officeDocument/2006/relationships" xmlns:a="http://schemas.openxmlformats.org/drawingml/2006/main" r:embed="R652459c6135e4133">
+          <a:blip xmlns:r="http://schemas.openxmlformats.org/officeDocument/2006/relationships" xmlns:a="http://schemas.openxmlformats.org/drawingml/2006/main" r:embed="Rb2d0b6b640b940e0">
             <a:alphaModFix/>
           </a:blip>
           <a:srcRect xmlns:a="http://schemas.openxmlformats.org/drawingml/2006/main" l="0" t="0" r="0" b="0"/>
@@ -41942,7 +41964,7 @@
           <p:nvPr/>
         </p:nvPicPr>
         <p:blipFill rotWithShape="1">
-          <a:blip xmlns:r="http://schemas.openxmlformats.org/officeDocument/2006/relationships" xmlns:a="http://schemas.openxmlformats.org/drawingml/2006/main" r:embed="R258b4be7ee2948e0">
+          <a:blip xmlns:r="http://schemas.openxmlformats.org/officeDocument/2006/relationships" xmlns:a="http://schemas.openxmlformats.org/drawingml/2006/main" r:embed="R3ae96e7dd6c44924">
             <a:alphaModFix/>
           </a:blip>
           <a:srcRect xmlns:a="http://schemas.openxmlformats.org/drawingml/2006/main" l="0" t="0" r="0" b="0"/>
